--- a/flipkart_ppt.pptx
+++ b/flipkart_ppt.pptx
@@ -56,21 +56,23 @@
       <p:font typeface="DM Sans" pitchFamily="2" charset="0"/>
       <p:regular r:id="rId36"/>
       <p:bold r:id="rId37"/>
+      <p:italic r:id="rId38"/>
+      <p:boldItalic r:id="rId39"/>
     </p:embeddedFont>
     <p:embeddedFont>
       <p:font typeface="Perpetua" panose="02020502060401020303" pitchFamily="18" charset="0"/>
-      <p:regular r:id="rId38"/>
-      <p:bold r:id="rId39"/>
-      <p:italic r:id="rId40"/>
-      <p:boldItalic r:id="rId41"/>
+      <p:regular r:id="rId40"/>
+      <p:bold r:id="rId41"/>
+      <p:italic r:id="rId42"/>
+      <p:boldItalic r:id="rId43"/>
     </p:embeddedFont>
     <p:embeddedFont>
       <p:font typeface="Readex Pro Semi-Bold" panose="020B0604020202020204" charset="-78"/>
-      <p:regular r:id="rId42"/>
+      <p:regular r:id="rId44"/>
     </p:embeddedFont>
     <p:embeddedFont>
       <p:font typeface="Rockwell Extra Bold" panose="02060903040505020403" pitchFamily="18" charset="0"/>
-      <p:bold r:id="rId43"/>
+      <p:bold r:id="rId45"/>
     </p:embeddedFont>
   </p:embeddedFontLst>
   <p:defaultTextStyle>
@@ -190,7 +192,7 @@
 <file path=ppt/revisionInfo.xml><?xml version="1.0" encoding="utf-8"?>
 <p1510:revInfo xmlns:a="http://schemas.openxmlformats.org/drawingml/2006/main" xmlns:r="http://schemas.openxmlformats.org/officeDocument/2006/relationships" xmlns:p1510="http://schemas.microsoft.com/office/powerpoint/2015/10/main">
   <p1510:revLst>
-    <p1510:client id="{232E99E9-1302-4CCA-BA72-E666FA57B805}" v="19" dt="2026-03-30T15:52:32.091"/>
+    <p1510:client id="{232E99E9-1302-4CCA-BA72-E666FA57B805}" v="30" dt="2026-04-02T16:03:09.298"/>
   </p1510:revLst>
 </p1510:revInfo>
 </file>
@@ -200,7 +202,7 @@
   <pc:docChgLst>
     <pc:chgData name="Krupa Dalal" userId="d4791ec40d55e7ee" providerId="LiveId" clId="{E1ED0E34-1AFB-42A3-A161-79F7C18B936E}"/>
     <pc:docChg chg="undo custSel addSld delSld modSld sldOrd">
-      <pc:chgData name="Krupa Dalal" userId="d4791ec40d55e7ee" providerId="LiveId" clId="{E1ED0E34-1AFB-42A3-A161-79F7C18B936E}" dt="2026-03-30T15:58:16.591" v="1987" actId="1076"/>
+      <pc:chgData name="Krupa Dalal" userId="d4791ec40d55e7ee" providerId="LiveId" clId="{E1ED0E34-1AFB-42A3-A161-79F7C18B936E}" dt="2026-04-02T16:04:58.970" v="2651" actId="1076"/>
       <pc:docMkLst>
         <pc:docMk/>
       </pc:docMkLst>
@@ -369,12 +371,36 @@
           </ac:picMkLst>
         </pc:picChg>
       </pc:sldChg>
-      <pc:sldChg chg="add">
-        <pc:chgData name="Krupa Dalal" userId="d4791ec40d55e7ee" providerId="LiveId" clId="{E1ED0E34-1AFB-42A3-A161-79F7C18B936E}" dt="2026-03-28T06:14:52.871" v="183" actId="2890"/>
+      <pc:sldChg chg="modSp add mod">
+        <pc:chgData name="Krupa Dalal" userId="d4791ec40d55e7ee" providerId="LiveId" clId="{E1ED0E34-1AFB-42A3-A161-79F7C18B936E}" dt="2026-04-02T16:04:58.970" v="2651" actId="1076"/>
         <pc:sldMkLst>
           <pc:docMk/>
           <pc:sldMk cId="3517545023" sldId="259"/>
         </pc:sldMkLst>
+        <pc:spChg chg="mod">
+          <ac:chgData name="Krupa Dalal" userId="d4791ec40d55e7ee" providerId="LiveId" clId="{E1ED0E34-1AFB-42A3-A161-79F7C18B936E}" dt="2026-04-01T07:37:55.463" v="1991" actId="1035"/>
+          <ac:spMkLst>
+            <pc:docMk/>
+            <pc:sldMk cId="3517545023" sldId="259"/>
+            <ac:spMk id="2" creationId="{C5F0A935-B34D-5316-76A2-C88C4F04F7AC}"/>
+          </ac:spMkLst>
+        </pc:spChg>
+        <pc:spChg chg="mod">
+          <ac:chgData name="Krupa Dalal" userId="d4791ec40d55e7ee" providerId="LiveId" clId="{E1ED0E34-1AFB-42A3-A161-79F7C18B936E}" dt="2026-04-01T07:37:51.501" v="1990" actId="1037"/>
+          <ac:spMkLst>
+            <pc:docMk/>
+            <pc:sldMk cId="3517545023" sldId="259"/>
+            <ac:spMk id="3" creationId="{719A633E-49A5-AF08-E7D0-DF355D9B8BD2}"/>
+          </ac:spMkLst>
+        </pc:spChg>
+        <pc:spChg chg="mod">
+          <ac:chgData name="Krupa Dalal" userId="d4791ec40d55e7ee" providerId="LiveId" clId="{E1ED0E34-1AFB-42A3-A161-79F7C18B936E}" dt="2026-04-02T16:04:58.970" v="2651" actId="1076"/>
+          <ac:spMkLst>
+            <pc:docMk/>
+            <pc:sldMk cId="3517545023" sldId="259"/>
+            <ac:spMk id="6" creationId="{1476A154-1360-7628-6D0F-A70DC7B591CE}"/>
+          </ac:spMkLst>
+        </pc:spChg>
       </pc:sldChg>
       <pc:sldChg chg="addSp delSp modSp add mod">
         <pc:chgData name="Krupa Dalal" userId="d4791ec40d55e7ee" providerId="LiveId" clId="{E1ED0E34-1AFB-42A3-A161-79F7C18B936E}" dt="2026-03-30T15:58:16.591" v="1987" actId="1076"/>
@@ -556,13 +582,21 @@
         </pc:spChg>
       </pc:sldChg>
       <pc:sldChg chg="addSp modSp add mod ord">
-        <pc:chgData name="Krupa Dalal" userId="d4791ec40d55e7ee" providerId="LiveId" clId="{E1ED0E34-1AFB-42A3-A161-79F7C18B936E}" dt="2026-03-28T10:18:16.102" v="507" actId="1076"/>
+        <pc:chgData name="Krupa Dalal" userId="d4791ec40d55e7ee" providerId="LiveId" clId="{E1ED0E34-1AFB-42A3-A161-79F7C18B936E}" dt="2026-04-02T15:50:49.067" v="2049" actId="207"/>
         <pc:sldMkLst>
           <pc:docMk/>
           <pc:sldMk cId="2052776629" sldId="265"/>
         </pc:sldMkLst>
+        <pc:spChg chg="add mod">
+          <ac:chgData name="Krupa Dalal" userId="d4791ec40d55e7ee" providerId="LiveId" clId="{E1ED0E34-1AFB-42A3-A161-79F7C18B936E}" dt="2026-04-02T15:50:49.067" v="2049" actId="207"/>
+          <ac:spMkLst>
+            <pc:docMk/>
+            <pc:sldMk cId="2052776629" sldId="265"/>
+            <ac:spMk id="6" creationId="{249A5A48-1AC8-7047-639F-7DF6F2C61D57}"/>
+          </ac:spMkLst>
+        </pc:spChg>
         <pc:spChg chg="mod">
-          <ac:chgData name="Krupa Dalal" userId="d4791ec40d55e7ee" providerId="LiveId" clId="{E1ED0E34-1AFB-42A3-A161-79F7C18B936E}" dt="2026-03-28T10:11:08.162" v="498" actId="404"/>
+          <ac:chgData name="Krupa Dalal" userId="d4791ec40d55e7ee" providerId="LiveId" clId="{E1ED0E34-1AFB-42A3-A161-79F7C18B936E}" dt="2026-04-02T15:48:52.146" v="1993" actId="404"/>
           <ac:spMkLst>
             <pc:docMk/>
             <pc:sldMk cId="2052776629" sldId="265"/>
@@ -570,7 +604,7 @@
           </ac:spMkLst>
         </pc:spChg>
         <pc:picChg chg="add mod">
-          <ac:chgData name="Krupa Dalal" userId="d4791ec40d55e7ee" providerId="LiveId" clId="{E1ED0E34-1AFB-42A3-A161-79F7C18B936E}" dt="2026-03-28T10:18:13.623" v="506" actId="1076"/>
+          <ac:chgData name="Krupa Dalal" userId="d4791ec40d55e7ee" providerId="LiveId" clId="{E1ED0E34-1AFB-42A3-A161-79F7C18B936E}" dt="2026-04-02T15:49:04.053" v="1995" actId="1076"/>
           <ac:picMkLst>
             <pc:docMk/>
             <pc:sldMk cId="2052776629" sldId="265"/>
@@ -578,7 +612,7 @@
           </ac:picMkLst>
         </pc:picChg>
         <pc:picChg chg="add mod">
-          <ac:chgData name="Krupa Dalal" userId="d4791ec40d55e7ee" providerId="LiveId" clId="{E1ED0E34-1AFB-42A3-A161-79F7C18B936E}" dt="2026-03-28T10:18:16.102" v="507" actId="1076"/>
+          <ac:chgData name="Krupa Dalal" userId="d4791ec40d55e7ee" providerId="LiveId" clId="{E1ED0E34-1AFB-42A3-A161-79F7C18B936E}" dt="2026-04-02T15:49:01.850" v="1994" actId="1076"/>
           <ac:picMkLst>
             <pc:docMk/>
             <pc:sldMk cId="2052776629" sldId="265"/>
@@ -633,11 +667,19 @@
         </pc:spChg>
       </pc:sldChg>
       <pc:sldChg chg="addSp delSp modSp add mod">
-        <pc:chgData name="Krupa Dalal" userId="d4791ec40d55e7ee" providerId="LiveId" clId="{E1ED0E34-1AFB-42A3-A161-79F7C18B936E}" dt="2026-03-28T10:48:33.876" v="692" actId="1076"/>
+        <pc:chgData name="Krupa Dalal" userId="d4791ec40d55e7ee" providerId="LiveId" clId="{E1ED0E34-1AFB-42A3-A161-79F7C18B936E}" dt="2026-04-02T15:52:09.636" v="2083" actId="14100"/>
         <pc:sldMkLst>
           <pc:docMk/>
           <pc:sldMk cId="448846968" sldId="268"/>
         </pc:sldMkLst>
+        <pc:spChg chg="add mod">
+          <ac:chgData name="Krupa Dalal" userId="d4791ec40d55e7ee" providerId="LiveId" clId="{E1ED0E34-1AFB-42A3-A161-79F7C18B936E}" dt="2026-04-02T15:52:09.636" v="2083" actId="14100"/>
+          <ac:spMkLst>
+            <pc:docMk/>
+            <pc:sldMk cId="448846968" sldId="268"/>
+            <ac:spMk id="6" creationId="{646782A9-88AF-5A2E-8208-B7C683F2ECC6}"/>
+          </ac:spMkLst>
+        </pc:spChg>
         <pc:spChg chg="mod">
           <ac:chgData name="Krupa Dalal" userId="d4791ec40d55e7ee" providerId="LiveId" clId="{E1ED0E34-1AFB-42A3-A161-79F7C18B936E}" dt="2026-03-28T10:48:33.876" v="692" actId="1076"/>
           <ac:spMkLst>
@@ -695,11 +737,19 @@
         </pc:picChg>
       </pc:sldChg>
       <pc:sldChg chg="addSp delSp modSp add mod">
-        <pc:chgData name="Krupa Dalal" userId="d4791ec40d55e7ee" providerId="LiveId" clId="{E1ED0E34-1AFB-42A3-A161-79F7C18B936E}" dt="2026-03-28T10:56:10.133" v="754" actId="1076"/>
+        <pc:chgData name="Krupa Dalal" userId="d4791ec40d55e7ee" providerId="LiveId" clId="{E1ED0E34-1AFB-42A3-A161-79F7C18B936E}" dt="2026-04-02T15:53:19.448" v="2146" actId="14100"/>
         <pc:sldMkLst>
           <pc:docMk/>
           <pc:sldMk cId="4178986393" sldId="270"/>
         </pc:sldMkLst>
+        <pc:spChg chg="add mod">
+          <ac:chgData name="Krupa Dalal" userId="d4791ec40d55e7ee" providerId="LiveId" clId="{E1ED0E34-1AFB-42A3-A161-79F7C18B936E}" dt="2026-04-02T15:53:19.448" v="2146" actId="14100"/>
+          <ac:spMkLst>
+            <pc:docMk/>
+            <pc:sldMk cId="4178986393" sldId="270"/>
+            <ac:spMk id="6" creationId="{BC09E674-2793-07B0-DA97-CD3C49C4AF0B}"/>
+          </ac:spMkLst>
+        </pc:spChg>
         <pc:spChg chg="mod">
           <ac:chgData name="Krupa Dalal" userId="d4791ec40d55e7ee" providerId="LiveId" clId="{E1ED0E34-1AFB-42A3-A161-79F7C18B936E}" dt="2026-03-28T10:52:04.456" v="745" actId="1076"/>
           <ac:spMkLst>
@@ -726,7 +776,7 @@
         </pc:picChg>
       </pc:sldChg>
       <pc:sldChg chg="addSp delSp modSp add mod">
-        <pc:chgData name="Krupa Dalal" userId="d4791ec40d55e7ee" providerId="LiveId" clId="{E1ED0E34-1AFB-42A3-A161-79F7C18B936E}" dt="2026-03-28T11:03:00.406" v="791" actId="14100"/>
+        <pc:chgData name="Krupa Dalal" userId="d4791ec40d55e7ee" providerId="LiveId" clId="{E1ED0E34-1AFB-42A3-A161-79F7C18B936E}" dt="2026-04-02T15:54:54.189" v="2195" actId="14100"/>
         <pc:sldMkLst>
           <pc:docMk/>
           <pc:sldMk cId="1364220508" sldId="271"/>
@@ -737,6 +787,14 @@
             <pc:docMk/>
             <pc:sldMk cId="1364220508" sldId="271"/>
             <ac:spMk id="6" creationId="{13E15050-C22B-3C3F-4951-6DAF8856AF33}"/>
+          </ac:spMkLst>
+        </pc:spChg>
+        <pc:spChg chg="add mod">
+          <ac:chgData name="Krupa Dalal" userId="d4791ec40d55e7ee" providerId="LiveId" clId="{E1ED0E34-1AFB-42A3-A161-79F7C18B936E}" dt="2026-04-02T15:54:54.189" v="2195" actId="14100"/>
+          <ac:spMkLst>
+            <pc:docMk/>
+            <pc:sldMk cId="1364220508" sldId="271"/>
+            <ac:spMk id="7" creationId="{9FF30C46-FE8A-ED42-4401-00DE84718BB8}"/>
           </ac:spMkLst>
         </pc:spChg>
         <pc:picChg chg="add mod">
@@ -757,7 +815,7 @@
         </pc:picChg>
       </pc:sldChg>
       <pc:sldChg chg="addSp delSp modSp add mod">
-        <pc:chgData name="Krupa Dalal" userId="d4791ec40d55e7ee" providerId="LiveId" clId="{E1ED0E34-1AFB-42A3-A161-79F7C18B936E}" dt="2026-03-28T11:12:13.948" v="854" actId="14100"/>
+        <pc:chgData name="Krupa Dalal" userId="d4791ec40d55e7ee" providerId="LiveId" clId="{E1ED0E34-1AFB-42A3-A161-79F7C18B936E}" dt="2026-04-02T15:56:03.701" v="2235" actId="14100"/>
         <pc:sldMkLst>
           <pc:docMk/>
           <pc:sldMk cId="771023578" sldId="272"/>
@@ -768,6 +826,14 @@
             <pc:docMk/>
             <pc:sldMk cId="771023578" sldId="272"/>
             <ac:spMk id="6" creationId="{65E9AAF1-4BB5-DD0F-D684-0DD990128189}"/>
+          </ac:spMkLst>
+        </pc:spChg>
+        <pc:spChg chg="add mod">
+          <ac:chgData name="Krupa Dalal" userId="d4791ec40d55e7ee" providerId="LiveId" clId="{E1ED0E34-1AFB-42A3-A161-79F7C18B936E}" dt="2026-04-02T15:56:03.701" v="2235" actId="14100"/>
+          <ac:spMkLst>
+            <pc:docMk/>
+            <pc:sldMk cId="771023578" sldId="272"/>
+            <ac:spMk id="7" creationId="{51059048-154A-E8A7-7CCB-97024EC67C27}"/>
           </ac:spMkLst>
         </pc:spChg>
         <pc:picChg chg="add mod">
@@ -788,21 +854,37 @@
         </pc:picChg>
       </pc:sldChg>
       <pc:sldChg chg="addSp modSp add mod">
-        <pc:chgData name="Krupa Dalal" userId="d4791ec40d55e7ee" providerId="LiveId" clId="{E1ED0E34-1AFB-42A3-A161-79F7C18B936E}" dt="2026-03-28T11:16:07.770" v="893" actId="14100"/>
+        <pc:chgData name="Krupa Dalal" userId="d4791ec40d55e7ee" providerId="LiveId" clId="{E1ED0E34-1AFB-42A3-A161-79F7C18B936E}" dt="2026-04-02T15:58:05.028" v="2342" actId="1076"/>
         <pc:sldMkLst>
           <pc:docMk/>
           <pc:sldMk cId="3908953289" sldId="273"/>
         </pc:sldMkLst>
+        <pc:spChg chg="ord">
+          <ac:chgData name="Krupa Dalal" userId="d4791ec40d55e7ee" providerId="LiveId" clId="{E1ED0E34-1AFB-42A3-A161-79F7C18B936E}" dt="2026-04-02T15:56:53.372" v="2275" actId="166"/>
+          <ac:spMkLst>
+            <pc:docMk/>
+            <pc:sldMk cId="3908953289" sldId="273"/>
+            <ac:spMk id="3" creationId="{648E2E53-B89F-24CD-8FAC-C08E36D8FE5F}"/>
+          </ac:spMkLst>
+        </pc:spChg>
         <pc:spChg chg="mod">
-          <ac:chgData name="Krupa Dalal" userId="d4791ec40d55e7ee" providerId="LiveId" clId="{E1ED0E34-1AFB-42A3-A161-79F7C18B936E}" dt="2026-03-28T11:15:32.556" v="887" actId="20577"/>
+          <ac:chgData name="Krupa Dalal" userId="d4791ec40d55e7ee" providerId="LiveId" clId="{E1ED0E34-1AFB-42A3-A161-79F7C18B936E}" dt="2026-04-02T15:56:38.957" v="2271" actId="20577"/>
           <ac:spMkLst>
             <pc:docMk/>
             <pc:sldMk cId="3908953289" sldId="273"/>
             <ac:spMk id="6" creationId="{33DA93E4-1568-E087-017E-A0CBDA8F53C7}"/>
           </ac:spMkLst>
         </pc:spChg>
+        <pc:spChg chg="add mod">
+          <ac:chgData name="Krupa Dalal" userId="d4791ec40d55e7ee" providerId="LiveId" clId="{E1ED0E34-1AFB-42A3-A161-79F7C18B936E}" dt="2026-04-02T15:58:05.028" v="2342" actId="1076"/>
+          <ac:spMkLst>
+            <pc:docMk/>
+            <pc:sldMk cId="3908953289" sldId="273"/>
+            <ac:spMk id="7" creationId="{100D1015-D2D8-2F1D-4D6D-F456EA53B272}"/>
+          </ac:spMkLst>
+        </pc:spChg>
         <pc:picChg chg="add mod">
-          <ac:chgData name="Krupa Dalal" userId="d4791ec40d55e7ee" providerId="LiveId" clId="{E1ED0E34-1AFB-42A3-A161-79F7C18B936E}" dt="2026-03-28T11:15:39.675" v="890" actId="14100"/>
+          <ac:chgData name="Krupa Dalal" userId="d4791ec40d55e7ee" providerId="LiveId" clId="{E1ED0E34-1AFB-42A3-A161-79F7C18B936E}" dt="2026-04-02T15:56:48.026" v="2274" actId="1076"/>
           <ac:picMkLst>
             <pc:docMk/>
             <pc:sldMk cId="3908953289" sldId="273"/>
@@ -810,7 +892,7 @@
           </ac:picMkLst>
         </pc:picChg>
         <pc:picChg chg="add mod">
-          <ac:chgData name="Krupa Dalal" userId="d4791ec40d55e7ee" providerId="LiveId" clId="{E1ED0E34-1AFB-42A3-A161-79F7C18B936E}" dt="2026-03-28T11:16:07.770" v="893" actId="14100"/>
+          <ac:chgData name="Krupa Dalal" userId="d4791ec40d55e7ee" providerId="LiveId" clId="{E1ED0E34-1AFB-42A3-A161-79F7C18B936E}" dt="2026-04-02T15:56:44.387" v="2273" actId="1076"/>
           <ac:picMkLst>
             <pc:docMk/>
             <pc:sldMk cId="3908953289" sldId="273"/>
@@ -819,7 +901,7 @@
         </pc:picChg>
       </pc:sldChg>
       <pc:sldChg chg="addSp modSp add mod">
-        <pc:chgData name="Krupa Dalal" userId="d4791ec40d55e7ee" providerId="LiveId" clId="{E1ED0E34-1AFB-42A3-A161-79F7C18B936E}" dt="2026-03-28T11:27:47.486" v="957" actId="14100"/>
+        <pc:chgData name="Krupa Dalal" userId="d4791ec40d55e7ee" providerId="LiveId" clId="{E1ED0E34-1AFB-42A3-A161-79F7C18B936E}" dt="2026-04-02T15:58:58.381" v="2390" actId="1076"/>
         <pc:sldMkLst>
           <pc:docMk/>
           <pc:sldMk cId="1623952363" sldId="274"/>
@@ -830,6 +912,14 @@
             <pc:docMk/>
             <pc:sldMk cId="1623952363" sldId="274"/>
             <ac:spMk id="6" creationId="{4A9C67D7-C9B7-E9AB-8735-A224F580B56C}"/>
+          </ac:spMkLst>
+        </pc:spChg>
+        <pc:spChg chg="add mod">
+          <ac:chgData name="Krupa Dalal" userId="d4791ec40d55e7ee" providerId="LiveId" clId="{E1ED0E34-1AFB-42A3-A161-79F7C18B936E}" dt="2026-04-02T15:58:58.381" v="2390" actId="1076"/>
+          <ac:spMkLst>
+            <pc:docMk/>
+            <pc:sldMk cId="1623952363" sldId="274"/>
+            <ac:spMk id="7" creationId="{09F58F9C-003F-96C4-C5EA-B6C75E35B9E0}"/>
           </ac:spMkLst>
         </pc:spChg>
         <pc:picChg chg="add mod">
@@ -881,7 +971,7 @@
         </pc:picChg>
       </pc:sldChg>
       <pc:sldChg chg="addSp modSp add mod ord">
-        <pc:chgData name="Krupa Dalal" userId="d4791ec40d55e7ee" providerId="LiveId" clId="{E1ED0E34-1AFB-42A3-A161-79F7C18B936E}" dt="2026-03-28T11:48:30.109" v="1214" actId="14100"/>
+        <pc:chgData name="Krupa Dalal" userId="d4791ec40d55e7ee" providerId="LiveId" clId="{E1ED0E34-1AFB-42A3-A161-79F7C18B936E}" dt="2026-04-02T16:01:29.706" v="2505" actId="14100"/>
         <pc:sldMkLst>
           <pc:docMk/>
           <pc:sldMk cId="1799572547" sldId="276"/>
@@ -892,6 +982,14 @@
             <pc:docMk/>
             <pc:sldMk cId="1799572547" sldId="276"/>
             <ac:spMk id="6" creationId="{41A3E4D4-4046-DCFB-E9CB-9CB80B053B0A}"/>
+          </ac:spMkLst>
+        </pc:spChg>
+        <pc:spChg chg="add mod">
+          <ac:chgData name="Krupa Dalal" userId="d4791ec40d55e7ee" providerId="LiveId" clId="{E1ED0E34-1AFB-42A3-A161-79F7C18B936E}" dt="2026-04-02T16:01:29.706" v="2505" actId="14100"/>
+          <ac:spMkLst>
+            <pc:docMk/>
+            <pc:sldMk cId="1799572547" sldId="276"/>
+            <ac:spMk id="7" creationId="{57779279-C66D-40D4-79FF-30D08A677267}"/>
           </ac:spMkLst>
         </pc:spChg>
         <pc:picChg chg="add mod">
@@ -912,7 +1010,7 @@
         </pc:picChg>
       </pc:sldChg>
       <pc:sldChg chg="addSp delSp modSp add mod">
-        <pc:chgData name="Krupa Dalal" userId="d4791ec40d55e7ee" providerId="LiveId" clId="{E1ED0E34-1AFB-42A3-A161-79F7C18B936E}" dt="2026-03-28T11:59:15.290" v="1383" actId="20577"/>
+        <pc:chgData name="Krupa Dalal" userId="d4791ec40d55e7ee" providerId="LiveId" clId="{E1ED0E34-1AFB-42A3-A161-79F7C18B936E}" dt="2026-04-02T16:02:41.497" v="2583" actId="20577"/>
         <pc:sldMkLst>
           <pc:docMk/>
           <pc:sldMk cId="3743173019" sldId="277"/>
@@ -923,6 +1021,14 @@
             <pc:docMk/>
             <pc:sldMk cId="3743173019" sldId="277"/>
             <ac:spMk id="6" creationId="{59651C35-66E0-F9EA-3190-3E031BAC2F9C}"/>
+          </ac:spMkLst>
+        </pc:spChg>
+        <pc:spChg chg="add mod">
+          <ac:chgData name="Krupa Dalal" userId="d4791ec40d55e7ee" providerId="LiveId" clId="{E1ED0E34-1AFB-42A3-A161-79F7C18B936E}" dt="2026-04-02T16:02:41.497" v="2583" actId="20577"/>
+          <ac:spMkLst>
+            <pc:docMk/>
+            <pc:sldMk cId="3743173019" sldId="277"/>
+            <ac:spMk id="7" creationId="{930F9E4A-B1AF-DE4B-39B7-96BF5BBC9272}"/>
           </ac:spMkLst>
         </pc:spChg>
         <pc:picChg chg="add mod">
@@ -943,7 +1049,7 @@
         </pc:picChg>
       </pc:sldChg>
       <pc:sldChg chg="addSp modSp add mod ord">
-        <pc:chgData name="Krupa Dalal" userId="d4791ec40d55e7ee" providerId="LiveId" clId="{E1ED0E34-1AFB-42A3-A161-79F7C18B936E}" dt="2026-03-28T11:47:07.817" v="1166"/>
+        <pc:chgData name="Krupa Dalal" userId="d4791ec40d55e7ee" providerId="LiveId" clId="{E1ED0E34-1AFB-42A3-A161-79F7C18B936E}" dt="2026-04-02T16:00:19.412" v="2447" actId="14100"/>
         <pc:sldMkLst>
           <pc:docMk/>
           <pc:sldMk cId="3743301246" sldId="278"/>
@@ -954,6 +1060,14 @@
             <pc:docMk/>
             <pc:sldMk cId="3743301246" sldId="278"/>
             <ac:spMk id="6" creationId="{F549A010-E3AB-45B7-0CD3-DFDB50C165CA}"/>
+          </ac:spMkLst>
+        </pc:spChg>
+        <pc:spChg chg="add mod">
+          <ac:chgData name="Krupa Dalal" userId="d4791ec40d55e7ee" providerId="LiveId" clId="{E1ED0E34-1AFB-42A3-A161-79F7C18B936E}" dt="2026-04-02T16:00:19.412" v="2447" actId="14100"/>
+          <ac:spMkLst>
+            <pc:docMk/>
+            <pc:sldMk cId="3743301246" sldId="278"/>
+            <ac:spMk id="7" creationId="{B270C394-3704-0B18-E9A2-3D9CFF44D2F7}"/>
           </ac:spMkLst>
         </pc:spChg>
         <pc:picChg chg="add mod">
@@ -974,7 +1088,7 @@
         </pc:picChg>
       </pc:sldChg>
       <pc:sldChg chg="addSp modSp add mod">
-        <pc:chgData name="Krupa Dalal" userId="d4791ec40d55e7ee" providerId="LiveId" clId="{E1ED0E34-1AFB-42A3-A161-79F7C18B936E}" dt="2026-03-28T11:57:29.148" v="1285" actId="1076"/>
+        <pc:chgData name="Krupa Dalal" userId="d4791ec40d55e7ee" providerId="LiveId" clId="{E1ED0E34-1AFB-42A3-A161-79F7C18B936E}" dt="2026-04-02T16:03:34.396" v="2624" actId="14100"/>
         <pc:sldMkLst>
           <pc:docMk/>
           <pc:sldMk cId="2789876119" sldId="279"/>
@@ -985,6 +1099,14 @@
             <pc:docMk/>
             <pc:sldMk cId="2789876119" sldId="279"/>
             <ac:spMk id="6" creationId="{7D167802-21CE-A0BB-9658-6EF24699A199}"/>
+          </ac:spMkLst>
+        </pc:spChg>
+        <pc:spChg chg="add mod">
+          <ac:chgData name="Krupa Dalal" userId="d4791ec40d55e7ee" providerId="LiveId" clId="{E1ED0E34-1AFB-42A3-A161-79F7C18B936E}" dt="2026-04-02T16:03:34.396" v="2624" actId="14100"/>
+          <ac:spMkLst>
+            <pc:docMk/>
+            <pc:sldMk cId="2789876119" sldId="279"/>
+            <ac:spMk id="7" creationId="{96623125-CB5B-8393-F7BF-5936FE20697C}"/>
           </ac:spMkLst>
         </pc:spChg>
         <pc:picChg chg="add mod">
@@ -1044,7 +1166,7 @@
         </pc:picChg>
       </pc:sldChg>
       <pc:sldChg chg="addSp delSp modSp add mod">
-        <pc:chgData name="Krupa Dalal" userId="d4791ec40d55e7ee" providerId="LiveId" clId="{E1ED0E34-1AFB-42A3-A161-79F7C18B936E}" dt="2026-03-30T15:49:46.963" v="1847" actId="1076"/>
+        <pc:chgData name="Krupa Dalal" userId="d4791ec40d55e7ee" providerId="LiveId" clId="{E1ED0E34-1AFB-42A3-A161-79F7C18B936E}" dt="2026-04-02T16:03:56.129" v="2626" actId="20577"/>
         <pc:sldMkLst>
           <pc:docMk/>
           <pc:sldMk cId="2767688936" sldId="281"/>
@@ -1058,7 +1180,7 @@
           </ac:spMkLst>
         </pc:spChg>
         <pc:spChg chg="mod">
-          <ac:chgData name="Krupa Dalal" userId="d4791ec40d55e7ee" providerId="LiveId" clId="{E1ED0E34-1AFB-42A3-A161-79F7C18B936E}" dt="2026-03-30T15:49:46.963" v="1847" actId="1076"/>
+          <ac:chgData name="Krupa Dalal" userId="d4791ec40d55e7ee" providerId="LiveId" clId="{E1ED0E34-1AFB-42A3-A161-79F7C18B936E}" dt="2026-04-02T16:03:56.129" v="2626" actId="20577"/>
           <ac:spMkLst>
             <pc:docMk/>
             <pc:sldMk cId="2767688936" sldId="281"/>
@@ -1073,14 +1195,6 @@
             <ac:picMk id="8" creationId="{DD733C2C-C28A-F62E-0D04-A89DEEB27CDD}"/>
           </ac:picMkLst>
         </pc:picChg>
-        <pc:picChg chg="del">
-          <ac:chgData name="Krupa Dalal" userId="d4791ec40d55e7ee" providerId="LiveId" clId="{E1ED0E34-1AFB-42A3-A161-79F7C18B936E}" dt="2026-03-30T15:43:46.319" v="1799" actId="478"/>
-          <ac:picMkLst>
-            <pc:docMk/>
-            <pc:sldMk cId="2767688936" sldId="281"/>
-            <ac:picMk id="9" creationId="{5DDFF2F7-DD7B-4BD5-726A-7A3E5D3E78EA}"/>
-          </ac:picMkLst>
-        </pc:picChg>
         <pc:picChg chg="add mod">
           <ac:chgData name="Krupa Dalal" userId="d4791ec40d55e7ee" providerId="LiveId" clId="{E1ED0E34-1AFB-42A3-A161-79F7C18B936E}" dt="2026-03-30T15:49:28.328" v="1843" actId="14100"/>
           <ac:picMkLst>
@@ -1089,24 +1203,9 @@
             <ac:picMk id="11" creationId="{DACED037-C642-74D9-2BF3-0EC7304D417F}"/>
           </ac:picMkLst>
         </pc:picChg>
-        <pc:picChg chg="del">
-          <ac:chgData name="Krupa Dalal" userId="d4791ec40d55e7ee" providerId="LiveId" clId="{E1ED0E34-1AFB-42A3-A161-79F7C18B936E}" dt="2026-03-30T15:43:44.509" v="1798" actId="478"/>
-          <ac:picMkLst>
-            <pc:docMk/>
-            <pc:sldMk cId="2767688936" sldId="281"/>
-            <ac:picMk id="12" creationId="{07F393E3-AFC0-6B4B-2B30-6741475DA437}"/>
-          </ac:picMkLst>
-        </pc:picChg>
-      </pc:sldChg>
-      <pc:sldChg chg="add del">
-        <pc:chgData name="Krupa Dalal" userId="d4791ec40d55e7ee" providerId="LiveId" clId="{E1ED0E34-1AFB-42A3-A161-79F7C18B936E}" dt="2026-03-30T15:39:10.393" v="1568" actId="47"/>
-        <pc:sldMkLst>
-          <pc:docMk/>
-          <pc:sldMk cId="3221610630" sldId="281"/>
-        </pc:sldMkLst>
       </pc:sldChg>
       <pc:sldChg chg="addSp delSp modSp add mod">
-        <pc:chgData name="Krupa Dalal" userId="d4791ec40d55e7ee" providerId="LiveId" clId="{E1ED0E34-1AFB-42A3-A161-79F7C18B936E}" dt="2026-03-30T15:56:59.325" v="1867" actId="1076"/>
+        <pc:chgData name="Krupa Dalal" userId="d4791ec40d55e7ee" providerId="LiveId" clId="{E1ED0E34-1AFB-42A3-A161-79F7C18B936E}" dt="2026-04-02T16:04:06.859" v="2628" actId="20577"/>
         <pc:sldMkLst>
           <pc:docMk/>
           <pc:sldMk cId="2306082377" sldId="282"/>
@@ -1120,35 +1219,19 @@
           </ac:spMkLst>
         </pc:spChg>
         <pc:spChg chg="mod">
-          <ac:chgData name="Krupa Dalal" userId="d4791ec40d55e7ee" providerId="LiveId" clId="{E1ED0E34-1AFB-42A3-A161-79F7C18B936E}" dt="2026-03-30T15:52:51.135" v="1851" actId="108"/>
+          <ac:chgData name="Krupa Dalal" userId="d4791ec40d55e7ee" providerId="LiveId" clId="{E1ED0E34-1AFB-42A3-A161-79F7C18B936E}" dt="2026-04-02T16:04:06.859" v="2628" actId="20577"/>
           <ac:spMkLst>
             <pc:docMk/>
             <pc:sldMk cId="2306082377" sldId="282"/>
             <ac:spMk id="6" creationId="{63594FF4-E57E-91E8-DD1F-008163748EBE}"/>
           </ac:spMkLst>
         </pc:spChg>
-        <pc:picChg chg="del">
-          <ac:chgData name="Krupa Dalal" userId="d4791ec40d55e7ee" providerId="LiveId" clId="{E1ED0E34-1AFB-42A3-A161-79F7C18B936E}" dt="2026-03-30T15:52:55.662" v="1853" actId="478"/>
-          <ac:picMkLst>
-            <pc:docMk/>
-            <pc:sldMk cId="2306082377" sldId="282"/>
-            <ac:picMk id="8" creationId="{E85DA518-A9B0-C282-B52E-3CF5BCB62F88}"/>
-          </ac:picMkLst>
-        </pc:picChg>
         <pc:picChg chg="add mod">
           <ac:chgData name="Krupa Dalal" userId="d4791ec40d55e7ee" providerId="LiveId" clId="{E1ED0E34-1AFB-42A3-A161-79F7C18B936E}" dt="2026-03-30T15:56:57.559" v="1866" actId="1076"/>
           <ac:picMkLst>
             <pc:docMk/>
             <pc:sldMk cId="2306082377" sldId="282"/>
             <ac:picMk id="9" creationId="{B982F44D-B60C-9953-C357-202DE7B87F27}"/>
-          </ac:picMkLst>
-        </pc:picChg>
-        <pc:picChg chg="del">
-          <ac:chgData name="Krupa Dalal" userId="d4791ec40d55e7ee" providerId="LiveId" clId="{E1ED0E34-1AFB-42A3-A161-79F7C18B936E}" dt="2026-03-30T15:52:53.769" v="1852" actId="478"/>
-          <ac:picMkLst>
-            <pc:docMk/>
-            <pc:sldMk cId="2306082377" sldId="282"/>
-            <ac:picMk id="11" creationId="{E8C6A283-0193-2AEB-1C18-7C75790D8A3E}"/>
           </ac:picMkLst>
         </pc:picChg>
         <pc:picChg chg="add mod">
@@ -1159,13 +1242,6 @@
             <ac:picMk id="12" creationId="{4DDEAA25-1D73-6485-5921-47A193076FDD}"/>
           </ac:picMkLst>
         </pc:picChg>
-      </pc:sldChg>
-      <pc:sldChg chg="add del">
-        <pc:chgData name="Krupa Dalal" userId="d4791ec40d55e7ee" providerId="LiveId" clId="{E1ED0E34-1AFB-42A3-A161-79F7C18B936E}" dt="2026-03-30T15:39:14.038" v="1569" actId="47"/>
-        <pc:sldMkLst>
-          <pc:docMk/>
-          <pc:sldMk cId="3635829260" sldId="282"/>
-        </pc:sldMkLst>
       </pc:sldChg>
     </pc:docChg>
   </pc:docChgLst>
@@ -1352,7 +1428,7 @@
             <a:fld id="{1D8BD707-D9CF-40AE-B4C6-C98DA3205C09}" type="datetimeFigureOut">
               <a:rPr lang="en-US" smtClean="0"/>
               <a:pPr/>
-              <a:t>3/30/2026</a:t>
+              <a:t>4/2/2026</a:t>
             </a:fld>
             <a:endParaRPr lang="en-US"/>
           </a:p>
@@ -1517,7 +1593,7 @@
             <a:fld id="{1D8BD707-D9CF-40AE-B4C6-C98DA3205C09}" type="datetimeFigureOut">
               <a:rPr lang="en-US" smtClean="0"/>
               <a:pPr/>
-              <a:t>3/30/2026</a:t>
+              <a:t>4/2/2026</a:t>
             </a:fld>
             <a:endParaRPr lang="en-US"/>
           </a:p>
@@ -1692,7 +1768,7 @@
             <a:fld id="{1D8BD707-D9CF-40AE-B4C6-C98DA3205C09}" type="datetimeFigureOut">
               <a:rPr lang="en-US" smtClean="0"/>
               <a:pPr/>
-              <a:t>3/30/2026</a:t>
+              <a:t>4/2/2026</a:t>
             </a:fld>
             <a:endParaRPr lang="en-US"/>
           </a:p>
@@ -1857,7 +1933,7 @@
             <a:fld id="{1D8BD707-D9CF-40AE-B4C6-C98DA3205C09}" type="datetimeFigureOut">
               <a:rPr lang="en-US" smtClean="0"/>
               <a:pPr/>
-              <a:t>3/30/2026</a:t>
+              <a:t>4/2/2026</a:t>
             </a:fld>
             <a:endParaRPr lang="en-US"/>
           </a:p>
@@ -2099,7 +2175,7 @@
             <a:fld id="{1D8BD707-D9CF-40AE-B4C6-C98DA3205C09}" type="datetimeFigureOut">
               <a:rPr lang="en-US" smtClean="0"/>
               <a:pPr/>
-              <a:t>3/30/2026</a:t>
+              <a:t>4/2/2026</a:t>
             </a:fld>
             <a:endParaRPr lang="en-US"/>
           </a:p>
@@ -2381,7 +2457,7 @@
             <a:fld id="{1D8BD707-D9CF-40AE-B4C6-C98DA3205C09}" type="datetimeFigureOut">
               <a:rPr lang="en-US" smtClean="0"/>
               <a:pPr/>
-              <a:t>3/30/2026</a:t>
+              <a:t>4/2/2026</a:t>
             </a:fld>
             <a:endParaRPr lang="en-US"/>
           </a:p>
@@ -2797,7 +2873,7 @@
             <a:fld id="{1D8BD707-D9CF-40AE-B4C6-C98DA3205C09}" type="datetimeFigureOut">
               <a:rPr lang="en-US" smtClean="0"/>
               <a:pPr/>
-              <a:t>3/30/2026</a:t>
+              <a:t>4/2/2026</a:t>
             </a:fld>
             <a:endParaRPr lang="en-US"/>
           </a:p>
@@ -2911,7 +2987,7 @@
             <a:fld id="{1D8BD707-D9CF-40AE-B4C6-C98DA3205C09}" type="datetimeFigureOut">
               <a:rPr lang="en-US" smtClean="0"/>
               <a:pPr/>
-              <a:t>3/30/2026</a:t>
+              <a:t>4/2/2026</a:t>
             </a:fld>
             <a:endParaRPr lang="en-US"/>
           </a:p>
@@ -3003,7 +3079,7 @@
             <a:fld id="{1D8BD707-D9CF-40AE-B4C6-C98DA3205C09}" type="datetimeFigureOut">
               <a:rPr lang="en-US" smtClean="0"/>
               <a:pPr/>
-              <a:t>3/30/2026</a:t>
+              <a:t>4/2/2026</a:t>
             </a:fld>
             <a:endParaRPr lang="en-US"/>
           </a:p>
@@ -3275,7 +3351,7 @@
             <a:fld id="{1D8BD707-D9CF-40AE-B4C6-C98DA3205C09}" type="datetimeFigureOut">
               <a:rPr lang="en-US" smtClean="0"/>
               <a:pPr/>
-              <a:t>3/30/2026</a:t>
+              <a:t>4/2/2026</a:t>
             </a:fld>
             <a:endParaRPr lang="en-US"/>
           </a:p>
@@ -3524,7 +3600,7 @@
             <a:fld id="{1D8BD707-D9CF-40AE-B4C6-C98DA3205C09}" type="datetimeFigureOut">
               <a:rPr lang="en-US" smtClean="0"/>
               <a:pPr/>
-              <a:t>3/30/2026</a:t>
+              <a:t>4/2/2026</a:t>
             </a:fld>
             <a:endParaRPr lang="en-US"/>
           </a:p>
@@ -3732,7 +3808,7 @@
             <a:fld id="{1D8BD707-D9CF-40AE-B4C6-C98DA3205C09}" type="datetimeFigureOut">
               <a:rPr lang="en-US" smtClean="0"/>
               <a:pPr/>
-              <a:t>3/30/2026</a:t>
+              <a:t>4/2/2026</a:t>
             </a:fld>
             <a:endParaRPr lang="en-US"/>
           </a:p>
@@ -4895,6 +4971,54 @@
           </a:prstGeom>
         </p:spPr>
       </p:pic>
+      <p:sp>
+        <p:nvSpPr>
+          <p:cNvPr id="6" name="TextBox 5">
+            <a:extLst>
+              <a:ext uri="{FF2B5EF4-FFF2-40B4-BE49-F238E27FC236}">
+                <a16:creationId xmlns:a16="http://schemas.microsoft.com/office/drawing/2014/main" id="{646782A9-88AF-5A2E-8208-B7C683F2ECC6}"/>
+              </a:ext>
+            </a:extLst>
+          </p:cNvPr>
+          <p:cNvSpPr txBox="1"/>
+          <p:nvPr/>
+        </p:nvSpPr>
+        <p:spPr>
+          <a:xfrm>
+            <a:off x="5181715" y="7966047"/>
+            <a:ext cx="6019686" cy="523220"/>
+          </a:xfrm>
+          <a:prstGeom prst="rect">
+            <a:avLst/>
+          </a:prstGeom>
+          <a:solidFill>
+            <a:srgbClr val="FFC000"/>
+          </a:solidFill>
+        </p:spPr>
+        <p:txBody>
+          <a:bodyPr wrap="square" rtlCol="0">
+            <a:spAutoFit/>
+          </a:bodyPr>
+          <a:lstStyle/>
+          <a:p>
+            <a:r>
+              <a:rPr lang="en-US" sz="2800" b="1" dirty="0">
+                <a:solidFill>
+                  <a:srgbClr val="002060"/>
+                </a:solidFill>
+                <a:latin typeface="Bahnschrift" panose="020B0502040204020203" pitchFamily="34" charset="0"/>
+              </a:rPr>
+              <a:t>HIGHEST ORDERS ARE FROM DELHI </a:t>
+            </a:r>
+            <a:endParaRPr lang="en-IN" sz="2800" b="1" dirty="0">
+              <a:solidFill>
+                <a:srgbClr val="002060"/>
+              </a:solidFill>
+              <a:latin typeface="Bahnschrift" panose="020B0502040204020203" pitchFamily="34" charset="0"/>
+            </a:endParaRPr>
+          </a:p>
+        </p:txBody>
+      </p:sp>
     </p:spTree>
     <p:extLst>
       <p:ext uri="{BB962C8B-B14F-4D97-AF65-F5344CB8AC3E}">
@@ -5287,6 +5411,54 @@
           </a:prstGeom>
         </p:spPr>
       </p:pic>
+      <p:sp>
+        <p:nvSpPr>
+          <p:cNvPr id="6" name="TextBox 5">
+            <a:extLst>
+              <a:ext uri="{FF2B5EF4-FFF2-40B4-BE49-F238E27FC236}">
+                <a16:creationId xmlns:a16="http://schemas.microsoft.com/office/drawing/2014/main" id="{BC09E674-2793-07B0-DA97-CD3C49C4AF0B}"/>
+              </a:ext>
+            </a:extLst>
+          </p:cNvPr>
+          <p:cNvSpPr txBox="1"/>
+          <p:nvPr/>
+        </p:nvSpPr>
+        <p:spPr>
+          <a:xfrm>
+            <a:off x="4837712" y="8361504"/>
+            <a:ext cx="7735287" cy="523220"/>
+          </a:xfrm>
+          <a:prstGeom prst="rect">
+            <a:avLst/>
+          </a:prstGeom>
+          <a:solidFill>
+            <a:srgbClr val="FFC000"/>
+          </a:solidFill>
+        </p:spPr>
+        <p:txBody>
+          <a:bodyPr wrap="square" rtlCol="0">
+            <a:spAutoFit/>
+          </a:bodyPr>
+          <a:lstStyle/>
+          <a:p>
+            <a:r>
+              <a:rPr lang="en-US" sz="2800" b="1" dirty="0">
+                <a:solidFill>
+                  <a:srgbClr val="002060"/>
+                </a:solidFill>
+                <a:latin typeface="Bahnschrift" panose="020B0502040204020203" pitchFamily="34" charset="0"/>
+              </a:rPr>
+              <a:t>MOST ORDERS ARE FROM DOMAIN YAHOO.COM</a:t>
+            </a:r>
+            <a:endParaRPr lang="en-IN" sz="2800" b="1" dirty="0">
+              <a:solidFill>
+                <a:srgbClr val="002060"/>
+              </a:solidFill>
+              <a:latin typeface="Bahnschrift" panose="020B0502040204020203" pitchFamily="34" charset="0"/>
+            </a:endParaRPr>
+          </a:p>
+        </p:txBody>
+      </p:sp>
     </p:spTree>
     <p:extLst>
       <p:ext uri="{BB962C8B-B14F-4D97-AF65-F5344CB8AC3E}">
@@ -6118,6 +6290,54 @@
           </a:prstGeom>
         </p:spPr>
       </p:pic>
+      <p:sp>
+        <p:nvSpPr>
+          <p:cNvPr id="7" name="TextBox 6">
+            <a:extLst>
+              <a:ext uri="{FF2B5EF4-FFF2-40B4-BE49-F238E27FC236}">
+                <a16:creationId xmlns:a16="http://schemas.microsoft.com/office/drawing/2014/main" id="{9FF30C46-FE8A-ED42-4401-00DE84718BB8}"/>
+              </a:ext>
+            </a:extLst>
+          </p:cNvPr>
+          <p:cNvSpPr txBox="1"/>
+          <p:nvPr/>
+        </p:nvSpPr>
+        <p:spPr>
+          <a:xfrm>
+            <a:off x="3657600" y="8403000"/>
+            <a:ext cx="9345891" cy="523220"/>
+          </a:xfrm>
+          <a:prstGeom prst="rect">
+            <a:avLst/>
+          </a:prstGeom>
+          <a:solidFill>
+            <a:srgbClr val="FFC000"/>
+          </a:solidFill>
+        </p:spPr>
+        <p:txBody>
+          <a:bodyPr wrap="square" rtlCol="0">
+            <a:spAutoFit/>
+          </a:bodyPr>
+          <a:lstStyle/>
+          <a:p>
+            <a:r>
+              <a:rPr lang="en-US" sz="2800" b="1" dirty="0">
+                <a:solidFill>
+                  <a:srgbClr val="002060"/>
+                </a:solidFill>
+                <a:latin typeface="Bahnschrift" panose="020B0502040204020203" pitchFamily="34" charset="0"/>
+              </a:rPr>
+              <a:t>HIGHEST SALES ARE GENERATED FROM SMARTPHONES</a:t>
+            </a:r>
+            <a:endParaRPr lang="en-IN" sz="2800" b="1" dirty="0">
+              <a:solidFill>
+                <a:srgbClr val="002060"/>
+              </a:solidFill>
+              <a:latin typeface="Bahnschrift" panose="020B0502040204020203" pitchFamily="34" charset="0"/>
+            </a:endParaRPr>
+          </a:p>
+        </p:txBody>
+      </p:sp>
     </p:spTree>
     <p:extLst>
       <p:ext uri="{BB962C8B-B14F-4D97-AF65-F5344CB8AC3E}">
@@ -6510,6 +6730,54 @@
           </a:prstGeom>
         </p:spPr>
       </p:pic>
+      <p:sp>
+        <p:nvSpPr>
+          <p:cNvPr id="7" name="TextBox 6">
+            <a:extLst>
+              <a:ext uri="{FF2B5EF4-FFF2-40B4-BE49-F238E27FC236}">
+                <a16:creationId xmlns:a16="http://schemas.microsoft.com/office/drawing/2014/main" id="{51059048-154A-E8A7-7CCB-97024EC67C27}"/>
+              </a:ext>
+            </a:extLst>
+          </p:cNvPr>
+          <p:cNvSpPr txBox="1"/>
+          <p:nvPr/>
+        </p:nvSpPr>
+        <p:spPr>
+          <a:xfrm>
+            <a:off x="2570981" y="8766337"/>
+            <a:ext cx="7106419" cy="523220"/>
+          </a:xfrm>
+          <a:prstGeom prst="rect">
+            <a:avLst/>
+          </a:prstGeom>
+          <a:solidFill>
+            <a:srgbClr val="FFC000"/>
+          </a:solidFill>
+        </p:spPr>
+        <p:txBody>
+          <a:bodyPr wrap="square" rtlCol="0">
+            <a:spAutoFit/>
+          </a:bodyPr>
+          <a:lstStyle/>
+          <a:p>
+            <a:r>
+              <a:rPr lang="en-US" sz="2800" b="1" dirty="0">
+                <a:solidFill>
+                  <a:srgbClr val="002060"/>
+                </a:solidFill>
+                <a:latin typeface="Bahnschrift" panose="020B0502040204020203" pitchFamily="34" charset="0"/>
+              </a:rPr>
+              <a:t>APPLE IPHONE 16 IS MOST SOLD PRODUCT</a:t>
+            </a:r>
+            <a:endParaRPr lang="en-IN" sz="2800" b="1" dirty="0">
+              <a:solidFill>
+                <a:srgbClr val="002060"/>
+              </a:solidFill>
+              <a:latin typeface="Bahnschrift" panose="020B0502040204020203" pitchFamily="34" charset="0"/>
+            </a:endParaRPr>
+          </a:p>
+        </p:txBody>
+      </p:sp>
     </p:spTree>
     <p:extLst>
       <p:ext uri="{BB962C8B-B14F-4D97-AF65-F5344CB8AC3E}">
@@ -6614,64 +6882,6 @@
       </p:sp>
       <p:sp>
         <p:nvSpPr>
-          <p:cNvPr id="3" name="Freeform 3">
-            <a:extLst>
-              <a:ext uri="{FF2B5EF4-FFF2-40B4-BE49-F238E27FC236}">
-                <a16:creationId xmlns:a16="http://schemas.microsoft.com/office/drawing/2014/main" id="{648E2E53-B89F-24CD-8FAC-C08E36D8FE5F}"/>
-              </a:ext>
-            </a:extLst>
-          </p:cNvPr>
-          <p:cNvSpPr/>
-          <p:nvPr/>
-        </p:nvSpPr>
-        <p:spPr>
-          <a:xfrm flipH="1">
-            <a:off x="12849610" y="4838700"/>
-            <a:ext cx="5448300" cy="5448300"/>
-          </a:xfrm>
-          <a:custGeom>
-            <a:avLst/>
-            <a:gdLst/>
-            <a:ahLst/>
-            <a:cxnLst/>
-            <a:rect l="l" t="t" r="r" b="b"/>
-            <a:pathLst>
-              <a:path w="5448300" h="5448300">
-                <a:moveTo>
-                  <a:pt x="5448300" y="0"/>
-                </a:moveTo>
-                <a:lnTo>
-                  <a:pt x="0" y="0"/>
-                </a:lnTo>
-                <a:lnTo>
-                  <a:pt x="0" y="5448300"/>
-                </a:lnTo>
-                <a:lnTo>
-                  <a:pt x="5448300" y="5448300"/>
-                </a:lnTo>
-                <a:lnTo>
-                  <a:pt x="5448300" y="0"/>
-                </a:lnTo>
-                <a:close/>
-              </a:path>
-            </a:pathLst>
-          </a:custGeom>
-          <a:blipFill>
-            <a:blip>
-              <a:extLst>
-                <a:ext uri="{96DAC541-7B7A-43D3-8B79-37D633B846F1}">
-                  <asvg:svgBlip xmlns:asvg="http://schemas.microsoft.com/office/drawing/2016/SVG/main" r:embed="rId2"/>
-                </a:ext>
-              </a:extLst>
-            </a:blip>
-            <a:stretch>
-              <a:fillRect/>
-            </a:stretch>
-          </a:blipFill>
-        </p:spPr>
-      </p:sp>
-      <p:sp>
-        <p:nvSpPr>
           <p:cNvPr id="4" name="Freeform 4">
             <a:extLst>
               <a:ext uri="{FF2B5EF4-FFF2-40B4-BE49-F238E27FC236}">
@@ -6801,7 +7011,7 @@
         <p:spPr>
           <a:xfrm>
             <a:off x="3810000" y="668789"/>
-            <a:ext cx="12616460" cy="1529265"/>
+            <a:ext cx="12616460" cy="3157916"/>
           </a:xfrm>
           <a:prstGeom prst="rect">
             <a:avLst/>
@@ -6830,6 +7040,25 @@
               </a:rPr>
               <a:t>Most Sold Product Category</a:t>
             </a:r>
+          </a:p>
+          <a:p>
+            <a:pPr algn="ctr">
+              <a:lnSpc>
+                <a:spcPts val="12685"/>
+              </a:lnSpc>
+            </a:pPr>
+            <a:r>
+              <a:rPr lang="en-US" sz="8000" b="1" dirty="0">
+                <a:solidFill>
+                  <a:srgbClr val="002B58"/>
+                </a:solidFill>
+                <a:latin typeface="Perpetua" panose="02020502060401020303" pitchFamily="18" charset="0"/>
+                <a:ea typeface="Readex Pro Semi-Bold"/>
+                <a:cs typeface="Readex Pro Semi-Bold"/>
+                <a:sym typeface="Readex Pro Semi-Bold"/>
+              </a:rPr>
+              <a:t>By order count</a:t>
+            </a:r>
             <a:endParaRPr lang="en-US" sz="6600" b="1" dirty="0">
               <a:solidFill>
                 <a:srgbClr val="002B58"/>
@@ -6864,7 +7093,7 @@
         </p:blipFill>
         <p:spPr>
           <a:xfrm>
-            <a:off x="2057400" y="3034438"/>
+            <a:off x="2285022" y="4047772"/>
             <a:ext cx="7833208" cy="3082651"/>
           </a:xfrm>
           <a:prstGeom prst="rect">
@@ -6894,7 +7123,7 @@
         </p:blipFill>
         <p:spPr>
           <a:xfrm>
-            <a:off x="10146996" y="3039880"/>
+            <a:off x="10250713" y="4036886"/>
             <a:ext cx="5197794" cy="4846819"/>
           </a:xfrm>
           <a:prstGeom prst="rect">
@@ -6902,6 +7131,130 @@
           </a:prstGeom>
         </p:spPr>
       </p:pic>
+      <p:sp>
+        <p:nvSpPr>
+          <p:cNvPr id="3" name="Freeform 3">
+            <a:extLst>
+              <a:ext uri="{FF2B5EF4-FFF2-40B4-BE49-F238E27FC236}">
+                <a16:creationId xmlns:a16="http://schemas.microsoft.com/office/drawing/2014/main" id="{648E2E53-B89F-24CD-8FAC-C08E36D8FE5F}"/>
+              </a:ext>
+            </a:extLst>
+          </p:cNvPr>
+          <p:cNvSpPr/>
+          <p:nvPr/>
+        </p:nvSpPr>
+        <p:spPr>
+          <a:xfrm flipH="1">
+            <a:off x="12849610" y="4838700"/>
+            <a:ext cx="5448300" cy="5448300"/>
+          </a:xfrm>
+          <a:custGeom>
+            <a:avLst/>
+            <a:gdLst/>
+            <a:ahLst/>
+            <a:cxnLst/>
+            <a:rect l="l" t="t" r="r" b="b"/>
+            <a:pathLst>
+              <a:path w="5448300" h="5448300">
+                <a:moveTo>
+                  <a:pt x="5448300" y="0"/>
+                </a:moveTo>
+                <a:lnTo>
+                  <a:pt x="0" y="0"/>
+                </a:lnTo>
+                <a:lnTo>
+                  <a:pt x="0" y="5448300"/>
+                </a:lnTo>
+                <a:lnTo>
+                  <a:pt x="5448300" y="5448300"/>
+                </a:lnTo>
+                <a:lnTo>
+                  <a:pt x="5448300" y="0"/>
+                </a:lnTo>
+                <a:close/>
+              </a:path>
+            </a:pathLst>
+          </a:custGeom>
+          <a:blipFill>
+            <a:blip>
+              <a:extLst>
+                <a:ext uri="{96DAC541-7B7A-43D3-8B79-37D633B846F1}">
+                  <asvg:svgBlip xmlns:asvg="http://schemas.microsoft.com/office/drawing/2016/SVG/main" r:embed="rId2"/>
+                </a:ext>
+              </a:extLst>
+            </a:blip>
+            <a:stretch>
+              <a:fillRect/>
+            </a:stretch>
+          </a:blipFill>
+        </p:spPr>
+      </p:sp>
+      <p:sp>
+        <p:nvSpPr>
+          <p:cNvPr id="7" name="TextBox 6">
+            <a:extLst>
+              <a:ext uri="{FF2B5EF4-FFF2-40B4-BE49-F238E27FC236}">
+                <a16:creationId xmlns:a16="http://schemas.microsoft.com/office/drawing/2014/main" id="{100D1015-D2D8-2F1D-4D6D-F456EA53B272}"/>
+              </a:ext>
+            </a:extLst>
+          </p:cNvPr>
+          <p:cNvSpPr txBox="1"/>
+          <p:nvPr/>
+        </p:nvSpPr>
+        <p:spPr>
+          <a:xfrm>
+            <a:off x="2133600" y="7874477"/>
+            <a:ext cx="7833209" cy="954107"/>
+          </a:xfrm>
+          <a:prstGeom prst="rect">
+            <a:avLst/>
+          </a:prstGeom>
+          <a:solidFill>
+            <a:srgbClr val="FFC000"/>
+          </a:solidFill>
+        </p:spPr>
+        <p:txBody>
+          <a:bodyPr wrap="square" rtlCol="0">
+            <a:spAutoFit/>
+          </a:bodyPr>
+          <a:lstStyle/>
+          <a:p>
+            <a:r>
+              <a:rPr lang="en-US" sz="2800" b="1" dirty="0">
+                <a:solidFill>
+                  <a:srgbClr val="002060"/>
+                </a:solidFill>
+                <a:latin typeface="Bahnschrift" panose="020B0502040204020203" pitchFamily="34" charset="0"/>
+              </a:rPr>
+              <a:t>SMARTPHONE CATEGORY HAS HIGHEST ORDER COUNT </a:t>
+            </a:r>
+            <a:r>
+              <a:rPr lang="en-US" sz="2800" b="1" dirty="0" err="1">
+                <a:solidFill>
+                  <a:srgbClr val="002060"/>
+                </a:solidFill>
+                <a:latin typeface="Bahnschrift" panose="020B0502040204020203" pitchFamily="34" charset="0"/>
+              </a:rPr>
+              <a:t>i.e</a:t>
+            </a:r>
+            <a:r>
+              <a:rPr lang="en-US" sz="2800" b="1" dirty="0">
+                <a:solidFill>
+                  <a:srgbClr val="002060"/>
+                </a:solidFill>
+                <a:latin typeface="Bahnschrift" panose="020B0502040204020203" pitchFamily="34" charset="0"/>
+              </a:rPr>
+              <a:t> 16830</a:t>
+            </a:r>
+            <a:endParaRPr lang="en-IN" sz="2800" b="1" dirty="0">
+              <a:solidFill>
+                <a:srgbClr val="002060"/>
+              </a:solidFill>
+              <a:latin typeface="Bahnschrift" panose="020B0502040204020203" pitchFamily="34" charset="0"/>
+            </a:endParaRPr>
+          </a:p>
+        </p:txBody>
+      </p:sp>
     </p:spTree>
     <p:extLst>
       <p:ext uri="{BB962C8B-B14F-4D97-AF65-F5344CB8AC3E}">
@@ -7294,6 +7647,72 @@
           </a:prstGeom>
         </p:spPr>
       </p:pic>
+      <p:sp>
+        <p:nvSpPr>
+          <p:cNvPr id="7" name="TextBox 6">
+            <a:extLst>
+              <a:ext uri="{FF2B5EF4-FFF2-40B4-BE49-F238E27FC236}">
+                <a16:creationId xmlns:a16="http://schemas.microsoft.com/office/drawing/2014/main" id="{09F58F9C-003F-96C4-C5EA-B6C75E35B9E0}"/>
+              </a:ext>
+            </a:extLst>
+          </p:cNvPr>
+          <p:cNvSpPr txBox="1"/>
+          <p:nvPr/>
+        </p:nvSpPr>
+        <p:spPr>
+          <a:xfrm>
+            <a:off x="4648200" y="8331996"/>
+            <a:ext cx="8612575" cy="523220"/>
+          </a:xfrm>
+          <a:prstGeom prst="rect">
+            <a:avLst/>
+          </a:prstGeom>
+          <a:solidFill>
+            <a:srgbClr val="FFC000"/>
+          </a:solidFill>
+        </p:spPr>
+        <p:txBody>
+          <a:bodyPr wrap="square" rtlCol="0">
+            <a:spAutoFit/>
+          </a:bodyPr>
+          <a:lstStyle/>
+          <a:p>
+            <a:r>
+              <a:rPr lang="en-US" sz="2800" b="1" dirty="0">
+                <a:solidFill>
+                  <a:srgbClr val="002060"/>
+                </a:solidFill>
+                <a:latin typeface="Bahnschrift" panose="020B0502040204020203" pitchFamily="34" charset="0"/>
+              </a:rPr>
+              <a:t>MOST CANCELLED PRODUCT IS TP-Link </a:t>
+            </a:r>
+            <a:r>
+              <a:rPr lang="en-US" sz="2800" b="1" dirty="0" err="1">
+                <a:solidFill>
+                  <a:srgbClr val="002060"/>
+                </a:solidFill>
+                <a:latin typeface="Bahnschrift" panose="020B0502040204020203" pitchFamily="34" charset="0"/>
+              </a:rPr>
+              <a:t>WiFi</a:t>
+            </a:r>
+            <a:r>
+              <a:rPr lang="en-US" sz="2800" b="1" dirty="0">
+                <a:solidFill>
+                  <a:srgbClr val="002060"/>
+                </a:solidFill>
+                <a:latin typeface="Bahnschrift" panose="020B0502040204020203" pitchFamily="34" charset="0"/>
+              </a:rPr>
+              <a:t> Router</a:t>
+            </a:r>
+            <a:endParaRPr lang="en-IN" sz="2800" b="1" dirty="0">
+              <a:solidFill>
+                <a:srgbClr val="002060"/>
+              </a:solidFill>
+              <a:latin typeface="Bahnschrift" panose="020B0502040204020203" pitchFamily="34" charset="0"/>
+            </a:endParaRPr>
+          </a:p>
+        </p:txBody>
+      </p:sp>
     </p:spTree>
     <p:extLst>
       <p:ext uri="{BB962C8B-B14F-4D97-AF65-F5344CB8AC3E}">
@@ -8487,6 +8906,54 @@
           </a:prstGeom>
         </p:spPr>
       </p:pic>
+      <p:sp>
+        <p:nvSpPr>
+          <p:cNvPr id="7" name="TextBox 6">
+            <a:extLst>
+              <a:ext uri="{FF2B5EF4-FFF2-40B4-BE49-F238E27FC236}">
+                <a16:creationId xmlns:a16="http://schemas.microsoft.com/office/drawing/2014/main" id="{B270C394-3704-0B18-E9A2-3D9CFF44D2F7}"/>
+              </a:ext>
+            </a:extLst>
+          </p:cNvPr>
+          <p:cNvSpPr txBox="1"/>
+          <p:nvPr/>
+        </p:nvSpPr>
+        <p:spPr>
+          <a:xfrm>
+            <a:off x="4934485" y="7382086"/>
+            <a:ext cx="7266820" cy="523220"/>
+          </a:xfrm>
+          <a:prstGeom prst="rect">
+            <a:avLst/>
+          </a:prstGeom>
+          <a:solidFill>
+            <a:srgbClr val="FFC000"/>
+          </a:solidFill>
+        </p:spPr>
+        <p:txBody>
+          <a:bodyPr wrap="square" rtlCol="0">
+            <a:spAutoFit/>
+          </a:bodyPr>
+          <a:lstStyle/>
+          <a:p>
+            <a:r>
+              <a:rPr lang="en-US" sz="2800" b="1" dirty="0">
+                <a:solidFill>
+                  <a:srgbClr val="002060"/>
+                </a:solidFill>
+                <a:latin typeface="Bahnschrift" panose="020B0502040204020203" pitchFamily="34" charset="0"/>
+              </a:rPr>
+              <a:t>MOST PRODUCTS ARE  ‘IN TRANSIT’ = 25145</a:t>
+            </a:r>
+            <a:endParaRPr lang="en-IN" sz="2800" b="1" dirty="0">
+              <a:solidFill>
+                <a:srgbClr val="002060"/>
+              </a:solidFill>
+              <a:latin typeface="Bahnschrift" panose="020B0502040204020203" pitchFamily="34" charset="0"/>
+            </a:endParaRPr>
+          </a:p>
+        </p:txBody>
+      </p:sp>
     </p:spTree>
     <p:extLst>
       <p:ext uri="{BB962C8B-B14F-4D97-AF65-F5344CB8AC3E}">
@@ -9337,6 +9804,65 @@
           </a:prstGeom>
         </p:spPr>
       </p:pic>
+      <p:sp>
+        <p:nvSpPr>
+          <p:cNvPr id="7" name="TextBox 6">
+            <a:extLst>
+              <a:ext uri="{FF2B5EF4-FFF2-40B4-BE49-F238E27FC236}">
+                <a16:creationId xmlns:a16="http://schemas.microsoft.com/office/drawing/2014/main" id="{57779279-C66D-40D4-79FF-30D08A677267}"/>
+              </a:ext>
+            </a:extLst>
+          </p:cNvPr>
+          <p:cNvSpPr txBox="1"/>
+          <p:nvPr/>
+        </p:nvSpPr>
+        <p:spPr>
+          <a:xfrm>
+            <a:off x="2121028" y="8212566"/>
+            <a:ext cx="8612575" cy="954107"/>
+          </a:xfrm>
+          <a:prstGeom prst="rect">
+            <a:avLst/>
+          </a:prstGeom>
+          <a:solidFill>
+            <a:srgbClr val="FFC000"/>
+          </a:solidFill>
+        </p:spPr>
+        <p:txBody>
+          <a:bodyPr wrap="square" rtlCol="0">
+            <a:spAutoFit/>
+          </a:bodyPr>
+          <a:lstStyle/>
+          <a:p>
+            <a:r>
+              <a:rPr lang="en-US" sz="2800" b="1" dirty="0">
+                <a:solidFill>
+                  <a:srgbClr val="002060"/>
+                </a:solidFill>
+                <a:latin typeface="Bahnschrift" panose="020B0502040204020203" pitchFamily="34" charset="0"/>
+              </a:rPr>
+              <a:t>HIGHEST ORDERS ARE RECORDED IN 2013-10-22 &amp; </a:t>
+            </a:r>
+          </a:p>
+          <a:p>
+            <a:r>
+              <a:rPr lang="en-US" sz="2800" b="1" dirty="0">
+                <a:solidFill>
+                  <a:srgbClr val="002060"/>
+                </a:solidFill>
+                <a:latin typeface="Bahnschrift" panose="020B0502040204020203" pitchFamily="34" charset="0"/>
+              </a:rPr>
+              <a:t>2028-05-24</a:t>
+            </a:r>
+            <a:endParaRPr lang="en-IN" sz="2800" b="1" dirty="0">
+              <a:solidFill>
+                <a:srgbClr val="002060"/>
+              </a:solidFill>
+              <a:latin typeface="Bahnschrift" panose="020B0502040204020203" pitchFamily="34" charset="0"/>
+            </a:endParaRPr>
+          </a:p>
+        </p:txBody>
+      </p:sp>
     </p:spTree>
     <p:extLst>
       <p:ext uri="{BB962C8B-B14F-4D97-AF65-F5344CB8AC3E}">
@@ -9729,6 +10255,54 @@
           </a:prstGeom>
         </p:spPr>
       </p:pic>
+      <p:sp>
+        <p:nvSpPr>
+          <p:cNvPr id="7" name="TextBox 6">
+            <a:extLst>
+              <a:ext uri="{FF2B5EF4-FFF2-40B4-BE49-F238E27FC236}">
+                <a16:creationId xmlns:a16="http://schemas.microsoft.com/office/drawing/2014/main" id="{930F9E4A-B1AF-DE4B-39B7-96BF5BBC9272}"/>
+              </a:ext>
+            </a:extLst>
+          </p:cNvPr>
+          <p:cNvSpPr txBox="1"/>
+          <p:nvPr/>
+        </p:nvSpPr>
+        <p:spPr>
+          <a:xfrm>
+            <a:off x="1899557" y="7562850"/>
+            <a:ext cx="7244443" cy="954107"/>
+          </a:xfrm>
+          <a:prstGeom prst="rect">
+            <a:avLst/>
+          </a:prstGeom>
+          <a:solidFill>
+            <a:srgbClr val="FFC000"/>
+          </a:solidFill>
+        </p:spPr>
+        <p:txBody>
+          <a:bodyPr wrap="square" rtlCol="0">
+            <a:spAutoFit/>
+          </a:bodyPr>
+          <a:lstStyle/>
+          <a:p>
+            <a:r>
+              <a:rPr lang="en-US" sz="2800" b="1" dirty="0">
+                <a:solidFill>
+                  <a:srgbClr val="002060"/>
+                </a:solidFill>
+                <a:latin typeface="Bahnschrift" panose="020B0502040204020203" pitchFamily="34" charset="0"/>
+              </a:rPr>
+              <a:t>HIGHEST ORDERS ARE RECORDED IN YEAR 2007 </a:t>
+            </a:r>
+            <a:endParaRPr lang="en-IN" sz="2800" b="1" dirty="0">
+              <a:solidFill>
+                <a:srgbClr val="002060"/>
+              </a:solidFill>
+              <a:latin typeface="Bahnschrift" panose="020B0502040204020203" pitchFamily="34" charset="0"/>
+            </a:endParaRPr>
+          </a:p>
+        </p:txBody>
+      </p:sp>
     </p:spTree>
     <p:extLst>
       <p:ext uri="{BB962C8B-B14F-4D97-AF65-F5344CB8AC3E}">
@@ -10121,6 +10695,54 @@
           </a:prstGeom>
         </p:spPr>
       </p:pic>
+      <p:sp>
+        <p:nvSpPr>
+          <p:cNvPr id="7" name="TextBox 6">
+            <a:extLst>
+              <a:ext uri="{FF2B5EF4-FFF2-40B4-BE49-F238E27FC236}">
+                <a16:creationId xmlns:a16="http://schemas.microsoft.com/office/drawing/2014/main" id="{96623125-CB5B-8393-F7BF-5936FE20697C}"/>
+              </a:ext>
+            </a:extLst>
+          </p:cNvPr>
+          <p:cNvSpPr txBox="1"/>
+          <p:nvPr/>
+        </p:nvSpPr>
+        <p:spPr>
+          <a:xfrm>
+            <a:off x="4837713" y="7562850"/>
+            <a:ext cx="7659088" cy="523220"/>
+          </a:xfrm>
+          <a:prstGeom prst="rect">
+            <a:avLst/>
+          </a:prstGeom>
+          <a:solidFill>
+            <a:srgbClr val="FFC000"/>
+          </a:solidFill>
+        </p:spPr>
+        <p:txBody>
+          <a:bodyPr wrap="square" rtlCol="0">
+            <a:spAutoFit/>
+          </a:bodyPr>
+          <a:lstStyle/>
+          <a:p>
+            <a:r>
+              <a:rPr lang="en-US" sz="2800" b="1" dirty="0">
+                <a:solidFill>
+                  <a:srgbClr val="002060"/>
+                </a:solidFill>
+                <a:latin typeface="Bahnschrift" panose="020B0502040204020203" pitchFamily="34" charset="0"/>
+              </a:rPr>
+              <a:t>HIGHEST REVENUE GENERATED IN YEAR 2007</a:t>
+            </a:r>
+            <a:endParaRPr lang="en-IN" sz="2800" b="1" dirty="0">
+              <a:solidFill>
+                <a:srgbClr val="002060"/>
+              </a:solidFill>
+              <a:latin typeface="Bahnschrift" panose="020B0502040204020203" pitchFamily="34" charset="0"/>
+            </a:endParaRPr>
+          </a:p>
+        </p:txBody>
+      </p:sp>
     </p:spTree>
     <p:extLst>
       <p:ext uri="{BB962C8B-B14F-4D97-AF65-F5344CB8AC3E}">
@@ -11152,6 +11774,18 @@
               </a:lnSpc>
             </a:pPr>
             <a:r>
+              <a:rPr lang="en-US" sz="8000" b="1" dirty="0" err="1">
+                <a:solidFill>
+                  <a:srgbClr val="002B58"/>
+                </a:solidFill>
+                <a:latin typeface="Perpetua" panose="02020502060401020303" pitchFamily="18" charset="0"/>
+                <a:ea typeface="Readex Pro Semi-Bold"/>
+                <a:cs typeface="Readex Pro Semi-Bold"/>
+                <a:sym typeface="Readex Pro Semi-Bold"/>
+              </a:rPr>
+              <a:t>Dense_Rank</a:t>
+            </a:r>
+            <a:r>
               <a:rPr lang="en-US" sz="8000" b="1" dirty="0">
                 <a:solidFill>
                   <a:srgbClr val="002B58"/>
@@ -11161,7 +11795,7 @@
                 <a:cs typeface="Readex Pro Semi-Bold"/>
                 <a:sym typeface="Readex Pro Semi-Bold"/>
               </a:rPr>
-              <a:t>Dense Rank Customers by Revenue</a:t>
+              <a:t> Customers by Revenue</a:t>
             </a:r>
             <a:endParaRPr lang="en-US" sz="6600" b="1" dirty="0">
               <a:solidFill>
@@ -11526,7 +12160,7 @@
         <p:spPr>
           <a:xfrm>
             <a:off x="3209718" y="780071"/>
-            <a:ext cx="13658302" cy="1475404"/>
+            <a:ext cx="13658302" cy="3157916"/>
           </a:xfrm>
           <a:prstGeom prst="rect">
             <a:avLst/>
@@ -11556,8 +12190,12 @@
           </a:lstStyle>
           <a:p>
             <a:r>
+              <a:rPr lang="en-US" dirty="0" err="1"/>
+              <a:t>Row_Number</a:t>
+            </a:r>
+            <a:r>
               <a:rPr lang="en-US" dirty="0"/>
-              <a:t>Row Number for Products by Sales</a:t>
+              <a:t> for Products by Sales</a:t>
             </a:r>
             <a:endParaRPr lang="en-US" dirty="0">
               <a:sym typeface="Readex Pro Semi-Bold"/>
@@ -11748,7 +12386,7 @@
         </p:nvSpPr>
         <p:spPr>
           <a:xfrm flipV="1">
-            <a:off x="-9908" y="0"/>
+            <a:off x="-9908" y="-38100"/>
             <a:ext cx="5448300" cy="5448300"/>
           </a:xfrm>
           <a:custGeom>
@@ -11806,7 +12444,7 @@
         </p:nvSpPr>
         <p:spPr>
           <a:xfrm flipH="1">
-            <a:off x="12849610" y="4838700"/>
+            <a:off x="12877800" y="4876800"/>
             <a:ext cx="5448300" cy="5448300"/>
           </a:xfrm>
           <a:custGeom>
@@ -11980,15 +12618,15 @@
         </p:nvSpPr>
         <p:spPr>
           <a:xfrm>
-            <a:off x="2470972" y="3812072"/>
-            <a:ext cx="13346055" cy="2872407"/>
+            <a:off x="2506883" y="4000500"/>
+            <a:ext cx="13302427" cy="1560042"/>
           </a:xfrm>
           <a:prstGeom prst="rect">
             <a:avLst/>
           </a:prstGeom>
         </p:spPr>
         <p:txBody>
-          <a:bodyPr lIns="0" tIns="0" rIns="0" bIns="0" rtlCol="0" anchor="t">
+          <a:bodyPr wrap="square" lIns="0" tIns="0" rIns="0" bIns="0" rtlCol="0" anchor="t">
             <a:spAutoFit/>
           </a:bodyPr>
           <a:lstStyle/>
@@ -11999,7 +12637,7 @@
               </a:lnSpc>
             </a:pPr>
             <a:r>
-              <a:rPr lang="en-US" sz="11086" b="1">
+              <a:rPr lang="en-US" sz="16000" b="1" dirty="0">
                 <a:solidFill>
                   <a:srgbClr val="002B58"/>
                 </a:solidFill>
@@ -12008,26 +12646,7 @@
                 <a:cs typeface="Readex Pro Semi-Bold"/>
                 <a:sym typeface="Readex Pro Semi-Bold"/>
               </a:rPr>
-              <a:t>THANK</a:t>
-            </a:r>
-          </a:p>
-          <a:p>
-            <a:pPr algn="ctr">
-              <a:lnSpc>
-                <a:spcPts val="11086"/>
-              </a:lnSpc>
-            </a:pPr>
-            <a:r>
-              <a:rPr lang="en-US" sz="11086" b="1">
-                <a:solidFill>
-                  <a:srgbClr val="002B58"/>
-                </a:solidFill>
-                <a:latin typeface="Readex Pro Semi-Bold"/>
-                <a:ea typeface="Readex Pro Semi-Bold"/>
-                <a:cs typeface="Readex Pro Semi-Bold"/>
-                <a:sym typeface="Readex Pro Semi-Bold"/>
-              </a:rPr>
-              <a:t>YOU</a:t>
+              <a:t>THANK YOU</a:t>
             </a:r>
           </a:p>
         </p:txBody>
@@ -14475,7 +15094,7 @@
         <p:spPr>
           <a:xfrm>
             <a:off x="3962400" y="491073"/>
-            <a:ext cx="12616460" cy="3198696"/>
+            <a:ext cx="12616460" cy="3057888"/>
           </a:xfrm>
           <a:prstGeom prst="rect">
             <a:avLst/>
@@ -14512,7 +15131,7 @@
               </a:lnSpc>
             </a:pPr>
             <a:r>
-              <a:rPr lang="en-US" sz="6600" b="1" dirty="0">
+              <a:rPr lang="en-US" sz="5400" b="1" dirty="0">
                 <a:solidFill>
                   <a:srgbClr val="002B58"/>
                 </a:solidFill>
@@ -14548,7 +15167,7 @@
         </p:blipFill>
         <p:spPr>
           <a:xfrm>
-            <a:off x="12163512" y="4180842"/>
+            <a:off x="12165180" y="3849413"/>
             <a:ext cx="5167681" cy="1927942"/>
           </a:xfrm>
           <a:prstGeom prst="rect">
@@ -14578,7 +15197,7 @@
         </p:blipFill>
         <p:spPr>
           <a:xfrm>
-            <a:off x="1791912" y="4180842"/>
+            <a:off x="1791912" y="3854856"/>
             <a:ext cx="10028551" cy="4507856"/>
           </a:xfrm>
           <a:prstGeom prst="rect">
@@ -14586,6 +15205,54 @@
           </a:prstGeom>
         </p:spPr>
       </p:pic>
+      <p:sp>
+        <p:nvSpPr>
+          <p:cNvPr id="6" name="TextBox 5">
+            <a:extLst>
+              <a:ext uri="{FF2B5EF4-FFF2-40B4-BE49-F238E27FC236}">
+                <a16:creationId xmlns:a16="http://schemas.microsoft.com/office/drawing/2014/main" id="{249A5A48-1AC8-7047-639F-7DF6F2C61D57}"/>
+              </a:ext>
+            </a:extLst>
+          </p:cNvPr>
+          <p:cNvSpPr txBox="1"/>
+          <p:nvPr/>
+        </p:nvSpPr>
+        <p:spPr>
+          <a:xfrm>
+            <a:off x="5257800" y="8828779"/>
+            <a:ext cx="8612575" cy="523220"/>
+          </a:xfrm>
+          <a:prstGeom prst="rect">
+            <a:avLst/>
+          </a:prstGeom>
+          <a:solidFill>
+            <a:srgbClr val="FFC000"/>
+          </a:solidFill>
+        </p:spPr>
+        <p:txBody>
+          <a:bodyPr wrap="square" rtlCol="0">
+            <a:spAutoFit/>
+          </a:bodyPr>
+          <a:lstStyle/>
+          <a:p>
+            <a:r>
+              <a:rPr lang="en-US" sz="2800" b="1" dirty="0">
+                <a:solidFill>
+                  <a:srgbClr val="002060"/>
+                </a:solidFill>
+                <a:latin typeface="Bahnschrift" panose="020B0502040204020203" pitchFamily="34" charset="0"/>
+              </a:rPr>
+              <a:t>MOST CUSTOMERS ARE FROM AGE GROUP (36-45)</a:t>
+            </a:r>
+            <a:endParaRPr lang="en-IN" sz="2800" b="1" dirty="0">
+              <a:solidFill>
+                <a:srgbClr val="002060"/>
+              </a:solidFill>
+              <a:latin typeface="Bahnschrift" panose="020B0502040204020203" pitchFamily="34" charset="0"/>
+            </a:endParaRPr>
+          </a:p>
+        </p:txBody>
+      </p:sp>
     </p:spTree>
     <p:extLst>
       <p:ext uri="{BB962C8B-B14F-4D97-AF65-F5344CB8AC3E}">

--- a/flipkart_ppt.pptx
+++ b/flipkart_ppt.pptx
@@ -7,72 +7,85 @@
   <p:sldIdLst>
     <p:sldId id="256" r:id="rId2"/>
     <p:sldId id="257" r:id="rId3"/>
-    <p:sldId id="258" r:id="rId4"/>
-    <p:sldId id="261" r:id="rId5"/>
-    <p:sldId id="262" r:id="rId6"/>
-    <p:sldId id="263" r:id="rId7"/>
-    <p:sldId id="264" r:id="rId8"/>
-    <p:sldId id="265" r:id="rId9"/>
-    <p:sldId id="269" r:id="rId10"/>
-    <p:sldId id="268" r:id="rId11"/>
-    <p:sldId id="270" r:id="rId12"/>
-    <p:sldId id="266" r:id="rId13"/>
-    <p:sldId id="271" r:id="rId14"/>
-    <p:sldId id="272" r:id="rId15"/>
-    <p:sldId id="273" r:id="rId16"/>
-    <p:sldId id="274" r:id="rId17"/>
-    <p:sldId id="275" r:id="rId18"/>
-    <p:sldId id="267" r:id="rId19"/>
-    <p:sldId id="278" r:id="rId20"/>
-    <p:sldId id="276" r:id="rId21"/>
-    <p:sldId id="277" r:id="rId22"/>
-    <p:sldId id="279" r:id="rId23"/>
-    <p:sldId id="260" r:id="rId24"/>
-    <p:sldId id="280" r:id="rId25"/>
-    <p:sldId id="281" r:id="rId26"/>
-    <p:sldId id="282" r:id="rId27"/>
-    <p:sldId id="259" r:id="rId28"/>
+    <p:sldId id="283" r:id="rId4"/>
+    <p:sldId id="258" r:id="rId5"/>
+    <p:sldId id="261" r:id="rId6"/>
+    <p:sldId id="262" r:id="rId7"/>
+    <p:sldId id="263" r:id="rId8"/>
+    <p:sldId id="264" r:id="rId9"/>
+    <p:sldId id="265" r:id="rId10"/>
+    <p:sldId id="269" r:id="rId11"/>
+    <p:sldId id="268" r:id="rId12"/>
+    <p:sldId id="270" r:id="rId13"/>
+    <p:sldId id="266" r:id="rId14"/>
+    <p:sldId id="271" r:id="rId15"/>
+    <p:sldId id="286" r:id="rId16"/>
+    <p:sldId id="272" r:id="rId17"/>
+    <p:sldId id="273" r:id="rId18"/>
+    <p:sldId id="274" r:id="rId19"/>
+    <p:sldId id="275" r:id="rId20"/>
+    <p:sldId id="267" r:id="rId21"/>
+    <p:sldId id="278" r:id="rId22"/>
+    <p:sldId id="277" r:id="rId23"/>
+    <p:sldId id="279" r:id="rId24"/>
+    <p:sldId id="260" r:id="rId25"/>
+    <p:sldId id="280" r:id="rId26"/>
+    <p:sldId id="281" r:id="rId27"/>
+    <p:sldId id="282" r:id="rId28"/>
+    <p:sldId id="285" r:id="rId29"/>
+    <p:sldId id="284" r:id="rId30"/>
+    <p:sldId id="259" r:id="rId31"/>
   </p:sldIdLst>
   <p:sldSz cx="18288000" cy="10287000"/>
   <p:notesSz cx="6858000" cy="9144000"/>
   <p:embeddedFontLst>
     <p:embeddedFont>
       <p:font typeface="Arial Rounded MT Bold" panose="020F0704030504030204" pitchFamily="34" charset="0"/>
-      <p:regular r:id="rId29"/>
+      <p:regular r:id="rId32"/>
     </p:embeddedFont>
     <p:embeddedFont>
       <p:font typeface="Bahnschrift" panose="020B0502040204020203" pitchFamily="34" charset="0"/>
-      <p:regular r:id="rId30"/>
-      <p:bold r:id="rId31"/>
+      <p:regular r:id="rId33"/>
+      <p:bold r:id="rId34"/>
+    </p:embeddedFont>
+    <p:embeddedFont>
+      <p:font typeface="Bell MT" panose="02020503060305020303" pitchFamily="18" charset="0"/>
+      <p:regular r:id="rId35"/>
+      <p:bold r:id="rId36"/>
+      <p:italic r:id="rId37"/>
     </p:embeddedFont>
     <p:embeddedFont>
       <p:font typeface="Cascadia Code" panose="020B0609020000020004" pitchFamily="49" charset="0"/>
-      <p:regular r:id="rId32"/>
-      <p:bold r:id="rId33"/>
-      <p:italic r:id="rId34"/>
-      <p:boldItalic r:id="rId35"/>
+      <p:regular r:id="rId38"/>
+      <p:bold r:id="rId39"/>
+      <p:italic r:id="rId40"/>
+      <p:boldItalic r:id="rId41"/>
     </p:embeddedFont>
     <p:embeddedFont>
-      <p:font typeface="DM Sans" pitchFamily="2" charset="0"/>
-      <p:regular r:id="rId36"/>
-      <p:bold r:id="rId37"/>
-      <p:italic r:id="rId38"/>
-      <p:boldItalic r:id="rId39"/>
+      <p:font typeface="Cooper Black" panose="0208090404030B020404" pitchFamily="18" charset="0"/>
+      <p:regular r:id="rId42"/>
     </p:embeddedFont>
     <p:embeddedFont>
       <p:font typeface="Perpetua" panose="02020502060401020303" pitchFamily="18" charset="0"/>
-      <p:regular r:id="rId40"/>
-      <p:bold r:id="rId41"/>
-      <p:italic r:id="rId42"/>
-      <p:boldItalic r:id="rId43"/>
+      <p:regular r:id="rId43"/>
+      <p:bold r:id="rId44"/>
+      <p:italic r:id="rId45"/>
+      <p:boldItalic r:id="rId46"/>
     </p:embeddedFont>
     <p:embeddedFont>
       <p:font typeface="Readex Pro Semi-Bold" panose="020B0604020202020204" charset="-78"/>
-      <p:regular r:id="rId44"/>
+      <p:regular r:id="rId47"/>
+    </p:embeddedFont>
+    <p:embeddedFont>
+      <p:font typeface="Rockwell" panose="02060603020205020403" pitchFamily="18" charset="0"/>
+      <p:regular r:id="rId48"/>
+      <p:bold r:id="rId49"/>
+      <p:italic r:id="rId50"/>
+      <p:boldItalic r:id="rId51"/>
     </p:embeddedFont>
     <p:embeddedFont>
       <p:font typeface="Rockwell Extra Bold" panose="02060903040505020403" pitchFamily="18" charset="0"/>
-      <p:bold r:id="rId45"/>
+      <p:bold r:id="rId52"/>
     </p:embeddedFont>
   </p:embeddedFontLst>
   <p:defaultTextStyle>
@@ -192,7 +205,7 @@
 <file path=ppt/revisionInfo.xml><?xml version="1.0" encoding="utf-8"?>
 <p1510:revInfo xmlns:a="http://schemas.openxmlformats.org/drawingml/2006/main" xmlns:r="http://schemas.openxmlformats.org/officeDocument/2006/relationships" xmlns:p1510="http://schemas.microsoft.com/office/powerpoint/2015/10/main">
   <p1510:revLst>
-    <p1510:client id="{232E99E9-1302-4CCA-BA72-E666FA57B805}" v="30" dt="2026-04-02T16:03:09.298"/>
+    <p1510:client id="{232E99E9-1302-4CCA-BA72-E666FA57B805}" v="67" dt="2026-04-03T16:34:29.386"/>
   </p1510:revLst>
 </p1510:revInfo>
 </file>
@@ -202,18 +215,18 @@
   <pc:docChgLst>
     <pc:chgData name="Krupa Dalal" userId="d4791ec40d55e7ee" providerId="LiveId" clId="{E1ED0E34-1AFB-42A3-A161-79F7C18B936E}"/>
     <pc:docChg chg="undo custSel addSld delSld modSld sldOrd">
-      <pc:chgData name="Krupa Dalal" userId="d4791ec40d55e7ee" providerId="LiveId" clId="{E1ED0E34-1AFB-42A3-A161-79F7C18B936E}" dt="2026-04-02T16:04:58.970" v="2651" actId="1076"/>
+      <pc:chgData name="Krupa Dalal" userId="d4791ec40d55e7ee" providerId="LiveId" clId="{E1ED0E34-1AFB-42A3-A161-79F7C18B936E}" dt="2026-04-03T16:37:26.795" v="3495" actId="1076"/>
       <pc:docMkLst>
         <pc:docMk/>
       </pc:docMkLst>
       <pc:sldChg chg="addSp modSp mod">
-        <pc:chgData name="Krupa Dalal" userId="d4791ec40d55e7ee" providerId="LiveId" clId="{E1ED0E34-1AFB-42A3-A161-79F7C18B936E}" dt="2026-03-28T12:00:40.897" v="1415" actId="14100"/>
+        <pc:chgData name="Krupa Dalal" userId="d4791ec40d55e7ee" providerId="LiveId" clId="{E1ED0E34-1AFB-42A3-A161-79F7C18B936E}" dt="2026-04-03T16:25:31.525" v="3312" actId="207"/>
         <pc:sldMkLst>
           <pc:docMk/>
           <pc:sldMk cId="0" sldId="256"/>
         </pc:sldMkLst>
         <pc:spChg chg="mod">
-          <ac:chgData name="Krupa Dalal" userId="d4791ec40d55e7ee" providerId="LiveId" clId="{E1ED0E34-1AFB-42A3-A161-79F7C18B936E}" dt="2026-03-28T06:09:02.169" v="2" actId="14100"/>
+          <ac:chgData name="Krupa Dalal" userId="d4791ec40d55e7ee" providerId="LiveId" clId="{E1ED0E34-1AFB-42A3-A161-79F7C18B936E}" dt="2026-04-03T11:40:35.203" v="2778" actId="1037"/>
           <ac:spMkLst>
             <pc:docMk/>
             <pc:sldMk cId="0" sldId="256"/>
@@ -221,7 +234,7 @@
           </ac:spMkLst>
         </pc:spChg>
         <pc:spChg chg="mod">
-          <ac:chgData name="Krupa Dalal" userId="d4791ec40d55e7ee" providerId="LiveId" clId="{E1ED0E34-1AFB-42A3-A161-79F7C18B936E}" dt="2026-03-28T06:08:55.307" v="1" actId="1076"/>
+          <ac:chgData name="Krupa Dalal" userId="d4791ec40d55e7ee" providerId="LiveId" clId="{E1ED0E34-1AFB-42A3-A161-79F7C18B936E}" dt="2026-04-03T11:40:37.289" v="2779" actId="1038"/>
           <ac:spMkLst>
             <pc:docMk/>
             <pc:sldMk cId="0" sldId="256"/>
@@ -229,7 +242,7 @@
           </ac:spMkLst>
         </pc:spChg>
         <pc:spChg chg="mod">
-          <ac:chgData name="Krupa Dalal" userId="d4791ec40d55e7ee" providerId="LiveId" clId="{E1ED0E34-1AFB-42A3-A161-79F7C18B936E}" dt="2026-03-28T06:10:38.692" v="105" actId="1076"/>
+          <ac:chgData name="Krupa Dalal" userId="d4791ec40d55e7ee" providerId="LiveId" clId="{E1ED0E34-1AFB-42A3-A161-79F7C18B936E}" dt="2026-04-03T16:25:31.525" v="3312" actId="207"/>
           <ac:spMkLst>
             <pc:docMk/>
             <pc:sldMk cId="0" sldId="256"/>
@@ -237,7 +250,7 @@
           </ac:spMkLst>
         </pc:spChg>
         <pc:spChg chg="mod">
-          <ac:chgData name="Krupa Dalal" userId="d4791ec40d55e7ee" providerId="LiveId" clId="{E1ED0E34-1AFB-42A3-A161-79F7C18B936E}" dt="2026-03-28T06:09:30.598" v="43" actId="1076"/>
+          <ac:chgData name="Krupa Dalal" userId="d4791ec40d55e7ee" providerId="LiveId" clId="{E1ED0E34-1AFB-42A3-A161-79F7C18B936E}" dt="2026-04-03T11:29:05.393" v="2768" actId="6559"/>
           <ac:spMkLst>
             <pc:docMk/>
             <pc:sldMk cId="0" sldId="256"/>
@@ -261,8 +274,8 @@
           </ac:picMkLst>
         </pc:picChg>
       </pc:sldChg>
-      <pc:sldChg chg="addSp delSp modSp mod">
-        <pc:chgData name="Krupa Dalal" userId="d4791ec40d55e7ee" providerId="LiveId" clId="{E1ED0E34-1AFB-42A3-A161-79F7C18B936E}" dt="2026-03-28T12:29:45.549" v="1527" actId="14100"/>
+      <pc:sldChg chg="addSp delSp modSp mod ord">
+        <pc:chgData name="Krupa Dalal" userId="d4791ec40d55e7ee" providerId="LiveId" clId="{E1ED0E34-1AFB-42A3-A161-79F7C18B936E}" dt="2026-04-03T16:26:03.372" v="3314"/>
         <pc:sldMkLst>
           <pc:docMk/>
           <pc:sldMk cId="0" sldId="257"/>
@@ -284,7 +297,7 @@
           </ac:spMkLst>
         </pc:spChg>
         <pc:spChg chg="mod">
-          <ac:chgData name="Krupa Dalal" userId="d4791ec40d55e7ee" providerId="LiveId" clId="{E1ED0E34-1AFB-42A3-A161-79F7C18B936E}" dt="2026-03-28T06:11:28.146" v="135" actId="14100"/>
+          <ac:chgData name="Krupa Dalal" userId="d4791ec40d55e7ee" providerId="LiveId" clId="{E1ED0E34-1AFB-42A3-A161-79F7C18B936E}" dt="2026-04-03T11:23:55.443" v="2751" actId="115"/>
           <ac:spMkLst>
             <pc:docMk/>
             <pc:sldMk cId="0" sldId="257"/>
@@ -292,23 +305,31 @@
           </ac:spMkLst>
         </pc:spChg>
         <pc:spChg chg="add mod">
-          <ac:chgData name="Krupa Dalal" userId="d4791ec40d55e7ee" providerId="LiveId" clId="{E1ED0E34-1AFB-42A3-A161-79F7C18B936E}" dt="2026-03-28T12:29:41.090" v="1526" actId="14100"/>
+          <ac:chgData name="Krupa Dalal" userId="d4791ec40d55e7ee" providerId="LiveId" clId="{E1ED0E34-1AFB-42A3-A161-79F7C18B936E}" dt="2026-04-03T11:24:00.061" v="2752" actId="1076"/>
+          <ac:spMkLst>
+            <pc:docMk/>
+            <pc:sldMk cId="0" sldId="257"/>
+            <ac:spMk id="8" creationId="{687F32F9-311C-0431-94E5-7F25DC085114}"/>
+          </ac:spMkLst>
+        </pc:spChg>
+        <pc:spChg chg="add del mod">
+          <ac:chgData name="Krupa Dalal" userId="d4791ec40d55e7ee" providerId="LiveId" clId="{E1ED0E34-1AFB-42A3-A161-79F7C18B936E}" dt="2026-04-03T11:16:07.645" v="2654" actId="478"/>
           <ac:spMkLst>
             <pc:docMk/>
             <pc:sldMk cId="0" sldId="257"/>
             <ac:spMk id="9" creationId="{02B646FF-7E78-4B36-D81F-B93AAC79B64E}"/>
           </ac:spMkLst>
         </pc:spChg>
-        <pc:spChg chg="add mod">
-          <ac:chgData name="Krupa Dalal" userId="d4791ec40d55e7ee" providerId="LiveId" clId="{E1ED0E34-1AFB-42A3-A161-79F7C18B936E}" dt="2026-03-28T12:29:45.549" v="1527" actId="14100"/>
+        <pc:spChg chg="add del mod">
+          <ac:chgData name="Krupa Dalal" userId="d4791ec40d55e7ee" providerId="LiveId" clId="{E1ED0E34-1AFB-42A3-A161-79F7C18B936E}" dt="2026-04-03T11:16:10.290" v="2655" actId="478"/>
           <ac:spMkLst>
             <pc:docMk/>
             <pc:sldMk cId="0" sldId="257"/>
             <ac:spMk id="10" creationId="{C3A7A127-7412-4EA9-9021-FFE52621C854}"/>
           </ac:spMkLst>
         </pc:spChg>
-        <pc:picChg chg="add mod">
-          <ac:chgData name="Krupa Dalal" userId="d4791ec40d55e7ee" providerId="LiveId" clId="{E1ED0E34-1AFB-42A3-A161-79F7C18B936E}" dt="2026-03-28T12:28:42.910" v="1517" actId="14100"/>
+        <pc:picChg chg="add del mod">
+          <ac:chgData name="Krupa Dalal" userId="d4791ec40d55e7ee" providerId="LiveId" clId="{E1ED0E34-1AFB-42A3-A161-79F7C18B936E}" dt="2026-04-03T11:16:05.298" v="2653" actId="478"/>
           <ac:picMkLst>
             <pc:docMk/>
             <pc:sldMk cId="0" sldId="257"/>
@@ -371,14 +392,14 @@
           </ac:picMkLst>
         </pc:picChg>
       </pc:sldChg>
-      <pc:sldChg chg="modSp add mod">
-        <pc:chgData name="Krupa Dalal" userId="d4791ec40d55e7ee" providerId="LiveId" clId="{E1ED0E34-1AFB-42A3-A161-79F7C18B936E}" dt="2026-04-02T16:04:58.970" v="2651" actId="1076"/>
+      <pc:sldChg chg="addSp delSp modSp add mod">
+        <pc:chgData name="Krupa Dalal" userId="d4791ec40d55e7ee" providerId="LiveId" clId="{E1ED0E34-1AFB-42A3-A161-79F7C18B936E}" dt="2026-04-03T16:25:00.354" v="3308" actId="1076"/>
         <pc:sldMkLst>
           <pc:docMk/>
           <pc:sldMk cId="3517545023" sldId="259"/>
         </pc:sldMkLst>
         <pc:spChg chg="mod">
-          <ac:chgData name="Krupa Dalal" userId="d4791ec40d55e7ee" providerId="LiveId" clId="{E1ED0E34-1AFB-42A3-A161-79F7C18B936E}" dt="2026-04-01T07:37:55.463" v="1991" actId="1035"/>
+          <ac:chgData name="Krupa Dalal" userId="d4791ec40d55e7ee" providerId="LiveId" clId="{E1ED0E34-1AFB-42A3-A161-79F7C18B936E}" dt="2026-04-03T11:41:20.576" v="2782" actId="1076"/>
           <ac:spMkLst>
             <pc:docMk/>
             <pc:sldMk cId="3517545023" sldId="259"/>
@@ -386,7 +407,7 @@
           </ac:spMkLst>
         </pc:spChg>
         <pc:spChg chg="mod">
-          <ac:chgData name="Krupa Dalal" userId="d4791ec40d55e7ee" providerId="LiveId" clId="{E1ED0E34-1AFB-42A3-A161-79F7C18B936E}" dt="2026-04-01T07:37:51.501" v="1990" actId="1037"/>
+          <ac:chgData name="Krupa Dalal" userId="d4791ec40d55e7ee" providerId="LiveId" clId="{E1ED0E34-1AFB-42A3-A161-79F7C18B936E}" dt="2026-04-03T11:41:53.445" v="2797" actId="1038"/>
           <ac:spMkLst>
             <pc:docMk/>
             <pc:sldMk cId="3517545023" sldId="259"/>
@@ -394,16 +415,48 @@
           </ac:spMkLst>
         </pc:spChg>
         <pc:spChg chg="mod">
-          <ac:chgData name="Krupa Dalal" userId="d4791ec40d55e7ee" providerId="LiveId" clId="{E1ED0E34-1AFB-42A3-A161-79F7C18B936E}" dt="2026-04-02T16:04:58.970" v="2651" actId="1076"/>
+          <ac:chgData name="Krupa Dalal" userId="d4791ec40d55e7ee" providerId="LiveId" clId="{E1ED0E34-1AFB-42A3-A161-79F7C18B936E}" dt="2026-04-03T11:41:25.841" v="2783" actId="1076"/>
+          <ac:spMkLst>
+            <pc:docMk/>
+            <pc:sldMk cId="3517545023" sldId="259"/>
+            <ac:spMk id="4" creationId="{AE972080-1AFC-6E3F-8760-E3F75CC7A429}"/>
+          </ac:spMkLst>
+        </pc:spChg>
+        <pc:spChg chg="mod">
+          <ac:chgData name="Krupa Dalal" userId="d4791ec40d55e7ee" providerId="LiveId" clId="{E1ED0E34-1AFB-42A3-A161-79F7C18B936E}" dt="2026-04-03T11:42:03.692" v="2799" actId="1076"/>
+          <ac:spMkLst>
+            <pc:docMk/>
+            <pc:sldMk cId="3517545023" sldId="259"/>
+            <ac:spMk id="5" creationId="{1786D99A-107B-BD8E-ED63-4C6A062853F7}"/>
+          </ac:spMkLst>
+        </pc:spChg>
+        <pc:spChg chg="mod">
+          <ac:chgData name="Krupa Dalal" userId="d4791ec40d55e7ee" providerId="LiveId" clId="{E1ED0E34-1AFB-42A3-A161-79F7C18B936E}" dt="2026-04-03T16:25:00.354" v="3308" actId="1076"/>
           <ac:spMkLst>
             <pc:docMk/>
             <pc:sldMk cId="3517545023" sldId="259"/>
             <ac:spMk id="6" creationId="{1476A154-1360-7628-6D0F-A70DC7B591CE}"/>
           </ac:spMkLst>
         </pc:spChg>
+        <pc:spChg chg="add mod">
+          <ac:chgData name="Krupa Dalal" userId="d4791ec40d55e7ee" providerId="LiveId" clId="{E1ED0E34-1AFB-42A3-A161-79F7C18B936E}" dt="2026-04-03T11:30:45.933" v="2770" actId="14100"/>
+          <ac:spMkLst>
+            <pc:docMk/>
+            <pc:sldMk cId="3517545023" sldId="259"/>
+            <ac:spMk id="7" creationId="{F8C1EF47-14B3-EBBD-A239-166E707DC2AA}"/>
+          </ac:spMkLst>
+        </pc:spChg>
+        <pc:spChg chg="add del mod">
+          <ac:chgData name="Krupa Dalal" userId="d4791ec40d55e7ee" providerId="LiveId" clId="{E1ED0E34-1AFB-42A3-A161-79F7C18B936E}" dt="2026-04-03T11:30:59.576" v="2774" actId="478"/>
+          <ac:spMkLst>
+            <pc:docMk/>
+            <pc:sldMk cId="3517545023" sldId="259"/>
+            <ac:spMk id="8" creationId="{E4DB2CD7-DFA7-B1B3-876A-DF96BD736788}"/>
+          </ac:spMkLst>
+        </pc:spChg>
       </pc:sldChg>
       <pc:sldChg chg="addSp delSp modSp add mod">
-        <pc:chgData name="Krupa Dalal" userId="d4791ec40d55e7ee" providerId="LiveId" clId="{E1ED0E34-1AFB-42A3-A161-79F7C18B936E}" dt="2026-03-30T15:58:16.591" v="1987" actId="1076"/>
+        <pc:chgData name="Krupa Dalal" userId="d4791ec40d55e7ee" providerId="LiveId" clId="{E1ED0E34-1AFB-42A3-A161-79F7C18B936E}" dt="2026-04-03T16:37:26.795" v="3495" actId="1076"/>
         <pc:sldMkLst>
           <pc:docMk/>
           <pc:sldMk cId="3100589224" sldId="260"/>
@@ -425,7 +478,7 @@
           </ac:spMkLst>
         </pc:spChg>
         <pc:spChg chg="add mod">
-          <ac:chgData name="Krupa Dalal" userId="d4791ec40d55e7ee" providerId="LiveId" clId="{E1ED0E34-1AFB-42A3-A161-79F7C18B936E}" dt="2026-03-28T12:06:50.352" v="1504" actId="404"/>
+          <ac:chgData name="Krupa Dalal" userId="d4791ec40d55e7ee" providerId="LiveId" clId="{E1ED0E34-1AFB-42A3-A161-79F7C18B936E}" dt="2026-04-03T16:37:26.795" v="3495" actId="1076"/>
           <ac:spMkLst>
             <pc:docMk/>
             <pc:sldMk cId="3100589224" sldId="260"/>
@@ -433,7 +486,7 @@
           </ac:spMkLst>
         </pc:spChg>
         <pc:spChg chg="add mod">
-          <ac:chgData name="Krupa Dalal" userId="d4791ec40d55e7ee" providerId="LiveId" clId="{E1ED0E34-1AFB-42A3-A161-79F7C18B936E}" dt="2026-03-30T15:58:08.384" v="1986" actId="1076"/>
+          <ac:chgData name="Krupa Dalal" userId="d4791ec40d55e7ee" providerId="LiveId" clId="{E1ED0E34-1AFB-42A3-A161-79F7C18B936E}" dt="2026-04-03T16:37:21.382" v="3494" actId="1076"/>
           <ac:spMkLst>
             <pc:docMk/>
             <pc:sldMk cId="3100589224" sldId="260"/>
@@ -581,8 +634,8 @@
           </ac:spMkLst>
         </pc:spChg>
       </pc:sldChg>
-      <pc:sldChg chg="addSp modSp add mod ord">
-        <pc:chgData name="Krupa Dalal" userId="d4791ec40d55e7ee" providerId="LiveId" clId="{E1ED0E34-1AFB-42A3-A161-79F7C18B936E}" dt="2026-04-02T15:50:49.067" v="2049" actId="207"/>
+      <pc:sldChg chg="addSp delSp modSp add mod ord">
+        <pc:chgData name="Krupa Dalal" userId="d4791ec40d55e7ee" providerId="LiveId" clId="{E1ED0E34-1AFB-42A3-A161-79F7C18B936E}" dt="2026-04-03T16:03:34.847" v="3055" actId="114"/>
         <pc:sldMkLst>
           <pc:docMk/>
           <pc:sldMk cId="2052776629" sldId="265"/>
@@ -596,11 +649,27 @@
           </ac:spMkLst>
         </pc:spChg>
         <pc:spChg chg="mod">
-          <ac:chgData name="Krupa Dalal" userId="d4791ec40d55e7ee" providerId="LiveId" clId="{E1ED0E34-1AFB-42A3-A161-79F7C18B936E}" dt="2026-04-02T15:48:52.146" v="1993" actId="404"/>
+          <ac:chgData name="Krupa Dalal" userId="d4791ec40d55e7ee" providerId="LiveId" clId="{E1ED0E34-1AFB-42A3-A161-79F7C18B936E}" dt="2026-04-03T15:59:19.090" v="2971" actId="1076"/>
           <ac:spMkLst>
             <pc:docMk/>
             <pc:sldMk cId="2052776629" sldId="265"/>
             <ac:spMk id="7" creationId="{423A724A-3F37-7484-8810-B05857986602}"/>
+          </ac:spMkLst>
+        </pc:spChg>
+        <pc:spChg chg="add del mod">
+          <ac:chgData name="Krupa Dalal" userId="d4791ec40d55e7ee" providerId="LiveId" clId="{E1ED0E34-1AFB-42A3-A161-79F7C18B936E}" dt="2026-04-03T16:03:17.409" v="3044"/>
+          <ac:spMkLst>
+            <pc:docMk/>
+            <pc:sldMk cId="2052776629" sldId="265"/>
+            <ac:spMk id="9" creationId="{D3CED14C-93CF-2FC2-09E4-3854961A2321}"/>
+          </ac:spMkLst>
+        </pc:spChg>
+        <pc:spChg chg="add mod">
+          <ac:chgData name="Krupa Dalal" userId="d4791ec40d55e7ee" providerId="LiveId" clId="{E1ED0E34-1AFB-42A3-A161-79F7C18B936E}" dt="2026-04-03T16:03:34.847" v="3055" actId="114"/>
+          <ac:spMkLst>
+            <pc:docMk/>
+            <pc:sldMk cId="2052776629" sldId="265"/>
+            <ac:spMk id="12" creationId="{234A4A13-09F7-3369-589D-BE98EF3D6BF9}"/>
           </ac:spMkLst>
         </pc:spChg>
         <pc:picChg chg="add mod">
@@ -644,13 +713,13 @@
         </pc:spChg>
       </pc:sldChg>
       <pc:sldChg chg="addSp modSp add mod">
-        <pc:chgData name="Krupa Dalal" userId="d4791ec40d55e7ee" providerId="LiveId" clId="{E1ED0E34-1AFB-42A3-A161-79F7C18B936E}" dt="2026-03-28T11:59:36.333" v="1411" actId="20577"/>
+        <pc:chgData name="Krupa Dalal" userId="d4791ec40d55e7ee" providerId="LiveId" clId="{E1ED0E34-1AFB-42A3-A161-79F7C18B936E}" dt="2026-04-03T16:18:43.368" v="3146" actId="20577"/>
         <pc:sldMkLst>
           <pc:docMk/>
           <pc:sldMk cId="3915144476" sldId="267"/>
         </pc:sldMkLst>
         <pc:spChg chg="add mod">
-          <ac:chgData name="Krupa Dalal" userId="d4791ec40d55e7ee" providerId="LiveId" clId="{E1ED0E34-1AFB-42A3-A161-79F7C18B936E}" dt="2026-03-28T11:59:36.333" v="1411" actId="20577"/>
+          <ac:chgData name="Krupa Dalal" userId="d4791ec40d55e7ee" providerId="LiveId" clId="{E1ED0E34-1AFB-42A3-A161-79F7C18B936E}" dt="2026-04-03T16:18:43.368" v="3146" actId="20577"/>
           <ac:spMkLst>
             <pc:docMk/>
             <pc:sldMk cId="3915144476" sldId="267"/>
@@ -667,11 +736,27 @@
         </pc:spChg>
       </pc:sldChg>
       <pc:sldChg chg="addSp delSp modSp add mod">
-        <pc:chgData name="Krupa Dalal" userId="d4791ec40d55e7ee" providerId="LiveId" clId="{E1ED0E34-1AFB-42A3-A161-79F7C18B936E}" dt="2026-04-02T15:52:09.636" v="2083" actId="14100"/>
+        <pc:chgData name="Krupa Dalal" userId="d4791ec40d55e7ee" providerId="LiveId" clId="{E1ED0E34-1AFB-42A3-A161-79F7C18B936E}" dt="2026-04-03T16:03:46.083" v="3057" actId="404"/>
         <pc:sldMkLst>
           <pc:docMk/>
           <pc:sldMk cId="448846968" sldId="268"/>
         </pc:sldMkLst>
+        <pc:spChg chg="mod">
+          <ac:chgData name="Krupa Dalal" userId="d4791ec40d55e7ee" providerId="LiveId" clId="{E1ED0E34-1AFB-42A3-A161-79F7C18B936E}" dt="2026-04-03T11:40:12.171" v="2776" actId="1035"/>
+          <ac:spMkLst>
+            <pc:docMk/>
+            <pc:sldMk cId="448846968" sldId="268"/>
+            <ac:spMk id="2" creationId="{7BE745BB-2A87-11A2-5D22-5B07B179F98D}"/>
+          </ac:spMkLst>
+        </pc:spChg>
+        <pc:spChg chg="mod">
+          <ac:chgData name="Krupa Dalal" userId="d4791ec40d55e7ee" providerId="LiveId" clId="{E1ED0E34-1AFB-42A3-A161-79F7C18B936E}" dt="2026-04-03T11:40:09.237" v="2775" actId="1036"/>
+          <ac:spMkLst>
+            <pc:docMk/>
+            <pc:sldMk cId="448846968" sldId="268"/>
+            <ac:spMk id="3" creationId="{23F710BC-926E-111F-450F-11957F6F3807}"/>
+          </ac:spMkLst>
+        </pc:spChg>
         <pc:spChg chg="add mod">
           <ac:chgData name="Krupa Dalal" userId="d4791ec40d55e7ee" providerId="LiveId" clId="{E1ED0E34-1AFB-42A3-A161-79F7C18B936E}" dt="2026-04-02T15:52:09.636" v="2083" actId="14100"/>
           <ac:spMkLst>
@@ -688,8 +773,16 @@
             <ac:spMk id="7" creationId="{37B18DDC-2406-9278-D49E-0C633507FEF6}"/>
           </ac:spMkLst>
         </pc:spChg>
+        <pc:spChg chg="add mod">
+          <ac:chgData name="Krupa Dalal" userId="d4791ec40d55e7ee" providerId="LiveId" clId="{E1ED0E34-1AFB-42A3-A161-79F7C18B936E}" dt="2026-04-03T16:03:46.083" v="3057" actId="404"/>
+          <ac:spMkLst>
+            <pc:docMk/>
+            <pc:sldMk cId="448846968" sldId="268"/>
+            <ac:spMk id="8" creationId="{CFA95F59-926E-6203-5C29-B26546F99DF5}"/>
+          </ac:spMkLst>
+        </pc:spChg>
         <pc:picChg chg="add mod">
-          <ac:chgData name="Krupa Dalal" userId="d4791ec40d55e7ee" providerId="LiveId" clId="{E1ED0E34-1AFB-42A3-A161-79F7C18B936E}" dt="2026-03-28T10:48:29.076" v="691" actId="14100"/>
+          <ac:chgData name="Krupa Dalal" userId="d4791ec40d55e7ee" providerId="LiveId" clId="{E1ED0E34-1AFB-42A3-A161-79F7C18B936E}" dt="2026-04-03T16:02:23.280" v="3035" actId="1076"/>
           <ac:picMkLst>
             <pc:docMk/>
             <pc:sldMk cId="448846968" sldId="268"/>
@@ -697,7 +790,7 @@
           </ac:picMkLst>
         </pc:picChg>
         <pc:picChg chg="add mod">
-          <ac:chgData name="Krupa Dalal" userId="d4791ec40d55e7ee" providerId="LiveId" clId="{E1ED0E34-1AFB-42A3-A161-79F7C18B936E}" dt="2026-03-28T10:48:20.502" v="689" actId="1076"/>
+          <ac:chgData name="Krupa Dalal" userId="d4791ec40d55e7ee" providerId="LiveId" clId="{E1ED0E34-1AFB-42A3-A161-79F7C18B936E}" dt="2026-04-03T16:02:18.028" v="3034" actId="1076"/>
           <ac:picMkLst>
             <pc:docMk/>
             <pc:sldMk cId="448846968" sldId="268"/>
@@ -705,39 +798,63 @@
           </ac:picMkLst>
         </pc:picChg>
       </pc:sldChg>
-      <pc:sldChg chg="addSp modSp add mod ord">
-        <pc:chgData name="Krupa Dalal" userId="d4791ec40d55e7ee" providerId="LiveId" clId="{E1ED0E34-1AFB-42A3-A161-79F7C18B936E}" dt="2026-03-28T10:40:52.286" v="585" actId="14100"/>
+      <pc:sldChg chg="addSp delSp modSp add mod ord">
+        <pc:chgData name="Krupa Dalal" userId="d4791ec40d55e7ee" providerId="LiveId" clId="{E1ED0E34-1AFB-42A3-A161-79F7C18B936E}" dt="2026-04-03T16:30:48.467" v="3341" actId="1076"/>
         <pc:sldMkLst>
           <pc:docMk/>
           <pc:sldMk cId="1831876244" sldId="269"/>
         </pc:sldMkLst>
+        <pc:spChg chg="add mod">
+          <ac:chgData name="Krupa Dalal" userId="d4791ec40d55e7ee" providerId="LiveId" clId="{E1ED0E34-1AFB-42A3-A161-79F7C18B936E}" dt="2026-04-03T16:03:53.102" v="3059" actId="404"/>
+          <ac:spMkLst>
+            <pc:docMk/>
+            <pc:sldMk cId="1831876244" sldId="269"/>
+            <ac:spMk id="6" creationId="{6D34FB52-1B2D-7998-03B2-F55BD75081C9}"/>
+          </ac:spMkLst>
+        </pc:spChg>
         <pc:spChg chg="mod">
-          <ac:chgData name="Krupa Dalal" userId="d4791ec40d55e7ee" providerId="LiveId" clId="{E1ED0E34-1AFB-42A3-A161-79F7C18B936E}" dt="2026-03-28T10:19:37.486" v="575" actId="1076"/>
+          <ac:chgData name="Krupa Dalal" userId="d4791ec40d55e7ee" providerId="LiveId" clId="{E1ED0E34-1AFB-42A3-A161-79F7C18B936E}" dt="2026-04-03T16:30:48.467" v="3341" actId="1076"/>
           <ac:spMkLst>
             <pc:docMk/>
             <pc:sldMk cId="1831876244" sldId="269"/>
             <ac:spMk id="7" creationId="{2BD2998F-C43D-F19F-A53F-50366158B387}"/>
           </ac:spMkLst>
         </pc:spChg>
-        <pc:picChg chg="add mod">
-          <ac:chgData name="Krupa Dalal" userId="d4791ec40d55e7ee" providerId="LiveId" clId="{E1ED0E34-1AFB-42A3-A161-79F7C18B936E}" dt="2026-03-28T10:40:44.929" v="583" actId="1076"/>
+        <pc:picChg chg="add del mod">
+          <ac:chgData name="Krupa Dalal" userId="d4791ec40d55e7ee" providerId="LiveId" clId="{E1ED0E34-1AFB-42A3-A161-79F7C18B936E}" dt="2026-04-03T16:29:50.434" v="3315" actId="478"/>
           <ac:picMkLst>
             <pc:docMk/>
             <pc:sldMk cId="1831876244" sldId="269"/>
             <ac:picMk id="8" creationId="{24380431-8D22-1F1E-F7BF-39A48515FEB7}"/>
           </ac:picMkLst>
         </pc:picChg>
-        <pc:picChg chg="add mod">
-          <ac:chgData name="Krupa Dalal" userId="d4791ec40d55e7ee" providerId="LiveId" clId="{E1ED0E34-1AFB-42A3-A161-79F7C18B936E}" dt="2026-03-28T10:40:52.286" v="585" actId="14100"/>
+        <pc:picChg chg="add del mod">
+          <ac:chgData name="Krupa Dalal" userId="d4791ec40d55e7ee" providerId="LiveId" clId="{E1ED0E34-1AFB-42A3-A161-79F7C18B936E}" dt="2026-04-03T16:30:03.497" v="3320" actId="478"/>
           <ac:picMkLst>
             <pc:docMk/>
             <pc:sldMk cId="1831876244" sldId="269"/>
             <ac:picMk id="10" creationId="{9AF500C7-BD08-13A7-5A07-E18CF421A19E}"/>
           </ac:picMkLst>
         </pc:picChg>
+        <pc:picChg chg="add mod">
+          <ac:chgData name="Krupa Dalal" userId="d4791ec40d55e7ee" providerId="LiveId" clId="{E1ED0E34-1AFB-42A3-A161-79F7C18B936E}" dt="2026-04-03T16:30:01.957" v="3319" actId="1076"/>
+          <ac:picMkLst>
+            <pc:docMk/>
+            <pc:sldMk cId="1831876244" sldId="269"/>
+            <ac:picMk id="11" creationId="{FEAA3670-811F-7FF1-CA81-3259B3F8DE59}"/>
+          </ac:picMkLst>
+        </pc:picChg>
+        <pc:picChg chg="add mod">
+          <ac:chgData name="Krupa Dalal" userId="d4791ec40d55e7ee" providerId="LiveId" clId="{E1ED0E34-1AFB-42A3-A161-79F7C18B936E}" dt="2026-04-03T16:30:29.953" v="3324" actId="1076"/>
+          <ac:picMkLst>
+            <pc:docMk/>
+            <pc:sldMk cId="1831876244" sldId="269"/>
+            <ac:picMk id="13" creationId="{98DAB128-F3BD-1ECC-5044-BAEE6C3F4487}"/>
+          </ac:picMkLst>
+        </pc:picChg>
       </pc:sldChg>
       <pc:sldChg chg="addSp delSp modSp add mod">
-        <pc:chgData name="Krupa Dalal" userId="d4791ec40d55e7ee" providerId="LiveId" clId="{E1ED0E34-1AFB-42A3-A161-79F7C18B936E}" dt="2026-04-02T15:53:19.448" v="2146" actId="14100"/>
+        <pc:chgData name="Krupa Dalal" userId="d4791ec40d55e7ee" providerId="LiveId" clId="{E1ED0E34-1AFB-42A3-A161-79F7C18B936E}" dt="2026-04-03T16:06:23.276" v="3098" actId="6549"/>
         <pc:sldMkLst>
           <pc:docMk/>
           <pc:sldMk cId="4178986393" sldId="270"/>
@@ -751,27 +868,51 @@
           </ac:spMkLst>
         </pc:spChg>
         <pc:spChg chg="mod">
-          <ac:chgData name="Krupa Dalal" userId="d4791ec40d55e7ee" providerId="LiveId" clId="{E1ED0E34-1AFB-42A3-A161-79F7C18B936E}" dt="2026-03-28T10:52:04.456" v="745" actId="1076"/>
+          <ac:chgData name="Krupa Dalal" userId="d4791ec40d55e7ee" providerId="LiveId" clId="{E1ED0E34-1AFB-42A3-A161-79F7C18B936E}" dt="2026-04-03T16:05:48.470" v="3073" actId="20577"/>
           <ac:spMkLst>
             <pc:docMk/>
             <pc:sldMk cId="4178986393" sldId="270"/>
             <ac:spMk id="7" creationId="{3EEB36F8-305A-E2AD-E606-7238D150BDAC}"/>
           </ac:spMkLst>
         </pc:spChg>
-        <pc:picChg chg="add mod">
-          <ac:chgData name="Krupa Dalal" userId="d4791ec40d55e7ee" providerId="LiveId" clId="{E1ED0E34-1AFB-42A3-A161-79F7C18B936E}" dt="2026-03-28T10:55:58.577" v="751" actId="1076"/>
+        <pc:spChg chg="add mod">
+          <ac:chgData name="Krupa Dalal" userId="d4791ec40d55e7ee" providerId="LiveId" clId="{E1ED0E34-1AFB-42A3-A161-79F7C18B936E}" dt="2026-04-03T16:06:23.276" v="3098" actId="6549"/>
+          <ac:spMkLst>
+            <pc:docMk/>
+            <pc:sldMk cId="4178986393" sldId="270"/>
+            <ac:spMk id="14" creationId="{068B0C43-ABCD-2CFB-8F04-FCD5B230D539}"/>
+          </ac:spMkLst>
+        </pc:spChg>
+        <pc:picChg chg="add del mod">
+          <ac:chgData name="Krupa Dalal" userId="d4791ec40d55e7ee" providerId="LiveId" clId="{E1ED0E34-1AFB-42A3-A161-79F7C18B936E}" dt="2026-04-03T16:05:03.667" v="3061" actId="478"/>
           <ac:picMkLst>
             <pc:docMk/>
             <pc:sldMk cId="4178986393" sldId="270"/>
             <ac:picMk id="8" creationId="{02E68497-E895-8BF3-ECA0-B7748EBAFD1F}"/>
           </ac:picMkLst>
         </pc:picChg>
-        <pc:picChg chg="add mod">
-          <ac:chgData name="Krupa Dalal" userId="d4791ec40d55e7ee" providerId="LiveId" clId="{E1ED0E34-1AFB-42A3-A161-79F7C18B936E}" dt="2026-03-28T10:56:10.133" v="754" actId="1076"/>
+        <pc:picChg chg="add del mod">
+          <ac:chgData name="Krupa Dalal" userId="d4791ec40d55e7ee" providerId="LiveId" clId="{E1ED0E34-1AFB-42A3-A161-79F7C18B936E}" dt="2026-04-03T16:05:34.812" v="3067" actId="478"/>
+          <ac:picMkLst>
+            <pc:docMk/>
+            <pc:sldMk cId="4178986393" sldId="270"/>
+            <ac:picMk id="10" creationId="{EFBD5E07-0515-E006-19AC-5CF48500EDBB}"/>
+          </ac:picMkLst>
+        </pc:picChg>
+        <pc:picChg chg="add del mod">
+          <ac:chgData name="Krupa Dalal" userId="d4791ec40d55e7ee" providerId="LiveId" clId="{E1ED0E34-1AFB-42A3-A161-79F7C18B936E}" dt="2026-04-03T16:05:37.898" v="3068" actId="478"/>
           <ac:picMkLst>
             <pc:docMk/>
             <pc:sldMk cId="4178986393" sldId="270"/>
             <ac:picMk id="11" creationId="{7BBEB0EC-93C5-A851-0ECF-B03CF408536D}"/>
+          </ac:picMkLst>
+        </pc:picChg>
+        <pc:picChg chg="add mod">
+          <ac:chgData name="Krupa Dalal" userId="d4791ec40d55e7ee" providerId="LiveId" clId="{E1ED0E34-1AFB-42A3-A161-79F7C18B936E}" dt="2026-04-03T16:05:43.968" v="3071" actId="14100"/>
+          <ac:picMkLst>
+            <pc:docMk/>
+            <pc:sldMk cId="4178986393" sldId="270"/>
+            <ac:picMk id="13" creationId="{F0524203-BC8C-381D-DDB8-13E42B8F47FF}"/>
           </ac:picMkLst>
         </pc:picChg>
       </pc:sldChg>
@@ -815,11 +956,19 @@
         </pc:picChg>
       </pc:sldChg>
       <pc:sldChg chg="addSp delSp modSp add mod">
-        <pc:chgData name="Krupa Dalal" userId="d4791ec40d55e7ee" providerId="LiveId" clId="{E1ED0E34-1AFB-42A3-A161-79F7C18B936E}" dt="2026-04-02T15:56:03.701" v="2235" actId="14100"/>
+        <pc:chgData name="Krupa Dalal" userId="d4791ec40d55e7ee" providerId="LiveId" clId="{E1ED0E34-1AFB-42A3-A161-79F7C18B936E}" dt="2026-04-03T16:13:10.863" v="3106" actId="166"/>
         <pc:sldMkLst>
           <pc:docMk/>
           <pc:sldMk cId="771023578" sldId="272"/>
         </pc:sldMkLst>
+        <pc:spChg chg="ord">
+          <ac:chgData name="Krupa Dalal" userId="d4791ec40d55e7ee" providerId="LiveId" clId="{E1ED0E34-1AFB-42A3-A161-79F7C18B936E}" dt="2026-04-03T16:13:10.863" v="3106" actId="166"/>
+          <ac:spMkLst>
+            <pc:docMk/>
+            <pc:sldMk cId="771023578" sldId="272"/>
+            <ac:spMk id="3" creationId="{F419AC10-F14F-2477-A031-BD18C8CDC2DD}"/>
+          </ac:spMkLst>
+        </pc:spChg>
         <pc:spChg chg="mod">
           <ac:chgData name="Krupa Dalal" userId="d4791ec40d55e7ee" providerId="LiveId" clId="{E1ED0E34-1AFB-42A3-A161-79F7C18B936E}" dt="2026-03-28T11:09:14.015" v="847" actId="20577"/>
           <ac:spMkLst>
@@ -837,7 +986,7 @@
           </ac:spMkLst>
         </pc:spChg>
         <pc:picChg chg="add mod">
-          <ac:chgData name="Krupa Dalal" userId="d4791ec40d55e7ee" providerId="LiveId" clId="{E1ED0E34-1AFB-42A3-A161-79F7C18B936E}" dt="2026-03-28T11:12:06.921" v="852" actId="14100"/>
+          <ac:chgData name="Krupa Dalal" userId="d4791ec40d55e7ee" providerId="LiveId" clId="{E1ED0E34-1AFB-42A3-A161-79F7C18B936E}" dt="2026-04-03T16:13:06.987" v="3105" actId="1076"/>
           <ac:picMkLst>
             <pc:docMk/>
             <pc:sldMk cId="771023578" sldId="272"/>
@@ -845,7 +994,7 @@
           </ac:picMkLst>
         </pc:picChg>
         <pc:picChg chg="add mod">
-          <ac:chgData name="Krupa Dalal" userId="d4791ec40d55e7ee" providerId="LiveId" clId="{E1ED0E34-1AFB-42A3-A161-79F7C18B936E}" dt="2026-03-28T11:12:13.948" v="854" actId="14100"/>
+          <ac:chgData name="Krupa Dalal" userId="d4791ec40d55e7ee" providerId="LiveId" clId="{E1ED0E34-1AFB-42A3-A161-79F7C18B936E}" dt="2026-04-03T16:13:00.069" v="3102" actId="1076"/>
           <ac:picMkLst>
             <pc:docMk/>
             <pc:sldMk cId="771023578" sldId="272"/>
@@ -854,7 +1003,7 @@
         </pc:picChg>
       </pc:sldChg>
       <pc:sldChg chg="addSp modSp add mod">
-        <pc:chgData name="Krupa Dalal" userId="d4791ec40d55e7ee" providerId="LiveId" clId="{E1ED0E34-1AFB-42A3-A161-79F7C18B936E}" dt="2026-04-02T15:58:05.028" v="2342" actId="1076"/>
+        <pc:chgData name="Krupa Dalal" userId="d4791ec40d55e7ee" providerId="LiveId" clId="{E1ED0E34-1AFB-42A3-A161-79F7C18B936E}" dt="2026-04-03T16:13:45.538" v="3110" actId="1076"/>
         <pc:sldMkLst>
           <pc:docMk/>
           <pc:sldMk cId="3908953289" sldId="273"/>
@@ -868,7 +1017,7 @@
           </ac:spMkLst>
         </pc:spChg>
         <pc:spChg chg="mod">
-          <ac:chgData name="Krupa Dalal" userId="d4791ec40d55e7ee" providerId="LiveId" clId="{E1ED0E34-1AFB-42A3-A161-79F7C18B936E}" dt="2026-04-02T15:56:38.957" v="2271" actId="20577"/>
+          <ac:chgData name="Krupa Dalal" userId="d4791ec40d55e7ee" providerId="LiveId" clId="{E1ED0E34-1AFB-42A3-A161-79F7C18B936E}" dt="2026-04-03T16:13:45.538" v="3110" actId="1076"/>
           <ac:spMkLst>
             <pc:docMk/>
             <pc:sldMk cId="3908953289" sldId="273"/>
@@ -940,21 +1089,29 @@
         </pc:picChg>
       </pc:sldChg>
       <pc:sldChg chg="addSp modSp add mod">
-        <pc:chgData name="Krupa Dalal" userId="d4791ec40d55e7ee" providerId="LiveId" clId="{E1ED0E34-1AFB-42A3-A161-79F7C18B936E}" dt="2026-03-28T11:38:46.624" v="1010" actId="14100"/>
+        <pc:chgData name="Krupa Dalal" userId="d4791ec40d55e7ee" providerId="LiveId" clId="{E1ED0E34-1AFB-42A3-A161-79F7C18B936E}" dt="2026-04-03T16:35:16.729" v="3407" actId="1076"/>
         <pc:sldMkLst>
           <pc:docMk/>
           <pc:sldMk cId="3388310826" sldId="275"/>
         </pc:sldMkLst>
         <pc:spChg chg="mod">
-          <ac:chgData name="Krupa Dalal" userId="d4791ec40d55e7ee" providerId="LiveId" clId="{E1ED0E34-1AFB-42A3-A161-79F7C18B936E}" dt="2026-03-28T11:34:35.227" v="1002" actId="20577"/>
+          <ac:chgData name="Krupa Dalal" userId="d4791ec40d55e7ee" providerId="LiveId" clId="{E1ED0E34-1AFB-42A3-A161-79F7C18B936E}" dt="2026-04-03T16:35:16.729" v="3407" actId="1076"/>
           <ac:spMkLst>
             <pc:docMk/>
             <pc:sldMk cId="3388310826" sldId="275"/>
             <ac:spMk id="6" creationId="{4DF795F7-FB30-8033-D210-318BDCE9D23F}"/>
           </ac:spMkLst>
         </pc:spChg>
+        <pc:spChg chg="add mod">
+          <ac:chgData name="Krupa Dalal" userId="d4791ec40d55e7ee" providerId="LiveId" clId="{E1ED0E34-1AFB-42A3-A161-79F7C18B936E}" dt="2026-04-03T16:35:06.204" v="3404" actId="14100"/>
+          <ac:spMkLst>
+            <pc:docMk/>
+            <pc:sldMk cId="3388310826" sldId="275"/>
+            <ac:spMk id="7" creationId="{FF8C7342-8261-B5B1-7E15-B43330E3435A}"/>
+          </ac:spMkLst>
+        </pc:spChg>
         <pc:picChg chg="add mod">
-          <ac:chgData name="Krupa Dalal" userId="d4791ec40d55e7ee" providerId="LiveId" clId="{E1ED0E34-1AFB-42A3-A161-79F7C18B936E}" dt="2026-03-28T11:38:46.624" v="1010" actId="14100"/>
+          <ac:chgData name="Krupa Dalal" userId="d4791ec40d55e7ee" providerId="LiveId" clId="{E1ED0E34-1AFB-42A3-A161-79F7C18B936E}" dt="2026-04-03T16:35:13.194" v="3406" actId="1076"/>
           <ac:picMkLst>
             <pc:docMk/>
             <pc:sldMk cId="3388310826" sldId="275"/>
@@ -962,7 +1119,7 @@
           </ac:picMkLst>
         </pc:picChg>
         <pc:picChg chg="add mod">
-          <ac:chgData name="Krupa Dalal" userId="d4791ec40d55e7ee" providerId="LiveId" clId="{E1ED0E34-1AFB-42A3-A161-79F7C18B936E}" dt="2026-03-28T11:38:35.202" v="1007" actId="14100"/>
+          <ac:chgData name="Krupa Dalal" userId="d4791ec40d55e7ee" providerId="LiveId" clId="{E1ED0E34-1AFB-42A3-A161-79F7C18B936E}" dt="2026-04-03T16:35:10.058" v="3405" actId="1076"/>
           <ac:picMkLst>
             <pc:docMk/>
             <pc:sldMk cId="3388310826" sldId="275"/>
@@ -970,20 +1127,12 @@
           </ac:picMkLst>
         </pc:picChg>
       </pc:sldChg>
-      <pc:sldChg chg="addSp modSp add mod ord">
-        <pc:chgData name="Krupa Dalal" userId="d4791ec40d55e7ee" providerId="LiveId" clId="{E1ED0E34-1AFB-42A3-A161-79F7C18B936E}" dt="2026-04-02T16:01:29.706" v="2505" actId="14100"/>
+      <pc:sldChg chg="addSp modSp add del mod ord">
+        <pc:chgData name="Krupa Dalal" userId="d4791ec40d55e7ee" providerId="LiveId" clId="{E1ED0E34-1AFB-42A3-A161-79F7C18B936E}" dt="2026-04-03T16:18:30.088" v="3113" actId="2696"/>
         <pc:sldMkLst>
           <pc:docMk/>
           <pc:sldMk cId="1799572547" sldId="276"/>
         </pc:sldMkLst>
-        <pc:spChg chg="mod">
-          <ac:chgData name="Krupa Dalal" userId="d4791ec40d55e7ee" providerId="LiveId" clId="{E1ED0E34-1AFB-42A3-A161-79F7C18B936E}" dt="2026-03-28T11:48:17.942" v="1210" actId="20577"/>
-          <ac:spMkLst>
-            <pc:docMk/>
-            <pc:sldMk cId="1799572547" sldId="276"/>
-            <ac:spMk id="6" creationId="{41A3E4D4-4046-DCFB-E9CB-9CB80B053B0A}"/>
-          </ac:spMkLst>
-        </pc:spChg>
         <pc:spChg chg="add mod">
           <ac:chgData name="Krupa Dalal" userId="d4791ec40d55e7ee" providerId="LiveId" clId="{E1ED0E34-1AFB-42A3-A161-79F7C18B936E}" dt="2026-04-02T16:01:29.706" v="2505" actId="14100"/>
           <ac:spMkLst>
@@ -992,31 +1141,15 @@
             <ac:spMk id="7" creationId="{57779279-C66D-40D4-79FF-30D08A677267}"/>
           </ac:spMkLst>
         </pc:spChg>
-        <pc:picChg chg="add mod">
-          <ac:chgData name="Krupa Dalal" userId="d4791ec40d55e7ee" providerId="LiveId" clId="{E1ED0E34-1AFB-42A3-A161-79F7C18B936E}" dt="2026-03-28T11:48:30.109" v="1214" actId="14100"/>
-          <ac:picMkLst>
-            <pc:docMk/>
-            <pc:sldMk cId="1799572547" sldId="276"/>
-            <ac:picMk id="8" creationId="{BF19D758-3DA9-9185-2F56-2DDE83599705}"/>
-          </ac:picMkLst>
-        </pc:picChg>
-        <pc:picChg chg="add mod">
-          <ac:chgData name="Krupa Dalal" userId="d4791ec40d55e7ee" providerId="LiveId" clId="{E1ED0E34-1AFB-42A3-A161-79F7C18B936E}" dt="2026-03-28T11:48:20.754" v="1211" actId="1076"/>
-          <ac:picMkLst>
-            <pc:docMk/>
-            <pc:sldMk cId="1799572547" sldId="276"/>
-            <ac:picMk id="10" creationId="{AB8C312D-29E5-CCCC-BD20-D0E8958B7A99}"/>
-          </ac:picMkLst>
-        </pc:picChg>
       </pc:sldChg>
       <pc:sldChg chg="addSp delSp modSp add mod">
-        <pc:chgData name="Krupa Dalal" userId="d4791ec40d55e7ee" providerId="LiveId" clId="{E1ED0E34-1AFB-42A3-A161-79F7C18B936E}" dt="2026-04-02T16:02:41.497" v="2583" actId="20577"/>
+        <pc:chgData name="Krupa Dalal" userId="d4791ec40d55e7ee" providerId="LiveId" clId="{E1ED0E34-1AFB-42A3-A161-79F7C18B936E}" dt="2026-04-03T16:21:08.985" v="3165" actId="20577"/>
         <pc:sldMkLst>
           <pc:docMk/>
           <pc:sldMk cId="3743173019" sldId="277"/>
         </pc:sldMkLst>
         <pc:spChg chg="mod">
-          <ac:chgData name="Krupa Dalal" userId="d4791ec40d55e7ee" providerId="LiveId" clId="{E1ED0E34-1AFB-42A3-A161-79F7C18B936E}" dt="2026-03-28T11:59:15.290" v="1383" actId="20577"/>
+          <ac:chgData name="Krupa Dalal" userId="d4791ec40d55e7ee" providerId="LiveId" clId="{E1ED0E34-1AFB-42A3-A161-79F7C18B936E}" dt="2026-04-03T16:21:08.985" v="3165" actId="20577"/>
           <ac:spMkLst>
             <pc:docMk/>
             <pc:sldMk cId="3743173019" sldId="277"/>
@@ -1032,15 +1165,31 @@
           </ac:spMkLst>
         </pc:spChg>
         <pc:picChg chg="add mod">
-          <ac:chgData name="Krupa Dalal" userId="d4791ec40d55e7ee" providerId="LiveId" clId="{E1ED0E34-1AFB-42A3-A161-79F7C18B936E}" dt="2026-03-28T11:53:45.019" v="1257" actId="14100"/>
+          <ac:chgData name="Krupa Dalal" userId="d4791ec40d55e7ee" providerId="LiveId" clId="{E1ED0E34-1AFB-42A3-A161-79F7C18B936E}" dt="2026-04-03T16:20:12.221" v="3151" actId="1076"/>
+          <ac:picMkLst>
+            <pc:docMk/>
+            <pc:sldMk cId="3743173019" sldId="277"/>
+            <ac:picMk id="9" creationId="{C704B0BE-B0D4-2167-E101-F025A1463F82}"/>
+          </ac:picMkLst>
+        </pc:picChg>
+        <pc:picChg chg="add mod">
+          <ac:chgData name="Krupa Dalal" userId="d4791ec40d55e7ee" providerId="LiveId" clId="{E1ED0E34-1AFB-42A3-A161-79F7C18B936E}" dt="2026-04-03T16:20:40.078" v="3156" actId="1076"/>
+          <ac:picMkLst>
+            <pc:docMk/>
+            <pc:sldMk cId="3743173019" sldId="277"/>
+            <ac:picMk id="11" creationId="{27D34EA9-8F21-F75C-FFE1-9B3A1786ED62}"/>
+          </ac:picMkLst>
+        </pc:picChg>
+        <pc:picChg chg="add del mod">
+          <ac:chgData name="Krupa Dalal" userId="d4791ec40d55e7ee" providerId="LiveId" clId="{E1ED0E34-1AFB-42A3-A161-79F7C18B936E}" dt="2026-04-03T16:20:03.016" v="3147" actId="478"/>
           <ac:picMkLst>
             <pc:docMk/>
             <pc:sldMk cId="3743173019" sldId="277"/>
             <ac:picMk id="12" creationId="{CDF63E1B-B08C-1912-FBE2-E3AF77685921}"/>
           </ac:picMkLst>
         </pc:picChg>
-        <pc:picChg chg="add mod">
-          <ac:chgData name="Krupa Dalal" userId="d4791ec40d55e7ee" providerId="LiveId" clId="{E1ED0E34-1AFB-42A3-A161-79F7C18B936E}" dt="2026-03-28T11:53:38.827" v="1255" actId="14100"/>
+        <pc:picChg chg="add del mod">
+          <ac:chgData name="Krupa Dalal" userId="d4791ec40d55e7ee" providerId="LiveId" clId="{E1ED0E34-1AFB-42A3-A161-79F7C18B936E}" dt="2026-04-03T16:20:14.028" v="3152" actId="478"/>
           <ac:picMkLst>
             <pc:docMk/>
             <pc:sldMk cId="3743173019" sldId="277"/>
@@ -1049,11 +1198,27 @@
         </pc:picChg>
       </pc:sldChg>
       <pc:sldChg chg="addSp modSp add mod ord">
-        <pc:chgData name="Krupa Dalal" userId="d4791ec40d55e7ee" providerId="LiveId" clId="{E1ED0E34-1AFB-42A3-A161-79F7C18B936E}" dt="2026-04-02T16:00:19.412" v="2447" actId="14100"/>
+        <pc:chgData name="Krupa Dalal" userId="d4791ec40d55e7ee" providerId="LiveId" clId="{E1ED0E34-1AFB-42A3-A161-79F7C18B936E}" dt="2026-04-03T16:15:22.501" v="3112" actId="1035"/>
         <pc:sldMkLst>
           <pc:docMk/>
           <pc:sldMk cId="3743301246" sldId="278"/>
         </pc:sldMkLst>
+        <pc:spChg chg="mod">
+          <ac:chgData name="Krupa Dalal" userId="d4791ec40d55e7ee" providerId="LiveId" clId="{E1ED0E34-1AFB-42A3-A161-79F7C18B936E}" dt="2026-04-03T16:15:22.501" v="3112" actId="1035"/>
+          <ac:spMkLst>
+            <pc:docMk/>
+            <pc:sldMk cId="3743301246" sldId="278"/>
+            <ac:spMk id="2" creationId="{5F22191A-5200-AAAC-1929-DFFD51EE1A1F}"/>
+          </ac:spMkLst>
+        </pc:spChg>
+        <pc:spChg chg="mod">
+          <ac:chgData name="Krupa Dalal" userId="d4791ec40d55e7ee" providerId="LiveId" clId="{E1ED0E34-1AFB-42A3-A161-79F7C18B936E}" dt="2026-04-03T16:14:42.043" v="3111" actId="1036"/>
+          <ac:spMkLst>
+            <pc:docMk/>
+            <pc:sldMk cId="3743301246" sldId="278"/>
+            <ac:spMk id="3" creationId="{8D91B05C-9C2D-6ADF-BB68-984FA2F6CE29}"/>
+          </ac:spMkLst>
+        </pc:spChg>
         <pc:spChg chg="mod">
           <ac:chgData name="Krupa Dalal" userId="d4791ec40d55e7ee" providerId="LiveId" clId="{E1ED0E34-1AFB-42A3-A161-79F7C18B936E}" dt="2026-03-28T11:44:34.021" v="1163" actId="1076"/>
           <ac:spMkLst>
@@ -1088,13 +1253,13 @@
         </pc:picChg>
       </pc:sldChg>
       <pc:sldChg chg="addSp modSp add mod">
-        <pc:chgData name="Krupa Dalal" userId="d4791ec40d55e7ee" providerId="LiveId" clId="{E1ED0E34-1AFB-42A3-A161-79F7C18B936E}" dt="2026-04-02T16:03:34.396" v="2624" actId="14100"/>
+        <pc:chgData name="Krupa Dalal" userId="d4791ec40d55e7ee" providerId="LiveId" clId="{E1ED0E34-1AFB-42A3-A161-79F7C18B936E}" dt="2026-04-03T16:21:12.512" v="3166" actId="20577"/>
         <pc:sldMkLst>
           <pc:docMk/>
           <pc:sldMk cId="2789876119" sldId="279"/>
         </pc:sldMkLst>
         <pc:spChg chg="mod">
-          <ac:chgData name="Krupa Dalal" userId="d4791ec40d55e7ee" providerId="LiveId" clId="{E1ED0E34-1AFB-42A3-A161-79F7C18B936E}" dt="2026-03-28T11:57:29.148" v="1285" actId="1076"/>
+          <ac:chgData name="Krupa Dalal" userId="d4791ec40d55e7ee" providerId="LiveId" clId="{E1ED0E34-1AFB-42A3-A161-79F7C18B936E}" dt="2026-04-03T16:21:12.512" v="3166" actId="20577"/>
           <ac:spMkLst>
             <pc:docMk/>
             <pc:sldMk cId="2789876119" sldId="279"/>
@@ -1127,7 +1292,7 @@
         </pc:picChg>
       </pc:sldChg>
       <pc:sldChg chg="addSp delSp modSp add mod ord">
-        <pc:chgData name="Krupa Dalal" userId="d4791ec40d55e7ee" providerId="LiveId" clId="{E1ED0E34-1AFB-42A3-A161-79F7C18B936E}" dt="2026-03-28T12:56:02.323" v="1566" actId="20577"/>
+        <pc:chgData name="Krupa Dalal" userId="d4791ec40d55e7ee" providerId="LiveId" clId="{E1ED0E34-1AFB-42A3-A161-79F7C18B936E}" dt="2026-04-03T16:24:19.142" v="3305" actId="20577"/>
         <pc:sldMkLst>
           <pc:docMk/>
           <pc:sldMk cId="3520345744" sldId="280"/>
@@ -1141,11 +1306,19 @@
           </ac:spMkLst>
         </pc:spChg>
         <pc:spChg chg="mod">
-          <ac:chgData name="Krupa Dalal" userId="d4791ec40d55e7ee" providerId="LiveId" clId="{E1ED0E34-1AFB-42A3-A161-79F7C18B936E}" dt="2026-03-28T12:56:02.323" v="1566" actId="20577"/>
+          <ac:chgData name="Krupa Dalal" userId="d4791ec40d55e7ee" providerId="LiveId" clId="{E1ED0E34-1AFB-42A3-A161-79F7C18B936E}" dt="2026-04-03T16:22:54.386" v="3225" actId="1076"/>
           <ac:spMkLst>
             <pc:docMk/>
             <pc:sldMk cId="3520345744" sldId="280"/>
             <ac:spMk id="6" creationId="{BB03EFC2-9675-C9C1-91E7-FF1361281A1A}"/>
+          </ac:spMkLst>
+        </pc:spChg>
+        <pc:spChg chg="add mod">
+          <ac:chgData name="Krupa Dalal" userId="d4791ec40d55e7ee" providerId="LiveId" clId="{E1ED0E34-1AFB-42A3-A161-79F7C18B936E}" dt="2026-04-03T16:24:19.142" v="3305" actId="20577"/>
+          <ac:spMkLst>
+            <pc:docMk/>
+            <pc:sldMk cId="3520345744" sldId="280"/>
+            <ac:spMk id="7" creationId="{D7F4641A-E56F-4631-F037-077D0FFEE42B}"/>
           </ac:spMkLst>
         </pc:spChg>
         <pc:picChg chg="add mod">
@@ -1166,7 +1339,7 @@
         </pc:picChg>
       </pc:sldChg>
       <pc:sldChg chg="addSp delSp modSp add mod">
-        <pc:chgData name="Krupa Dalal" userId="d4791ec40d55e7ee" providerId="LiveId" clId="{E1ED0E34-1AFB-42A3-A161-79F7C18B936E}" dt="2026-04-02T16:03:56.129" v="2626" actId="20577"/>
+        <pc:chgData name="Krupa Dalal" userId="d4791ec40d55e7ee" providerId="LiveId" clId="{E1ED0E34-1AFB-42A3-A161-79F7C18B936E}" dt="2026-04-03T16:24:15.392" v="3304" actId="20577"/>
         <pc:sldMkLst>
           <pc:docMk/>
           <pc:sldMk cId="2767688936" sldId="281"/>
@@ -1180,11 +1353,19 @@
           </ac:spMkLst>
         </pc:spChg>
         <pc:spChg chg="mod">
-          <ac:chgData name="Krupa Dalal" userId="d4791ec40d55e7ee" providerId="LiveId" clId="{E1ED0E34-1AFB-42A3-A161-79F7C18B936E}" dt="2026-04-02T16:03:56.129" v="2626" actId="20577"/>
+          <ac:chgData name="Krupa Dalal" userId="d4791ec40d55e7ee" providerId="LiveId" clId="{E1ED0E34-1AFB-42A3-A161-79F7C18B936E}" dt="2026-04-03T16:21:44.724" v="3177" actId="20577"/>
           <ac:spMkLst>
             <pc:docMk/>
             <pc:sldMk cId="2767688936" sldId="281"/>
             <ac:spMk id="6" creationId="{0F4B3FBC-DCB8-3B70-6436-138EC9A66EF2}"/>
+          </ac:spMkLst>
+        </pc:spChg>
+        <pc:spChg chg="add mod">
+          <ac:chgData name="Krupa Dalal" userId="d4791ec40d55e7ee" providerId="LiveId" clId="{E1ED0E34-1AFB-42A3-A161-79F7C18B936E}" dt="2026-04-03T16:24:15.392" v="3304" actId="20577"/>
+          <ac:spMkLst>
+            <pc:docMk/>
+            <pc:sldMk cId="2767688936" sldId="281"/>
+            <ac:spMk id="10" creationId="{A5FAC44A-D09B-09F8-61EB-D3A6F6BEA8A3}"/>
           </ac:spMkLst>
         </pc:spChg>
         <pc:picChg chg="add mod">
@@ -1193,6 +1374,14 @@
             <pc:docMk/>
             <pc:sldMk cId="2767688936" sldId="281"/>
             <ac:picMk id="8" creationId="{DD733C2C-C28A-F62E-0D04-A89DEEB27CDD}"/>
+          </ac:picMkLst>
+        </pc:picChg>
+        <pc:picChg chg="add del">
+          <ac:chgData name="Krupa Dalal" userId="d4791ec40d55e7ee" providerId="LiveId" clId="{E1ED0E34-1AFB-42A3-A161-79F7C18B936E}" dt="2026-04-03T16:21:48.777" v="3179" actId="22"/>
+          <ac:picMkLst>
+            <pc:docMk/>
+            <pc:sldMk cId="2767688936" sldId="281"/>
+            <ac:picMk id="9" creationId="{EECE6C1D-84B1-5EB1-64C8-6FBCD34BB020}"/>
           </ac:picMkLst>
         </pc:picChg>
         <pc:picChg chg="add mod">
@@ -1205,7 +1394,7 @@
         </pc:picChg>
       </pc:sldChg>
       <pc:sldChg chg="addSp delSp modSp add mod">
-        <pc:chgData name="Krupa Dalal" userId="d4791ec40d55e7ee" providerId="LiveId" clId="{E1ED0E34-1AFB-42A3-A161-79F7C18B936E}" dt="2026-04-02T16:04:06.859" v="2628" actId="20577"/>
+        <pc:chgData name="Krupa Dalal" userId="d4791ec40d55e7ee" providerId="LiveId" clId="{E1ED0E34-1AFB-42A3-A161-79F7C18B936E}" dt="2026-04-03T16:24:25.483" v="3306" actId="1076"/>
         <pc:sldMkLst>
           <pc:docMk/>
           <pc:sldMk cId="2306082377" sldId="282"/>
@@ -1219,11 +1408,19 @@
           </ac:spMkLst>
         </pc:spChg>
         <pc:spChg chg="mod">
-          <ac:chgData name="Krupa Dalal" userId="d4791ec40d55e7ee" providerId="LiveId" clId="{E1ED0E34-1AFB-42A3-A161-79F7C18B936E}" dt="2026-04-02T16:04:06.859" v="2628" actId="20577"/>
+          <ac:chgData name="Krupa Dalal" userId="d4791ec40d55e7ee" providerId="LiveId" clId="{E1ED0E34-1AFB-42A3-A161-79F7C18B936E}" dt="2026-04-03T16:23:45.142" v="3272" actId="20577"/>
           <ac:spMkLst>
             <pc:docMk/>
             <pc:sldMk cId="2306082377" sldId="282"/>
             <ac:spMk id="6" creationId="{63594FF4-E57E-91E8-DD1F-008163748EBE}"/>
+          </ac:spMkLst>
+        </pc:spChg>
+        <pc:spChg chg="add mod">
+          <ac:chgData name="Krupa Dalal" userId="d4791ec40d55e7ee" providerId="LiveId" clId="{E1ED0E34-1AFB-42A3-A161-79F7C18B936E}" dt="2026-04-03T16:24:25.483" v="3306" actId="1076"/>
+          <ac:spMkLst>
+            <pc:docMk/>
+            <pc:sldMk cId="2306082377" sldId="282"/>
+            <ac:spMk id="7" creationId="{19A3C7A9-639C-CFFC-2A3A-87D1DF5DA3E3}"/>
           </ac:spMkLst>
         </pc:spChg>
         <pc:picChg chg="add mod">
@@ -1235,11 +1432,263 @@
           </ac:picMkLst>
         </pc:picChg>
         <pc:picChg chg="add mod">
-          <ac:chgData name="Krupa Dalal" userId="d4791ec40d55e7ee" providerId="LiveId" clId="{E1ED0E34-1AFB-42A3-A161-79F7C18B936E}" dt="2026-03-30T15:56:59.325" v="1867" actId="1076"/>
+          <ac:chgData name="Krupa Dalal" userId="d4791ec40d55e7ee" providerId="LiveId" clId="{E1ED0E34-1AFB-42A3-A161-79F7C18B936E}" dt="2026-04-03T11:28:19.578" v="2767"/>
           <ac:picMkLst>
             <pc:docMk/>
             <pc:sldMk cId="2306082377" sldId="282"/>
             <ac:picMk id="12" creationId="{4DDEAA25-1D73-6485-5921-47A193076FDD}"/>
+          </ac:picMkLst>
+        </pc:picChg>
+      </pc:sldChg>
+      <pc:sldChg chg="add">
+        <pc:chgData name="Krupa Dalal" userId="d4791ec40d55e7ee" providerId="LiveId" clId="{E1ED0E34-1AFB-42A3-A161-79F7C18B936E}" dt="2026-04-03T11:16:01.342" v="2652" actId="2890"/>
+        <pc:sldMkLst>
+          <pc:docMk/>
+          <pc:sldMk cId="3054742959" sldId="283"/>
+        </pc:sldMkLst>
+      </pc:sldChg>
+      <pc:sldChg chg="addSp delSp modSp add mod ord">
+        <pc:chgData name="Krupa Dalal" userId="d4791ec40d55e7ee" providerId="LiveId" clId="{E1ED0E34-1AFB-42A3-A161-79F7C18B936E}" dt="2026-04-03T15:55:53.579" v="2949" actId="20577"/>
+        <pc:sldMkLst>
+          <pc:docMk/>
+          <pc:sldMk cId="3949468740" sldId="284"/>
+        </pc:sldMkLst>
+        <pc:spChg chg="mod">
+          <ac:chgData name="Krupa Dalal" userId="d4791ec40d55e7ee" providerId="LiveId" clId="{E1ED0E34-1AFB-42A3-A161-79F7C18B936E}" dt="2026-04-03T11:26:36.881" v="2757" actId="1076"/>
+          <ac:spMkLst>
+            <pc:docMk/>
+            <pc:sldMk cId="3949468740" sldId="284"/>
+            <ac:spMk id="2" creationId="{3F679695-62BA-0A4D-9D7C-FE6FE43082E4}"/>
+          </ac:spMkLst>
+        </pc:spChg>
+        <pc:spChg chg="mod ord">
+          <ac:chgData name="Krupa Dalal" userId="d4791ec40d55e7ee" providerId="LiveId" clId="{E1ED0E34-1AFB-42A3-A161-79F7C18B936E}" dt="2026-04-03T11:26:44.495" v="2759" actId="1036"/>
+          <ac:spMkLst>
+            <pc:docMk/>
+            <pc:sldMk cId="3949468740" sldId="284"/>
+            <ac:spMk id="3" creationId="{FD6FEDFF-F355-40EF-5979-D13FE4F376C3}"/>
+          </ac:spMkLst>
+        </pc:spChg>
+        <pc:spChg chg="mod">
+          <ac:chgData name="Krupa Dalal" userId="d4791ec40d55e7ee" providerId="LiveId" clId="{E1ED0E34-1AFB-42A3-A161-79F7C18B936E}" dt="2026-04-03T11:26:30.891" v="2756" actId="1076"/>
+          <ac:spMkLst>
+            <pc:docMk/>
+            <pc:sldMk cId="3949468740" sldId="284"/>
+            <ac:spMk id="5" creationId="{7D5B5046-6FA6-3FCC-EB7E-949493F0BE38}"/>
+          </ac:spMkLst>
+        </pc:spChg>
+        <pc:spChg chg="mod">
+          <ac:chgData name="Krupa Dalal" userId="d4791ec40d55e7ee" providerId="LiveId" clId="{E1ED0E34-1AFB-42A3-A161-79F7C18B936E}" dt="2026-04-03T11:23:24.167" v="2748" actId="2711"/>
+          <ac:spMkLst>
+            <pc:docMk/>
+            <pc:sldMk cId="3949468740" sldId="284"/>
+            <ac:spMk id="6" creationId="{4BBE73BC-3595-CF36-E0CF-A0C1FE4D0E3C}"/>
+          </ac:spMkLst>
+        </pc:spChg>
+        <pc:spChg chg="add">
+          <ac:chgData name="Krupa Dalal" userId="d4791ec40d55e7ee" providerId="LiveId" clId="{E1ED0E34-1AFB-42A3-A161-79F7C18B936E}" dt="2026-04-03T11:19:17.651" v="2707"/>
+          <ac:spMkLst>
+            <pc:docMk/>
+            <pc:sldMk cId="3949468740" sldId="284"/>
+            <ac:spMk id="7" creationId="{E54A8CBE-B0C1-8A98-10A9-40481C3638D5}"/>
+          </ac:spMkLst>
+        </pc:spChg>
+        <pc:spChg chg="add del mod">
+          <ac:chgData name="Krupa Dalal" userId="d4791ec40d55e7ee" providerId="LiveId" clId="{E1ED0E34-1AFB-42A3-A161-79F7C18B936E}" dt="2026-04-03T11:19:47.456" v="2711" actId="478"/>
+          <ac:spMkLst>
+            <pc:docMk/>
+            <pc:sldMk cId="3949468740" sldId="284"/>
+            <ac:spMk id="8" creationId="{8CF45DA2-B185-4831-CCA7-621B2D4B832F}"/>
+          </ac:spMkLst>
+        </pc:spChg>
+        <pc:spChg chg="add">
+          <ac:chgData name="Krupa Dalal" userId="d4791ec40d55e7ee" providerId="LiveId" clId="{E1ED0E34-1AFB-42A3-A161-79F7C18B936E}" dt="2026-04-03T11:19:28.149" v="2709"/>
+          <ac:spMkLst>
+            <pc:docMk/>
+            <pc:sldMk cId="3949468740" sldId="284"/>
+            <ac:spMk id="10" creationId="{E82C31BE-1311-123A-7DAD-7B6B45111741}"/>
+          </ac:spMkLst>
+        </pc:spChg>
+        <pc:spChg chg="add">
+          <ac:chgData name="Krupa Dalal" userId="d4791ec40d55e7ee" providerId="LiveId" clId="{E1ED0E34-1AFB-42A3-A161-79F7C18B936E}" dt="2026-04-03T11:20:00.751" v="2712"/>
+          <ac:spMkLst>
+            <pc:docMk/>
+            <pc:sldMk cId="3949468740" sldId="284"/>
+            <ac:spMk id="11" creationId="{48D3BA3B-CA90-BBCC-1DBB-422F0C5586EE}"/>
+          </ac:spMkLst>
+        </pc:spChg>
+        <pc:spChg chg="add mod">
+          <ac:chgData name="Krupa Dalal" userId="d4791ec40d55e7ee" providerId="LiveId" clId="{E1ED0E34-1AFB-42A3-A161-79F7C18B936E}" dt="2026-04-03T15:55:53.579" v="2949" actId="20577"/>
+          <ac:spMkLst>
+            <pc:docMk/>
+            <pc:sldMk cId="3949468740" sldId="284"/>
+            <ac:spMk id="13" creationId="{0E04A93F-1BD4-95E9-B7D8-8689A8C17793}"/>
+          </ac:spMkLst>
+        </pc:spChg>
+        <pc:spChg chg="add">
+          <ac:chgData name="Krupa Dalal" userId="d4791ec40d55e7ee" providerId="LiveId" clId="{E1ED0E34-1AFB-42A3-A161-79F7C18B936E}" dt="2026-04-03T11:20:10.836" v="2714"/>
+          <ac:spMkLst>
+            <pc:docMk/>
+            <pc:sldMk cId="3949468740" sldId="284"/>
+            <ac:spMk id="14" creationId="{66347066-6383-FBCB-6021-B79129C20EC2}"/>
+          </ac:spMkLst>
+        </pc:spChg>
+        <pc:spChg chg="add">
+          <ac:chgData name="Krupa Dalal" userId="d4791ec40d55e7ee" providerId="LiveId" clId="{E1ED0E34-1AFB-42A3-A161-79F7C18B936E}" dt="2026-04-03T11:20:15.052" v="2715"/>
+          <ac:spMkLst>
+            <pc:docMk/>
+            <pc:sldMk cId="3949468740" sldId="284"/>
+            <ac:spMk id="15" creationId="{B92909B3-0B18-2DEF-B1D2-52786F68532B}"/>
+          </ac:spMkLst>
+        </pc:spChg>
+        <pc:picChg chg="del">
+          <ac:chgData name="Krupa Dalal" userId="d4791ec40d55e7ee" providerId="LiveId" clId="{E1ED0E34-1AFB-42A3-A161-79F7C18B936E}" dt="2026-04-03T11:18:59.820" v="2706" actId="478"/>
+          <ac:picMkLst>
+            <pc:docMk/>
+            <pc:sldMk cId="3949468740" sldId="284"/>
+            <ac:picMk id="9" creationId="{A6E608BC-33CE-BACD-BC7E-8581887928EF}"/>
+          </ac:picMkLst>
+        </pc:picChg>
+        <pc:picChg chg="del">
+          <ac:chgData name="Krupa Dalal" userId="d4791ec40d55e7ee" providerId="LiveId" clId="{E1ED0E34-1AFB-42A3-A161-79F7C18B936E}" dt="2026-04-03T11:18:57.521" v="2705" actId="478"/>
+          <ac:picMkLst>
+            <pc:docMk/>
+            <pc:sldMk cId="3949468740" sldId="284"/>
+            <ac:picMk id="12" creationId="{8D2A96E5-15D9-D6C8-0012-53FB17F04E2C}"/>
+          </ac:picMkLst>
+        </pc:picChg>
+      </pc:sldChg>
+      <pc:sldChg chg="addSp delSp modSp add mod ord">
+        <pc:chgData name="Krupa Dalal" userId="d4791ec40d55e7ee" providerId="LiveId" clId="{E1ED0E34-1AFB-42A3-A161-79F7C18B936E}" dt="2026-04-03T16:24:43.982" v="3307" actId="1076"/>
+        <pc:sldMkLst>
+          <pc:docMk/>
+          <pc:sldMk cId="2716857443" sldId="285"/>
+        </pc:sldMkLst>
+        <pc:spChg chg="del">
+          <ac:chgData name="Krupa Dalal" userId="d4791ec40d55e7ee" providerId="LiveId" clId="{E1ED0E34-1AFB-42A3-A161-79F7C18B936E}" dt="2026-04-03T14:03:28.781" v="2828" actId="478"/>
+          <ac:spMkLst>
+            <pc:docMk/>
+            <pc:sldMk cId="2716857443" sldId="285"/>
+            <ac:spMk id="6" creationId="{D2F24385-A97F-99C2-C051-46B0BE8EEA56}"/>
+          </ac:spMkLst>
+        </pc:spChg>
+        <pc:spChg chg="mod">
+          <ac:chgData name="Krupa Dalal" userId="d4791ec40d55e7ee" providerId="LiveId" clId="{E1ED0E34-1AFB-42A3-A161-79F7C18B936E}" dt="2026-04-03T14:03:58.394" v="2834" actId="1076"/>
+          <ac:spMkLst>
+            <pc:docMk/>
+            <pc:sldMk cId="2716857443" sldId="285"/>
+            <ac:spMk id="7" creationId="{769C8791-C9AE-9638-EEB9-68CC3F6460B8}"/>
+          </ac:spMkLst>
+        </pc:spChg>
+        <pc:picChg chg="del">
+          <ac:chgData name="Krupa Dalal" userId="d4791ec40d55e7ee" providerId="LiveId" clId="{E1ED0E34-1AFB-42A3-A161-79F7C18B936E}" dt="2026-04-03T14:03:12.726" v="2822" actId="478"/>
+          <ac:picMkLst>
+            <pc:docMk/>
+            <pc:sldMk cId="2716857443" sldId="285"/>
+            <ac:picMk id="8" creationId="{FB4AFFA5-0CA9-00EE-FA58-BB1C53C7179A}"/>
+          </ac:picMkLst>
+        </pc:picChg>
+        <pc:picChg chg="add del mod">
+          <ac:chgData name="Krupa Dalal" userId="d4791ec40d55e7ee" providerId="LiveId" clId="{E1ED0E34-1AFB-42A3-A161-79F7C18B936E}" dt="2026-04-03T14:12:50.633" v="2835" actId="478"/>
+          <ac:picMkLst>
+            <pc:docMk/>
+            <pc:sldMk cId="2716857443" sldId="285"/>
+            <ac:picMk id="10" creationId="{838484A3-3842-B0B2-B16A-60D23C3703D7}"/>
+          </ac:picMkLst>
+        </pc:picChg>
+        <pc:picChg chg="del">
+          <ac:chgData name="Krupa Dalal" userId="d4791ec40d55e7ee" providerId="LiveId" clId="{E1ED0E34-1AFB-42A3-A161-79F7C18B936E}" dt="2026-04-03T14:03:14.506" v="2823" actId="478"/>
+          <ac:picMkLst>
+            <pc:docMk/>
+            <pc:sldMk cId="2716857443" sldId="285"/>
+            <ac:picMk id="11" creationId="{621A105D-F907-0AFB-F9A9-C8F6EFF3EB15}"/>
+          </ac:picMkLst>
+        </pc:picChg>
+        <pc:picChg chg="add del mod">
+          <ac:chgData name="Krupa Dalal" userId="d4791ec40d55e7ee" providerId="LiveId" clId="{E1ED0E34-1AFB-42A3-A161-79F7C18B936E}" dt="2026-04-03T14:12:52.290" v="2836" actId="478"/>
+          <ac:picMkLst>
+            <pc:docMk/>
+            <pc:sldMk cId="2716857443" sldId="285"/>
+            <ac:picMk id="13" creationId="{CC97E207-9959-C603-ED32-04755D9E38A4}"/>
+          </ac:picMkLst>
+        </pc:picChg>
+        <pc:picChg chg="add mod">
+          <ac:chgData name="Krupa Dalal" userId="d4791ec40d55e7ee" providerId="LiveId" clId="{E1ED0E34-1AFB-42A3-A161-79F7C18B936E}" dt="2026-04-03T16:24:43.982" v="3307" actId="1076"/>
+          <ac:picMkLst>
+            <pc:docMk/>
+            <pc:sldMk cId="2716857443" sldId="285"/>
+            <ac:picMk id="15" creationId="{84DB20A4-20FF-D144-31F8-4481C459029F}"/>
+          </ac:picMkLst>
+        </pc:picChg>
+        <pc:picChg chg="add mod">
+          <ac:chgData name="Krupa Dalal" userId="d4791ec40d55e7ee" providerId="LiveId" clId="{E1ED0E34-1AFB-42A3-A161-79F7C18B936E}" dt="2026-04-03T14:18:10.576" v="2844" actId="1076"/>
+          <ac:picMkLst>
+            <pc:docMk/>
+            <pc:sldMk cId="2716857443" sldId="285"/>
+            <ac:picMk id="17" creationId="{509D9BBC-8019-4D5B-05BA-BB8D107E2860}"/>
+          </ac:picMkLst>
+        </pc:picChg>
+      </pc:sldChg>
+      <pc:sldChg chg="addSp delSp modSp add mod">
+        <pc:chgData name="Krupa Dalal" userId="d4791ec40d55e7ee" providerId="LiveId" clId="{E1ED0E34-1AFB-42A3-A161-79F7C18B936E}" dt="2026-04-03T16:07:36.930" v="3101" actId="20577"/>
+        <pc:sldMkLst>
+          <pc:docMk/>
+          <pc:sldMk cId="475174190" sldId="286"/>
+        </pc:sldMkLst>
+        <pc:spChg chg="mod">
+          <ac:chgData name="Krupa Dalal" userId="d4791ec40d55e7ee" providerId="LiveId" clId="{E1ED0E34-1AFB-42A3-A161-79F7C18B936E}" dt="2026-04-03T16:07:36.930" v="3101" actId="20577"/>
+          <ac:spMkLst>
+            <pc:docMk/>
+            <pc:sldMk cId="475174190" sldId="286"/>
+            <ac:spMk id="6" creationId="{F0D73817-C4C2-3FCC-29F0-96E14CCE68FF}"/>
+          </ac:spMkLst>
+        </pc:spChg>
+        <pc:spChg chg="del">
+          <ac:chgData name="Krupa Dalal" userId="d4791ec40d55e7ee" providerId="LiveId" clId="{E1ED0E34-1AFB-42A3-A161-79F7C18B936E}" dt="2026-04-03T15:43:32.082" v="2854" actId="478"/>
+          <ac:spMkLst>
+            <pc:docMk/>
+            <pc:sldMk cId="475174190" sldId="286"/>
+            <ac:spMk id="7" creationId="{42853A54-0D8C-2CC0-29DD-1A4BD732AC7E}"/>
+          </ac:spMkLst>
+        </pc:spChg>
+        <pc:spChg chg="add mod">
+          <ac:chgData name="Krupa Dalal" userId="d4791ec40d55e7ee" providerId="LiveId" clId="{E1ED0E34-1AFB-42A3-A161-79F7C18B936E}" dt="2026-04-03T15:52:11.657" v="2904" actId="14100"/>
+          <ac:spMkLst>
+            <pc:docMk/>
+            <pc:sldMk cId="475174190" sldId="286"/>
+            <ac:spMk id="14" creationId="{2FB24B08-6489-E159-6CD4-0DE28F13F9A6}"/>
+          </ac:spMkLst>
+        </pc:spChg>
+        <pc:picChg chg="del">
+          <ac:chgData name="Krupa Dalal" userId="d4791ec40d55e7ee" providerId="LiveId" clId="{E1ED0E34-1AFB-42A3-A161-79F7C18B936E}" dt="2026-04-03T15:43:27.966" v="2852" actId="478"/>
+          <ac:picMkLst>
+            <pc:docMk/>
+            <pc:sldMk cId="475174190" sldId="286"/>
+            <ac:picMk id="9" creationId="{9B1EEC69-0886-1C53-8D41-E86986AA521A}"/>
+          </ac:picMkLst>
+        </pc:picChg>
+        <pc:picChg chg="add mod">
+          <ac:chgData name="Krupa Dalal" userId="d4791ec40d55e7ee" providerId="LiveId" clId="{E1ED0E34-1AFB-42A3-A161-79F7C18B936E}" dt="2026-04-03T15:52:45.139" v="2927" actId="1076"/>
+          <ac:picMkLst>
+            <pc:docMk/>
+            <pc:sldMk cId="475174190" sldId="286"/>
+            <ac:picMk id="10" creationId="{582432F2-274C-81A5-D8A0-3C6EECEE4E97}"/>
+          </ac:picMkLst>
+        </pc:picChg>
+        <pc:picChg chg="del">
+          <ac:chgData name="Krupa Dalal" userId="d4791ec40d55e7ee" providerId="LiveId" clId="{E1ED0E34-1AFB-42A3-A161-79F7C18B936E}" dt="2026-04-03T15:43:29.949" v="2853" actId="478"/>
+          <ac:picMkLst>
+            <pc:docMk/>
+            <pc:sldMk cId="475174190" sldId="286"/>
+            <ac:picMk id="11" creationId="{5B69E08E-E892-6A17-1864-C249530CA3FB}"/>
+          </ac:picMkLst>
+        </pc:picChg>
+        <pc:picChg chg="add mod">
+          <ac:chgData name="Krupa Dalal" userId="d4791ec40d55e7ee" providerId="LiveId" clId="{E1ED0E34-1AFB-42A3-A161-79F7C18B936E}" dt="2026-04-03T15:52:42.822" v="2926" actId="1076"/>
+          <ac:picMkLst>
+            <pc:docMk/>
+            <pc:sldMk cId="475174190" sldId="286"/>
+            <ac:picMk id="13" creationId="{5EA0741F-9968-87C0-6FBB-D29F4462D9D0}"/>
           </ac:picMkLst>
         </pc:picChg>
       </pc:sldChg>
@@ -1428,7 +1877,7 @@
             <a:fld id="{1D8BD707-D9CF-40AE-B4C6-C98DA3205C09}" type="datetimeFigureOut">
               <a:rPr lang="en-US" smtClean="0"/>
               <a:pPr/>
-              <a:t>4/2/2026</a:t>
+              <a:t>4/3/2026</a:t>
             </a:fld>
             <a:endParaRPr lang="en-US"/>
           </a:p>
@@ -1593,7 +2042,7 @@
             <a:fld id="{1D8BD707-D9CF-40AE-B4C6-C98DA3205C09}" type="datetimeFigureOut">
               <a:rPr lang="en-US" smtClean="0"/>
               <a:pPr/>
-              <a:t>4/2/2026</a:t>
+              <a:t>4/3/2026</a:t>
             </a:fld>
             <a:endParaRPr lang="en-US"/>
           </a:p>
@@ -1768,7 +2217,7 @@
             <a:fld id="{1D8BD707-D9CF-40AE-B4C6-C98DA3205C09}" type="datetimeFigureOut">
               <a:rPr lang="en-US" smtClean="0"/>
               <a:pPr/>
-              <a:t>4/2/2026</a:t>
+              <a:t>4/3/2026</a:t>
             </a:fld>
             <a:endParaRPr lang="en-US"/>
           </a:p>
@@ -1933,7 +2382,7 @@
             <a:fld id="{1D8BD707-D9CF-40AE-B4C6-C98DA3205C09}" type="datetimeFigureOut">
               <a:rPr lang="en-US" smtClean="0"/>
               <a:pPr/>
-              <a:t>4/2/2026</a:t>
+              <a:t>4/3/2026</a:t>
             </a:fld>
             <a:endParaRPr lang="en-US"/>
           </a:p>
@@ -2175,7 +2624,7 @@
             <a:fld id="{1D8BD707-D9CF-40AE-B4C6-C98DA3205C09}" type="datetimeFigureOut">
               <a:rPr lang="en-US" smtClean="0"/>
               <a:pPr/>
-              <a:t>4/2/2026</a:t>
+              <a:t>4/3/2026</a:t>
             </a:fld>
             <a:endParaRPr lang="en-US"/>
           </a:p>
@@ -2457,7 +2906,7 @@
             <a:fld id="{1D8BD707-D9CF-40AE-B4C6-C98DA3205C09}" type="datetimeFigureOut">
               <a:rPr lang="en-US" smtClean="0"/>
               <a:pPr/>
-              <a:t>4/2/2026</a:t>
+              <a:t>4/3/2026</a:t>
             </a:fld>
             <a:endParaRPr lang="en-US"/>
           </a:p>
@@ -2873,7 +3322,7 @@
             <a:fld id="{1D8BD707-D9CF-40AE-B4C6-C98DA3205C09}" type="datetimeFigureOut">
               <a:rPr lang="en-US" smtClean="0"/>
               <a:pPr/>
-              <a:t>4/2/2026</a:t>
+              <a:t>4/3/2026</a:t>
             </a:fld>
             <a:endParaRPr lang="en-US"/>
           </a:p>
@@ -2987,7 +3436,7 @@
             <a:fld id="{1D8BD707-D9CF-40AE-B4C6-C98DA3205C09}" type="datetimeFigureOut">
               <a:rPr lang="en-US" smtClean="0"/>
               <a:pPr/>
-              <a:t>4/2/2026</a:t>
+              <a:t>4/3/2026</a:t>
             </a:fld>
             <a:endParaRPr lang="en-US"/>
           </a:p>
@@ -3079,7 +3528,7 @@
             <a:fld id="{1D8BD707-D9CF-40AE-B4C6-C98DA3205C09}" type="datetimeFigureOut">
               <a:rPr lang="en-US" smtClean="0"/>
               <a:pPr/>
-              <a:t>4/2/2026</a:t>
+              <a:t>4/3/2026</a:t>
             </a:fld>
             <a:endParaRPr lang="en-US"/>
           </a:p>
@@ -3351,7 +3800,7 @@
             <a:fld id="{1D8BD707-D9CF-40AE-B4C6-C98DA3205C09}" type="datetimeFigureOut">
               <a:rPr lang="en-US" smtClean="0"/>
               <a:pPr/>
-              <a:t>4/2/2026</a:t>
+              <a:t>4/3/2026</a:t>
             </a:fld>
             <a:endParaRPr lang="en-US"/>
           </a:p>
@@ -3600,7 +4049,7 @@
             <a:fld id="{1D8BD707-D9CF-40AE-B4C6-C98DA3205C09}" type="datetimeFigureOut">
               <a:rPr lang="en-US" smtClean="0"/>
               <a:pPr/>
-              <a:t>4/2/2026</a:t>
+              <a:t>4/3/2026</a:t>
             </a:fld>
             <a:endParaRPr lang="en-US"/>
           </a:p>
@@ -3808,7 +4257,7 @@
             <a:fld id="{1D8BD707-D9CF-40AE-B4C6-C98DA3205C09}" type="datetimeFigureOut">
               <a:rPr lang="en-US" smtClean="0"/>
               <a:pPr/>
-              <a:t>4/2/2026</a:t>
+              <a:t>4/3/2026</a:t>
             </a:fld>
             <a:endParaRPr lang="en-US"/>
           </a:p>
@@ -4195,7 +4644,7 @@
         </p:nvSpPr>
         <p:spPr>
           <a:xfrm>
-            <a:off x="0" y="5143500"/>
+            <a:off x="-76200" y="5181600"/>
             <a:ext cx="5943600" cy="5143500"/>
           </a:xfrm>
           <a:custGeom>
@@ -4247,7 +4696,7 @@
         </p:nvSpPr>
         <p:spPr>
           <a:xfrm flipH="1" flipV="1">
-            <a:off x="12839699" y="-10886"/>
+            <a:off x="12915900" y="-10886"/>
             <a:ext cx="5448300" cy="5448300"/>
           </a:xfrm>
           <a:custGeom>
@@ -4404,7 +4853,7 @@
         <p:spPr>
           <a:xfrm>
             <a:off x="4893376" y="6693790"/>
-            <a:ext cx="8468585" cy="928493"/>
+            <a:ext cx="8468585" cy="878446"/>
           </a:xfrm>
           <a:prstGeom prst="rect">
             <a:avLst/>
@@ -4422,11 +4871,14 @@
               </a:lnSpc>
             </a:pPr>
             <a:r>
-              <a:rPr lang="en-US" sz="5445" dirty="0">
+              <a:rPr lang="en-US" sz="4800" dirty="0">
                 <a:solidFill>
-                  <a:srgbClr val="002B58"/>
+                  <a:schemeClr val="accent2">
+                    <a:lumMod val="60000"/>
+                    <a:lumOff val="40000"/>
+                  </a:schemeClr>
                 </a:solidFill>
-                <a:latin typeface="DM Sans"/>
+                <a:latin typeface="Cooper Black" panose="0208090404030B020404" pitchFamily="18" charset="0"/>
                 <a:ea typeface="DM Sans"/>
                 <a:cs typeface="DM Sans"/>
                 <a:sym typeface="DM Sans"/>
@@ -4463,7 +4915,7 @@
               </a:lnSpc>
             </a:pPr>
             <a:r>
-              <a:rPr lang="en-US" sz="11086" b="1" dirty="0">
+              <a:rPr lang="en-US" sz="11086" b="1" spc="-300" dirty="0">
                 <a:solidFill>
                   <a:srgbClr val="002B58"/>
                 </a:solidFill>
@@ -4593,6 +5045,466 @@
 </file>
 
 <file path=ppt/slides/slide10.xml><?xml version="1.0" encoding="utf-8"?>
+<p:sld xmlns:a="http://schemas.openxmlformats.org/drawingml/2006/main" xmlns:r="http://schemas.openxmlformats.org/officeDocument/2006/relationships" xmlns:p="http://schemas.openxmlformats.org/presentationml/2006/main">
+  <p:cSld>
+    <p:bg>
+      <p:bgPr>
+        <a:solidFill>
+          <a:srgbClr val="F8F3ED"/>
+        </a:solidFill>
+        <a:effectLst/>
+      </p:bgPr>
+    </p:bg>
+    <p:spTree>
+      <p:nvGrpSpPr>
+        <p:cNvPr id="1" name="">
+          <a:extLst>
+            <a:ext uri="{FF2B5EF4-FFF2-40B4-BE49-F238E27FC236}">
+              <a16:creationId xmlns:a16="http://schemas.microsoft.com/office/drawing/2014/main" id="{3ED26FA1-5B69-8033-832C-0C4506A1DAE0}"/>
+            </a:ext>
+          </a:extLst>
+        </p:cNvPr>
+        <p:cNvGrpSpPr/>
+        <p:nvPr/>
+      </p:nvGrpSpPr>
+      <p:grpSpPr>
+        <a:xfrm>
+          <a:off x="0" y="0"/>
+          <a:ext cx="0" cy="0"/>
+          <a:chOff x="0" y="0"/>
+          <a:chExt cx="0" cy="0"/>
+        </a:xfrm>
+      </p:grpSpPr>
+      <p:sp>
+        <p:nvSpPr>
+          <p:cNvPr id="2" name="Freeform 2">
+            <a:extLst>
+              <a:ext uri="{FF2B5EF4-FFF2-40B4-BE49-F238E27FC236}">
+                <a16:creationId xmlns:a16="http://schemas.microsoft.com/office/drawing/2014/main" id="{867AFCD8-14EC-0C6D-AF80-615E1612F651}"/>
+              </a:ext>
+            </a:extLst>
+          </p:cNvPr>
+          <p:cNvSpPr/>
+          <p:nvPr/>
+        </p:nvSpPr>
+        <p:spPr>
+          <a:xfrm flipV="1">
+            <a:off x="-9908" y="0"/>
+            <a:ext cx="5448300" cy="5448300"/>
+          </a:xfrm>
+          <a:custGeom>
+            <a:avLst/>
+            <a:gdLst/>
+            <a:ahLst/>
+            <a:cxnLst/>
+            <a:rect l="l" t="t" r="r" b="b"/>
+            <a:pathLst>
+              <a:path w="5448300" h="5448300">
+                <a:moveTo>
+                  <a:pt x="0" y="5448300"/>
+                </a:moveTo>
+                <a:lnTo>
+                  <a:pt x="5448300" y="5448300"/>
+                </a:lnTo>
+                <a:lnTo>
+                  <a:pt x="5448300" y="0"/>
+                </a:lnTo>
+                <a:lnTo>
+                  <a:pt x="0" y="0"/>
+                </a:lnTo>
+                <a:lnTo>
+                  <a:pt x="0" y="5448300"/>
+                </a:lnTo>
+                <a:close/>
+              </a:path>
+            </a:pathLst>
+          </a:custGeom>
+          <a:blipFill>
+            <a:blip>
+              <a:extLst>
+                <a:ext uri="{96DAC541-7B7A-43D3-8B79-37D633B846F1}">
+                  <asvg:svgBlip xmlns:asvg="http://schemas.microsoft.com/office/drawing/2016/SVG/main" r:embed="rId2"/>
+                </a:ext>
+              </a:extLst>
+            </a:blip>
+            <a:stretch>
+              <a:fillRect/>
+            </a:stretch>
+          </a:blipFill>
+        </p:spPr>
+      </p:sp>
+      <p:sp>
+        <p:nvSpPr>
+          <p:cNvPr id="3" name="Freeform 3">
+            <a:extLst>
+              <a:ext uri="{FF2B5EF4-FFF2-40B4-BE49-F238E27FC236}">
+                <a16:creationId xmlns:a16="http://schemas.microsoft.com/office/drawing/2014/main" id="{F1DF5BDD-20A9-1692-3B98-0111F4349878}"/>
+              </a:ext>
+            </a:extLst>
+          </p:cNvPr>
+          <p:cNvSpPr/>
+          <p:nvPr/>
+        </p:nvSpPr>
+        <p:spPr>
+          <a:xfrm flipH="1">
+            <a:off x="12849610" y="4838700"/>
+            <a:ext cx="5448300" cy="5448300"/>
+          </a:xfrm>
+          <a:custGeom>
+            <a:avLst/>
+            <a:gdLst/>
+            <a:ahLst/>
+            <a:cxnLst/>
+            <a:rect l="l" t="t" r="r" b="b"/>
+            <a:pathLst>
+              <a:path w="5448300" h="5448300">
+                <a:moveTo>
+                  <a:pt x="5448300" y="0"/>
+                </a:moveTo>
+                <a:lnTo>
+                  <a:pt x="0" y="0"/>
+                </a:lnTo>
+                <a:lnTo>
+                  <a:pt x="0" y="5448300"/>
+                </a:lnTo>
+                <a:lnTo>
+                  <a:pt x="5448300" y="5448300"/>
+                </a:lnTo>
+                <a:lnTo>
+                  <a:pt x="5448300" y="0"/>
+                </a:lnTo>
+                <a:close/>
+              </a:path>
+            </a:pathLst>
+          </a:custGeom>
+          <a:blipFill>
+            <a:blip>
+              <a:extLst>
+                <a:ext uri="{96DAC541-7B7A-43D3-8B79-37D633B846F1}">
+                  <asvg:svgBlip xmlns:asvg="http://schemas.microsoft.com/office/drawing/2016/SVG/main" r:embed="rId2"/>
+                </a:ext>
+              </a:extLst>
+            </a:blip>
+            <a:stretch>
+              <a:fillRect/>
+            </a:stretch>
+          </a:blipFill>
+        </p:spPr>
+      </p:sp>
+      <p:sp>
+        <p:nvSpPr>
+          <p:cNvPr id="4" name="Freeform 4">
+            <a:extLst>
+              <a:ext uri="{FF2B5EF4-FFF2-40B4-BE49-F238E27FC236}">
+                <a16:creationId xmlns:a16="http://schemas.microsoft.com/office/drawing/2014/main" id="{04D3A3B0-B9F5-9FA2-0328-3961AAEE9FDA}"/>
+              </a:ext>
+            </a:extLst>
+          </p:cNvPr>
+          <p:cNvSpPr/>
+          <p:nvPr/>
+        </p:nvSpPr>
+        <p:spPr>
+          <a:xfrm>
+            <a:off x="610206" y="7472290"/>
+            <a:ext cx="836989" cy="2209944"/>
+          </a:xfrm>
+          <a:custGeom>
+            <a:avLst/>
+            <a:gdLst/>
+            <a:ahLst/>
+            <a:cxnLst/>
+            <a:rect l="l" t="t" r="r" b="b"/>
+            <a:pathLst>
+              <a:path w="836989" h="2209944">
+                <a:moveTo>
+                  <a:pt x="0" y="0"/>
+                </a:moveTo>
+                <a:lnTo>
+                  <a:pt x="836988" y="0"/>
+                </a:lnTo>
+                <a:lnTo>
+                  <a:pt x="836988" y="2209945"/>
+                </a:lnTo>
+                <a:lnTo>
+                  <a:pt x="0" y="2209945"/>
+                </a:lnTo>
+                <a:lnTo>
+                  <a:pt x="0" y="0"/>
+                </a:lnTo>
+                <a:close/>
+              </a:path>
+            </a:pathLst>
+          </a:custGeom>
+          <a:blipFill>
+            <a:blip>
+              <a:extLst>
+                <a:ext uri="{96DAC541-7B7A-43D3-8B79-37D633B846F1}">
+                  <asvg:svgBlip xmlns:asvg="http://schemas.microsoft.com/office/drawing/2016/SVG/main" r:embed="rId3"/>
+                </a:ext>
+              </a:extLst>
+            </a:blip>
+            <a:stretch>
+              <a:fillRect/>
+            </a:stretch>
+          </a:blipFill>
+        </p:spPr>
+      </p:sp>
+      <p:sp>
+        <p:nvSpPr>
+          <p:cNvPr id="5" name="Freeform 5">
+            <a:extLst>
+              <a:ext uri="{FF2B5EF4-FFF2-40B4-BE49-F238E27FC236}">
+                <a16:creationId xmlns:a16="http://schemas.microsoft.com/office/drawing/2014/main" id="{F0300AB4-3B41-AA44-1A9C-B8D62F6C8F80}"/>
+              </a:ext>
+            </a:extLst>
+          </p:cNvPr>
+          <p:cNvSpPr/>
+          <p:nvPr/>
+        </p:nvSpPr>
+        <p:spPr>
+          <a:xfrm>
+            <a:off x="16840806" y="604765"/>
+            <a:ext cx="836989" cy="2209944"/>
+          </a:xfrm>
+          <a:custGeom>
+            <a:avLst/>
+            <a:gdLst/>
+            <a:ahLst/>
+            <a:cxnLst/>
+            <a:rect l="l" t="t" r="r" b="b"/>
+            <a:pathLst>
+              <a:path w="836989" h="2209944">
+                <a:moveTo>
+                  <a:pt x="0" y="0"/>
+                </a:moveTo>
+                <a:lnTo>
+                  <a:pt x="836988" y="0"/>
+                </a:lnTo>
+                <a:lnTo>
+                  <a:pt x="836988" y="2209945"/>
+                </a:lnTo>
+                <a:lnTo>
+                  <a:pt x="0" y="2209945"/>
+                </a:lnTo>
+                <a:lnTo>
+                  <a:pt x="0" y="0"/>
+                </a:lnTo>
+                <a:close/>
+              </a:path>
+            </a:pathLst>
+          </a:custGeom>
+          <a:blipFill>
+            <a:blip>
+              <a:extLst>
+                <a:ext uri="{96DAC541-7B7A-43D3-8B79-37D633B846F1}">
+                  <asvg:svgBlip xmlns:asvg="http://schemas.microsoft.com/office/drawing/2016/SVG/main" r:embed="rId3"/>
+                </a:ext>
+              </a:extLst>
+            </a:blip>
+            <a:stretch>
+              <a:fillRect/>
+            </a:stretch>
+          </a:blipFill>
+        </p:spPr>
+      </p:sp>
+      <p:sp>
+        <p:nvSpPr>
+          <p:cNvPr id="7" name="TextBox 6">
+            <a:extLst>
+              <a:ext uri="{FF2B5EF4-FFF2-40B4-BE49-F238E27FC236}">
+                <a16:creationId xmlns:a16="http://schemas.microsoft.com/office/drawing/2014/main" id="{2BD2998F-C43D-F19F-A53F-50366158B387}"/>
+              </a:ext>
+            </a:extLst>
+          </p:cNvPr>
+          <p:cNvSpPr txBox="1"/>
+          <p:nvPr/>
+        </p:nvSpPr>
+        <p:spPr>
+          <a:xfrm>
+            <a:off x="3407573" y="803879"/>
+            <a:ext cx="13302260" cy="1529265"/>
+          </a:xfrm>
+          <a:prstGeom prst="rect">
+            <a:avLst/>
+          </a:prstGeom>
+        </p:spPr>
+        <p:txBody>
+          <a:bodyPr wrap="square" lIns="0" tIns="0" rIns="0" bIns="0" rtlCol="0" anchor="t">
+            <a:spAutoFit/>
+          </a:bodyPr>
+          <a:lstStyle/>
+          <a:p>
+            <a:pPr algn="ctr">
+              <a:lnSpc>
+                <a:spcPts val="12685"/>
+              </a:lnSpc>
+            </a:pPr>
+            <a:r>
+              <a:rPr lang="en-US" sz="8000" b="1" dirty="0">
+                <a:solidFill>
+                  <a:srgbClr val="002B58"/>
+                </a:solidFill>
+                <a:latin typeface="Perpetua" panose="02020502060401020303" pitchFamily="18" charset="0"/>
+                <a:ea typeface="Readex Pro Semi-Bold"/>
+                <a:cs typeface="Readex Pro Semi-Bold"/>
+                <a:sym typeface="Readex Pro Semi-Bold"/>
+              </a:rPr>
+              <a:t>Top 10 Customers </a:t>
+            </a:r>
+            <a:r>
+              <a:rPr lang="en-US" sz="6000" b="1" dirty="0">
+                <a:solidFill>
+                  <a:srgbClr val="002B58"/>
+                </a:solidFill>
+                <a:latin typeface="Perpetua" panose="02020502060401020303" pitchFamily="18" charset="0"/>
+                <a:ea typeface="Readex Pro Semi-Bold"/>
+                <a:cs typeface="Readex Pro Semi-Bold"/>
+                <a:sym typeface="Readex Pro Semi-Bold"/>
+              </a:rPr>
+              <a:t>(Spending-Wise)</a:t>
+            </a:r>
+            <a:endParaRPr lang="en-US" sz="8000" b="1" dirty="0">
+              <a:solidFill>
+                <a:srgbClr val="002B58"/>
+              </a:solidFill>
+              <a:latin typeface="Perpetua" panose="02020502060401020303" pitchFamily="18" charset="0"/>
+              <a:ea typeface="Readex Pro Semi-Bold"/>
+              <a:cs typeface="Readex Pro Semi-Bold"/>
+              <a:sym typeface="Readex Pro Semi-Bold"/>
+            </a:endParaRPr>
+          </a:p>
+        </p:txBody>
+      </p:sp>
+      <p:sp>
+        <p:nvSpPr>
+          <p:cNvPr id="6" name="TextBox 5">
+            <a:extLst>
+              <a:ext uri="{FF2B5EF4-FFF2-40B4-BE49-F238E27FC236}">
+                <a16:creationId xmlns:a16="http://schemas.microsoft.com/office/drawing/2014/main" id="{6D34FB52-1B2D-7998-03B2-F55BD75081C9}"/>
+              </a:ext>
+            </a:extLst>
+          </p:cNvPr>
+          <p:cNvSpPr txBox="1"/>
+          <p:nvPr/>
+        </p:nvSpPr>
+        <p:spPr>
+          <a:xfrm>
+            <a:off x="2797973" y="1641545"/>
+            <a:ext cx="13911860" cy="1383199"/>
+          </a:xfrm>
+          <a:prstGeom prst="rect">
+            <a:avLst/>
+          </a:prstGeom>
+        </p:spPr>
+        <p:txBody>
+          <a:bodyPr wrap="square" lIns="0" tIns="0" rIns="0" bIns="0" rtlCol="0" anchor="t">
+            <a:spAutoFit/>
+          </a:bodyPr>
+          <a:lstStyle/>
+          <a:p>
+            <a:pPr algn="ctr">
+              <a:lnSpc>
+                <a:spcPts val="12685"/>
+              </a:lnSpc>
+            </a:pPr>
+            <a:r>
+              <a:rPr lang="en-US" sz="4400" b="1" i="1" dirty="0">
+                <a:solidFill>
+                  <a:srgbClr val="002B58"/>
+                </a:solidFill>
+                <a:latin typeface="Rockwell" panose="02060603020205020403" pitchFamily="18" charset="0"/>
+                <a:ea typeface="Readex Pro Semi-Bold"/>
+                <a:cs typeface="Readex Pro Semi-Bold"/>
+                <a:sym typeface="Readex Pro Semi-Bold"/>
+              </a:rPr>
+              <a:t>Using (JOINS)</a:t>
+            </a:r>
+            <a:endParaRPr lang="en-US" sz="2800" b="1" i="1" dirty="0">
+              <a:solidFill>
+                <a:srgbClr val="002B58"/>
+              </a:solidFill>
+              <a:latin typeface="Rockwell" panose="02060603020205020403" pitchFamily="18" charset="0"/>
+              <a:ea typeface="Readex Pro Semi-Bold"/>
+              <a:cs typeface="Readex Pro Semi-Bold"/>
+              <a:sym typeface="Readex Pro Semi-Bold"/>
+            </a:endParaRPr>
+          </a:p>
+        </p:txBody>
+      </p:sp>
+      <p:pic>
+        <p:nvPicPr>
+          <p:cNvPr id="11" name="Picture 10">
+            <a:extLst>
+              <a:ext uri="{FF2B5EF4-FFF2-40B4-BE49-F238E27FC236}">
+                <a16:creationId xmlns:a16="http://schemas.microsoft.com/office/drawing/2014/main" id="{FEAA3670-811F-7FF1-CA81-3259B3F8DE59}"/>
+              </a:ext>
+            </a:extLst>
+          </p:cNvPr>
+          <p:cNvPicPr>
+            <a:picLocks noChangeAspect="1"/>
+          </p:cNvPicPr>
+          <p:nvPr/>
+        </p:nvPicPr>
+        <p:blipFill>
+          <a:blip r:embed="rId4"/>
+          <a:stretch>
+            <a:fillRect/>
+          </a:stretch>
+        </p:blipFill>
+        <p:spPr>
+          <a:xfrm>
+            <a:off x="10651223" y="3641204"/>
+            <a:ext cx="5820932" cy="4092588"/>
+          </a:xfrm>
+          <a:prstGeom prst="rect">
+            <a:avLst/>
+          </a:prstGeom>
+        </p:spPr>
+      </p:pic>
+      <p:pic>
+        <p:nvPicPr>
+          <p:cNvPr id="13" name="Picture 12">
+            <a:extLst>
+              <a:ext uri="{FF2B5EF4-FFF2-40B4-BE49-F238E27FC236}">
+                <a16:creationId xmlns:a16="http://schemas.microsoft.com/office/drawing/2014/main" id="{98DAB128-F3BD-1ECC-5044-BAEE6C3F4487}"/>
+              </a:ext>
+            </a:extLst>
+          </p:cNvPr>
+          <p:cNvPicPr>
+            <a:picLocks noChangeAspect="1"/>
+          </p:cNvPicPr>
+          <p:nvPr/>
+        </p:nvPicPr>
+        <p:blipFill>
+          <a:blip r:embed="rId5"/>
+          <a:stretch>
+            <a:fillRect/>
+          </a:stretch>
+        </p:blipFill>
+        <p:spPr>
+          <a:xfrm>
+            <a:off x="2362200" y="3641204"/>
+            <a:ext cx="7596205" cy="4092588"/>
+          </a:xfrm>
+          <a:prstGeom prst="rect">
+            <a:avLst/>
+          </a:prstGeom>
+        </p:spPr>
+      </p:pic>
+    </p:spTree>
+    <p:extLst>
+      <p:ext uri="{BB962C8B-B14F-4D97-AF65-F5344CB8AC3E}">
+        <p14:creationId xmlns:p14="http://schemas.microsoft.com/office/powerpoint/2010/main" val="1831876244"/>
+      </p:ext>
+    </p:extLst>
+  </p:cSld>
+  <p:clrMapOvr>
+    <a:masterClrMapping/>
+  </p:clrMapOvr>
+</p:sld>
+</file>
+
+<file path=ppt/slides/slide11.xml><?xml version="1.0" encoding="utf-8"?>
 <p:sld xmlns:a="http://schemas.openxmlformats.org/drawingml/2006/main" xmlns:r="http://schemas.openxmlformats.org/officeDocument/2006/relationships" xmlns:p="http://schemas.openxmlformats.org/presentationml/2006/main">
   <p:cSld>
     <p:bg>
@@ -4637,7 +5549,7 @@
         </p:nvSpPr>
         <p:spPr>
           <a:xfrm flipV="1">
-            <a:off x="-9908" y="0"/>
+            <a:off x="-9908" y="-38100"/>
             <a:ext cx="5448300" cy="5448300"/>
           </a:xfrm>
           <a:custGeom>
@@ -4695,7 +5607,7 @@
         </p:nvSpPr>
         <p:spPr>
           <a:xfrm flipH="1">
-            <a:off x="12849610" y="4838700"/>
+            <a:off x="12849610" y="4876800"/>
             <a:ext cx="5448300" cy="5448300"/>
           </a:xfrm>
           <a:custGeom>
@@ -4933,7 +5845,7 @@
         </p:blipFill>
         <p:spPr>
           <a:xfrm>
-            <a:off x="10058400" y="3003287"/>
+            <a:off x="10058400" y="3477677"/>
             <a:ext cx="4724400" cy="4128716"/>
           </a:xfrm>
           <a:prstGeom prst="rect">
@@ -4963,7 +5875,7 @@
         </p:blipFill>
         <p:spPr>
           <a:xfrm>
-            <a:off x="1981200" y="3036440"/>
+            <a:off x="1905000" y="3527484"/>
             <a:ext cx="7506802" cy="3604519"/>
           </a:xfrm>
           <a:prstGeom prst="rect">
@@ -5019,6 +5931,62 @@
           </a:p>
         </p:txBody>
       </p:sp>
+      <p:sp>
+        <p:nvSpPr>
+          <p:cNvPr id="8" name="TextBox 7">
+            <a:extLst>
+              <a:ext uri="{FF2B5EF4-FFF2-40B4-BE49-F238E27FC236}">
+                <a16:creationId xmlns:a16="http://schemas.microsoft.com/office/drawing/2014/main" id="{CFA95F59-926E-6203-5C29-B26546F99DF5}"/>
+              </a:ext>
+            </a:extLst>
+          </p:cNvPr>
+          <p:cNvSpPr txBox="1"/>
+          <p:nvPr/>
+        </p:nvSpPr>
+        <p:spPr>
+          <a:xfrm>
+            <a:off x="2797973" y="1641545"/>
+            <a:ext cx="13911860" cy="1383199"/>
+          </a:xfrm>
+          <a:prstGeom prst="rect">
+            <a:avLst/>
+          </a:prstGeom>
+        </p:spPr>
+        <p:txBody>
+          <a:bodyPr wrap="square" lIns="0" tIns="0" rIns="0" bIns="0" rtlCol="0" anchor="t">
+            <a:spAutoFit/>
+          </a:bodyPr>
+          <a:lstStyle/>
+          <a:p>
+            <a:pPr algn="ctr">
+              <a:lnSpc>
+                <a:spcPts val="12685"/>
+              </a:lnSpc>
+            </a:pPr>
+            <a:r>
+              <a:rPr lang="en-US" sz="4400" b="1" i="1" dirty="0">
+                <a:solidFill>
+                  <a:srgbClr val="002B58"/>
+                </a:solidFill>
+                <a:latin typeface="Rockwell" panose="02060603020205020403" pitchFamily="18" charset="0"/>
+                <a:ea typeface="Readex Pro Semi-Bold"/>
+                <a:cs typeface="Readex Pro Semi-Bold"/>
+                <a:sym typeface="Readex Pro Semi-Bold"/>
+              </a:rPr>
+              <a:t>Using (JOINS)</a:t>
+            </a:r>
+            <a:endParaRPr lang="en-US" sz="2800" b="1" i="1" dirty="0">
+              <a:solidFill>
+                <a:srgbClr val="002B58"/>
+              </a:solidFill>
+              <a:latin typeface="Rockwell" panose="02060603020205020403" pitchFamily="18" charset="0"/>
+              <a:ea typeface="Readex Pro Semi-Bold"/>
+              <a:cs typeface="Readex Pro Semi-Bold"/>
+              <a:sym typeface="Readex Pro Semi-Bold"/>
+            </a:endParaRPr>
+          </a:p>
+        </p:txBody>
+      </p:sp>
     </p:spTree>
     <p:extLst>
       <p:ext uri="{BB962C8B-B14F-4D97-AF65-F5344CB8AC3E}">
@@ -5032,7 +6000,7 @@
 </p:sld>
 </file>
 
-<file path=ppt/slides/slide11.xml><?xml version="1.0" encoding="utf-8"?>
+<file path=ppt/slides/slide12.xml><?xml version="1.0" encoding="utf-8"?>
 <p:sld xmlns:a="http://schemas.openxmlformats.org/drawingml/2006/main" xmlns:r="http://schemas.openxmlformats.org/officeDocument/2006/relationships" xmlns:p="http://schemas.openxmlformats.org/presentationml/2006/main">
   <p:cSld>
     <p:bg>
@@ -5310,7 +6278,7 @@
         <p:spPr>
           <a:xfrm>
             <a:off x="3810000" y="668789"/>
-            <a:ext cx="12616460" cy="3157916"/>
+            <a:ext cx="12616460" cy="1529265"/>
           </a:xfrm>
           <a:prstGeom prst="rect">
             <a:avLst/>
@@ -5337,7 +6305,7 @@
                 <a:cs typeface="Readex Pro Semi-Bold"/>
                 <a:sym typeface="Readex Pro Semi-Bold"/>
               </a:rPr>
-              <a:t>Total orders by email domain with Revenue</a:t>
+              <a:t>Total orders by Email domain</a:t>
             </a:r>
             <a:endParaRPr lang="en-US" sz="6600" b="1" dirty="0">
               <a:solidFill>
@@ -5351,66 +6319,6 @@
           </a:p>
         </p:txBody>
       </p:sp>
-      <p:pic>
-        <p:nvPicPr>
-          <p:cNvPr id="8" name="Picture 7">
-            <a:extLst>
-              <a:ext uri="{FF2B5EF4-FFF2-40B4-BE49-F238E27FC236}">
-                <a16:creationId xmlns:a16="http://schemas.microsoft.com/office/drawing/2014/main" id="{02E68497-E895-8BF3-ECA0-B7748EBAFD1F}"/>
-              </a:ext>
-            </a:extLst>
-          </p:cNvPr>
-          <p:cNvPicPr>
-            <a:picLocks noChangeAspect="1"/>
-          </p:cNvPicPr>
-          <p:nvPr/>
-        </p:nvPicPr>
-        <p:blipFill>
-          <a:blip r:embed="rId4"/>
-          <a:stretch>
-            <a:fillRect/>
-          </a:stretch>
-        </p:blipFill>
-        <p:spPr>
-          <a:xfrm>
-            <a:off x="1530674" y="3989817"/>
-            <a:ext cx="9401751" cy="3854865"/>
-          </a:xfrm>
-          <a:prstGeom prst="rect">
-            <a:avLst/>
-          </a:prstGeom>
-        </p:spPr>
-      </p:pic>
-      <p:pic>
-        <p:nvPicPr>
-          <p:cNvPr id="11" name="Picture 10">
-            <a:extLst>
-              <a:ext uri="{FF2B5EF4-FFF2-40B4-BE49-F238E27FC236}">
-                <a16:creationId xmlns:a16="http://schemas.microsoft.com/office/drawing/2014/main" id="{7BBEB0EC-93C5-A851-0ECF-B03CF408536D}"/>
-              </a:ext>
-            </a:extLst>
-          </p:cNvPr>
-          <p:cNvPicPr>
-            <a:picLocks noChangeAspect="1"/>
-          </p:cNvPicPr>
-          <p:nvPr/>
-        </p:nvPicPr>
-        <p:blipFill>
-          <a:blip r:embed="rId5"/>
-          <a:stretch>
-            <a:fillRect/>
-          </a:stretch>
-        </p:blipFill>
-        <p:spPr>
-          <a:xfrm>
-            <a:off x="11015904" y="4060268"/>
-            <a:ext cx="5495390" cy="2400028"/>
-          </a:xfrm>
-          <a:prstGeom prst="rect">
-            <a:avLst/>
-          </a:prstGeom>
-        </p:spPr>
-      </p:pic>
       <p:sp>
         <p:nvSpPr>
           <p:cNvPr id="6" name="TextBox 5">
@@ -5459,6 +6367,146 @@
           </a:p>
         </p:txBody>
       </p:sp>
+      <p:pic>
+        <p:nvPicPr>
+          <p:cNvPr id="10" name="Picture 9">
+            <a:extLst>
+              <a:ext uri="{FF2B5EF4-FFF2-40B4-BE49-F238E27FC236}">
+                <a16:creationId xmlns:a16="http://schemas.microsoft.com/office/drawing/2014/main" id="{EFBD5E07-0515-E006-19AC-5CF48500EDBB}"/>
+              </a:ext>
+            </a:extLst>
+          </p:cNvPr>
+          <p:cNvPicPr>
+            <a:picLocks noChangeAspect="1"/>
+          </p:cNvPicPr>
+          <p:nvPr/>
+        </p:nvPicPr>
+        <p:blipFill>
+          <a:blip r:embed="rId4"/>
+          <a:stretch>
+            <a:fillRect/>
+          </a:stretch>
+        </p:blipFill>
+        <p:spPr>
+          <a:xfrm>
+            <a:off x="1981200" y="3703231"/>
+            <a:ext cx="8256519" cy="3490137"/>
+          </a:xfrm>
+          <a:prstGeom prst="rect">
+            <a:avLst/>
+          </a:prstGeom>
+        </p:spPr>
+      </p:pic>
+      <p:pic>
+        <p:nvPicPr>
+          <p:cNvPr id="13" name="Picture 12">
+            <a:extLst>
+              <a:ext uri="{FF2B5EF4-FFF2-40B4-BE49-F238E27FC236}">
+                <a16:creationId xmlns:a16="http://schemas.microsoft.com/office/drawing/2014/main" id="{F0524203-BC8C-381D-DDB8-13E42B8F47FF}"/>
+              </a:ext>
+            </a:extLst>
+          </p:cNvPr>
+          <p:cNvPicPr>
+            <a:picLocks noChangeAspect="1"/>
+          </p:cNvPicPr>
+          <p:nvPr/>
+        </p:nvPicPr>
+        <p:blipFill>
+          <a:blip r:embed="rId5"/>
+          <a:stretch>
+            <a:fillRect/>
+          </a:stretch>
+        </p:blipFill>
+        <p:spPr>
+          <a:xfrm>
+            <a:off x="10689608" y="3703231"/>
+            <a:ext cx="4905052" cy="2202269"/>
+          </a:xfrm>
+          <a:prstGeom prst="rect">
+            <a:avLst/>
+          </a:prstGeom>
+        </p:spPr>
+      </p:pic>
+      <p:sp>
+        <p:nvSpPr>
+          <p:cNvPr id="14" name="TextBox 13">
+            <a:extLst>
+              <a:ext uri="{FF2B5EF4-FFF2-40B4-BE49-F238E27FC236}">
+                <a16:creationId xmlns:a16="http://schemas.microsoft.com/office/drawing/2014/main" id="{068B0C43-ABCD-2CFB-8F04-FCD5B230D539}"/>
+              </a:ext>
+            </a:extLst>
+          </p:cNvPr>
+          <p:cNvSpPr txBox="1"/>
+          <p:nvPr/>
+        </p:nvSpPr>
+        <p:spPr>
+          <a:xfrm>
+            <a:off x="2797973" y="1641545"/>
+            <a:ext cx="13911860" cy="1383199"/>
+          </a:xfrm>
+          <a:prstGeom prst="rect">
+            <a:avLst/>
+          </a:prstGeom>
+        </p:spPr>
+        <p:txBody>
+          <a:bodyPr wrap="square" lIns="0" tIns="0" rIns="0" bIns="0" rtlCol="0" anchor="t">
+            <a:spAutoFit/>
+          </a:bodyPr>
+          <a:lstStyle/>
+          <a:p>
+            <a:pPr algn="ctr">
+              <a:lnSpc>
+                <a:spcPts val="12685"/>
+              </a:lnSpc>
+            </a:pPr>
+            <a:r>
+              <a:rPr lang="en-US" sz="4400" b="1" i="1" dirty="0">
+                <a:solidFill>
+                  <a:srgbClr val="002B58"/>
+                </a:solidFill>
+                <a:latin typeface="Rockwell" panose="02060603020205020403" pitchFamily="18" charset="0"/>
+                <a:ea typeface="Readex Pro Semi-Bold"/>
+                <a:cs typeface="Readex Pro Semi-Bold"/>
+                <a:sym typeface="Readex Pro Semi-Bold"/>
+              </a:rPr>
+              <a:t>Using (</a:t>
+            </a:r>
+            <a:r>
+              <a:rPr lang="en-US" sz="4400" b="1" i="1" dirty="0" err="1">
+                <a:solidFill>
+                  <a:srgbClr val="002B58"/>
+                </a:solidFill>
+                <a:latin typeface="Rockwell" panose="02060603020205020403" pitchFamily="18" charset="0"/>
+                <a:ea typeface="Readex Pro Semi-Bold"/>
+                <a:cs typeface="Readex Pro Semi-Bold"/>
+                <a:sym typeface="Readex Pro Semi-Bold"/>
+              </a:rPr>
+              <a:t>Substring_index</a:t>
+            </a:r>
+            <a:r>
+              <a:rPr lang="en-US" sz="4400" b="1" i="1" dirty="0">
+                <a:solidFill>
+                  <a:srgbClr val="002B58"/>
+                </a:solidFill>
+                <a:latin typeface="Rockwell" panose="02060603020205020403" pitchFamily="18" charset="0"/>
+                <a:ea typeface="Readex Pro Semi-Bold"/>
+                <a:cs typeface="Readex Pro Semi-Bold"/>
+                <a:sym typeface="Readex Pro Semi-Bold"/>
+              </a:rPr>
+              <a:t>)</a:t>
+            </a:r>
+            <a:endParaRPr lang="en-US" sz="2800" b="1" i="1" dirty="0">
+              <a:solidFill>
+                <a:srgbClr val="002B58"/>
+              </a:solidFill>
+              <a:latin typeface="Rockwell" panose="02060603020205020403" pitchFamily="18" charset="0"/>
+              <a:ea typeface="Readex Pro Semi-Bold"/>
+              <a:cs typeface="Readex Pro Semi-Bold"/>
+              <a:sym typeface="Readex Pro Semi-Bold"/>
+            </a:endParaRPr>
+          </a:p>
+        </p:txBody>
+      </p:sp>
     </p:spTree>
     <p:extLst>
       <p:ext uri="{BB962C8B-B14F-4D97-AF65-F5344CB8AC3E}">
@@ -5472,7 +6520,7 @@
 </p:sld>
 </file>
 
-<file path=ppt/slides/slide12.xml><?xml version="1.0" encoding="utf-8"?>
+<file path=ppt/slides/slide13.xml><?xml version="1.0" encoding="utf-8"?>
 <p:sld xmlns:a="http://schemas.openxmlformats.org/drawingml/2006/main" xmlns:r="http://schemas.openxmlformats.org/officeDocument/2006/relationships" xmlns:p="http://schemas.openxmlformats.org/presentationml/2006/main">
   <p:cSld>
     <p:bg>
@@ -5911,7 +6959,7 @@
 </p:sld>
 </file>
 
-<file path=ppt/slides/slide13.xml><?xml version="1.0" encoding="utf-8"?>
+<file path=ppt/slides/slide14.xml><?xml version="1.0" encoding="utf-8"?>
 <p:sld xmlns:a="http://schemas.openxmlformats.org/drawingml/2006/main" xmlns:r="http://schemas.openxmlformats.org/officeDocument/2006/relationships" xmlns:p="http://schemas.openxmlformats.org/presentationml/2006/main">
   <p:cSld>
     <p:bg>
@@ -6351,7 +7399,456 @@
 </p:sld>
 </file>
 
-<file path=ppt/slides/slide14.xml><?xml version="1.0" encoding="utf-8"?>
+<file path=ppt/slides/slide15.xml><?xml version="1.0" encoding="utf-8"?>
+<p:sld xmlns:a="http://schemas.openxmlformats.org/drawingml/2006/main" xmlns:r="http://schemas.openxmlformats.org/officeDocument/2006/relationships" xmlns:p="http://schemas.openxmlformats.org/presentationml/2006/main">
+  <p:cSld>
+    <p:bg>
+      <p:bgPr>
+        <a:solidFill>
+          <a:srgbClr val="F8F3ED"/>
+        </a:solidFill>
+        <a:effectLst/>
+      </p:bgPr>
+    </p:bg>
+    <p:spTree>
+      <p:nvGrpSpPr>
+        <p:cNvPr id="1" name="">
+          <a:extLst>
+            <a:ext uri="{FF2B5EF4-FFF2-40B4-BE49-F238E27FC236}">
+              <a16:creationId xmlns:a16="http://schemas.microsoft.com/office/drawing/2014/main" id="{C9AE59D6-284B-06DA-A44B-B3E720324FBB}"/>
+            </a:ext>
+          </a:extLst>
+        </p:cNvPr>
+        <p:cNvGrpSpPr/>
+        <p:nvPr/>
+      </p:nvGrpSpPr>
+      <p:grpSpPr>
+        <a:xfrm>
+          <a:off x="0" y="0"/>
+          <a:ext cx="0" cy="0"/>
+          <a:chOff x="0" y="0"/>
+          <a:chExt cx="0" cy="0"/>
+        </a:xfrm>
+      </p:grpSpPr>
+      <p:sp>
+        <p:nvSpPr>
+          <p:cNvPr id="2" name="Freeform 2">
+            <a:extLst>
+              <a:ext uri="{FF2B5EF4-FFF2-40B4-BE49-F238E27FC236}">
+                <a16:creationId xmlns:a16="http://schemas.microsoft.com/office/drawing/2014/main" id="{74F3AA6D-00D0-F023-44DA-B78843DEF451}"/>
+              </a:ext>
+            </a:extLst>
+          </p:cNvPr>
+          <p:cNvSpPr/>
+          <p:nvPr/>
+        </p:nvSpPr>
+        <p:spPr>
+          <a:xfrm flipV="1">
+            <a:off x="-9908" y="0"/>
+            <a:ext cx="5448300" cy="5448300"/>
+          </a:xfrm>
+          <a:custGeom>
+            <a:avLst/>
+            <a:gdLst/>
+            <a:ahLst/>
+            <a:cxnLst/>
+            <a:rect l="l" t="t" r="r" b="b"/>
+            <a:pathLst>
+              <a:path w="5448300" h="5448300">
+                <a:moveTo>
+                  <a:pt x="0" y="5448300"/>
+                </a:moveTo>
+                <a:lnTo>
+                  <a:pt x="5448300" y="5448300"/>
+                </a:lnTo>
+                <a:lnTo>
+                  <a:pt x="5448300" y="0"/>
+                </a:lnTo>
+                <a:lnTo>
+                  <a:pt x="0" y="0"/>
+                </a:lnTo>
+                <a:lnTo>
+                  <a:pt x="0" y="5448300"/>
+                </a:lnTo>
+                <a:close/>
+              </a:path>
+            </a:pathLst>
+          </a:custGeom>
+          <a:blipFill>
+            <a:blip>
+              <a:extLst>
+                <a:ext uri="{96DAC541-7B7A-43D3-8B79-37D633B846F1}">
+                  <asvg:svgBlip xmlns:asvg="http://schemas.microsoft.com/office/drawing/2016/SVG/main" r:embed="rId2"/>
+                </a:ext>
+              </a:extLst>
+            </a:blip>
+            <a:stretch>
+              <a:fillRect/>
+            </a:stretch>
+          </a:blipFill>
+        </p:spPr>
+      </p:sp>
+      <p:sp>
+        <p:nvSpPr>
+          <p:cNvPr id="3" name="Freeform 3">
+            <a:extLst>
+              <a:ext uri="{FF2B5EF4-FFF2-40B4-BE49-F238E27FC236}">
+                <a16:creationId xmlns:a16="http://schemas.microsoft.com/office/drawing/2014/main" id="{7C14747B-16F2-83A8-BF9B-B2DAFDFB4C97}"/>
+              </a:ext>
+            </a:extLst>
+          </p:cNvPr>
+          <p:cNvSpPr/>
+          <p:nvPr/>
+        </p:nvSpPr>
+        <p:spPr>
+          <a:xfrm flipH="1">
+            <a:off x="12849610" y="4838700"/>
+            <a:ext cx="5448300" cy="5448300"/>
+          </a:xfrm>
+          <a:custGeom>
+            <a:avLst/>
+            <a:gdLst/>
+            <a:ahLst/>
+            <a:cxnLst/>
+            <a:rect l="l" t="t" r="r" b="b"/>
+            <a:pathLst>
+              <a:path w="5448300" h="5448300">
+                <a:moveTo>
+                  <a:pt x="5448300" y="0"/>
+                </a:moveTo>
+                <a:lnTo>
+                  <a:pt x="0" y="0"/>
+                </a:lnTo>
+                <a:lnTo>
+                  <a:pt x="0" y="5448300"/>
+                </a:lnTo>
+                <a:lnTo>
+                  <a:pt x="5448300" y="5448300"/>
+                </a:lnTo>
+                <a:lnTo>
+                  <a:pt x="5448300" y="0"/>
+                </a:lnTo>
+                <a:close/>
+              </a:path>
+            </a:pathLst>
+          </a:custGeom>
+          <a:blipFill>
+            <a:blip>
+              <a:extLst>
+                <a:ext uri="{96DAC541-7B7A-43D3-8B79-37D633B846F1}">
+                  <asvg:svgBlip xmlns:asvg="http://schemas.microsoft.com/office/drawing/2016/SVG/main" r:embed="rId2"/>
+                </a:ext>
+              </a:extLst>
+            </a:blip>
+            <a:stretch>
+              <a:fillRect/>
+            </a:stretch>
+          </a:blipFill>
+        </p:spPr>
+      </p:sp>
+      <p:sp>
+        <p:nvSpPr>
+          <p:cNvPr id="4" name="Freeform 4">
+            <a:extLst>
+              <a:ext uri="{FF2B5EF4-FFF2-40B4-BE49-F238E27FC236}">
+                <a16:creationId xmlns:a16="http://schemas.microsoft.com/office/drawing/2014/main" id="{9D867F9A-4BAD-F880-50FC-61D7D91D1872}"/>
+              </a:ext>
+            </a:extLst>
+          </p:cNvPr>
+          <p:cNvSpPr/>
+          <p:nvPr/>
+        </p:nvSpPr>
+        <p:spPr>
+          <a:xfrm>
+            <a:off x="610206" y="7472290"/>
+            <a:ext cx="836989" cy="2209944"/>
+          </a:xfrm>
+          <a:custGeom>
+            <a:avLst/>
+            <a:gdLst/>
+            <a:ahLst/>
+            <a:cxnLst/>
+            <a:rect l="l" t="t" r="r" b="b"/>
+            <a:pathLst>
+              <a:path w="836989" h="2209944">
+                <a:moveTo>
+                  <a:pt x="0" y="0"/>
+                </a:moveTo>
+                <a:lnTo>
+                  <a:pt x="836988" y="0"/>
+                </a:lnTo>
+                <a:lnTo>
+                  <a:pt x="836988" y="2209945"/>
+                </a:lnTo>
+                <a:lnTo>
+                  <a:pt x="0" y="2209945"/>
+                </a:lnTo>
+                <a:lnTo>
+                  <a:pt x="0" y="0"/>
+                </a:lnTo>
+                <a:close/>
+              </a:path>
+            </a:pathLst>
+          </a:custGeom>
+          <a:blipFill>
+            <a:blip>
+              <a:extLst>
+                <a:ext uri="{96DAC541-7B7A-43D3-8B79-37D633B846F1}">
+                  <asvg:svgBlip xmlns:asvg="http://schemas.microsoft.com/office/drawing/2016/SVG/main" r:embed="rId3"/>
+                </a:ext>
+              </a:extLst>
+            </a:blip>
+            <a:stretch>
+              <a:fillRect/>
+            </a:stretch>
+          </a:blipFill>
+        </p:spPr>
+      </p:sp>
+      <p:sp>
+        <p:nvSpPr>
+          <p:cNvPr id="5" name="Freeform 5">
+            <a:extLst>
+              <a:ext uri="{FF2B5EF4-FFF2-40B4-BE49-F238E27FC236}">
+                <a16:creationId xmlns:a16="http://schemas.microsoft.com/office/drawing/2014/main" id="{E4CE8417-CBFF-3B67-5FA9-CBCBA4474D99}"/>
+              </a:ext>
+            </a:extLst>
+          </p:cNvPr>
+          <p:cNvSpPr/>
+          <p:nvPr/>
+        </p:nvSpPr>
+        <p:spPr>
+          <a:xfrm>
+            <a:off x="16840806" y="604765"/>
+            <a:ext cx="836989" cy="2209944"/>
+          </a:xfrm>
+          <a:custGeom>
+            <a:avLst/>
+            <a:gdLst/>
+            <a:ahLst/>
+            <a:cxnLst/>
+            <a:rect l="l" t="t" r="r" b="b"/>
+            <a:pathLst>
+              <a:path w="836989" h="2209944">
+                <a:moveTo>
+                  <a:pt x="0" y="0"/>
+                </a:moveTo>
+                <a:lnTo>
+                  <a:pt x="836988" y="0"/>
+                </a:lnTo>
+                <a:lnTo>
+                  <a:pt x="836988" y="2209945"/>
+                </a:lnTo>
+                <a:lnTo>
+                  <a:pt x="0" y="2209945"/>
+                </a:lnTo>
+                <a:lnTo>
+                  <a:pt x="0" y="0"/>
+                </a:lnTo>
+                <a:close/>
+              </a:path>
+            </a:pathLst>
+          </a:custGeom>
+          <a:blipFill>
+            <a:blip>
+              <a:extLst>
+                <a:ext uri="{96DAC541-7B7A-43D3-8B79-37D633B846F1}">
+                  <asvg:svgBlip xmlns:asvg="http://schemas.microsoft.com/office/drawing/2016/SVG/main" r:embed="rId3"/>
+                </a:ext>
+              </a:extLst>
+            </a:blip>
+            <a:stretch>
+              <a:fillRect/>
+            </a:stretch>
+          </a:blipFill>
+        </p:spPr>
+      </p:sp>
+      <p:sp>
+        <p:nvSpPr>
+          <p:cNvPr id="6" name="TextBox 5">
+            <a:extLst>
+              <a:ext uri="{FF2B5EF4-FFF2-40B4-BE49-F238E27FC236}">
+                <a16:creationId xmlns:a16="http://schemas.microsoft.com/office/drawing/2014/main" id="{F0D73817-C4C2-3FCC-29F0-96E14CCE68FF}"/>
+              </a:ext>
+            </a:extLst>
+          </p:cNvPr>
+          <p:cNvSpPr txBox="1"/>
+          <p:nvPr/>
+        </p:nvSpPr>
+        <p:spPr>
+          <a:xfrm>
+            <a:off x="3494754" y="850748"/>
+            <a:ext cx="12616460" cy="2981907"/>
+          </a:xfrm>
+          <a:prstGeom prst="rect">
+            <a:avLst/>
+          </a:prstGeom>
+        </p:spPr>
+        <p:txBody>
+          <a:bodyPr wrap="square" lIns="0" tIns="0" rIns="0" bIns="0" rtlCol="0" anchor="t">
+            <a:spAutoFit/>
+          </a:bodyPr>
+          <a:lstStyle/>
+          <a:p>
+            <a:pPr algn="ctr">
+              <a:lnSpc>
+                <a:spcPts val="12685"/>
+              </a:lnSpc>
+            </a:pPr>
+            <a:r>
+              <a:rPr lang="en-US" sz="8000" b="1" dirty="0">
+                <a:solidFill>
+                  <a:srgbClr val="002B58"/>
+                </a:solidFill>
+                <a:latin typeface="Perpetua" panose="02020502060401020303" pitchFamily="18" charset="0"/>
+                <a:ea typeface="Readex Pro Semi-Bold"/>
+                <a:cs typeface="Readex Pro Semi-Bold"/>
+                <a:sym typeface="Readex Pro Semi-Bold"/>
+              </a:rPr>
+              <a:t>Most Expensive Product</a:t>
+            </a:r>
+          </a:p>
+          <a:p>
+            <a:pPr algn="ctr">
+              <a:lnSpc>
+                <a:spcPts val="12685"/>
+              </a:lnSpc>
+            </a:pPr>
+            <a:r>
+              <a:rPr lang="en-US" sz="4400" b="1" i="1" dirty="0">
+                <a:solidFill>
+                  <a:srgbClr val="002B58"/>
+                </a:solidFill>
+                <a:latin typeface="Rockwell" panose="02060603020205020403" pitchFamily="18" charset="0"/>
+                <a:cs typeface="Readex Pro Semi-Bold"/>
+                <a:sym typeface="Readex Pro Semi-Bold"/>
+              </a:rPr>
+              <a:t>Using Subqueries</a:t>
+            </a:r>
+          </a:p>
+        </p:txBody>
+      </p:sp>
+      <p:pic>
+        <p:nvPicPr>
+          <p:cNvPr id="10" name="Picture 9">
+            <a:extLst>
+              <a:ext uri="{FF2B5EF4-FFF2-40B4-BE49-F238E27FC236}">
+                <a16:creationId xmlns:a16="http://schemas.microsoft.com/office/drawing/2014/main" id="{582432F2-274C-81A5-D8A0-3C6EECEE4E97}"/>
+              </a:ext>
+            </a:extLst>
+          </p:cNvPr>
+          <p:cNvPicPr>
+            <a:picLocks noChangeAspect="1"/>
+          </p:cNvPicPr>
+          <p:nvPr/>
+        </p:nvPicPr>
+        <p:blipFill>
+          <a:blip r:embed="rId4"/>
+          <a:stretch>
+            <a:fillRect/>
+          </a:stretch>
+        </p:blipFill>
+        <p:spPr>
+          <a:xfrm>
+            <a:off x="9857413" y="4859412"/>
+            <a:ext cx="6510015" cy="1676400"/>
+          </a:xfrm>
+          <a:prstGeom prst="rect">
+            <a:avLst/>
+          </a:prstGeom>
+        </p:spPr>
+      </p:pic>
+      <p:pic>
+        <p:nvPicPr>
+          <p:cNvPr id="13" name="Picture 12">
+            <a:extLst>
+              <a:ext uri="{FF2B5EF4-FFF2-40B4-BE49-F238E27FC236}">
+                <a16:creationId xmlns:a16="http://schemas.microsoft.com/office/drawing/2014/main" id="{5EA0741F-9968-87C0-6FBB-D29F4462D9D0}"/>
+              </a:ext>
+            </a:extLst>
+          </p:cNvPr>
+          <p:cNvPicPr>
+            <a:picLocks noChangeAspect="1"/>
+          </p:cNvPicPr>
+          <p:nvPr/>
+        </p:nvPicPr>
+        <p:blipFill>
+          <a:blip r:embed="rId5"/>
+          <a:stretch>
+            <a:fillRect/>
+          </a:stretch>
+        </p:blipFill>
+        <p:spPr>
+          <a:xfrm>
+            <a:off x="2075873" y="4511376"/>
+            <a:ext cx="7503555" cy="2879271"/>
+          </a:xfrm>
+          <a:prstGeom prst="rect">
+            <a:avLst/>
+          </a:prstGeom>
+        </p:spPr>
+      </p:pic>
+      <p:sp>
+        <p:nvSpPr>
+          <p:cNvPr id="14" name="TextBox 13">
+            <a:extLst>
+              <a:ext uri="{FF2B5EF4-FFF2-40B4-BE49-F238E27FC236}">
+                <a16:creationId xmlns:a16="http://schemas.microsoft.com/office/drawing/2014/main" id="{2FB24B08-6489-E159-6CD4-0DE28F13F9A6}"/>
+              </a:ext>
+            </a:extLst>
+          </p:cNvPr>
+          <p:cNvSpPr txBox="1"/>
+          <p:nvPr/>
+        </p:nvSpPr>
+        <p:spPr>
+          <a:xfrm>
+            <a:off x="2895600" y="7981286"/>
+            <a:ext cx="8229600" cy="523220"/>
+          </a:xfrm>
+          <a:prstGeom prst="rect">
+            <a:avLst/>
+          </a:prstGeom>
+          <a:solidFill>
+            <a:srgbClr val="FFC000"/>
+          </a:solidFill>
+        </p:spPr>
+        <p:txBody>
+          <a:bodyPr wrap="square" rtlCol="0">
+            <a:spAutoFit/>
+          </a:bodyPr>
+          <a:lstStyle/>
+          <a:p>
+            <a:r>
+              <a:rPr lang="en-US" sz="2800" b="1" dirty="0">
+                <a:solidFill>
+                  <a:srgbClr val="002060"/>
+                </a:solidFill>
+                <a:latin typeface="Bahnschrift" panose="020B0502040204020203" pitchFamily="34" charset="0"/>
+              </a:rPr>
+              <a:t>APPLE IPHONE 16 IS MOST EXPENSIVE PRODUCT</a:t>
+            </a:r>
+            <a:endParaRPr lang="en-IN" sz="2800" b="1" dirty="0">
+              <a:solidFill>
+                <a:srgbClr val="002060"/>
+              </a:solidFill>
+              <a:latin typeface="Bahnschrift" panose="020B0502040204020203" pitchFamily="34" charset="0"/>
+            </a:endParaRPr>
+          </a:p>
+        </p:txBody>
+      </p:sp>
+    </p:spTree>
+    <p:extLst>
+      <p:ext uri="{BB962C8B-B14F-4D97-AF65-F5344CB8AC3E}">
+        <p14:creationId xmlns:p14="http://schemas.microsoft.com/office/powerpoint/2010/main" val="475174190"/>
+      </p:ext>
+    </p:extLst>
+  </p:cSld>
+  <p:clrMapOvr>
+    <a:masterClrMapping/>
+  </p:clrMapOvr>
+</p:sld>
+</file>
+
+<file path=ppt/slides/slide16.xml><?xml version="1.0" encoding="utf-8"?>
 <p:sld xmlns:a="http://schemas.openxmlformats.org/drawingml/2006/main" xmlns:r="http://schemas.openxmlformats.org/officeDocument/2006/relationships" xmlns:p="http://schemas.openxmlformats.org/presentationml/2006/main">
   <p:cSld>
     <p:bg>
@@ -6442,64 +7939,6 @@
       </p:sp>
       <p:sp>
         <p:nvSpPr>
-          <p:cNvPr id="3" name="Freeform 3">
-            <a:extLst>
-              <a:ext uri="{FF2B5EF4-FFF2-40B4-BE49-F238E27FC236}">
-                <a16:creationId xmlns:a16="http://schemas.microsoft.com/office/drawing/2014/main" id="{F419AC10-F14F-2477-A031-BD18C8CDC2DD}"/>
-              </a:ext>
-            </a:extLst>
-          </p:cNvPr>
-          <p:cNvSpPr/>
-          <p:nvPr/>
-        </p:nvSpPr>
-        <p:spPr>
-          <a:xfrm flipH="1">
-            <a:off x="12849610" y="4838700"/>
-            <a:ext cx="5448300" cy="5448300"/>
-          </a:xfrm>
-          <a:custGeom>
-            <a:avLst/>
-            <a:gdLst/>
-            <a:ahLst/>
-            <a:cxnLst/>
-            <a:rect l="l" t="t" r="r" b="b"/>
-            <a:pathLst>
-              <a:path w="5448300" h="5448300">
-                <a:moveTo>
-                  <a:pt x="5448300" y="0"/>
-                </a:moveTo>
-                <a:lnTo>
-                  <a:pt x="0" y="0"/>
-                </a:lnTo>
-                <a:lnTo>
-                  <a:pt x="0" y="5448300"/>
-                </a:lnTo>
-                <a:lnTo>
-                  <a:pt x="5448300" y="5448300"/>
-                </a:lnTo>
-                <a:lnTo>
-                  <a:pt x="5448300" y="0"/>
-                </a:lnTo>
-                <a:close/>
-              </a:path>
-            </a:pathLst>
-          </a:custGeom>
-          <a:blipFill>
-            <a:blip>
-              <a:extLst>
-                <a:ext uri="{96DAC541-7B7A-43D3-8B79-37D633B846F1}">
-                  <asvg:svgBlip xmlns:asvg="http://schemas.microsoft.com/office/drawing/2016/SVG/main" r:embed="rId2"/>
-                </a:ext>
-              </a:extLst>
-            </a:blip>
-            <a:stretch>
-              <a:fillRect/>
-            </a:stretch>
-          </a:blipFill>
-        </p:spPr>
-      </p:sp>
-      <p:sp>
-        <p:nvSpPr>
           <p:cNvPr id="4" name="Freeform 4">
             <a:extLst>
               <a:ext uri="{FF2B5EF4-FFF2-40B4-BE49-F238E27FC236}">
@@ -6692,8 +8131,8 @@
         </p:blipFill>
         <p:spPr>
           <a:xfrm>
-            <a:off x="1905000" y="3150697"/>
-            <a:ext cx="5613532" cy="2966392"/>
+            <a:off x="1667144" y="3591295"/>
+            <a:ext cx="7028308" cy="3714010"/>
           </a:xfrm>
           <a:prstGeom prst="rect">
             <a:avLst/>
@@ -6722,7 +8161,7 @@
         </p:blipFill>
         <p:spPr>
           <a:xfrm>
-            <a:off x="7669402" y="3162102"/>
+            <a:off x="8915400" y="2910386"/>
             <a:ext cx="7028308" cy="5448300"/>
           </a:xfrm>
           <a:prstGeom prst="rect">
@@ -6778,6 +8217,64 @@
           </a:p>
         </p:txBody>
       </p:sp>
+      <p:sp>
+        <p:nvSpPr>
+          <p:cNvPr id="3" name="Freeform 3">
+            <a:extLst>
+              <a:ext uri="{FF2B5EF4-FFF2-40B4-BE49-F238E27FC236}">
+                <a16:creationId xmlns:a16="http://schemas.microsoft.com/office/drawing/2014/main" id="{F419AC10-F14F-2477-A031-BD18C8CDC2DD}"/>
+              </a:ext>
+            </a:extLst>
+          </p:cNvPr>
+          <p:cNvSpPr/>
+          <p:nvPr/>
+        </p:nvSpPr>
+        <p:spPr>
+          <a:xfrm flipH="1">
+            <a:off x="12849610" y="4838700"/>
+            <a:ext cx="5448300" cy="5448300"/>
+          </a:xfrm>
+          <a:custGeom>
+            <a:avLst/>
+            <a:gdLst/>
+            <a:ahLst/>
+            <a:cxnLst/>
+            <a:rect l="l" t="t" r="r" b="b"/>
+            <a:pathLst>
+              <a:path w="5448300" h="5448300">
+                <a:moveTo>
+                  <a:pt x="5448300" y="0"/>
+                </a:moveTo>
+                <a:lnTo>
+                  <a:pt x="0" y="0"/>
+                </a:lnTo>
+                <a:lnTo>
+                  <a:pt x="0" y="5448300"/>
+                </a:lnTo>
+                <a:lnTo>
+                  <a:pt x="5448300" y="5448300"/>
+                </a:lnTo>
+                <a:lnTo>
+                  <a:pt x="5448300" y="0"/>
+                </a:lnTo>
+                <a:close/>
+              </a:path>
+            </a:pathLst>
+          </a:custGeom>
+          <a:blipFill>
+            <a:blip>
+              <a:extLst>
+                <a:ext uri="{96DAC541-7B7A-43D3-8B79-37D633B846F1}">
+                  <asvg:svgBlip xmlns:asvg="http://schemas.microsoft.com/office/drawing/2016/SVG/main" r:embed="rId2"/>
+                </a:ext>
+              </a:extLst>
+            </a:blip>
+            <a:stretch>
+              <a:fillRect/>
+            </a:stretch>
+          </a:blipFill>
+        </p:spPr>
+      </p:sp>
     </p:spTree>
     <p:extLst>
       <p:ext uri="{BB962C8B-B14F-4D97-AF65-F5344CB8AC3E}">
@@ -6791,7 +8288,7 @@
 </p:sld>
 </file>
 
-<file path=ppt/slides/slide15.xml><?xml version="1.0" encoding="utf-8"?>
+<file path=ppt/slides/slide17.xml><?xml version="1.0" encoding="utf-8"?>
 <p:sld xmlns:a="http://schemas.openxmlformats.org/drawingml/2006/main" xmlns:r="http://schemas.openxmlformats.org/officeDocument/2006/relationships" xmlns:p="http://schemas.openxmlformats.org/presentationml/2006/main">
   <p:cSld>
     <p:bg>
@@ -7010,8 +8507,8 @@
         </p:nvSpPr>
         <p:spPr>
           <a:xfrm>
-            <a:off x="3810000" y="668789"/>
-            <a:ext cx="12616460" cy="3157916"/>
+            <a:off x="3810000" y="1123656"/>
+            <a:ext cx="12616460" cy="2462213"/>
           </a:xfrm>
           <a:prstGeom prst="rect">
             <a:avLst/>
@@ -7023,11 +8520,7 @@
           </a:bodyPr>
           <a:lstStyle/>
           <a:p>
-            <a:pPr algn="ctr">
-              <a:lnSpc>
-                <a:spcPts val="12685"/>
-              </a:lnSpc>
-            </a:pPr>
+            <a:pPr algn="ctr"/>
             <a:r>
               <a:rPr lang="en-US" sz="8000" b="1" dirty="0">
                 <a:solidFill>
@@ -7042,11 +8535,7 @@
             </a:r>
           </a:p>
           <a:p>
-            <a:pPr algn="ctr">
-              <a:lnSpc>
-                <a:spcPts val="12685"/>
-              </a:lnSpc>
-            </a:pPr>
+            <a:pPr algn="ctr"/>
             <a:r>
               <a:rPr lang="en-US" sz="8000" b="1" dirty="0">
                 <a:solidFill>
@@ -7057,7 +8546,7 @@
                 <a:cs typeface="Readex Pro Semi-Bold"/>
                 <a:sym typeface="Readex Pro Semi-Bold"/>
               </a:rPr>
-              <a:t>By order count</a:t>
+              <a:t>by order count</a:t>
             </a:r>
             <a:endParaRPr lang="en-US" sz="6600" b="1" dirty="0">
               <a:solidFill>
@@ -7268,7 +8757,7 @@
 </p:sld>
 </file>
 
-<file path=ppt/slides/slide16.xml><?xml version="1.0" encoding="utf-8"?>
+<file path=ppt/slides/slide18.xml><?xml version="1.0" encoding="utf-8"?>
 <p:sld xmlns:a="http://schemas.openxmlformats.org/drawingml/2006/main" xmlns:r="http://schemas.openxmlformats.org/officeDocument/2006/relationships" xmlns:p="http://schemas.openxmlformats.org/presentationml/2006/main">
   <p:cSld>
     <p:bg>
@@ -7726,7 +9215,7 @@
 </p:sld>
 </file>
 
-<file path=ppt/slides/slide17.xml><?xml version="1.0" encoding="utf-8"?>
+<file path=ppt/slides/slide19.xml><?xml version="1.0" encoding="utf-8"?>
 <p:sld xmlns:a="http://schemas.openxmlformats.org/drawingml/2006/main" xmlns:r="http://schemas.openxmlformats.org/officeDocument/2006/relationships" xmlns:p="http://schemas.openxmlformats.org/presentationml/2006/main">
   <p:cSld>
     <p:bg>
@@ -8003,7 +9492,7 @@
         </p:nvSpPr>
         <p:spPr>
           <a:xfrm>
-            <a:off x="3810000" y="668789"/>
+            <a:off x="3705006" y="1179358"/>
             <a:ext cx="12616460" cy="1529265"/>
           </a:xfrm>
           <a:prstGeom prst="rect">
@@ -8031,7 +9520,7 @@
                 <a:cs typeface="Readex Pro Semi-Bold"/>
                 <a:sym typeface="Readex Pro Semi-Bold"/>
               </a:rPr>
-              <a:t>Products-wise In Transit</a:t>
+              <a:t>Products-wise “In Transit”</a:t>
             </a:r>
             <a:endParaRPr lang="en-US" sz="6600" b="1" dirty="0">
               <a:solidFill>
@@ -8067,7 +9556,7 @@
         </p:blipFill>
         <p:spPr>
           <a:xfrm>
-            <a:off x="10591800" y="2680639"/>
+            <a:off x="10613570" y="3165248"/>
             <a:ext cx="6263067" cy="4367861"/>
           </a:xfrm>
           <a:prstGeom prst="rect">
@@ -8097,7 +9586,7 @@
         </p:blipFill>
         <p:spPr>
           <a:xfrm>
-            <a:off x="2422845" y="2656568"/>
+            <a:off x="2362200" y="3176134"/>
             <a:ext cx="7930648" cy="4544332"/>
           </a:xfrm>
           <a:prstGeom prst="rect">
@@ -8105,288 +9594,12 @@
           </a:prstGeom>
         </p:spPr>
       </p:pic>
-    </p:spTree>
-    <p:extLst>
-      <p:ext uri="{BB962C8B-B14F-4D97-AF65-F5344CB8AC3E}">
-        <p14:creationId xmlns:p14="http://schemas.microsoft.com/office/powerpoint/2010/main" val="3388310826"/>
-      </p:ext>
-    </p:extLst>
-  </p:cSld>
-  <p:clrMapOvr>
-    <a:masterClrMapping/>
-  </p:clrMapOvr>
-</p:sld>
-</file>
-
-<file path=ppt/slides/slide18.xml><?xml version="1.0" encoding="utf-8"?>
-<p:sld xmlns:a="http://schemas.openxmlformats.org/drawingml/2006/main" xmlns:r="http://schemas.openxmlformats.org/officeDocument/2006/relationships" xmlns:p="http://schemas.openxmlformats.org/presentationml/2006/main">
-  <p:cSld>
-    <p:bg>
-      <p:bgPr>
-        <a:solidFill>
-          <a:srgbClr val="F8F3ED"/>
-        </a:solidFill>
-        <a:effectLst/>
-      </p:bgPr>
-    </p:bg>
-    <p:spTree>
-      <p:nvGrpSpPr>
-        <p:cNvPr id="1" name="">
-          <a:extLst>
-            <a:ext uri="{FF2B5EF4-FFF2-40B4-BE49-F238E27FC236}">
-              <a16:creationId xmlns:a16="http://schemas.microsoft.com/office/drawing/2014/main" id="{570299F2-8DE4-FDE6-ED93-B1CEC01B5685}"/>
-            </a:ext>
-          </a:extLst>
-        </p:cNvPr>
-        <p:cNvGrpSpPr/>
-        <p:nvPr/>
-      </p:nvGrpSpPr>
-      <p:grpSpPr>
-        <a:xfrm>
-          <a:off x="0" y="0"/>
-          <a:ext cx="0" cy="0"/>
-          <a:chOff x="0" y="0"/>
-          <a:chExt cx="0" cy="0"/>
-        </a:xfrm>
-      </p:grpSpPr>
-      <p:sp>
-        <p:nvSpPr>
-          <p:cNvPr id="2" name="Freeform 2">
-            <a:extLst>
-              <a:ext uri="{FF2B5EF4-FFF2-40B4-BE49-F238E27FC236}">
-                <a16:creationId xmlns:a16="http://schemas.microsoft.com/office/drawing/2014/main" id="{0401A22C-DF8B-73AF-D0D6-A6354B31025D}"/>
-              </a:ext>
-            </a:extLst>
-          </p:cNvPr>
-          <p:cNvSpPr/>
-          <p:nvPr/>
-        </p:nvSpPr>
-        <p:spPr>
-          <a:xfrm flipV="1">
-            <a:off x="-9908" y="0"/>
-            <a:ext cx="5448300" cy="5448300"/>
-          </a:xfrm>
-          <a:custGeom>
-            <a:avLst/>
-            <a:gdLst/>
-            <a:ahLst/>
-            <a:cxnLst/>
-            <a:rect l="l" t="t" r="r" b="b"/>
-            <a:pathLst>
-              <a:path w="5448300" h="5448300">
-                <a:moveTo>
-                  <a:pt x="0" y="5448300"/>
-                </a:moveTo>
-                <a:lnTo>
-                  <a:pt x="5448300" y="5448300"/>
-                </a:lnTo>
-                <a:lnTo>
-                  <a:pt x="5448300" y="0"/>
-                </a:lnTo>
-                <a:lnTo>
-                  <a:pt x="0" y="0"/>
-                </a:lnTo>
-                <a:lnTo>
-                  <a:pt x="0" y="5448300"/>
-                </a:lnTo>
-                <a:close/>
-              </a:path>
-            </a:pathLst>
-          </a:custGeom>
-          <a:blipFill>
-            <a:blip>
-              <a:extLst>
-                <a:ext uri="{96DAC541-7B7A-43D3-8B79-37D633B846F1}">
-                  <asvg:svgBlip xmlns:asvg="http://schemas.microsoft.com/office/drawing/2016/SVG/main" r:embed="rId2"/>
-                </a:ext>
-              </a:extLst>
-            </a:blip>
-            <a:stretch>
-              <a:fillRect/>
-            </a:stretch>
-          </a:blipFill>
-        </p:spPr>
-      </p:sp>
-      <p:sp>
-        <p:nvSpPr>
-          <p:cNvPr id="3" name="Freeform 3">
-            <a:extLst>
-              <a:ext uri="{FF2B5EF4-FFF2-40B4-BE49-F238E27FC236}">
-                <a16:creationId xmlns:a16="http://schemas.microsoft.com/office/drawing/2014/main" id="{A97F75B4-73FA-B6A2-9287-52EB73B730A7}"/>
-              </a:ext>
-            </a:extLst>
-          </p:cNvPr>
-          <p:cNvSpPr/>
-          <p:nvPr/>
-        </p:nvSpPr>
-        <p:spPr>
-          <a:xfrm flipH="1">
-            <a:off x="12849610" y="4838700"/>
-            <a:ext cx="5448300" cy="5448300"/>
-          </a:xfrm>
-          <a:custGeom>
-            <a:avLst/>
-            <a:gdLst/>
-            <a:ahLst/>
-            <a:cxnLst/>
-            <a:rect l="l" t="t" r="r" b="b"/>
-            <a:pathLst>
-              <a:path w="5448300" h="5448300">
-                <a:moveTo>
-                  <a:pt x="5448300" y="0"/>
-                </a:moveTo>
-                <a:lnTo>
-                  <a:pt x="0" y="0"/>
-                </a:lnTo>
-                <a:lnTo>
-                  <a:pt x="0" y="5448300"/>
-                </a:lnTo>
-                <a:lnTo>
-                  <a:pt x="5448300" y="5448300"/>
-                </a:lnTo>
-                <a:lnTo>
-                  <a:pt x="5448300" y="0"/>
-                </a:lnTo>
-                <a:close/>
-              </a:path>
-            </a:pathLst>
-          </a:custGeom>
-          <a:blipFill>
-            <a:blip>
-              <a:extLst>
-                <a:ext uri="{96DAC541-7B7A-43D3-8B79-37D633B846F1}">
-                  <asvg:svgBlip xmlns:asvg="http://schemas.microsoft.com/office/drawing/2016/SVG/main" r:embed="rId2"/>
-                </a:ext>
-              </a:extLst>
-            </a:blip>
-            <a:stretch>
-              <a:fillRect/>
-            </a:stretch>
-          </a:blipFill>
-        </p:spPr>
-      </p:sp>
-      <p:sp>
-        <p:nvSpPr>
-          <p:cNvPr id="4" name="Freeform 4">
-            <a:extLst>
-              <a:ext uri="{FF2B5EF4-FFF2-40B4-BE49-F238E27FC236}">
-                <a16:creationId xmlns:a16="http://schemas.microsoft.com/office/drawing/2014/main" id="{AFD627CD-6C9E-D40E-0CC2-C8B309D6F92D}"/>
-              </a:ext>
-            </a:extLst>
-          </p:cNvPr>
-          <p:cNvSpPr/>
-          <p:nvPr/>
-        </p:nvSpPr>
-        <p:spPr>
-          <a:xfrm>
-            <a:off x="610206" y="7472290"/>
-            <a:ext cx="836989" cy="2209944"/>
-          </a:xfrm>
-          <a:custGeom>
-            <a:avLst/>
-            <a:gdLst/>
-            <a:ahLst/>
-            <a:cxnLst/>
-            <a:rect l="l" t="t" r="r" b="b"/>
-            <a:pathLst>
-              <a:path w="836989" h="2209944">
-                <a:moveTo>
-                  <a:pt x="0" y="0"/>
-                </a:moveTo>
-                <a:lnTo>
-                  <a:pt x="836988" y="0"/>
-                </a:lnTo>
-                <a:lnTo>
-                  <a:pt x="836988" y="2209945"/>
-                </a:lnTo>
-                <a:lnTo>
-                  <a:pt x="0" y="2209945"/>
-                </a:lnTo>
-                <a:lnTo>
-                  <a:pt x="0" y="0"/>
-                </a:lnTo>
-                <a:close/>
-              </a:path>
-            </a:pathLst>
-          </a:custGeom>
-          <a:blipFill>
-            <a:blip>
-              <a:extLst>
-                <a:ext uri="{96DAC541-7B7A-43D3-8B79-37D633B846F1}">
-                  <asvg:svgBlip xmlns:asvg="http://schemas.microsoft.com/office/drawing/2016/SVG/main" r:embed="rId3"/>
-                </a:ext>
-              </a:extLst>
-            </a:blip>
-            <a:stretch>
-              <a:fillRect/>
-            </a:stretch>
-          </a:blipFill>
-        </p:spPr>
-      </p:sp>
-      <p:sp>
-        <p:nvSpPr>
-          <p:cNvPr id="5" name="Freeform 5">
-            <a:extLst>
-              <a:ext uri="{FF2B5EF4-FFF2-40B4-BE49-F238E27FC236}">
-                <a16:creationId xmlns:a16="http://schemas.microsoft.com/office/drawing/2014/main" id="{D2A370F1-98A3-D7BA-3A1D-E66F42E09C87}"/>
-              </a:ext>
-            </a:extLst>
-          </p:cNvPr>
-          <p:cNvSpPr/>
-          <p:nvPr/>
-        </p:nvSpPr>
-        <p:spPr>
-          <a:xfrm>
-            <a:off x="16840806" y="604765"/>
-            <a:ext cx="836989" cy="2209944"/>
-          </a:xfrm>
-          <a:custGeom>
-            <a:avLst/>
-            <a:gdLst/>
-            <a:ahLst/>
-            <a:cxnLst/>
-            <a:rect l="l" t="t" r="r" b="b"/>
-            <a:pathLst>
-              <a:path w="836989" h="2209944">
-                <a:moveTo>
-                  <a:pt x="0" y="0"/>
-                </a:moveTo>
-                <a:lnTo>
-                  <a:pt x="836988" y="0"/>
-                </a:lnTo>
-                <a:lnTo>
-                  <a:pt x="836988" y="2209945"/>
-                </a:lnTo>
-                <a:lnTo>
-                  <a:pt x="0" y="2209945"/>
-                </a:lnTo>
-                <a:lnTo>
-                  <a:pt x="0" y="0"/>
-                </a:lnTo>
-                <a:close/>
-              </a:path>
-            </a:pathLst>
-          </a:custGeom>
-          <a:blipFill>
-            <a:blip>
-              <a:extLst>
-                <a:ext uri="{96DAC541-7B7A-43D3-8B79-37D633B846F1}">
-                  <asvg:svgBlip xmlns:asvg="http://schemas.microsoft.com/office/drawing/2016/SVG/main" r:embed="rId3"/>
-                </a:ext>
-              </a:extLst>
-            </a:blip>
-            <a:stretch>
-              <a:fillRect/>
-            </a:stretch>
-          </a:blipFill>
-        </p:spPr>
-      </p:sp>
       <p:sp>
         <p:nvSpPr>
           <p:cNvPr id="7" name="TextBox 6">
             <a:extLst>
               <a:ext uri="{FF2B5EF4-FFF2-40B4-BE49-F238E27FC236}">
-                <a16:creationId xmlns:a16="http://schemas.microsoft.com/office/drawing/2014/main" id="{DC65176E-54FA-3755-A3F9-D66D81863C9F}"/>
+                <a16:creationId xmlns:a16="http://schemas.microsoft.com/office/drawing/2014/main" id="{FF8C7342-8261-B5B1-7E15-B43330E3435A}"/>
               </a:ext>
             </a:extLst>
           </p:cNvPr>
@@ -8395,533 +9608,8 @@
         </p:nvSpPr>
         <p:spPr>
           <a:xfrm>
-            <a:off x="2714242" y="1709737"/>
-            <a:ext cx="13911860" cy="1492781"/>
-          </a:xfrm>
-          <a:prstGeom prst="rect">
-            <a:avLst/>
-          </a:prstGeom>
-        </p:spPr>
-        <p:txBody>
-          <a:bodyPr wrap="square" lIns="0" tIns="0" rIns="0" bIns="0" rtlCol="0" anchor="t">
-            <a:spAutoFit/>
-          </a:bodyPr>
-          <a:lstStyle/>
-          <a:p>
-            <a:pPr algn="ctr">
-              <a:lnSpc>
-                <a:spcPts val="12685"/>
-              </a:lnSpc>
-            </a:pPr>
-            <a:r>
-              <a:rPr lang="en-US" sz="9060" b="1" dirty="0">
-                <a:solidFill>
-                  <a:srgbClr val="002B58"/>
-                </a:solidFill>
-                <a:latin typeface="Rockwell Extra Bold" panose="02060903040505020403" pitchFamily="18" charset="0"/>
-                <a:ea typeface="Readex Pro Semi-Bold"/>
-                <a:cs typeface="Readex Pro Semi-Bold"/>
-                <a:sym typeface="Readex Pro Semi-Bold"/>
-              </a:rPr>
-              <a:t>Orders Insights</a:t>
-            </a:r>
-          </a:p>
-        </p:txBody>
-      </p:sp>
-      <p:sp>
-        <p:nvSpPr>
-          <p:cNvPr id="6" name="TextBox 5">
-            <a:extLst>
-              <a:ext uri="{FF2B5EF4-FFF2-40B4-BE49-F238E27FC236}">
-                <a16:creationId xmlns:a16="http://schemas.microsoft.com/office/drawing/2014/main" id="{15BC79B9-B1BC-736F-6E0D-976765AD38CC}"/>
-              </a:ext>
-            </a:extLst>
-          </p:cNvPr>
-          <p:cNvSpPr txBox="1"/>
-          <p:nvPr/>
-        </p:nvSpPr>
-        <p:spPr>
-          <a:xfrm>
-            <a:off x="3955172" y="3816591"/>
-            <a:ext cx="11430000" cy="3477875"/>
-          </a:xfrm>
-          <a:prstGeom prst="rect">
-            <a:avLst/>
-          </a:prstGeom>
-          <a:noFill/>
-        </p:spPr>
-        <p:txBody>
-          <a:bodyPr wrap="square" rtlCol="0">
-            <a:spAutoFit/>
-          </a:bodyPr>
-          <a:lstStyle/>
-          <a:p>
-            <a:pPr marL="742950" indent="-742950">
-              <a:buAutoNum type="arabicPeriod"/>
-            </a:pPr>
-            <a:r>
-              <a:rPr lang="en-US" sz="4400" dirty="0">
-                <a:latin typeface="Cascadia Code" panose="020B0609020000020004" pitchFamily="49" charset="0"/>
-                <a:cs typeface="Cascadia Code" panose="020B0609020000020004" pitchFamily="49" charset="0"/>
-              </a:rPr>
-              <a:t>Order Status Distribution</a:t>
-            </a:r>
-          </a:p>
-          <a:p>
-            <a:pPr marL="742950" indent="-742950">
-              <a:buAutoNum type="arabicPeriod"/>
-            </a:pPr>
-            <a:r>
-              <a:rPr lang="en-US" sz="4400" dirty="0">
-                <a:latin typeface="Cascadia Code" panose="020B0609020000020004" pitchFamily="49" charset="0"/>
-                <a:cs typeface="Cascadia Code" panose="020B0609020000020004" pitchFamily="49" charset="0"/>
-              </a:rPr>
-              <a:t>Top 10 Days with Highest Orders</a:t>
-            </a:r>
-          </a:p>
-          <a:p>
-            <a:pPr marL="742950" indent="-742950">
-              <a:buAutoNum type="arabicPeriod"/>
-            </a:pPr>
-            <a:r>
-              <a:rPr lang="en-US" sz="4400" dirty="0">
-                <a:latin typeface="Cascadia Code" panose="020B0609020000020004" pitchFamily="49" charset="0"/>
-                <a:cs typeface="Cascadia Code" panose="020B0609020000020004" pitchFamily="49" charset="0"/>
-              </a:rPr>
-              <a:t>Top 10 Total Orders by year</a:t>
-            </a:r>
-          </a:p>
-          <a:p>
-            <a:pPr marL="742950" indent="-742950">
-              <a:buAutoNum type="arabicPeriod"/>
-            </a:pPr>
-            <a:r>
-              <a:rPr lang="en-US" sz="4400" dirty="0">
-                <a:latin typeface="Cascadia Code" panose="020B0609020000020004" pitchFamily="49" charset="0"/>
-                <a:cs typeface="Cascadia Code" panose="020B0609020000020004" pitchFamily="49" charset="0"/>
-              </a:rPr>
-              <a:t>Total Revenue by Year</a:t>
-            </a:r>
-          </a:p>
-          <a:p>
-            <a:pPr marL="742950" indent="-742950">
-              <a:buAutoNum type="arabicPeriod"/>
-            </a:pPr>
-            <a:endParaRPr lang="en-IN" sz="4400" dirty="0">
-              <a:latin typeface="Cascadia Code" panose="020B0609020000020004" pitchFamily="49" charset="0"/>
-              <a:cs typeface="Cascadia Code" panose="020B0609020000020004" pitchFamily="49" charset="0"/>
-            </a:endParaRPr>
-          </a:p>
-        </p:txBody>
-      </p:sp>
-    </p:spTree>
-    <p:extLst>
-      <p:ext uri="{BB962C8B-B14F-4D97-AF65-F5344CB8AC3E}">
-        <p14:creationId xmlns:p14="http://schemas.microsoft.com/office/powerpoint/2010/main" val="3915144476"/>
-      </p:ext>
-    </p:extLst>
-  </p:cSld>
-  <p:clrMapOvr>
-    <a:masterClrMapping/>
-  </p:clrMapOvr>
-</p:sld>
-</file>
-
-<file path=ppt/slides/slide19.xml><?xml version="1.0" encoding="utf-8"?>
-<p:sld xmlns:a="http://schemas.openxmlformats.org/drawingml/2006/main" xmlns:r="http://schemas.openxmlformats.org/officeDocument/2006/relationships" xmlns:p="http://schemas.openxmlformats.org/presentationml/2006/main">
-  <p:cSld>
-    <p:bg>
-      <p:bgPr>
-        <a:solidFill>
-          <a:srgbClr val="F8F3ED"/>
-        </a:solidFill>
-        <a:effectLst/>
-      </p:bgPr>
-    </p:bg>
-    <p:spTree>
-      <p:nvGrpSpPr>
-        <p:cNvPr id="1" name="">
-          <a:extLst>
-            <a:ext uri="{FF2B5EF4-FFF2-40B4-BE49-F238E27FC236}">
-              <a16:creationId xmlns:a16="http://schemas.microsoft.com/office/drawing/2014/main" id="{5340A724-792B-8835-0E38-0C750AC7BCAE}"/>
-            </a:ext>
-          </a:extLst>
-        </p:cNvPr>
-        <p:cNvGrpSpPr/>
-        <p:nvPr/>
-      </p:nvGrpSpPr>
-      <p:grpSpPr>
-        <a:xfrm>
-          <a:off x="0" y="0"/>
-          <a:ext cx="0" cy="0"/>
-          <a:chOff x="0" y="0"/>
-          <a:chExt cx="0" cy="0"/>
-        </a:xfrm>
-      </p:grpSpPr>
-      <p:sp>
-        <p:nvSpPr>
-          <p:cNvPr id="2" name="Freeform 2">
-            <a:extLst>
-              <a:ext uri="{FF2B5EF4-FFF2-40B4-BE49-F238E27FC236}">
-                <a16:creationId xmlns:a16="http://schemas.microsoft.com/office/drawing/2014/main" id="{5F22191A-5200-AAAC-1929-DFFD51EE1A1F}"/>
-              </a:ext>
-            </a:extLst>
-          </p:cNvPr>
-          <p:cNvSpPr/>
-          <p:nvPr/>
-        </p:nvSpPr>
-        <p:spPr>
-          <a:xfrm flipV="1">
-            <a:off x="-9908" y="0"/>
-            <a:ext cx="5448300" cy="5448300"/>
-          </a:xfrm>
-          <a:custGeom>
-            <a:avLst/>
-            <a:gdLst/>
-            <a:ahLst/>
-            <a:cxnLst/>
-            <a:rect l="l" t="t" r="r" b="b"/>
-            <a:pathLst>
-              <a:path w="5448300" h="5448300">
-                <a:moveTo>
-                  <a:pt x="0" y="5448300"/>
-                </a:moveTo>
-                <a:lnTo>
-                  <a:pt x="5448300" y="5448300"/>
-                </a:lnTo>
-                <a:lnTo>
-                  <a:pt x="5448300" y="0"/>
-                </a:lnTo>
-                <a:lnTo>
-                  <a:pt x="0" y="0"/>
-                </a:lnTo>
-                <a:lnTo>
-                  <a:pt x="0" y="5448300"/>
-                </a:lnTo>
-                <a:close/>
-              </a:path>
-            </a:pathLst>
-          </a:custGeom>
-          <a:blipFill>
-            <a:blip>
-              <a:extLst>
-                <a:ext uri="{96DAC541-7B7A-43D3-8B79-37D633B846F1}">
-                  <asvg:svgBlip xmlns:asvg="http://schemas.microsoft.com/office/drawing/2016/SVG/main" r:embed="rId2"/>
-                </a:ext>
-              </a:extLst>
-            </a:blip>
-            <a:stretch>
-              <a:fillRect/>
-            </a:stretch>
-          </a:blipFill>
-        </p:spPr>
-      </p:sp>
-      <p:sp>
-        <p:nvSpPr>
-          <p:cNvPr id="3" name="Freeform 3">
-            <a:extLst>
-              <a:ext uri="{FF2B5EF4-FFF2-40B4-BE49-F238E27FC236}">
-                <a16:creationId xmlns:a16="http://schemas.microsoft.com/office/drawing/2014/main" id="{8D91B05C-9C2D-6ADF-BB68-984FA2F6CE29}"/>
-              </a:ext>
-            </a:extLst>
-          </p:cNvPr>
-          <p:cNvSpPr/>
-          <p:nvPr/>
-        </p:nvSpPr>
-        <p:spPr>
-          <a:xfrm flipH="1">
-            <a:off x="12849610" y="4838700"/>
-            <a:ext cx="5448300" cy="5448300"/>
-          </a:xfrm>
-          <a:custGeom>
-            <a:avLst/>
-            <a:gdLst/>
-            <a:ahLst/>
-            <a:cxnLst/>
-            <a:rect l="l" t="t" r="r" b="b"/>
-            <a:pathLst>
-              <a:path w="5448300" h="5448300">
-                <a:moveTo>
-                  <a:pt x="5448300" y="0"/>
-                </a:moveTo>
-                <a:lnTo>
-                  <a:pt x="0" y="0"/>
-                </a:lnTo>
-                <a:lnTo>
-                  <a:pt x="0" y="5448300"/>
-                </a:lnTo>
-                <a:lnTo>
-                  <a:pt x="5448300" y="5448300"/>
-                </a:lnTo>
-                <a:lnTo>
-                  <a:pt x="5448300" y="0"/>
-                </a:lnTo>
-                <a:close/>
-              </a:path>
-            </a:pathLst>
-          </a:custGeom>
-          <a:blipFill>
-            <a:blip>
-              <a:extLst>
-                <a:ext uri="{96DAC541-7B7A-43D3-8B79-37D633B846F1}">
-                  <asvg:svgBlip xmlns:asvg="http://schemas.microsoft.com/office/drawing/2016/SVG/main" r:embed="rId2"/>
-                </a:ext>
-              </a:extLst>
-            </a:blip>
-            <a:stretch>
-              <a:fillRect/>
-            </a:stretch>
-          </a:blipFill>
-        </p:spPr>
-      </p:sp>
-      <p:sp>
-        <p:nvSpPr>
-          <p:cNvPr id="4" name="Freeform 4">
-            <a:extLst>
-              <a:ext uri="{FF2B5EF4-FFF2-40B4-BE49-F238E27FC236}">
-                <a16:creationId xmlns:a16="http://schemas.microsoft.com/office/drawing/2014/main" id="{9E39B145-531D-C5F1-A320-1A86D6F862B1}"/>
-              </a:ext>
-            </a:extLst>
-          </p:cNvPr>
-          <p:cNvSpPr/>
-          <p:nvPr/>
-        </p:nvSpPr>
-        <p:spPr>
-          <a:xfrm>
-            <a:off x="610206" y="7472290"/>
-            <a:ext cx="836989" cy="2209944"/>
-          </a:xfrm>
-          <a:custGeom>
-            <a:avLst/>
-            <a:gdLst/>
-            <a:ahLst/>
-            <a:cxnLst/>
-            <a:rect l="l" t="t" r="r" b="b"/>
-            <a:pathLst>
-              <a:path w="836989" h="2209944">
-                <a:moveTo>
-                  <a:pt x="0" y="0"/>
-                </a:moveTo>
-                <a:lnTo>
-                  <a:pt x="836988" y="0"/>
-                </a:lnTo>
-                <a:lnTo>
-                  <a:pt x="836988" y="2209945"/>
-                </a:lnTo>
-                <a:lnTo>
-                  <a:pt x="0" y="2209945"/>
-                </a:lnTo>
-                <a:lnTo>
-                  <a:pt x="0" y="0"/>
-                </a:lnTo>
-                <a:close/>
-              </a:path>
-            </a:pathLst>
-          </a:custGeom>
-          <a:blipFill>
-            <a:blip>
-              <a:extLst>
-                <a:ext uri="{96DAC541-7B7A-43D3-8B79-37D633B846F1}">
-                  <asvg:svgBlip xmlns:asvg="http://schemas.microsoft.com/office/drawing/2016/SVG/main" r:embed="rId3"/>
-                </a:ext>
-              </a:extLst>
-            </a:blip>
-            <a:stretch>
-              <a:fillRect/>
-            </a:stretch>
-          </a:blipFill>
-        </p:spPr>
-      </p:sp>
-      <p:sp>
-        <p:nvSpPr>
-          <p:cNvPr id="5" name="Freeform 5">
-            <a:extLst>
-              <a:ext uri="{FF2B5EF4-FFF2-40B4-BE49-F238E27FC236}">
-                <a16:creationId xmlns:a16="http://schemas.microsoft.com/office/drawing/2014/main" id="{C1746DC5-DC88-740A-3E3C-AFCF84CA1798}"/>
-              </a:ext>
-            </a:extLst>
-          </p:cNvPr>
-          <p:cNvSpPr/>
-          <p:nvPr/>
-        </p:nvSpPr>
-        <p:spPr>
-          <a:xfrm>
-            <a:off x="16840806" y="604765"/>
-            <a:ext cx="836989" cy="2209944"/>
-          </a:xfrm>
-          <a:custGeom>
-            <a:avLst/>
-            <a:gdLst/>
-            <a:ahLst/>
-            <a:cxnLst/>
-            <a:rect l="l" t="t" r="r" b="b"/>
-            <a:pathLst>
-              <a:path w="836989" h="2209944">
-                <a:moveTo>
-                  <a:pt x="0" y="0"/>
-                </a:moveTo>
-                <a:lnTo>
-                  <a:pt x="836988" y="0"/>
-                </a:lnTo>
-                <a:lnTo>
-                  <a:pt x="836988" y="2209945"/>
-                </a:lnTo>
-                <a:lnTo>
-                  <a:pt x="0" y="2209945"/>
-                </a:lnTo>
-                <a:lnTo>
-                  <a:pt x="0" y="0"/>
-                </a:lnTo>
-                <a:close/>
-              </a:path>
-            </a:pathLst>
-          </a:custGeom>
-          <a:blipFill>
-            <a:blip>
-              <a:extLst>
-                <a:ext uri="{96DAC541-7B7A-43D3-8B79-37D633B846F1}">
-                  <asvg:svgBlip xmlns:asvg="http://schemas.microsoft.com/office/drawing/2016/SVG/main" r:embed="rId3"/>
-                </a:ext>
-              </a:extLst>
-            </a:blip>
-            <a:stretch>
-              <a:fillRect/>
-            </a:stretch>
-          </a:blipFill>
-        </p:spPr>
-      </p:sp>
-      <p:sp>
-        <p:nvSpPr>
-          <p:cNvPr id="6" name="TextBox 5">
-            <a:extLst>
-              <a:ext uri="{FF2B5EF4-FFF2-40B4-BE49-F238E27FC236}">
-                <a16:creationId xmlns:a16="http://schemas.microsoft.com/office/drawing/2014/main" id="{F549A010-E3AB-45B7-0CD3-DFDB50C165CA}"/>
-              </a:ext>
-            </a:extLst>
-          </p:cNvPr>
-          <p:cNvSpPr txBox="1"/>
-          <p:nvPr/>
-        </p:nvSpPr>
-        <p:spPr>
-          <a:xfrm>
-            <a:off x="3352800" y="1959517"/>
-            <a:ext cx="12616460" cy="1529265"/>
-          </a:xfrm>
-          <a:prstGeom prst="rect">
-            <a:avLst/>
-          </a:prstGeom>
-        </p:spPr>
-        <p:txBody>
-          <a:bodyPr wrap="square" lIns="0" tIns="0" rIns="0" bIns="0" rtlCol="0" anchor="t">
-            <a:spAutoFit/>
-          </a:bodyPr>
-          <a:lstStyle/>
-          <a:p>
-            <a:pPr algn="ctr">
-              <a:lnSpc>
-                <a:spcPts val="12685"/>
-              </a:lnSpc>
-            </a:pPr>
-            <a:r>
-              <a:rPr lang="en-US" sz="8000" b="1" dirty="0">
-                <a:solidFill>
-                  <a:srgbClr val="002B58"/>
-                </a:solidFill>
-                <a:latin typeface="Perpetua" panose="02020502060401020303" pitchFamily="18" charset="0"/>
-                <a:ea typeface="Readex Pro Semi-Bold"/>
-                <a:cs typeface="Readex Pro Semi-Bold"/>
-                <a:sym typeface="Readex Pro Semi-Bold"/>
-              </a:rPr>
-              <a:t>Order Status Distribution</a:t>
-            </a:r>
-            <a:endParaRPr lang="en-US" sz="6600" b="1" dirty="0">
-              <a:solidFill>
-                <a:srgbClr val="002B58"/>
-              </a:solidFill>
-              <a:latin typeface="Perpetua" panose="02020502060401020303" pitchFamily="18" charset="0"/>
-              <a:ea typeface="Readex Pro Semi-Bold"/>
-              <a:cs typeface="Readex Pro Semi-Bold"/>
-              <a:sym typeface="Readex Pro Semi-Bold"/>
-            </a:endParaRPr>
-          </a:p>
-        </p:txBody>
-      </p:sp>
-      <p:pic>
-        <p:nvPicPr>
-          <p:cNvPr id="8" name="Picture 7">
-            <a:extLst>
-              <a:ext uri="{FF2B5EF4-FFF2-40B4-BE49-F238E27FC236}">
-                <a16:creationId xmlns:a16="http://schemas.microsoft.com/office/drawing/2014/main" id="{06F43ADF-3725-7663-3A8A-328EFFA58535}"/>
-              </a:ext>
-            </a:extLst>
-          </p:cNvPr>
-          <p:cNvPicPr>
-            <a:picLocks noChangeAspect="1"/>
-          </p:cNvPicPr>
-          <p:nvPr/>
-        </p:nvPicPr>
-        <p:blipFill>
-          <a:blip r:embed="rId4"/>
-          <a:stretch>
-            <a:fillRect/>
-          </a:stretch>
-        </p:blipFill>
-        <p:spPr>
-          <a:xfrm>
-            <a:off x="9829800" y="4176607"/>
-            <a:ext cx="5106959" cy="2543386"/>
-          </a:xfrm>
-          <a:prstGeom prst="rect">
-            <a:avLst/>
-          </a:prstGeom>
-        </p:spPr>
-      </p:pic>
-      <p:pic>
-        <p:nvPicPr>
-          <p:cNvPr id="10" name="Picture 9">
-            <a:extLst>
-              <a:ext uri="{FF2B5EF4-FFF2-40B4-BE49-F238E27FC236}">
-                <a16:creationId xmlns:a16="http://schemas.microsoft.com/office/drawing/2014/main" id="{51443BE8-6632-3B70-2DF8-73F017A34E8B}"/>
-              </a:ext>
-            </a:extLst>
-          </p:cNvPr>
-          <p:cNvPicPr>
-            <a:picLocks noChangeAspect="1"/>
-          </p:cNvPicPr>
-          <p:nvPr/>
-        </p:nvPicPr>
-        <p:blipFill>
-          <a:blip r:embed="rId5"/>
-          <a:stretch>
-            <a:fillRect/>
-          </a:stretch>
-        </p:blipFill>
-        <p:spPr>
-          <a:xfrm>
-            <a:off x="2133600" y="4176607"/>
-            <a:ext cx="7266820" cy="2543386"/>
-          </a:xfrm>
-          <a:prstGeom prst="rect">
-            <a:avLst/>
-          </a:prstGeom>
-        </p:spPr>
-      </p:pic>
-      <p:sp>
-        <p:nvSpPr>
-          <p:cNvPr id="7" name="TextBox 6">
-            <a:extLst>
-              <a:ext uri="{FF2B5EF4-FFF2-40B4-BE49-F238E27FC236}">
-                <a16:creationId xmlns:a16="http://schemas.microsoft.com/office/drawing/2014/main" id="{B270C394-3704-0B18-E9A2-3D9CFF44D2F7}"/>
-              </a:ext>
-            </a:extLst>
-          </p:cNvPr>
-          <p:cNvSpPr txBox="1"/>
-          <p:nvPr/>
-        </p:nvSpPr>
-        <p:spPr>
-          <a:xfrm>
-            <a:off x="4934485" y="7382086"/>
-            <a:ext cx="7266820" cy="523220"/>
+            <a:off x="3705006" y="8331996"/>
+            <a:ext cx="9555770" cy="523220"/>
           </a:xfrm>
           <a:prstGeom prst="rect">
             <a:avLst/>
@@ -8943,7 +9631,7 @@
                 </a:solidFill>
                 <a:latin typeface="Bahnschrift" panose="020B0502040204020203" pitchFamily="34" charset="0"/>
               </a:rPr>
-              <a:t>MOST PRODUCTS ARE  ‘IN TRANSIT’ = 25145</a:t>
+              <a:t>MOSTLY APPLE IPHONE 16 PRODUCTS ARE “IN TRANSIT”</a:t>
             </a:r>
             <a:endParaRPr lang="en-IN" sz="2800" b="1" dirty="0">
               <a:solidFill>
@@ -8957,7 +9645,7 @@
     </p:spTree>
     <p:extLst>
       <p:ext uri="{BB962C8B-B14F-4D97-AF65-F5344CB8AC3E}">
-        <p14:creationId xmlns:p14="http://schemas.microsoft.com/office/powerpoint/2010/main" val="3743301246"/>
+        <p14:creationId xmlns:p14="http://schemas.microsoft.com/office/powerpoint/2010/main" val="3388310826"/>
       </p:ext>
     </p:extLst>
   </p:cSld>
@@ -9208,8 +9896,8 @@
         </p:nvSpPr>
         <p:spPr>
           <a:xfrm>
-            <a:off x="3690340" y="1744732"/>
-            <a:ext cx="12616460" cy="1500347"/>
+            <a:off x="2269671" y="974429"/>
+            <a:ext cx="13716000" cy="3121432"/>
           </a:xfrm>
           <a:prstGeom prst="rect">
             <a:avLst/>
@@ -9227,196 +9915,65 @@
               </a:lnSpc>
             </a:pPr>
             <a:r>
-              <a:rPr lang="en-US" sz="9060" b="1" dirty="0">
+              <a:rPr lang="en-US" sz="9060" b="1" u="sng" dirty="0">
                 <a:solidFill>
                   <a:srgbClr val="002B58"/>
                 </a:solidFill>
-                <a:latin typeface="Readex Pro Semi-Bold"/>
+                <a:latin typeface="Rockwell Extra Bold" panose="02060903040505020403" pitchFamily="18" charset="0"/>
                 <a:ea typeface="Readex Pro Semi-Bold"/>
                 <a:cs typeface="Readex Pro Semi-Bold"/>
                 <a:sym typeface="Readex Pro Semi-Bold"/>
               </a:rPr>
-              <a:t>DATASET CONTAINS</a:t>
+              <a:t>PROBLEM STATEMENT</a:t>
             </a:r>
           </a:p>
         </p:txBody>
       </p:sp>
       <p:sp>
         <p:nvSpPr>
-          <p:cNvPr id="9" name="Rectangle: Diagonal Corners Rounded 8">
-            <a:extLst>
-              <a:ext uri="{FF2B5EF4-FFF2-40B4-BE49-F238E27FC236}">
-                <a16:creationId xmlns:a16="http://schemas.microsoft.com/office/drawing/2014/main" id="{02B646FF-7E78-4B36-D81F-B93AAC79B64E}"/>
-              </a:ext>
-            </a:extLst>
-          </p:cNvPr>
-          <p:cNvSpPr/>
-          <p:nvPr/>
-        </p:nvSpPr>
-        <p:spPr>
-          <a:xfrm>
-            <a:off x="2286000" y="7789720"/>
-            <a:ext cx="4419600" cy="1314450"/>
-          </a:xfrm>
-          <a:prstGeom prst="round2DiagRect">
-            <a:avLst>
-              <a:gd name="adj1" fmla="val 16667"/>
-              <a:gd name="adj2" fmla="val 50000"/>
-            </a:avLst>
+          <p:cNvPr id="8" name="TextBox 7">
+            <a:extLst>
+              <a:ext uri="{FF2B5EF4-FFF2-40B4-BE49-F238E27FC236}">
+                <a16:creationId xmlns:a16="http://schemas.microsoft.com/office/drawing/2014/main" id="{687F32F9-311C-0431-94E5-7F25DC085114}"/>
+              </a:ext>
+            </a:extLst>
+          </p:cNvPr>
+          <p:cNvSpPr txBox="1"/>
+          <p:nvPr/>
+        </p:nvSpPr>
+        <p:spPr>
+          <a:xfrm>
+            <a:off x="1847850" y="4838700"/>
+            <a:ext cx="13716000" cy="3046988"/>
+          </a:xfrm>
+          <a:prstGeom prst="rect">
+            <a:avLst/>
           </a:prstGeom>
           <a:solidFill>
-            <a:schemeClr val="accent5">
-              <a:alpha val="50000"/>
+            <a:schemeClr val="accent1">
+              <a:lumMod val="40000"/>
+              <a:lumOff val="60000"/>
             </a:schemeClr>
           </a:solidFill>
-          <a:ln>
-            <a:noFill/>
-          </a:ln>
-        </p:spPr>
-        <p:style>
-          <a:lnRef idx="0">
-            <a:scrgbClr r="0" g="0" b="0"/>
-          </a:lnRef>
-          <a:fillRef idx="0">
-            <a:scrgbClr r="0" g="0" b="0"/>
-          </a:fillRef>
-          <a:effectRef idx="0">
-            <a:scrgbClr r="0" g="0" b="0"/>
-          </a:effectRef>
-          <a:fontRef idx="minor">
-            <a:schemeClr val="lt1"/>
-          </a:fontRef>
-        </p:style>
+        </p:spPr>
         <p:txBody>
-          <a:bodyPr rtlCol="0" anchor="ctr"/>
+          <a:bodyPr wrap="square">
+            <a:spAutoFit/>
+          </a:bodyPr>
           <a:lstStyle/>
           <a:p>
-            <a:pPr algn="ctr"/>
             <a:r>
-              <a:rPr lang="en-US" sz="4400" dirty="0">
-                <a:solidFill>
-                  <a:schemeClr val="tx2">
-                    <a:lumMod val="50000"/>
-                  </a:schemeClr>
-                </a:solidFill>
-                <a:latin typeface="Arial Rounded MT Bold" panose="020F0704030504030204" pitchFamily="34" charset="0"/>
+              <a:rPr lang="en-US" sz="4800" dirty="0">
+                <a:latin typeface="Bell MT" panose="02020503060305020303" pitchFamily="18" charset="0"/>
               </a:rPr>
-              <a:t>100K ROWS</a:t>
+              <a:t>The objective of this project is to analyze large-scale e-commerce data (100K+ records) from Flipkart to uncover meaningful insights about customer behavior, product performance, and order trends.</a:t>
             </a:r>
-            <a:endParaRPr lang="en-IN" sz="4400" dirty="0">
-              <a:solidFill>
-                <a:schemeClr val="tx2">
-                  <a:lumMod val="50000"/>
-                </a:schemeClr>
-              </a:solidFill>
-              <a:latin typeface="Arial Rounded MT Bold" panose="020F0704030504030204" pitchFamily="34" charset="0"/>
+            <a:endParaRPr lang="en-IN" sz="4800" dirty="0">
+              <a:latin typeface="Bell MT" panose="02020503060305020303" pitchFamily="18" charset="0"/>
             </a:endParaRPr>
           </a:p>
         </p:txBody>
       </p:sp>
-      <p:sp>
-        <p:nvSpPr>
-          <p:cNvPr id="10" name="Rectangle: Diagonal Corners Rounded 9">
-            <a:extLst>
-              <a:ext uri="{FF2B5EF4-FFF2-40B4-BE49-F238E27FC236}">
-                <a16:creationId xmlns:a16="http://schemas.microsoft.com/office/drawing/2014/main" id="{C3A7A127-7412-4EA9-9021-FFE52621C854}"/>
-              </a:ext>
-            </a:extLst>
-          </p:cNvPr>
-          <p:cNvSpPr/>
-          <p:nvPr/>
-        </p:nvSpPr>
-        <p:spPr>
-          <a:xfrm>
-            <a:off x="7586738" y="7789720"/>
-            <a:ext cx="4990495" cy="1314450"/>
-          </a:xfrm>
-          <a:prstGeom prst="round2DiagRect">
-            <a:avLst>
-              <a:gd name="adj1" fmla="val 16667"/>
-              <a:gd name="adj2" fmla="val 50000"/>
-            </a:avLst>
-          </a:prstGeom>
-          <a:solidFill>
-            <a:schemeClr val="accent5">
-              <a:alpha val="50000"/>
-            </a:schemeClr>
-          </a:solidFill>
-          <a:ln>
-            <a:noFill/>
-          </a:ln>
-        </p:spPr>
-        <p:style>
-          <a:lnRef idx="0">
-            <a:scrgbClr r="0" g="0" b="0"/>
-          </a:lnRef>
-          <a:fillRef idx="0">
-            <a:scrgbClr r="0" g="0" b="0"/>
-          </a:fillRef>
-          <a:effectRef idx="0">
-            <a:scrgbClr r="0" g="0" b="0"/>
-          </a:effectRef>
-          <a:fontRef idx="minor">
-            <a:schemeClr val="lt1"/>
-          </a:fontRef>
-        </p:style>
-        <p:txBody>
-          <a:bodyPr rtlCol="0" anchor="ctr"/>
-          <a:lstStyle/>
-          <a:p>
-            <a:pPr algn="ctr"/>
-            <a:r>
-              <a:rPr lang="en-US" sz="4400" dirty="0">
-                <a:solidFill>
-                  <a:schemeClr val="tx2">
-                    <a:lumMod val="50000"/>
-                  </a:schemeClr>
-                </a:solidFill>
-                <a:latin typeface="Arial Rounded MT Bold" panose="020F0704030504030204" pitchFamily="34" charset="0"/>
-              </a:rPr>
-              <a:t>14 COLUMNS</a:t>
-            </a:r>
-            <a:endParaRPr lang="en-IN" sz="4400" dirty="0">
-              <a:solidFill>
-                <a:schemeClr val="tx2">
-                  <a:lumMod val="50000"/>
-                </a:schemeClr>
-              </a:solidFill>
-              <a:latin typeface="Arial Rounded MT Bold" panose="020F0704030504030204" pitchFamily="34" charset="0"/>
-            </a:endParaRPr>
-          </a:p>
-        </p:txBody>
-      </p:sp>
-      <p:pic>
-        <p:nvPicPr>
-          <p:cNvPr id="14" name="Picture 13">
-            <a:extLst>
-              <a:ext uri="{FF2B5EF4-FFF2-40B4-BE49-F238E27FC236}">
-                <a16:creationId xmlns:a16="http://schemas.microsoft.com/office/drawing/2014/main" id="{522254BD-6DB1-C7AD-11EB-998AD006E0CA}"/>
-              </a:ext>
-            </a:extLst>
-          </p:cNvPr>
-          <p:cNvPicPr>
-            <a:picLocks noChangeAspect="1"/>
-          </p:cNvPicPr>
-          <p:nvPr/>
-        </p:nvPicPr>
-        <p:blipFill>
-          <a:blip r:embed="rId4"/>
-          <a:stretch>
-            <a:fillRect/>
-          </a:stretch>
-        </p:blipFill>
-        <p:spPr>
-          <a:xfrm>
-            <a:off x="1098556" y="3655870"/>
-            <a:ext cx="16090887" cy="3621230"/>
-          </a:xfrm>
-          <a:prstGeom prst="rect">
-            <a:avLst/>
-          </a:prstGeom>
-        </p:spPr>
-      </p:pic>
     </p:spTree>
   </p:cSld>
   <p:clrMapOvr>
@@ -9441,7 +9998,7 @@
         <p:cNvPr id="1" name="">
           <a:extLst>
             <a:ext uri="{FF2B5EF4-FFF2-40B4-BE49-F238E27FC236}">
-              <a16:creationId xmlns:a16="http://schemas.microsoft.com/office/drawing/2014/main" id="{0A27AD7A-3FF4-18DA-E993-5FB51F749A85}"/>
+              <a16:creationId xmlns:a16="http://schemas.microsoft.com/office/drawing/2014/main" id="{570299F2-8DE4-FDE6-ED93-B1CEC01B5685}"/>
             </a:ext>
           </a:extLst>
         </p:cNvPr>
@@ -9461,7 +10018,7 @@
           <p:cNvPr id="2" name="Freeform 2">
             <a:extLst>
               <a:ext uri="{FF2B5EF4-FFF2-40B4-BE49-F238E27FC236}">
-                <a16:creationId xmlns:a16="http://schemas.microsoft.com/office/drawing/2014/main" id="{1642D6A4-139A-6EE3-7CFB-6C58522EA196}"/>
+                <a16:creationId xmlns:a16="http://schemas.microsoft.com/office/drawing/2014/main" id="{0401A22C-DF8B-73AF-D0D6-A6354B31025D}"/>
               </a:ext>
             </a:extLst>
           </p:cNvPr>
@@ -9519,7 +10076,7 @@
           <p:cNvPr id="3" name="Freeform 3">
             <a:extLst>
               <a:ext uri="{FF2B5EF4-FFF2-40B4-BE49-F238E27FC236}">
-                <a16:creationId xmlns:a16="http://schemas.microsoft.com/office/drawing/2014/main" id="{15313AE2-4DFF-4280-E5B4-5F9410C44E23}"/>
+                <a16:creationId xmlns:a16="http://schemas.microsoft.com/office/drawing/2014/main" id="{A97F75B4-73FA-B6A2-9287-52EB73B730A7}"/>
               </a:ext>
             </a:extLst>
           </p:cNvPr>
@@ -9577,7 +10134,7 @@
           <p:cNvPr id="4" name="Freeform 4">
             <a:extLst>
               <a:ext uri="{FF2B5EF4-FFF2-40B4-BE49-F238E27FC236}">
-                <a16:creationId xmlns:a16="http://schemas.microsoft.com/office/drawing/2014/main" id="{DC4BA261-12ED-B906-54C9-296CC1853654}"/>
+                <a16:creationId xmlns:a16="http://schemas.microsoft.com/office/drawing/2014/main" id="{AFD627CD-6C9E-D40E-0CC2-C8B309D6F92D}"/>
               </a:ext>
             </a:extLst>
           </p:cNvPr>
@@ -9635,7 +10192,7 @@
           <p:cNvPr id="5" name="Freeform 5">
             <a:extLst>
               <a:ext uri="{FF2B5EF4-FFF2-40B4-BE49-F238E27FC236}">
-                <a16:creationId xmlns:a16="http://schemas.microsoft.com/office/drawing/2014/main" id="{AAA7516D-8DB7-5B8C-FFAC-C171E88FE88E}"/>
+                <a16:creationId xmlns:a16="http://schemas.microsoft.com/office/drawing/2014/main" id="{D2A370F1-98A3-D7BA-3A1D-E66F42E09C87}"/>
               </a:ext>
             </a:extLst>
           </p:cNvPr>
@@ -9690,10 +10247,57 @@
       </p:sp>
       <p:sp>
         <p:nvSpPr>
+          <p:cNvPr id="7" name="TextBox 6">
+            <a:extLst>
+              <a:ext uri="{FF2B5EF4-FFF2-40B4-BE49-F238E27FC236}">
+                <a16:creationId xmlns:a16="http://schemas.microsoft.com/office/drawing/2014/main" id="{DC65176E-54FA-3755-A3F9-D66D81863C9F}"/>
+              </a:ext>
+            </a:extLst>
+          </p:cNvPr>
+          <p:cNvSpPr txBox="1"/>
+          <p:nvPr/>
+        </p:nvSpPr>
+        <p:spPr>
+          <a:xfrm>
+            <a:off x="2714242" y="1709737"/>
+            <a:ext cx="13911860" cy="1492781"/>
+          </a:xfrm>
+          <a:prstGeom prst="rect">
+            <a:avLst/>
+          </a:prstGeom>
+        </p:spPr>
+        <p:txBody>
+          <a:bodyPr wrap="square" lIns="0" tIns="0" rIns="0" bIns="0" rtlCol="0" anchor="t">
+            <a:spAutoFit/>
+          </a:bodyPr>
+          <a:lstStyle/>
+          <a:p>
+            <a:pPr algn="ctr">
+              <a:lnSpc>
+                <a:spcPts val="12685"/>
+              </a:lnSpc>
+            </a:pPr>
+            <a:r>
+              <a:rPr lang="en-US" sz="9060" b="1" dirty="0">
+                <a:solidFill>
+                  <a:srgbClr val="002B58"/>
+                </a:solidFill>
+                <a:latin typeface="Rockwell Extra Bold" panose="02060903040505020403" pitchFamily="18" charset="0"/>
+                <a:ea typeface="Readex Pro Semi-Bold"/>
+                <a:cs typeface="Readex Pro Semi-Bold"/>
+                <a:sym typeface="Readex Pro Semi-Bold"/>
+              </a:rPr>
+              <a:t>Orders Insights</a:t>
+            </a:r>
+          </a:p>
+        </p:txBody>
+      </p:sp>
+      <p:sp>
+        <p:nvSpPr>
           <p:cNvPr id="6" name="TextBox 5">
             <a:extLst>
               <a:ext uri="{FF2B5EF4-FFF2-40B4-BE49-F238E27FC236}">
-                <a16:creationId xmlns:a16="http://schemas.microsoft.com/office/drawing/2014/main" id="{41A3E4D4-4046-DCFB-E9CB-9CB80B053B0A}"/>
+                <a16:creationId xmlns:a16="http://schemas.microsoft.com/office/drawing/2014/main" id="{15BC79B9-B1BC-736F-6E0D-976765AD38CC}"/>
               </a:ext>
             </a:extLst>
           </p:cNvPr>
@@ -9702,8 +10306,358 @@
         </p:nvSpPr>
         <p:spPr>
           <a:xfrm>
-            <a:off x="3810000" y="668789"/>
-            <a:ext cx="12616460" cy="3157916"/>
+            <a:off x="3955172" y="3816591"/>
+            <a:ext cx="11430000" cy="2800767"/>
+          </a:xfrm>
+          <a:prstGeom prst="rect">
+            <a:avLst/>
+          </a:prstGeom>
+          <a:noFill/>
+        </p:spPr>
+        <p:txBody>
+          <a:bodyPr wrap="square" rtlCol="0">
+            <a:spAutoFit/>
+          </a:bodyPr>
+          <a:lstStyle/>
+          <a:p>
+            <a:pPr marL="742950" indent="-742950">
+              <a:buAutoNum type="arabicPeriod"/>
+            </a:pPr>
+            <a:r>
+              <a:rPr lang="en-US" sz="4400" dirty="0">
+                <a:latin typeface="Cascadia Code" panose="020B0609020000020004" pitchFamily="49" charset="0"/>
+                <a:cs typeface="Cascadia Code" panose="020B0609020000020004" pitchFamily="49" charset="0"/>
+              </a:rPr>
+              <a:t>Order Status Distribution</a:t>
+            </a:r>
+          </a:p>
+          <a:p>
+            <a:pPr marL="742950" indent="-742950">
+              <a:buAutoNum type="arabicPeriod"/>
+            </a:pPr>
+            <a:r>
+              <a:rPr lang="en-US" sz="4400" dirty="0">
+                <a:latin typeface="Cascadia Code" panose="020B0609020000020004" pitchFamily="49" charset="0"/>
+                <a:cs typeface="Cascadia Code" panose="020B0609020000020004" pitchFamily="49" charset="0"/>
+              </a:rPr>
+              <a:t>Top 10 Total Orders by year</a:t>
+            </a:r>
+          </a:p>
+          <a:p>
+            <a:pPr marL="742950" indent="-742950">
+              <a:buAutoNum type="arabicPeriod"/>
+            </a:pPr>
+            <a:r>
+              <a:rPr lang="en-US" sz="4400" dirty="0">
+                <a:latin typeface="Cascadia Code" panose="020B0609020000020004" pitchFamily="49" charset="0"/>
+                <a:cs typeface="Cascadia Code" panose="020B0609020000020004" pitchFamily="49" charset="0"/>
+              </a:rPr>
+              <a:t>Total Revenue by Year</a:t>
+            </a:r>
+          </a:p>
+          <a:p>
+            <a:pPr marL="742950" indent="-742950">
+              <a:buAutoNum type="arabicPeriod"/>
+            </a:pPr>
+            <a:endParaRPr lang="en-IN" sz="4400" dirty="0">
+              <a:latin typeface="Cascadia Code" panose="020B0609020000020004" pitchFamily="49" charset="0"/>
+              <a:cs typeface="Cascadia Code" panose="020B0609020000020004" pitchFamily="49" charset="0"/>
+            </a:endParaRPr>
+          </a:p>
+        </p:txBody>
+      </p:sp>
+    </p:spTree>
+    <p:extLst>
+      <p:ext uri="{BB962C8B-B14F-4D97-AF65-F5344CB8AC3E}">
+        <p14:creationId xmlns:p14="http://schemas.microsoft.com/office/powerpoint/2010/main" val="3915144476"/>
+      </p:ext>
+    </p:extLst>
+  </p:cSld>
+  <p:clrMapOvr>
+    <a:masterClrMapping/>
+  </p:clrMapOvr>
+</p:sld>
+</file>
+
+<file path=ppt/slides/slide21.xml><?xml version="1.0" encoding="utf-8"?>
+<p:sld xmlns:a="http://schemas.openxmlformats.org/drawingml/2006/main" xmlns:r="http://schemas.openxmlformats.org/officeDocument/2006/relationships" xmlns:p="http://schemas.openxmlformats.org/presentationml/2006/main">
+  <p:cSld>
+    <p:bg>
+      <p:bgPr>
+        <a:solidFill>
+          <a:srgbClr val="F8F3ED"/>
+        </a:solidFill>
+        <a:effectLst/>
+      </p:bgPr>
+    </p:bg>
+    <p:spTree>
+      <p:nvGrpSpPr>
+        <p:cNvPr id="1" name="">
+          <a:extLst>
+            <a:ext uri="{FF2B5EF4-FFF2-40B4-BE49-F238E27FC236}">
+              <a16:creationId xmlns:a16="http://schemas.microsoft.com/office/drawing/2014/main" id="{5340A724-792B-8835-0E38-0C750AC7BCAE}"/>
+            </a:ext>
+          </a:extLst>
+        </p:cNvPr>
+        <p:cNvGrpSpPr/>
+        <p:nvPr/>
+      </p:nvGrpSpPr>
+      <p:grpSpPr>
+        <a:xfrm>
+          <a:off x="0" y="0"/>
+          <a:ext cx="0" cy="0"/>
+          <a:chOff x="0" y="0"/>
+          <a:chExt cx="0" cy="0"/>
+        </a:xfrm>
+      </p:grpSpPr>
+      <p:sp>
+        <p:nvSpPr>
+          <p:cNvPr id="2" name="Freeform 2">
+            <a:extLst>
+              <a:ext uri="{FF2B5EF4-FFF2-40B4-BE49-F238E27FC236}">
+                <a16:creationId xmlns:a16="http://schemas.microsoft.com/office/drawing/2014/main" id="{5F22191A-5200-AAAC-1929-DFFD51EE1A1F}"/>
+              </a:ext>
+            </a:extLst>
+          </p:cNvPr>
+          <p:cNvSpPr/>
+          <p:nvPr/>
+        </p:nvSpPr>
+        <p:spPr>
+          <a:xfrm flipV="1">
+            <a:off x="-9908" y="-38100"/>
+            <a:ext cx="5448300" cy="5448300"/>
+          </a:xfrm>
+          <a:custGeom>
+            <a:avLst/>
+            <a:gdLst/>
+            <a:ahLst/>
+            <a:cxnLst/>
+            <a:rect l="l" t="t" r="r" b="b"/>
+            <a:pathLst>
+              <a:path w="5448300" h="5448300">
+                <a:moveTo>
+                  <a:pt x="0" y="5448300"/>
+                </a:moveTo>
+                <a:lnTo>
+                  <a:pt x="5448300" y="5448300"/>
+                </a:lnTo>
+                <a:lnTo>
+                  <a:pt x="5448300" y="0"/>
+                </a:lnTo>
+                <a:lnTo>
+                  <a:pt x="0" y="0"/>
+                </a:lnTo>
+                <a:lnTo>
+                  <a:pt x="0" y="5448300"/>
+                </a:lnTo>
+                <a:close/>
+              </a:path>
+            </a:pathLst>
+          </a:custGeom>
+          <a:blipFill>
+            <a:blip>
+              <a:extLst>
+                <a:ext uri="{96DAC541-7B7A-43D3-8B79-37D633B846F1}">
+                  <asvg:svgBlip xmlns:asvg="http://schemas.microsoft.com/office/drawing/2016/SVG/main" r:embed="rId2"/>
+                </a:ext>
+              </a:extLst>
+            </a:blip>
+            <a:stretch>
+              <a:fillRect/>
+            </a:stretch>
+          </a:blipFill>
+        </p:spPr>
+      </p:sp>
+      <p:sp>
+        <p:nvSpPr>
+          <p:cNvPr id="3" name="Freeform 3">
+            <a:extLst>
+              <a:ext uri="{FF2B5EF4-FFF2-40B4-BE49-F238E27FC236}">
+                <a16:creationId xmlns:a16="http://schemas.microsoft.com/office/drawing/2014/main" id="{8D91B05C-9C2D-6ADF-BB68-984FA2F6CE29}"/>
+              </a:ext>
+            </a:extLst>
+          </p:cNvPr>
+          <p:cNvSpPr/>
+          <p:nvPr/>
+        </p:nvSpPr>
+        <p:spPr>
+          <a:xfrm flipH="1">
+            <a:off x="12849610" y="4876800"/>
+            <a:ext cx="5448300" cy="5448300"/>
+          </a:xfrm>
+          <a:custGeom>
+            <a:avLst/>
+            <a:gdLst/>
+            <a:ahLst/>
+            <a:cxnLst/>
+            <a:rect l="l" t="t" r="r" b="b"/>
+            <a:pathLst>
+              <a:path w="5448300" h="5448300">
+                <a:moveTo>
+                  <a:pt x="5448300" y="0"/>
+                </a:moveTo>
+                <a:lnTo>
+                  <a:pt x="0" y="0"/>
+                </a:lnTo>
+                <a:lnTo>
+                  <a:pt x="0" y="5448300"/>
+                </a:lnTo>
+                <a:lnTo>
+                  <a:pt x="5448300" y="5448300"/>
+                </a:lnTo>
+                <a:lnTo>
+                  <a:pt x="5448300" y="0"/>
+                </a:lnTo>
+                <a:close/>
+              </a:path>
+            </a:pathLst>
+          </a:custGeom>
+          <a:blipFill>
+            <a:blip>
+              <a:extLst>
+                <a:ext uri="{96DAC541-7B7A-43D3-8B79-37D633B846F1}">
+                  <asvg:svgBlip xmlns:asvg="http://schemas.microsoft.com/office/drawing/2016/SVG/main" r:embed="rId2"/>
+                </a:ext>
+              </a:extLst>
+            </a:blip>
+            <a:stretch>
+              <a:fillRect/>
+            </a:stretch>
+          </a:blipFill>
+        </p:spPr>
+      </p:sp>
+      <p:sp>
+        <p:nvSpPr>
+          <p:cNvPr id="4" name="Freeform 4">
+            <a:extLst>
+              <a:ext uri="{FF2B5EF4-FFF2-40B4-BE49-F238E27FC236}">
+                <a16:creationId xmlns:a16="http://schemas.microsoft.com/office/drawing/2014/main" id="{9E39B145-531D-C5F1-A320-1A86D6F862B1}"/>
+              </a:ext>
+            </a:extLst>
+          </p:cNvPr>
+          <p:cNvSpPr/>
+          <p:nvPr/>
+        </p:nvSpPr>
+        <p:spPr>
+          <a:xfrm>
+            <a:off x="610206" y="7472290"/>
+            <a:ext cx="836989" cy="2209944"/>
+          </a:xfrm>
+          <a:custGeom>
+            <a:avLst/>
+            <a:gdLst/>
+            <a:ahLst/>
+            <a:cxnLst/>
+            <a:rect l="l" t="t" r="r" b="b"/>
+            <a:pathLst>
+              <a:path w="836989" h="2209944">
+                <a:moveTo>
+                  <a:pt x="0" y="0"/>
+                </a:moveTo>
+                <a:lnTo>
+                  <a:pt x="836988" y="0"/>
+                </a:lnTo>
+                <a:lnTo>
+                  <a:pt x="836988" y="2209945"/>
+                </a:lnTo>
+                <a:lnTo>
+                  <a:pt x="0" y="2209945"/>
+                </a:lnTo>
+                <a:lnTo>
+                  <a:pt x="0" y="0"/>
+                </a:lnTo>
+                <a:close/>
+              </a:path>
+            </a:pathLst>
+          </a:custGeom>
+          <a:blipFill>
+            <a:blip>
+              <a:extLst>
+                <a:ext uri="{96DAC541-7B7A-43D3-8B79-37D633B846F1}">
+                  <asvg:svgBlip xmlns:asvg="http://schemas.microsoft.com/office/drawing/2016/SVG/main" r:embed="rId3"/>
+                </a:ext>
+              </a:extLst>
+            </a:blip>
+            <a:stretch>
+              <a:fillRect/>
+            </a:stretch>
+          </a:blipFill>
+        </p:spPr>
+      </p:sp>
+      <p:sp>
+        <p:nvSpPr>
+          <p:cNvPr id="5" name="Freeform 5">
+            <a:extLst>
+              <a:ext uri="{FF2B5EF4-FFF2-40B4-BE49-F238E27FC236}">
+                <a16:creationId xmlns:a16="http://schemas.microsoft.com/office/drawing/2014/main" id="{C1746DC5-DC88-740A-3E3C-AFCF84CA1798}"/>
+              </a:ext>
+            </a:extLst>
+          </p:cNvPr>
+          <p:cNvSpPr/>
+          <p:nvPr/>
+        </p:nvSpPr>
+        <p:spPr>
+          <a:xfrm>
+            <a:off x="16840806" y="604765"/>
+            <a:ext cx="836989" cy="2209944"/>
+          </a:xfrm>
+          <a:custGeom>
+            <a:avLst/>
+            <a:gdLst/>
+            <a:ahLst/>
+            <a:cxnLst/>
+            <a:rect l="l" t="t" r="r" b="b"/>
+            <a:pathLst>
+              <a:path w="836989" h="2209944">
+                <a:moveTo>
+                  <a:pt x="0" y="0"/>
+                </a:moveTo>
+                <a:lnTo>
+                  <a:pt x="836988" y="0"/>
+                </a:lnTo>
+                <a:lnTo>
+                  <a:pt x="836988" y="2209945"/>
+                </a:lnTo>
+                <a:lnTo>
+                  <a:pt x="0" y="2209945"/>
+                </a:lnTo>
+                <a:lnTo>
+                  <a:pt x="0" y="0"/>
+                </a:lnTo>
+                <a:close/>
+              </a:path>
+            </a:pathLst>
+          </a:custGeom>
+          <a:blipFill>
+            <a:blip>
+              <a:extLst>
+                <a:ext uri="{96DAC541-7B7A-43D3-8B79-37D633B846F1}">
+                  <asvg:svgBlip xmlns:asvg="http://schemas.microsoft.com/office/drawing/2016/SVG/main" r:embed="rId3"/>
+                </a:ext>
+              </a:extLst>
+            </a:blip>
+            <a:stretch>
+              <a:fillRect/>
+            </a:stretch>
+          </a:blipFill>
+        </p:spPr>
+      </p:sp>
+      <p:sp>
+        <p:nvSpPr>
+          <p:cNvPr id="6" name="TextBox 5">
+            <a:extLst>
+              <a:ext uri="{FF2B5EF4-FFF2-40B4-BE49-F238E27FC236}">
+                <a16:creationId xmlns:a16="http://schemas.microsoft.com/office/drawing/2014/main" id="{F549A010-E3AB-45B7-0CD3-DFDB50C165CA}"/>
+              </a:ext>
+            </a:extLst>
+          </p:cNvPr>
+          <p:cNvSpPr txBox="1"/>
+          <p:nvPr/>
+        </p:nvSpPr>
+        <p:spPr>
+          <a:xfrm>
+            <a:off x="3352800" y="1959517"/>
+            <a:ext cx="12616460" cy="1529265"/>
           </a:xfrm>
           <a:prstGeom prst="rect">
             <a:avLst/>
@@ -9730,7 +10684,7 @@
                 <a:cs typeface="Readex Pro Semi-Bold"/>
                 <a:sym typeface="Readex Pro Semi-Bold"/>
               </a:rPr>
-              <a:t>Top 10 Days with Highest Orders</a:t>
+              <a:t>Order Status Distribution</a:t>
             </a:r>
             <a:endParaRPr lang="en-US" sz="6600" b="1" dirty="0">
               <a:solidFill>
@@ -9749,7 +10703,7 @@
           <p:cNvPr id="8" name="Picture 7">
             <a:extLst>
               <a:ext uri="{FF2B5EF4-FFF2-40B4-BE49-F238E27FC236}">
-                <a16:creationId xmlns:a16="http://schemas.microsoft.com/office/drawing/2014/main" id="{BF19D758-3DA9-9185-2F56-2DDE83599705}"/>
+                <a16:creationId xmlns:a16="http://schemas.microsoft.com/office/drawing/2014/main" id="{06F43ADF-3725-7663-3A8A-328EFFA58535}"/>
               </a:ext>
             </a:extLst>
           </p:cNvPr>
@@ -9766,8 +10720,8 @@
         </p:blipFill>
         <p:spPr>
           <a:xfrm>
-            <a:off x="10896600" y="4292960"/>
-            <a:ext cx="4107653" cy="4431940"/>
+            <a:off x="9829800" y="4176607"/>
+            <a:ext cx="5106959" cy="2543386"/>
           </a:xfrm>
           <a:prstGeom prst="rect">
             <a:avLst/>
@@ -9779,7 +10733,7 @@
           <p:cNvPr id="10" name="Picture 9">
             <a:extLst>
               <a:ext uri="{FF2B5EF4-FFF2-40B4-BE49-F238E27FC236}">
-                <a16:creationId xmlns:a16="http://schemas.microsoft.com/office/drawing/2014/main" id="{AB8C312D-29E5-CCCC-BD20-D0E8958B7A99}"/>
+                <a16:creationId xmlns:a16="http://schemas.microsoft.com/office/drawing/2014/main" id="{51443BE8-6632-3B70-2DF8-73F017A34E8B}"/>
               </a:ext>
             </a:extLst>
           </p:cNvPr>
@@ -9796,8 +10750,8 @@
         </p:blipFill>
         <p:spPr>
           <a:xfrm>
-            <a:off x="1756217" y="4292960"/>
-            <a:ext cx="8977386" cy="3648257"/>
+            <a:off x="2133600" y="4176607"/>
+            <a:ext cx="7266820" cy="2543386"/>
           </a:xfrm>
           <a:prstGeom prst="rect">
             <a:avLst/>
@@ -9809,7 +10763,7 @@
           <p:cNvPr id="7" name="TextBox 6">
             <a:extLst>
               <a:ext uri="{FF2B5EF4-FFF2-40B4-BE49-F238E27FC236}">
-                <a16:creationId xmlns:a16="http://schemas.microsoft.com/office/drawing/2014/main" id="{57779279-C66D-40D4-79FF-30D08A677267}"/>
+                <a16:creationId xmlns:a16="http://schemas.microsoft.com/office/drawing/2014/main" id="{B270C394-3704-0B18-E9A2-3D9CFF44D2F7}"/>
               </a:ext>
             </a:extLst>
           </p:cNvPr>
@@ -9818,8 +10772,8 @@
         </p:nvSpPr>
         <p:spPr>
           <a:xfrm>
-            <a:off x="2121028" y="8212566"/>
-            <a:ext cx="8612575" cy="954107"/>
+            <a:off x="4934485" y="7382086"/>
+            <a:ext cx="7266820" cy="523220"/>
           </a:xfrm>
           <a:prstGeom prst="rect">
             <a:avLst/>
@@ -9841,18 +10795,7 @@
                 </a:solidFill>
                 <a:latin typeface="Bahnschrift" panose="020B0502040204020203" pitchFamily="34" charset="0"/>
               </a:rPr>
-              <a:t>HIGHEST ORDERS ARE RECORDED IN 2013-10-22 &amp; </a:t>
-            </a:r>
-          </a:p>
-          <a:p>
-            <a:r>
-              <a:rPr lang="en-US" sz="2800" b="1" dirty="0">
-                <a:solidFill>
-                  <a:srgbClr val="002060"/>
-                </a:solidFill>
-                <a:latin typeface="Bahnschrift" panose="020B0502040204020203" pitchFamily="34" charset="0"/>
-              </a:rPr>
-              <a:t>2028-05-24</a:t>
+              <a:t>MOST PRODUCTS ARE  ‘IN TRANSIT’ = 25145</a:t>
             </a:r>
             <a:endParaRPr lang="en-IN" sz="2800" b="1" dirty="0">
               <a:solidFill>
@@ -9866,7 +10809,7 @@
     </p:spTree>
     <p:extLst>
       <p:ext uri="{BB962C8B-B14F-4D97-AF65-F5344CB8AC3E}">
-        <p14:creationId xmlns:p14="http://schemas.microsoft.com/office/powerpoint/2010/main" val="1799572547"/>
+        <p14:creationId xmlns:p14="http://schemas.microsoft.com/office/powerpoint/2010/main" val="3743301246"/>
       </p:ext>
     </p:extLst>
   </p:cSld>
@@ -9876,7 +10819,7 @@
 </p:sld>
 </file>
 
-<file path=ppt/slides/slide21.xml><?xml version="1.0" encoding="utf-8"?>
+<file path=ppt/slides/slide22.xml><?xml version="1.0" encoding="utf-8"?>
 <p:sld xmlns:a="http://schemas.openxmlformats.org/drawingml/2006/main" xmlns:r="http://schemas.openxmlformats.org/officeDocument/2006/relationships" xmlns:p="http://schemas.openxmlformats.org/presentationml/2006/main">
   <p:cSld>
     <p:bg>
@@ -10181,7 +11124,7 @@
                 <a:cs typeface="Readex Pro Semi-Bold"/>
                 <a:sym typeface="Readex Pro Semi-Bold"/>
               </a:rPr>
-              <a:t>Top 10  Total Orders by Year</a:t>
+              <a:t>Top 6  Total Orders by Year</a:t>
             </a:r>
             <a:endParaRPr lang="en-US" sz="6600" b="1" dirty="0">
               <a:solidFill>
@@ -10195,66 +11138,6 @@
           </a:p>
         </p:txBody>
       </p:sp>
-      <p:pic>
-        <p:nvPicPr>
-          <p:cNvPr id="12" name="Picture 11">
-            <a:extLst>
-              <a:ext uri="{FF2B5EF4-FFF2-40B4-BE49-F238E27FC236}">
-                <a16:creationId xmlns:a16="http://schemas.microsoft.com/office/drawing/2014/main" id="{CDF63E1B-B08C-1912-FBE2-E3AF77685921}"/>
-              </a:ext>
-            </a:extLst>
-          </p:cNvPr>
-          <p:cNvPicPr>
-            <a:picLocks noChangeAspect="1"/>
-          </p:cNvPicPr>
-          <p:nvPr/>
-        </p:nvPicPr>
-        <p:blipFill>
-          <a:blip r:embed="rId4"/>
-          <a:stretch>
-            <a:fillRect/>
-          </a:stretch>
-        </p:blipFill>
-        <p:spPr>
-          <a:xfrm>
-            <a:off x="9449884" y="3436472"/>
-            <a:ext cx="4020415" cy="5136028"/>
-          </a:xfrm>
-          <a:prstGeom prst="rect">
-            <a:avLst/>
-          </a:prstGeom>
-        </p:spPr>
-      </p:pic>
-      <p:pic>
-        <p:nvPicPr>
-          <p:cNvPr id="14" name="Picture 13">
-            <a:extLst>
-              <a:ext uri="{FF2B5EF4-FFF2-40B4-BE49-F238E27FC236}">
-                <a16:creationId xmlns:a16="http://schemas.microsoft.com/office/drawing/2014/main" id="{C7C7AC14-716A-A280-F07F-9FBA111AC177}"/>
-              </a:ext>
-            </a:extLst>
-          </p:cNvPr>
-          <p:cNvPicPr>
-            <a:picLocks noChangeAspect="1"/>
-          </p:cNvPicPr>
-          <p:nvPr/>
-        </p:nvPicPr>
-        <p:blipFill>
-          <a:blip r:embed="rId5"/>
-          <a:stretch>
-            <a:fillRect/>
-          </a:stretch>
-        </p:blipFill>
-        <p:spPr>
-          <a:xfrm>
-            <a:off x="1905000" y="3436472"/>
-            <a:ext cx="7080080" cy="3688228"/>
-          </a:xfrm>
-          <a:prstGeom prst="rect">
-            <a:avLst/>
-          </a:prstGeom>
-        </p:spPr>
-      </p:pic>
       <p:sp>
         <p:nvSpPr>
           <p:cNvPr id="7" name="TextBox 6">
@@ -10303,6 +11186,66 @@
           </a:p>
         </p:txBody>
       </p:sp>
+      <p:pic>
+        <p:nvPicPr>
+          <p:cNvPr id="9" name="Picture 8">
+            <a:extLst>
+              <a:ext uri="{FF2B5EF4-FFF2-40B4-BE49-F238E27FC236}">
+                <a16:creationId xmlns:a16="http://schemas.microsoft.com/office/drawing/2014/main" id="{C704B0BE-B0D4-2167-E101-F025A1463F82}"/>
+              </a:ext>
+            </a:extLst>
+          </p:cNvPr>
+          <p:cNvPicPr>
+            <a:picLocks noChangeAspect="1"/>
+          </p:cNvPicPr>
+          <p:nvPr/>
+        </p:nvPicPr>
+        <p:blipFill>
+          <a:blip r:embed="rId4"/>
+          <a:stretch>
+            <a:fillRect/>
+          </a:stretch>
+        </p:blipFill>
+        <p:spPr>
+          <a:xfrm>
+            <a:off x="9906000" y="3262677"/>
+            <a:ext cx="5037815" cy="4035818"/>
+          </a:xfrm>
+          <a:prstGeom prst="rect">
+            <a:avLst/>
+          </a:prstGeom>
+        </p:spPr>
+      </p:pic>
+      <p:pic>
+        <p:nvPicPr>
+          <p:cNvPr id="11" name="Picture 10">
+            <a:extLst>
+              <a:ext uri="{FF2B5EF4-FFF2-40B4-BE49-F238E27FC236}">
+                <a16:creationId xmlns:a16="http://schemas.microsoft.com/office/drawing/2014/main" id="{27D34EA9-8F21-F75C-FFE1-9B3A1786ED62}"/>
+              </a:ext>
+            </a:extLst>
+          </p:cNvPr>
+          <p:cNvPicPr>
+            <a:picLocks noChangeAspect="1"/>
+          </p:cNvPicPr>
+          <p:nvPr/>
+        </p:nvPicPr>
+        <p:blipFill>
+          <a:blip r:embed="rId5"/>
+          <a:stretch>
+            <a:fillRect/>
+          </a:stretch>
+        </p:blipFill>
+        <p:spPr>
+          <a:xfrm>
+            <a:off x="2057400" y="3262677"/>
+            <a:ext cx="7387882" cy="4035818"/>
+          </a:xfrm>
+          <a:prstGeom prst="rect">
+            <a:avLst/>
+          </a:prstGeom>
+        </p:spPr>
+      </p:pic>
     </p:spTree>
     <p:extLst>
       <p:ext uri="{BB962C8B-B14F-4D97-AF65-F5344CB8AC3E}">
@@ -10316,7 +11259,7 @@
 </p:sld>
 </file>
 
-<file path=ppt/slides/slide22.xml><?xml version="1.0" encoding="utf-8"?>
+<file path=ppt/slides/slide23.xml><?xml version="1.0" encoding="utf-8"?>
 <p:sld xmlns:a="http://schemas.openxmlformats.org/drawingml/2006/main" xmlns:r="http://schemas.openxmlformats.org/officeDocument/2006/relationships" xmlns:p="http://schemas.openxmlformats.org/presentationml/2006/main">
   <p:cSld>
     <p:bg>
@@ -10621,7 +11564,7 @@
                 <a:cs typeface="Readex Pro Semi-Bold"/>
                 <a:sym typeface="Readex Pro Semi-Bold"/>
               </a:rPr>
-              <a:t>Total Revenue by Year</a:t>
+              <a:t>Top 5  Total Revenue by Year</a:t>
             </a:r>
             <a:endParaRPr lang="en-US" sz="6600" b="1" dirty="0">
               <a:solidFill>
@@ -10756,7 +11699,7 @@
 </p:sld>
 </file>
 
-<file path=ppt/slides/slide23.xml><?xml version="1.0" encoding="utf-8"?>
+<file path=ppt/slides/slide24.xml><?xml version="1.0" encoding="utf-8"?>
 <p:sld xmlns:a="http://schemas.openxmlformats.org/drawingml/2006/main" xmlns:r="http://schemas.openxmlformats.org/officeDocument/2006/relationships" xmlns:p="http://schemas.openxmlformats.org/presentationml/2006/main">
   <p:cSld>
     <p:bg>
@@ -11033,8 +11976,8 @@
         </p:nvSpPr>
         <p:spPr>
           <a:xfrm>
-            <a:off x="2714242" y="1709737"/>
-            <a:ext cx="13911860" cy="3121432"/>
+            <a:off x="2374956" y="2528887"/>
+            <a:ext cx="13911860" cy="2462213"/>
           </a:xfrm>
           <a:prstGeom prst="rect">
             <a:avLst/>
@@ -11046,11 +11989,7 @@
           </a:bodyPr>
           <a:lstStyle/>
           <a:p>
-            <a:pPr algn="ctr">
-              <a:lnSpc>
-                <a:spcPts val="12685"/>
-              </a:lnSpc>
-            </a:pPr>
+            <a:pPr algn="ctr"/>
             <a:r>
               <a:rPr lang="en-US" sz="8000" b="1" dirty="0">
                 <a:solidFill>
@@ -11061,7 +12000,7 @@
                 <a:cs typeface="Readex Pro Semi-Bold"/>
                 <a:sym typeface="Readex Pro Semi-Bold"/>
               </a:rPr>
-              <a:t>Key Insights using Windows Function</a:t>
+              <a:t>Using Windows Function</a:t>
             </a:r>
           </a:p>
         </p:txBody>
@@ -11080,8 +12019,8 @@
         </p:nvSpPr>
         <p:spPr>
           <a:xfrm>
-            <a:off x="3955172" y="5138057"/>
-            <a:ext cx="11430000" cy="2123658"/>
+            <a:off x="2590800" y="5143500"/>
+            <a:ext cx="13480172" cy="2123658"/>
           </a:xfrm>
           <a:prstGeom prst="rect">
             <a:avLst/>
@@ -11102,7 +12041,7 @@
                 <a:latin typeface="Cascadia Code" panose="020B0609020000020004" pitchFamily="49" charset="0"/>
                 <a:cs typeface="Cascadia Code" panose="020B0609020000020004" pitchFamily="49" charset="0"/>
               </a:rPr>
-              <a:t>Rank Products by Revenue</a:t>
+              <a:t>Products by Revenue(using RANK)</a:t>
             </a:r>
           </a:p>
           <a:p>
@@ -11114,7 +12053,7 @@
                 <a:latin typeface="Cascadia Code" panose="020B0609020000020004" pitchFamily="49" charset="0"/>
                 <a:cs typeface="Cascadia Code" panose="020B0609020000020004" pitchFamily="49" charset="0"/>
               </a:rPr>
-              <a:t>Dense Rank Customers by Revenue</a:t>
+              <a:t>Customers by Revenue(Using DENSE_RANK)</a:t>
             </a:r>
           </a:p>
           <a:p>
@@ -11126,7 +12065,7 @@
                 <a:latin typeface="Cascadia Code" panose="020B0609020000020004" pitchFamily="49" charset="0"/>
                 <a:cs typeface="Cascadia Code" panose="020B0609020000020004" pitchFamily="49" charset="0"/>
               </a:rPr>
-              <a:t>Row Number for Products by Sales</a:t>
+              <a:t>Products by Sales(Using ROW_NUMBER)</a:t>
             </a:r>
           </a:p>
         </p:txBody>
@@ -11144,7 +12083,7 @@
 </p:sld>
 </file>
 
-<file path=ppt/slides/slide24.xml><?xml version="1.0" encoding="utf-8"?>
+<file path=ppt/slides/slide25.xml><?xml version="1.0" encoding="utf-8"?>
 <p:sld xmlns:a="http://schemas.openxmlformats.org/drawingml/2006/main" xmlns:r="http://schemas.openxmlformats.org/officeDocument/2006/relationships" xmlns:p="http://schemas.openxmlformats.org/presentationml/2006/main">
   <p:cSld>
     <p:bg>
@@ -11363,7 +12302,7 @@
         </p:nvSpPr>
         <p:spPr>
           <a:xfrm>
-            <a:off x="3182504" y="1556835"/>
+            <a:off x="3352800" y="1116566"/>
             <a:ext cx="12616460" cy="1529265"/>
           </a:xfrm>
           <a:prstGeom prst="rect">
@@ -11391,7 +12330,7 @@
                 <a:cs typeface="Readex Pro Semi-Bold"/>
                 <a:sym typeface="Readex Pro Semi-Bold"/>
               </a:rPr>
-              <a:t>Rank Products by Revenue</a:t>
+              <a:t>Products by Revenue</a:t>
             </a:r>
             <a:endParaRPr lang="en-US" sz="6600" b="1" dirty="0">
               <a:solidFill>
@@ -11523,6 +12462,62 @@
           </a:prstGeom>
         </p:spPr>
       </p:pic>
+      <p:sp>
+        <p:nvSpPr>
+          <p:cNvPr id="7" name="TextBox 6">
+            <a:extLst>
+              <a:ext uri="{FF2B5EF4-FFF2-40B4-BE49-F238E27FC236}">
+                <a16:creationId xmlns:a16="http://schemas.microsoft.com/office/drawing/2014/main" id="{D7F4641A-E56F-4631-F037-077D0FFEE42B}"/>
+              </a:ext>
+            </a:extLst>
+          </p:cNvPr>
+          <p:cNvSpPr txBox="1"/>
+          <p:nvPr/>
+        </p:nvSpPr>
+        <p:spPr>
+          <a:xfrm>
+            <a:off x="2862551" y="2100321"/>
+            <a:ext cx="13911860" cy="1383199"/>
+          </a:xfrm>
+          <a:prstGeom prst="rect">
+            <a:avLst/>
+          </a:prstGeom>
+        </p:spPr>
+        <p:txBody>
+          <a:bodyPr wrap="square" lIns="0" tIns="0" rIns="0" bIns="0" rtlCol="0" anchor="t">
+            <a:spAutoFit/>
+          </a:bodyPr>
+          <a:lstStyle/>
+          <a:p>
+            <a:pPr algn="ctr">
+              <a:lnSpc>
+                <a:spcPts val="12685"/>
+              </a:lnSpc>
+            </a:pPr>
+            <a:r>
+              <a:rPr lang="en-US" sz="4400" b="1" i="1" dirty="0">
+                <a:solidFill>
+                  <a:srgbClr val="002B58"/>
+                </a:solidFill>
+                <a:latin typeface="Rockwell" panose="02060603020205020403" pitchFamily="18" charset="0"/>
+                <a:ea typeface="Readex Pro Semi-Bold"/>
+                <a:cs typeface="Readex Pro Semi-Bold"/>
+                <a:sym typeface="Readex Pro Semi-Bold"/>
+              </a:rPr>
+              <a:t>Using RANK( ) Window function</a:t>
+            </a:r>
+            <a:endParaRPr lang="en-US" sz="2800" b="1" i="1" dirty="0">
+              <a:solidFill>
+                <a:srgbClr val="002B58"/>
+              </a:solidFill>
+              <a:latin typeface="Rockwell" panose="02060603020205020403" pitchFamily="18" charset="0"/>
+              <a:ea typeface="Readex Pro Semi-Bold"/>
+              <a:cs typeface="Readex Pro Semi-Bold"/>
+              <a:sym typeface="Readex Pro Semi-Bold"/>
+            </a:endParaRPr>
+          </a:p>
+        </p:txBody>
+      </p:sp>
     </p:spTree>
     <p:extLst>
       <p:ext uri="{BB962C8B-B14F-4D97-AF65-F5344CB8AC3E}">
@@ -11536,7 +12531,7 @@
 </p:sld>
 </file>
 
-<file path=ppt/slides/slide25.xml><?xml version="1.0" encoding="utf-8"?>
+<file path=ppt/slides/slide26.xml><?xml version="1.0" encoding="utf-8"?>
 <p:sld xmlns:a="http://schemas.openxmlformats.org/drawingml/2006/main" xmlns:r="http://schemas.openxmlformats.org/officeDocument/2006/relationships" xmlns:p="http://schemas.openxmlformats.org/presentationml/2006/main">
   <p:cSld>
     <p:bg>
@@ -11756,7 +12751,7 @@
         <p:spPr>
           <a:xfrm>
             <a:off x="3209718" y="780071"/>
-            <a:ext cx="13658302" cy="3157916"/>
+            <a:ext cx="13658302" cy="1231106"/>
           </a:xfrm>
           <a:prstGeom prst="rect">
             <a:avLst/>
@@ -11768,23 +12763,7 @@
           </a:bodyPr>
           <a:lstStyle/>
           <a:p>
-            <a:pPr algn="ctr">
-              <a:lnSpc>
-                <a:spcPts val="12685"/>
-              </a:lnSpc>
-            </a:pPr>
-            <a:r>
-              <a:rPr lang="en-US" sz="8000" b="1" dirty="0" err="1">
-                <a:solidFill>
-                  <a:srgbClr val="002B58"/>
-                </a:solidFill>
-                <a:latin typeface="Perpetua" panose="02020502060401020303" pitchFamily="18" charset="0"/>
-                <a:ea typeface="Readex Pro Semi-Bold"/>
-                <a:cs typeface="Readex Pro Semi-Bold"/>
-                <a:sym typeface="Readex Pro Semi-Bold"/>
-              </a:rPr>
-              <a:t>Dense_Rank</a:t>
-            </a:r>
+            <a:pPr algn="ctr"/>
             <a:r>
               <a:rPr lang="en-US" sz="8000" b="1" dirty="0">
                 <a:solidFill>
@@ -11927,6 +12906,62 @@
           </a:blipFill>
         </p:spPr>
       </p:sp>
+      <p:sp>
+        <p:nvSpPr>
+          <p:cNvPr id="10" name="TextBox 9">
+            <a:extLst>
+              <a:ext uri="{FF2B5EF4-FFF2-40B4-BE49-F238E27FC236}">
+                <a16:creationId xmlns:a16="http://schemas.microsoft.com/office/drawing/2014/main" id="{A5FAC44A-D09B-09F8-61EB-D3A6F6BEA8A3}"/>
+              </a:ext>
+            </a:extLst>
+          </p:cNvPr>
+          <p:cNvSpPr txBox="1"/>
+          <p:nvPr/>
+        </p:nvSpPr>
+        <p:spPr>
+          <a:xfrm>
+            <a:off x="2797973" y="1641545"/>
+            <a:ext cx="13911860" cy="1383199"/>
+          </a:xfrm>
+          <a:prstGeom prst="rect">
+            <a:avLst/>
+          </a:prstGeom>
+        </p:spPr>
+        <p:txBody>
+          <a:bodyPr wrap="square" lIns="0" tIns="0" rIns="0" bIns="0" rtlCol="0" anchor="t">
+            <a:spAutoFit/>
+          </a:bodyPr>
+          <a:lstStyle/>
+          <a:p>
+            <a:pPr algn="ctr">
+              <a:lnSpc>
+                <a:spcPts val="12685"/>
+              </a:lnSpc>
+            </a:pPr>
+            <a:r>
+              <a:rPr lang="en-US" sz="4400" b="1" i="1" dirty="0">
+                <a:solidFill>
+                  <a:srgbClr val="002B58"/>
+                </a:solidFill>
+                <a:latin typeface="Rockwell" panose="02060603020205020403" pitchFamily="18" charset="0"/>
+                <a:ea typeface="Readex Pro Semi-Bold"/>
+                <a:cs typeface="Readex Pro Semi-Bold"/>
+                <a:sym typeface="Readex Pro Semi-Bold"/>
+              </a:rPr>
+              <a:t>Using DENSE_RANK( ) Window function</a:t>
+            </a:r>
+            <a:endParaRPr lang="en-US" sz="2800" b="1" i="1" dirty="0">
+              <a:solidFill>
+                <a:srgbClr val="002B58"/>
+              </a:solidFill>
+              <a:latin typeface="Rockwell" panose="02060603020205020403" pitchFamily="18" charset="0"/>
+              <a:ea typeface="Readex Pro Semi-Bold"/>
+              <a:cs typeface="Readex Pro Semi-Bold"/>
+              <a:sym typeface="Readex Pro Semi-Bold"/>
+            </a:endParaRPr>
+          </a:p>
+        </p:txBody>
+      </p:sp>
     </p:spTree>
     <p:extLst>
       <p:ext uri="{BB962C8B-B14F-4D97-AF65-F5344CB8AC3E}">
@@ -11940,7 +12975,7 @@
 </p:sld>
 </file>
 
-<file path=ppt/slides/slide26.xml><?xml version="1.0" encoding="utf-8"?>
+<file path=ppt/slides/slide27.xml><?xml version="1.0" encoding="utf-8"?>
 <p:sld xmlns:a="http://schemas.openxmlformats.org/drawingml/2006/main" xmlns:r="http://schemas.openxmlformats.org/officeDocument/2006/relationships" xmlns:p="http://schemas.openxmlformats.org/presentationml/2006/main">
   <p:cSld>
     <p:bg>
@@ -12160,7 +13195,7 @@
         <p:spPr>
           <a:xfrm>
             <a:off x="3209718" y="780071"/>
-            <a:ext cx="13658302" cy="3157916"/>
+            <a:ext cx="13658302" cy="1529265"/>
           </a:xfrm>
           <a:prstGeom prst="rect">
             <a:avLst/>
@@ -12190,12 +13225,8 @@
           </a:lstStyle>
           <a:p>
             <a:r>
-              <a:rPr lang="en-US" dirty="0" err="1"/>
-              <a:t>Row_Number</a:t>
-            </a:r>
-            <a:r>
               <a:rPr lang="en-US" dirty="0"/>
-              <a:t> for Products by Sales</a:t>
+              <a:t>Products by Sales</a:t>
             </a:r>
             <a:endParaRPr lang="en-US" dirty="0">
               <a:sym typeface="Readex Pro Semi-Bold"/>
@@ -12313,7 +13344,19 @@
           <p:nvPr/>
         </p:nvPicPr>
         <p:blipFill>
-          <a:blip r:embed="rId5"/>
+          <a:blip r:embed="rId5">
+            <a:extLst>
+              <a:ext uri="{BEBA8EAE-BF5A-486C-A8C5-ECC9F3942E4B}">
+                <a14:imgProps xmlns:a14="http://schemas.microsoft.com/office/drawing/2010/main">
+                  <a14:imgLayer r:embed="rId6">
+                    <a14:imgEffect>
+                      <a14:brightnessContrast contrast="40000"/>
+                    </a14:imgEffect>
+                  </a14:imgLayer>
+                </a14:imgProps>
+              </a:ext>
+            </a:extLst>
+          </a:blip>
           <a:stretch>
             <a:fillRect/>
           </a:stretch>
@@ -12328,6 +13371,62 @@
           </a:prstGeom>
         </p:spPr>
       </p:pic>
+      <p:sp>
+        <p:nvSpPr>
+          <p:cNvPr id="7" name="TextBox 6">
+            <a:extLst>
+              <a:ext uri="{FF2B5EF4-FFF2-40B4-BE49-F238E27FC236}">
+                <a16:creationId xmlns:a16="http://schemas.microsoft.com/office/drawing/2014/main" id="{19A3C7A9-639C-CFFC-2A3A-87D1DF5DA3E3}"/>
+              </a:ext>
+            </a:extLst>
+          </p:cNvPr>
+          <p:cNvSpPr txBox="1"/>
+          <p:nvPr/>
+        </p:nvSpPr>
+        <p:spPr>
+          <a:xfrm>
+            <a:off x="2797670" y="1826842"/>
+            <a:ext cx="13911860" cy="1383199"/>
+          </a:xfrm>
+          <a:prstGeom prst="rect">
+            <a:avLst/>
+          </a:prstGeom>
+        </p:spPr>
+        <p:txBody>
+          <a:bodyPr wrap="square" lIns="0" tIns="0" rIns="0" bIns="0" rtlCol="0" anchor="t">
+            <a:spAutoFit/>
+          </a:bodyPr>
+          <a:lstStyle/>
+          <a:p>
+            <a:pPr algn="ctr">
+              <a:lnSpc>
+                <a:spcPts val="12685"/>
+              </a:lnSpc>
+            </a:pPr>
+            <a:r>
+              <a:rPr lang="en-US" sz="4400" b="1" i="1" dirty="0">
+                <a:solidFill>
+                  <a:srgbClr val="002B58"/>
+                </a:solidFill>
+                <a:latin typeface="Rockwell" panose="02060603020205020403" pitchFamily="18" charset="0"/>
+                <a:ea typeface="Readex Pro Semi-Bold"/>
+                <a:cs typeface="Readex Pro Semi-Bold"/>
+                <a:sym typeface="Readex Pro Semi-Bold"/>
+              </a:rPr>
+              <a:t>Using ROW_NUMBER( ) Window function</a:t>
+            </a:r>
+            <a:endParaRPr lang="en-US" sz="2800" b="1" i="1" dirty="0">
+              <a:solidFill>
+                <a:srgbClr val="002B58"/>
+              </a:solidFill>
+              <a:latin typeface="Rockwell" panose="02060603020205020403" pitchFamily="18" charset="0"/>
+              <a:ea typeface="Readex Pro Semi-Bold"/>
+              <a:cs typeface="Readex Pro Semi-Bold"/>
+              <a:sym typeface="Readex Pro Semi-Bold"/>
+            </a:endParaRPr>
+          </a:p>
+        </p:txBody>
+      </p:sp>
     </p:spTree>
     <p:extLst>
       <p:ext uri="{BB962C8B-B14F-4D97-AF65-F5344CB8AC3E}">
@@ -12341,7 +13440,1359 @@
 </p:sld>
 </file>
 
-<file path=ppt/slides/slide27.xml><?xml version="1.0" encoding="utf-8"?>
+<file path=ppt/slides/slide28.xml><?xml version="1.0" encoding="utf-8"?>
+<p:sld xmlns:a="http://schemas.openxmlformats.org/drawingml/2006/main" xmlns:r="http://schemas.openxmlformats.org/officeDocument/2006/relationships" xmlns:p="http://schemas.openxmlformats.org/presentationml/2006/main">
+  <p:cSld>
+    <p:bg>
+      <p:bgPr>
+        <a:solidFill>
+          <a:srgbClr val="F8F3ED"/>
+        </a:solidFill>
+        <a:effectLst/>
+      </p:bgPr>
+    </p:bg>
+    <p:spTree>
+      <p:nvGrpSpPr>
+        <p:cNvPr id="1" name="">
+          <a:extLst>
+            <a:ext uri="{FF2B5EF4-FFF2-40B4-BE49-F238E27FC236}">
+              <a16:creationId xmlns:a16="http://schemas.microsoft.com/office/drawing/2014/main" id="{AF49882E-0632-E5D2-443A-0B8FAF43A8AE}"/>
+            </a:ext>
+          </a:extLst>
+        </p:cNvPr>
+        <p:cNvGrpSpPr/>
+        <p:nvPr/>
+      </p:nvGrpSpPr>
+      <p:grpSpPr>
+        <a:xfrm>
+          <a:off x="0" y="0"/>
+          <a:ext cx="0" cy="0"/>
+          <a:chOff x="0" y="0"/>
+          <a:chExt cx="0" cy="0"/>
+        </a:xfrm>
+      </p:grpSpPr>
+      <p:sp>
+        <p:nvSpPr>
+          <p:cNvPr id="2" name="Freeform 2">
+            <a:extLst>
+              <a:ext uri="{FF2B5EF4-FFF2-40B4-BE49-F238E27FC236}">
+                <a16:creationId xmlns:a16="http://schemas.microsoft.com/office/drawing/2014/main" id="{B016E7F1-D279-1343-2EB4-2A224149986F}"/>
+              </a:ext>
+            </a:extLst>
+          </p:cNvPr>
+          <p:cNvSpPr/>
+          <p:nvPr/>
+        </p:nvSpPr>
+        <p:spPr>
+          <a:xfrm flipV="1">
+            <a:off x="-9908" y="0"/>
+            <a:ext cx="5448300" cy="5448300"/>
+          </a:xfrm>
+          <a:custGeom>
+            <a:avLst/>
+            <a:gdLst/>
+            <a:ahLst/>
+            <a:cxnLst/>
+            <a:rect l="l" t="t" r="r" b="b"/>
+            <a:pathLst>
+              <a:path w="5448300" h="5448300">
+                <a:moveTo>
+                  <a:pt x="0" y="5448300"/>
+                </a:moveTo>
+                <a:lnTo>
+                  <a:pt x="5448300" y="5448300"/>
+                </a:lnTo>
+                <a:lnTo>
+                  <a:pt x="5448300" y="0"/>
+                </a:lnTo>
+                <a:lnTo>
+                  <a:pt x="0" y="0"/>
+                </a:lnTo>
+                <a:lnTo>
+                  <a:pt x="0" y="5448300"/>
+                </a:lnTo>
+                <a:close/>
+              </a:path>
+            </a:pathLst>
+          </a:custGeom>
+          <a:blipFill>
+            <a:blip>
+              <a:extLst>
+                <a:ext uri="{96DAC541-7B7A-43D3-8B79-37D633B846F1}">
+                  <asvg:svgBlip xmlns:asvg="http://schemas.microsoft.com/office/drawing/2016/SVG/main" r:embed="rId2"/>
+                </a:ext>
+              </a:extLst>
+            </a:blip>
+            <a:stretch>
+              <a:fillRect/>
+            </a:stretch>
+          </a:blipFill>
+        </p:spPr>
+      </p:sp>
+      <p:sp>
+        <p:nvSpPr>
+          <p:cNvPr id="3" name="Freeform 3">
+            <a:extLst>
+              <a:ext uri="{FF2B5EF4-FFF2-40B4-BE49-F238E27FC236}">
+                <a16:creationId xmlns:a16="http://schemas.microsoft.com/office/drawing/2014/main" id="{E7CB680C-7321-78A5-A25A-00FCBDDE7EB0}"/>
+              </a:ext>
+            </a:extLst>
+          </p:cNvPr>
+          <p:cNvSpPr/>
+          <p:nvPr/>
+        </p:nvSpPr>
+        <p:spPr>
+          <a:xfrm flipH="1">
+            <a:off x="12849610" y="4838700"/>
+            <a:ext cx="5448300" cy="5448300"/>
+          </a:xfrm>
+          <a:custGeom>
+            <a:avLst/>
+            <a:gdLst/>
+            <a:ahLst/>
+            <a:cxnLst/>
+            <a:rect l="l" t="t" r="r" b="b"/>
+            <a:pathLst>
+              <a:path w="5448300" h="5448300">
+                <a:moveTo>
+                  <a:pt x="5448300" y="0"/>
+                </a:moveTo>
+                <a:lnTo>
+                  <a:pt x="0" y="0"/>
+                </a:lnTo>
+                <a:lnTo>
+                  <a:pt x="0" y="5448300"/>
+                </a:lnTo>
+                <a:lnTo>
+                  <a:pt x="5448300" y="5448300"/>
+                </a:lnTo>
+                <a:lnTo>
+                  <a:pt x="5448300" y="0"/>
+                </a:lnTo>
+                <a:close/>
+              </a:path>
+            </a:pathLst>
+          </a:custGeom>
+          <a:blipFill>
+            <a:blip>
+              <a:extLst>
+                <a:ext uri="{96DAC541-7B7A-43D3-8B79-37D633B846F1}">
+                  <asvg:svgBlip xmlns:asvg="http://schemas.microsoft.com/office/drawing/2016/SVG/main" r:embed="rId2"/>
+                </a:ext>
+              </a:extLst>
+            </a:blip>
+            <a:stretch>
+              <a:fillRect/>
+            </a:stretch>
+          </a:blipFill>
+        </p:spPr>
+      </p:sp>
+      <p:sp>
+        <p:nvSpPr>
+          <p:cNvPr id="4" name="Freeform 4">
+            <a:extLst>
+              <a:ext uri="{FF2B5EF4-FFF2-40B4-BE49-F238E27FC236}">
+                <a16:creationId xmlns:a16="http://schemas.microsoft.com/office/drawing/2014/main" id="{DCF7F2DE-8576-6A47-618C-BD742D17B1DE}"/>
+              </a:ext>
+            </a:extLst>
+          </p:cNvPr>
+          <p:cNvSpPr/>
+          <p:nvPr/>
+        </p:nvSpPr>
+        <p:spPr>
+          <a:xfrm>
+            <a:off x="610206" y="7472290"/>
+            <a:ext cx="836989" cy="2209944"/>
+          </a:xfrm>
+          <a:custGeom>
+            <a:avLst/>
+            <a:gdLst/>
+            <a:ahLst/>
+            <a:cxnLst/>
+            <a:rect l="l" t="t" r="r" b="b"/>
+            <a:pathLst>
+              <a:path w="836989" h="2209944">
+                <a:moveTo>
+                  <a:pt x="0" y="0"/>
+                </a:moveTo>
+                <a:lnTo>
+                  <a:pt x="836988" y="0"/>
+                </a:lnTo>
+                <a:lnTo>
+                  <a:pt x="836988" y="2209945"/>
+                </a:lnTo>
+                <a:lnTo>
+                  <a:pt x="0" y="2209945"/>
+                </a:lnTo>
+                <a:lnTo>
+                  <a:pt x="0" y="0"/>
+                </a:lnTo>
+                <a:close/>
+              </a:path>
+            </a:pathLst>
+          </a:custGeom>
+          <a:blipFill>
+            <a:blip>
+              <a:extLst>
+                <a:ext uri="{96DAC541-7B7A-43D3-8B79-37D633B846F1}">
+                  <asvg:svgBlip xmlns:asvg="http://schemas.microsoft.com/office/drawing/2016/SVG/main" r:embed="rId3"/>
+                </a:ext>
+              </a:extLst>
+            </a:blip>
+            <a:stretch>
+              <a:fillRect/>
+            </a:stretch>
+          </a:blipFill>
+        </p:spPr>
+      </p:sp>
+      <p:sp>
+        <p:nvSpPr>
+          <p:cNvPr id="5" name="Freeform 5">
+            <a:extLst>
+              <a:ext uri="{FF2B5EF4-FFF2-40B4-BE49-F238E27FC236}">
+                <a16:creationId xmlns:a16="http://schemas.microsoft.com/office/drawing/2014/main" id="{864DAD17-3E9F-E97B-C60F-0E0DD18C45D0}"/>
+              </a:ext>
+            </a:extLst>
+          </p:cNvPr>
+          <p:cNvSpPr/>
+          <p:nvPr/>
+        </p:nvSpPr>
+        <p:spPr>
+          <a:xfrm>
+            <a:off x="16840806" y="604765"/>
+            <a:ext cx="836989" cy="2209944"/>
+          </a:xfrm>
+          <a:custGeom>
+            <a:avLst/>
+            <a:gdLst/>
+            <a:ahLst/>
+            <a:cxnLst/>
+            <a:rect l="l" t="t" r="r" b="b"/>
+            <a:pathLst>
+              <a:path w="836989" h="2209944">
+                <a:moveTo>
+                  <a:pt x="0" y="0"/>
+                </a:moveTo>
+                <a:lnTo>
+                  <a:pt x="836988" y="0"/>
+                </a:lnTo>
+                <a:lnTo>
+                  <a:pt x="836988" y="2209945"/>
+                </a:lnTo>
+                <a:lnTo>
+                  <a:pt x="0" y="2209945"/>
+                </a:lnTo>
+                <a:lnTo>
+                  <a:pt x="0" y="0"/>
+                </a:lnTo>
+                <a:close/>
+              </a:path>
+            </a:pathLst>
+          </a:custGeom>
+          <a:blipFill>
+            <a:blip>
+              <a:extLst>
+                <a:ext uri="{96DAC541-7B7A-43D3-8B79-37D633B846F1}">
+                  <asvg:svgBlip xmlns:asvg="http://schemas.microsoft.com/office/drawing/2016/SVG/main" r:embed="rId3"/>
+                </a:ext>
+              </a:extLst>
+            </a:blip>
+            <a:stretch>
+              <a:fillRect/>
+            </a:stretch>
+          </a:blipFill>
+        </p:spPr>
+      </p:sp>
+      <p:sp>
+        <p:nvSpPr>
+          <p:cNvPr id="7" name="TextBox 6">
+            <a:extLst>
+              <a:ext uri="{FF2B5EF4-FFF2-40B4-BE49-F238E27FC236}">
+                <a16:creationId xmlns:a16="http://schemas.microsoft.com/office/drawing/2014/main" id="{769C8791-C9AE-9638-EEB9-68CC3F6460B8}"/>
+              </a:ext>
+            </a:extLst>
+          </p:cNvPr>
+          <p:cNvSpPr txBox="1"/>
+          <p:nvPr/>
+        </p:nvSpPr>
+        <p:spPr>
+          <a:xfrm>
+            <a:off x="2714242" y="1630426"/>
+            <a:ext cx="12616460" cy="1529265"/>
+          </a:xfrm>
+          <a:prstGeom prst="rect">
+            <a:avLst/>
+          </a:prstGeom>
+        </p:spPr>
+        <p:txBody>
+          <a:bodyPr wrap="square" lIns="0" tIns="0" rIns="0" bIns="0" rtlCol="0" anchor="t">
+            <a:spAutoFit/>
+          </a:bodyPr>
+          <a:lstStyle/>
+          <a:p>
+            <a:pPr algn="ctr">
+              <a:lnSpc>
+                <a:spcPts val="12685"/>
+              </a:lnSpc>
+            </a:pPr>
+            <a:r>
+              <a:rPr lang="en-US" sz="8000" b="1" dirty="0">
+                <a:solidFill>
+                  <a:srgbClr val="002B58"/>
+                </a:solidFill>
+                <a:latin typeface="Perpetua" panose="02020502060401020303" pitchFamily="18" charset="0"/>
+                <a:ea typeface="Readex Pro Semi-Bold"/>
+                <a:cs typeface="Readex Pro Semi-Bold"/>
+                <a:sym typeface="Readex Pro Semi-Bold"/>
+              </a:rPr>
+              <a:t>VIEWS (Virtual Table)</a:t>
+            </a:r>
+            <a:endParaRPr lang="en-US" sz="6600" b="1" dirty="0">
+              <a:solidFill>
+                <a:srgbClr val="002B58"/>
+              </a:solidFill>
+              <a:latin typeface="Perpetua" panose="02020502060401020303" pitchFamily="18" charset="0"/>
+              <a:ea typeface="Readex Pro Semi-Bold"/>
+              <a:cs typeface="Readex Pro Semi-Bold"/>
+              <a:sym typeface="Readex Pro Semi-Bold"/>
+            </a:endParaRPr>
+          </a:p>
+        </p:txBody>
+      </p:sp>
+      <p:pic>
+        <p:nvPicPr>
+          <p:cNvPr id="15" name="Picture 14">
+            <a:extLst>
+              <a:ext uri="{FF2B5EF4-FFF2-40B4-BE49-F238E27FC236}">
+                <a16:creationId xmlns:a16="http://schemas.microsoft.com/office/drawing/2014/main" id="{84DB20A4-20FF-D144-31F8-4481C459029F}"/>
+              </a:ext>
+            </a:extLst>
+          </p:cNvPr>
+          <p:cNvPicPr>
+            <a:picLocks noChangeAspect="1"/>
+          </p:cNvPicPr>
+          <p:nvPr/>
+        </p:nvPicPr>
+        <p:blipFill>
+          <a:blip r:embed="rId4"/>
+          <a:stretch>
+            <a:fillRect/>
+          </a:stretch>
+        </p:blipFill>
+        <p:spPr>
+          <a:xfrm>
+            <a:off x="8069931" y="3557458"/>
+            <a:ext cx="7239000" cy="5126330"/>
+          </a:xfrm>
+          <a:prstGeom prst="rect">
+            <a:avLst/>
+          </a:prstGeom>
+        </p:spPr>
+      </p:pic>
+      <p:pic>
+        <p:nvPicPr>
+          <p:cNvPr id="17" name="Picture 16">
+            <a:extLst>
+              <a:ext uri="{FF2B5EF4-FFF2-40B4-BE49-F238E27FC236}">
+                <a16:creationId xmlns:a16="http://schemas.microsoft.com/office/drawing/2014/main" id="{509D9BBC-8019-4D5B-05BA-BB8D107E2860}"/>
+              </a:ext>
+            </a:extLst>
+          </p:cNvPr>
+          <p:cNvPicPr>
+            <a:picLocks noChangeAspect="1"/>
+          </p:cNvPicPr>
+          <p:nvPr/>
+        </p:nvPicPr>
+        <p:blipFill>
+          <a:blip r:embed="rId5"/>
+          <a:stretch>
+            <a:fillRect/>
+          </a:stretch>
+        </p:blipFill>
+        <p:spPr>
+          <a:xfrm>
+            <a:off x="1981200" y="3806188"/>
+            <a:ext cx="5900099" cy="4872157"/>
+          </a:xfrm>
+          <a:prstGeom prst="rect">
+            <a:avLst/>
+          </a:prstGeom>
+        </p:spPr>
+      </p:pic>
+    </p:spTree>
+    <p:extLst>
+      <p:ext uri="{BB962C8B-B14F-4D97-AF65-F5344CB8AC3E}">
+        <p14:creationId xmlns:p14="http://schemas.microsoft.com/office/powerpoint/2010/main" val="2716857443"/>
+      </p:ext>
+    </p:extLst>
+  </p:cSld>
+  <p:clrMapOvr>
+    <a:masterClrMapping/>
+  </p:clrMapOvr>
+</p:sld>
+</file>
+
+<file path=ppt/slides/slide29.xml><?xml version="1.0" encoding="utf-8"?>
+<p:sld xmlns:a="http://schemas.openxmlformats.org/drawingml/2006/main" xmlns:r="http://schemas.openxmlformats.org/officeDocument/2006/relationships" xmlns:p="http://schemas.openxmlformats.org/presentationml/2006/main">
+  <p:cSld>
+    <p:bg>
+      <p:bgPr>
+        <a:solidFill>
+          <a:srgbClr val="F8F3ED"/>
+        </a:solidFill>
+        <a:effectLst/>
+      </p:bgPr>
+    </p:bg>
+    <p:spTree>
+      <p:nvGrpSpPr>
+        <p:cNvPr id="1" name="">
+          <a:extLst>
+            <a:ext uri="{FF2B5EF4-FFF2-40B4-BE49-F238E27FC236}">
+              <a16:creationId xmlns:a16="http://schemas.microsoft.com/office/drawing/2014/main" id="{3EC47D1B-563B-C83C-7B12-D177FB4BA932}"/>
+            </a:ext>
+          </a:extLst>
+        </p:cNvPr>
+        <p:cNvGrpSpPr/>
+        <p:nvPr/>
+      </p:nvGrpSpPr>
+      <p:grpSpPr>
+        <a:xfrm>
+          <a:off x="0" y="0"/>
+          <a:ext cx="0" cy="0"/>
+          <a:chOff x="0" y="0"/>
+          <a:chExt cx="0" cy="0"/>
+        </a:xfrm>
+      </p:grpSpPr>
+      <p:sp>
+        <p:nvSpPr>
+          <p:cNvPr id="2" name="Freeform 2">
+            <a:extLst>
+              <a:ext uri="{FF2B5EF4-FFF2-40B4-BE49-F238E27FC236}">
+                <a16:creationId xmlns:a16="http://schemas.microsoft.com/office/drawing/2014/main" id="{3F679695-62BA-0A4D-9D7C-FE6FE43082E4}"/>
+              </a:ext>
+            </a:extLst>
+          </p:cNvPr>
+          <p:cNvSpPr/>
+          <p:nvPr/>
+        </p:nvSpPr>
+        <p:spPr>
+          <a:xfrm flipV="1">
+            <a:off x="-9909" y="-81065"/>
+            <a:ext cx="5448300" cy="5448300"/>
+          </a:xfrm>
+          <a:custGeom>
+            <a:avLst/>
+            <a:gdLst/>
+            <a:ahLst/>
+            <a:cxnLst/>
+            <a:rect l="l" t="t" r="r" b="b"/>
+            <a:pathLst>
+              <a:path w="5448300" h="5448300">
+                <a:moveTo>
+                  <a:pt x="0" y="5448300"/>
+                </a:moveTo>
+                <a:lnTo>
+                  <a:pt x="5448300" y="5448300"/>
+                </a:lnTo>
+                <a:lnTo>
+                  <a:pt x="5448300" y="0"/>
+                </a:lnTo>
+                <a:lnTo>
+                  <a:pt x="0" y="0"/>
+                </a:lnTo>
+                <a:lnTo>
+                  <a:pt x="0" y="5448300"/>
+                </a:lnTo>
+                <a:close/>
+              </a:path>
+            </a:pathLst>
+          </a:custGeom>
+          <a:blipFill>
+            <a:blip>
+              <a:extLst>
+                <a:ext uri="{96DAC541-7B7A-43D3-8B79-37D633B846F1}">
+                  <asvg:svgBlip xmlns:asvg="http://schemas.microsoft.com/office/drawing/2016/SVG/main" r:embed="rId2"/>
+                </a:ext>
+              </a:extLst>
+            </a:blip>
+            <a:stretch>
+              <a:fillRect/>
+            </a:stretch>
+          </a:blipFill>
+        </p:spPr>
+      </p:sp>
+      <p:sp>
+        <p:nvSpPr>
+          <p:cNvPr id="4" name="Freeform 4">
+            <a:extLst>
+              <a:ext uri="{FF2B5EF4-FFF2-40B4-BE49-F238E27FC236}">
+                <a16:creationId xmlns:a16="http://schemas.microsoft.com/office/drawing/2014/main" id="{753A6A62-13FF-D657-551F-643E4EE5CE27}"/>
+              </a:ext>
+            </a:extLst>
+          </p:cNvPr>
+          <p:cNvSpPr/>
+          <p:nvPr/>
+        </p:nvSpPr>
+        <p:spPr>
+          <a:xfrm>
+            <a:off x="610206" y="7472290"/>
+            <a:ext cx="836989" cy="2209944"/>
+          </a:xfrm>
+          <a:custGeom>
+            <a:avLst/>
+            <a:gdLst/>
+            <a:ahLst/>
+            <a:cxnLst/>
+            <a:rect l="l" t="t" r="r" b="b"/>
+            <a:pathLst>
+              <a:path w="836989" h="2209944">
+                <a:moveTo>
+                  <a:pt x="0" y="0"/>
+                </a:moveTo>
+                <a:lnTo>
+                  <a:pt x="836988" y="0"/>
+                </a:lnTo>
+                <a:lnTo>
+                  <a:pt x="836988" y="2209945"/>
+                </a:lnTo>
+                <a:lnTo>
+                  <a:pt x="0" y="2209945"/>
+                </a:lnTo>
+                <a:lnTo>
+                  <a:pt x="0" y="0"/>
+                </a:lnTo>
+                <a:close/>
+              </a:path>
+            </a:pathLst>
+          </a:custGeom>
+          <a:blipFill>
+            <a:blip>
+              <a:extLst>
+                <a:ext uri="{96DAC541-7B7A-43D3-8B79-37D633B846F1}">
+                  <asvg:svgBlip xmlns:asvg="http://schemas.microsoft.com/office/drawing/2016/SVG/main" r:embed="rId3"/>
+                </a:ext>
+              </a:extLst>
+            </a:blip>
+            <a:stretch>
+              <a:fillRect/>
+            </a:stretch>
+          </a:blipFill>
+        </p:spPr>
+      </p:sp>
+      <p:sp>
+        <p:nvSpPr>
+          <p:cNvPr id="5" name="Freeform 5">
+            <a:extLst>
+              <a:ext uri="{FF2B5EF4-FFF2-40B4-BE49-F238E27FC236}">
+                <a16:creationId xmlns:a16="http://schemas.microsoft.com/office/drawing/2014/main" id="{7D5B5046-6FA6-3FCC-EB7E-949493F0BE38}"/>
+              </a:ext>
+            </a:extLst>
+          </p:cNvPr>
+          <p:cNvSpPr/>
+          <p:nvPr/>
+        </p:nvSpPr>
+        <p:spPr>
+          <a:xfrm>
+            <a:off x="16884348" y="511789"/>
+            <a:ext cx="836989" cy="2209944"/>
+          </a:xfrm>
+          <a:custGeom>
+            <a:avLst/>
+            <a:gdLst/>
+            <a:ahLst/>
+            <a:cxnLst/>
+            <a:rect l="l" t="t" r="r" b="b"/>
+            <a:pathLst>
+              <a:path w="836989" h="2209944">
+                <a:moveTo>
+                  <a:pt x="0" y="0"/>
+                </a:moveTo>
+                <a:lnTo>
+                  <a:pt x="836988" y="0"/>
+                </a:lnTo>
+                <a:lnTo>
+                  <a:pt x="836988" y="2209945"/>
+                </a:lnTo>
+                <a:lnTo>
+                  <a:pt x="0" y="2209945"/>
+                </a:lnTo>
+                <a:lnTo>
+                  <a:pt x="0" y="0"/>
+                </a:lnTo>
+                <a:close/>
+              </a:path>
+            </a:pathLst>
+          </a:custGeom>
+          <a:blipFill>
+            <a:blip>
+              <a:extLst>
+                <a:ext uri="{96DAC541-7B7A-43D3-8B79-37D633B846F1}">
+                  <asvg:svgBlip xmlns:asvg="http://schemas.microsoft.com/office/drawing/2016/SVG/main" r:embed="rId3"/>
+                </a:ext>
+              </a:extLst>
+            </a:blip>
+            <a:stretch>
+              <a:fillRect/>
+            </a:stretch>
+          </a:blipFill>
+        </p:spPr>
+      </p:sp>
+      <p:sp>
+        <p:nvSpPr>
+          <p:cNvPr id="6" name="TextBox 5">
+            <a:extLst>
+              <a:ext uri="{FF2B5EF4-FFF2-40B4-BE49-F238E27FC236}">
+                <a16:creationId xmlns:a16="http://schemas.microsoft.com/office/drawing/2014/main" id="{4BBE73BC-3595-CF36-E0CF-A0C1FE4D0E3C}"/>
+              </a:ext>
+            </a:extLst>
+          </p:cNvPr>
+          <p:cNvSpPr txBox="1"/>
+          <p:nvPr/>
+        </p:nvSpPr>
+        <p:spPr>
+          <a:xfrm>
+            <a:off x="2565826" y="945105"/>
+            <a:ext cx="13658302" cy="1461041"/>
+          </a:xfrm>
+          <a:prstGeom prst="rect">
+            <a:avLst/>
+          </a:prstGeom>
+        </p:spPr>
+        <p:txBody>
+          <a:bodyPr wrap="square" lIns="0" tIns="0" rIns="0" bIns="0" rtlCol="0" anchor="t">
+            <a:spAutoFit/>
+          </a:bodyPr>
+          <a:lstStyle>
+            <a:defPPr>
+              <a:defRPr lang="en-US"/>
+            </a:defPPr>
+            <a:lvl1pPr algn="ctr">
+              <a:lnSpc>
+                <a:spcPts val="12685"/>
+              </a:lnSpc>
+              <a:defRPr sz="8000" b="1">
+                <a:solidFill>
+                  <a:srgbClr val="002B58"/>
+                </a:solidFill>
+                <a:latin typeface="Perpetua" panose="02020502060401020303" pitchFamily="18" charset="0"/>
+                <a:ea typeface="Readex Pro Semi-Bold"/>
+                <a:cs typeface="Readex Pro Semi-Bold"/>
+              </a:defRPr>
+            </a:lvl1pPr>
+          </a:lstStyle>
+          <a:p>
+            <a:r>
+              <a:rPr lang="en-US" u="sng" dirty="0">
+                <a:latin typeface="Rockwell Extra Bold" panose="02060903040505020403" pitchFamily="18" charset="0"/>
+                <a:sym typeface="Readex Pro Semi-Bold"/>
+              </a:rPr>
+              <a:t>CONCLUSION</a:t>
+            </a:r>
+          </a:p>
+        </p:txBody>
+      </p:sp>
+      <p:sp>
+        <p:nvSpPr>
+          <p:cNvPr id="13" name="TextBox 12">
+            <a:extLst>
+              <a:ext uri="{FF2B5EF4-FFF2-40B4-BE49-F238E27FC236}">
+                <a16:creationId xmlns:a16="http://schemas.microsoft.com/office/drawing/2014/main" id="{0E04A93F-1BD4-95E9-B7D8-8689A8C17793}"/>
+              </a:ext>
+            </a:extLst>
+          </p:cNvPr>
+          <p:cNvSpPr txBox="1"/>
+          <p:nvPr/>
+        </p:nvSpPr>
+        <p:spPr>
+          <a:xfrm>
+            <a:off x="1927377" y="2814709"/>
+            <a:ext cx="14935200" cy="6186309"/>
+          </a:xfrm>
+          <a:prstGeom prst="rect">
+            <a:avLst/>
+          </a:prstGeom>
+          <a:solidFill>
+            <a:schemeClr val="accent1">
+              <a:lumMod val="40000"/>
+              <a:lumOff val="60000"/>
+            </a:schemeClr>
+          </a:solidFill>
+          <a:ln>
+            <a:noFill/>
+          </a:ln>
+        </p:spPr>
+        <p:txBody>
+          <a:bodyPr wrap="square" rtlCol="0">
+            <a:spAutoFit/>
+          </a:bodyPr>
+          <a:lstStyle/>
+          <a:p>
+            <a:pPr marL="571500" indent="-571500">
+              <a:buFont typeface="Arial" panose="020B0604020202020204" pitchFamily="34" charset="0"/>
+              <a:buChar char="•"/>
+            </a:pPr>
+            <a:r>
+              <a:rPr lang="en-US" sz="3600" dirty="0">
+                <a:latin typeface="Bell MT" panose="02020503060305020303" pitchFamily="18" charset="0"/>
+              </a:rPr>
+              <a:t>The 36–45 age group forms the largest customer segment.</a:t>
+            </a:r>
+          </a:p>
+          <a:p>
+            <a:pPr marL="571500" indent="-571500">
+              <a:buFont typeface="Arial" panose="020B0604020202020204" pitchFamily="34" charset="0"/>
+              <a:buChar char="•"/>
+            </a:pPr>
+            <a:r>
+              <a:rPr lang="en-US" sz="3600" dirty="0">
+                <a:latin typeface="Bell MT" panose="02020503060305020303" pitchFamily="18" charset="0"/>
+              </a:rPr>
+              <a:t>Delhi contributes the highest number of orders.</a:t>
+            </a:r>
+          </a:p>
+          <a:p>
+            <a:pPr marL="571500" indent="-571500">
+              <a:buFont typeface="Arial" panose="020B0604020202020204" pitchFamily="34" charset="0"/>
+              <a:buChar char="•"/>
+            </a:pPr>
+            <a:r>
+              <a:rPr lang="en-US" sz="3600" dirty="0">
+                <a:latin typeface="Bell MT" panose="02020503060305020303" pitchFamily="18" charset="0"/>
+              </a:rPr>
+              <a:t>Smartphones are the top-performing category in both sales and order volume.</a:t>
+            </a:r>
+          </a:p>
+          <a:p>
+            <a:pPr marL="571500" indent="-571500">
+              <a:buFont typeface="Arial" panose="020B0604020202020204" pitchFamily="34" charset="0"/>
+              <a:buChar char="•"/>
+            </a:pPr>
+            <a:r>
+              <a:rPr lang="en-US" sz="3600" dirty="0">
+                <a:latin typeface="Bell MT" panose="02020503060305020303" pitchFamily="18" charset="0"/>
+              </a:rPr>
+              <a:t>Apple iPhone 16 emerges as the best-selling product, most expensive.</a:t>
+            </a:r>
+          </a:p>
+          <a:p>
+            <a:pPr marL="571500" indent="-571500">
+              <a:buFont typeface="Arial" panose="020B0604020202020204" pitchFamily="34" charset="0"/>
+              <a:buChar char="•"/>
+            </a:pPr>
+            <a:r>
+              <a:rPr lang="en-US" sz="3600" dirty="0">
+                <a:latin typeface="Bell MT" panose="02020503060305020303" pitchFamily="18" charset="0"/>
+              </a:rPr>
+              <a:t>A significant number of orders are “In Transit”, indicating scope for logistics optimization</a:t>
+            </a:r>
+          </a:p>
+          <a:p>
+            <a:pPr marL="571500" indent="-571500">
+              <a:buFont typeface="Arial" panose="020B0604020202020204" pitchFamily="34" charset="0"/>
+              <a:buChar char="•"/>
+            </a:pPr>
+            <a:r>
+              <a:rPr lang="en-US" sz="3600" dirty="0">
+                <a:latin typeface="Bell MT" panose="02020503060305020303" pitchFamily="18" charset="0"/>
+              </a:rPr>
+              <a:t>Certain products show high cancellation rates, requiring further investigation</a:t>
+            </a:r>
+          </a:p>
+          <a:p>
+            <a:pPr marL="571500" indent="-571500">
+              <a:buFont typeface="Arial" panose="020B0604020202020204" pitchFamily="34" charset="0"/>
+              <a:buChar char="•"/>
+            </a:pPr>
+            <a:r>
+              <a:rPr lang="en-US" sz="3600" dirty="0">
+                <a:latin typeface="Bell MT" panose="02020503060305020303" pitchFamily="18" charset="0"/>
+              </a:rPr>
+              <a:t>The year 2007 recorded peak orders and revenue, highlighting strong historical performance</a:t>
+            </a:r>
+            <a:endParaRPr lang="en-IN" sz="3600" dirty="0">
+              <a:latin typeface="Bell MT" panose="02020503060305020303" pitchFamily="18" charset="0"/>
+            </a:endParaRPr>
+          </a:p>
+        </p:txBody>
+      </p:sp>
+      <p:sp>
+        <p:nvSpPr>
+          <p:cNvPr id="3" name="Freeform 3">
+            <a:extLst>
+              <a:ext uri="{FF2B5EF4-FFF2-40B4-BE49-F238E27FC236}">
+                <a16:creationId xmlns:a16="http://schemas.microsoft.com/office/drawing/2014/main" id="{FD6FEDFF-F355-40EF-5979-D13FE4F376C3}"/>
+              </a:ext>
+            </a:extLst>
+          </p:cNvPr>
+          <p:cNvSpPr/>
+          <p:nvPr/>
+        </p:nvSpPr>
+        <p:spPr>
+          <a:xfrm flipH="1">
+            <a:off x="12849611" y="4876800"/>
+            <a:ext cx="5448300" cy="5448300"/>
+          </a:xfrm>
+          <a:custGeom>
+            <a:avLst/>
+            <a:gdLst/>
+            <a:ahLst/>
+            <a:cxnLst/>
+            <a:rect l="l" t="t" r="r" b="b"/>
+            <a:pathLst>
+              <a:path w="5448300" h="5448300">
+                <a:moveTo>
+                  <a:pt x="5448300" y="0"/>
+                </a:moveTo>
+                <a:lnTo>
+                  <a:pt x="0" y="0"/>
+                </a:lnTo>
+                <a:lnTo>
+                  <a:pt x="0" y="5448300"/>
+                </a:lnTo>
+                <a:lnTo>
+                  <a:pt x="5448300" y="5448300"/>
+                </a:lnTo>
+                <a:lnTo>
+                  <a:pt x="5448300" y="0"/>
+                </a:lnTo>
+                <a:close/>
+              </a:path>
+            </a:pathLst>
+          </a:custGeom>
+          <a:blipFill>
+            <a:blip>
+              <a:extLst>
+                <a:ext uri="{96DAC541-7B7A-43D3-8B79-37D633B846F1}">
+                  <asvg:svgBlip xmlns:asvg="http://schemas.microsoft.com/office/drawing/2016/SVG/main" r:embed="rId2"/>
+                </a:ext>
+              </a:extLst>
+            </a:blip>
+            <a:stretch>
+              <a:fillRect/>
+            </a:stretch>
+          </a:blipFill>
+        </p:spPr>
+        <p:txBody>
+          <a:bodyPr/>
+          <a:lstStyle/>
+          <a:p>
+            <a:endParaRPr lang="en-IN" dirty="0"/>
+          </a:p>
+        </p:txBody>
+      </p:sp>
+    </p:spTree>
+    <p:extLst>
+      <p:ext uri="{BB962C8B-B14F-4D97-AF65-F5344CB8AC3E}">
+        <p14:creationId xmlns:p14="http://schemas.microsoft.com/office/powerpoint/2010/main" val="3949468740"/>
+      </p:ext>
+    </p:extLst>
+  </p:cSld>
+  <p:clrMapOvr>
+    <a:masterClrMapping/>
+  </p:clrMapOvr>
+</p:sld>
+</file>
+
+<file path=ppt/slides/slide3.xml><?xml version="1.0" encoding="utf-8"?>
+<p:sld xmlns:a="http://schemas.openxmlformats.org/drawingml/2006/main" xmlns:r="http://schemas.openxmlformats.org/officeDocument/2006/relationships" xmlns:p="http://schemas.openxmlformats.org/presentationml/2006/main">
+  <p:cSld>
+    <p:bg>
+      <p:bgPr>
+        <a:solidFill>
+          <a:srgbClr val="F8F3ED"/>
+        </a:solidFill>
+        <a:effectLst/>
+      </p:bgPr>
+    </p:bg>
+    <p:spTree>
+      <p:nvGrpSpPr>
+        <p:cNvPr id="1" name="">
+          <a:extLst>
+            <a:ext uri="{FF2B5EF4-FFF2-40B4-BE49-F238E27FC236}">
+              <a16:creationId xmlns:a16="http://schemas.microsoft.com/office/drawing/2014/main" id="{0C9724BC-52FE-CEFA-0586-26AA87BB8A0C}"/>
+            </a:ext>
+          </a:extLst>
+        </p:cNvPr>
+        <p:cNvGrpSpPr/>
+        <p:nvPr/>
+      </p:nvGrpSpPr>
+      <p:grpSpPr>
+        <a:xfrm>
+          <a:off x="0" y="0"/>
+          <a:ext cx="0" cy="0"/>
+          <a:chOff x="0" y="0"/>
+          <a:chExt cx="0" cy="0"/>
+        </a:xfrm>
+      </p:grpSpPr>
+      <p:sp>
+        <p:nvSpPr>
+          <p:cNvPr id="2" name="Freeform 2">
+            <a:extLst>
+              <a:ext uri="{FF2B5EF4-FFF2-40B4-BE49-F238E27FC236}">
+                <a16:creationId xmlns:a16="http://schemas.microsoft.com/office/drawing/2014/main" id="{B855E89C-BF12-7924-42CB-023D21231897}"/>
+              </a:ext>
+            </a:extLst>
+          </p:cNvPr>
+          <p:cNvSpPr/>
+          <p:nvPr/>
+        </p:nvSpPr>
+        <p:spPr>
+          <a:xfrm flipV="1">
+            <a:off x="0" y="0"/>
+            <a:ext cx="5448300" cy="5448300"/>
+          </a:xfrm>
+          <a:custGeom>
+            <a:avLst/>
+            <a:gdLst/>
+            <a:ahLst/>
+            <a:cxnLst/>
+            <a:rect l="l" t="t" r="r" b="b"/>
+            <a:pathLst>
+              <a:path w="5448300" h="5448300">
+                <a:moveTo>
+                  <a:pt x="0" y="5448300"/>
+                </a:moveTo>
+                <a:lnTo>
+                  <a:pt x="5448300" y="5448300"/>
+                </a:lnTo>
+                <a:lnTo>
+                  <a:pt x="5448300" y="0"/>
+                </a:lnTo>
+                <a:lnTo>
+                  <a:pt x="0" y="0"/>
+                </a:lnTo>
+                <a:lnTo>
+                  <a:pt x="0" y="5448300"/>
+                </a:lnTo>
+                <a:close/>
+              </a:path>
+            </a:pathLst>
+          </a:custGeom>
+          <a:blipFill>
+            <a:blip>
+              <a:extLst>
+                <a:ext uri="{96DAC541-7B7A-43D3-8B79-37D633B846F1}">
+                  <asvg:svgBlip xmlns:asvg="http://schemas.microsoft.com/office/drawing/2016/SVG/main" r:embed="rId2"/>
+                </a:ext>
+              </a:extLst>
+            </a:blip>
+            <a:stretch>
+              <a:fillRect/>
+            </a:stretch>
+          </a:blipFill>
+        </p:spPr>
+      </p:sp>
+      <p:sp>
+        <p:nvSpPr>
+          <p:cNvPr id="3" name="Freeform 3">
+            <a:extLst>
+              <a:ext uri="{FF2B5EF4-FFF2-40B4-BE49-F238E27FC236}">
+                <a16:creationId xmlns:a16="http://schemas.microsoft.com/office/drawing/2014/main" id="{FB399A0D-AB19-F2C3-7340-72C8E3F7938C}"/>
+              </a:ext>
+            </a:extLst>
+          </p:cNvPr>
+          <p:cNvSpPr/>
+          <p:nvPr/>
+        </p:nvSpPr>
+        <p:spPr>
+          <a:xfrm flipH="1">
+            <a:off x="12839700" y="4838700"/>
+            <a:ext cx="5448300" cy="5448300"/>
+          </a:xfrm>
+          <a:custGeom>
+            <a:avLst/>
+            <a:gdLst/>
+            <a:ahLst/>
+            <a:cxnLst/>
+            <a:rect l="l" t="t" r="r" b="b"/>
+            <a:pathLst>
+              <a:path w="5448300" h="5448300">
+                <a:moveTo>
+                  <a:pt x="5448300" y="0"/>
+                </a:moveTo>
+                <a:lnTo>
+                  <a:pt x="0" y="0"/>
+                </a:lnTo>
+                <a:lnTo>
+                  <a:pt x="0" y="5448300"/>
+                </a:lnTo>
+                <a:lnTo>
+                  <a:pt x="5448300" y="5448300"/>
+                </a:lnTo>
+                <a:lnTo>
+                  <a:pt x="5448300" y="0"/>
+                </a:lnTo>
+                <a:close/>
+              </a:path>
+            </a:pathLst>
+          </a:custGeom>
+          <a:blipFill>
+            <a:blip>
+              <a:extLst>
+                <a:ext uri="{96DAC541-7B7A-43D3-8B79-37D633B846F1}">
+                  <asvg:svgBlip xmlns:asvg="http://schemas.microsoft.com/office/drawing/2016/SVG/main" r:embed="rId2"/>
+                </a:ext>
+              </a:extLst>
+            </a:blip>
+            <a:stretch>
+              <a:fillRect/>
+            </a:stretch>
+          </a:blipFill>
+        </p:spPr>
+      </p:sp>
+      <p:sp>
+        <p:nvSpPr>
+          <p:cNvPr id="4" name="Freeform 4">
+            <a:extLst>
+              <a:ext uri="{FF2B5EF4-FFF2-40B4-BE49-F238E27FC236}">
+                <a16:creationId xmlns:a16="http://schemas.microsoft.com/office/drawing/2014/main" id="{E9B982C4-1BB1-1D08-774D-7B78EA7658B0}"/>
+              </a:ext>
+            </a:extLst>
+          </p:cNvPr>
+          <p:cNvSpPr/>
+          <p:nvPr/>
+        </p:nvSpPr>
+        <p:spPr>
+          <a:xfrm>
+            <a:off x="610206" y="7472290"/>
+            <a:ext cx="836989" cy="2209944"/>
+          </a:xfrm>
+          <a:custGeom>
+            <a:avLst/>
+            <a:gdLst/>
+            <a:ahLst/>
+            <a:cxnLst/>
+            <a:rect l="l" t="t" r="r" b="b"/>
+            <a:pathLst>
+              <a:path w="836989" h="2209944">
+                <a:moveTo>
+                  <a:pt x="0" y="0"/>
+                </a:moveTo>
+                <a:lnTo>
+                  <a:pt x="836988" y="0"/>
+                </a:lnTo>
+                <a:lnTo>
+                  <a:pt x="836988" y="2209945"/>
+                </a:lnTo>
+                <a:lnTo>
+                  <a:pt x="0" y="2209945"/>
+                </a:lnTo>
+                <a:lnTo>
+                  <a:pt x="0" y="0"/>
+                </a:lnTo>
+                <a:close/>
+              </a:path>
+            </a:pathLst>
+          </a:custGeom>
+          <a:blipFill>
+            <a:blip>
+              <a:extLst>
+                <a:ext uri="{96DAC541-7B7A-43D3-8B79-37D633B846F1}">
+                  <asvg:svgBlip xmlns:asvg="http://schemas.microsoft.com/office/drawing/2016/SVG/main" r:embed="rId3"/>
+                </a:ext>
+              </a:extLst>
+            </a:blip>
+            <a:stretch>
+              <a:fillRect/>
+            </a:stretch>
+          </a:blipFill>
+        </p:spPr>
+      </p:sp>
+      <p:sp>
+        <p:nvSpPr>
+          <p:cNvPr id="5" name="Freeform 5">
+            <a:extLst>
+              <a:ext uri="{FF2B5EF4-FFF2-40B4-BE49-F238E27FC236}">
+                <a16:creationId xmlns:a16="http://schemas.microsoft.com/office/drawing/2014/main" id="{84F9AE45-D914-58B3-E348-1685020F8C8F}"/>
+              </a:ext>
+            </a:extLst>
+          </p:cNvPr>
+          <p:cNvSpPr/>
+          <p:nvPr/>
+        </p:nvSpPr>
+        <p:spPr>
+          <a:xfrm>
+            <a:off x="16840806" y="604765"/>
+            <a:ext cx="836989" cy="2209944"/>
+          </a:xfrm>
+          <a:custGeom>
+            <a:avLst/>
+            <a:gdLst/>
+            <a:ahLst/>
+            <a:cxnLst/>
+            <a:rect l="l" t="t" r="r" b="b"/>
+            <a:pathLst>
+              <a:path w="836989" h="2209944">
+                <a:moveTo>
+                  <a:pt x="0" y="0"/>
+                </a:moveTo>
+                <a:lnTo>
+                  <a:pt x="836988" y="0"/>
+                </a:lnTo>
+                <a:lnTo>
+                  <a:pt x="836988" y="2209945"/>
+                </a:lnTo>
+                <a:lnTo>
+                  <a:pt x="0" y="2209945"/>
+                </a:lnTo>
+                <a:lnTo>
+                  <a:pt x="0" y="0"/>
+                </a:lnTo>
+                <a:close/>
+              </a:path>
+            </a:pathLst>
+          </a:custGeom>
+          <a:blipFill>
+            <a:blip>
+              <a:extLst>
+                <a:ext uri="{96DAC541-7B7A-43D3-8B79-37D633B846F1}">
+                  <asvg:svgBlip xmlns:asvg="http://schemas.microsoft.com/office/drawing/2016/SVG/main" r:embed="rId3"/>
+                </a:ext>
+              </a:extLst>
+            </a:blip>
+            <a:stretch>
+              <a:fillRect/>
+            </a:stretch>
+          </a:blipFill>
+        </p:spPr>
+      </p:sp>
+      <p:sp>
+        <p:nvSpPr>
+          <p:cNvPr id="6" name="TextBox 6">
+            <a:extLst>
+              <a:ext uri="{FF2B5EF4-FFF2-40B4-BE49-F238E27FC236}">
+                <a16:creationId xmlns:a16="http://schemas.microsoft.com/office/drawing/2014/main" id="{B738BD1E-317D-971F-191E-90D9602A41E1}"/>
+              </a:ext>
+            </a:extLst>
+          </p:cNvPr>
+          <p:cNvSpPr txBox="1"/>
+          <p:nvPr/>
+        </p:nvSpPr>
+        <p:spPr>
+          <a:xfrm>
+            <a:off x="3690340" y="1744732"/>
+            <a:ext cx="12616460" cy="1500347"/>
+          </a:xfrm>
+          <a:prstGeom prst="rect">
+            <a:avLst/>
+          </a:prstGeom>
+        </p:spPr>
+        <p:txBody>
+          <a:bodyPr wrap="square" lIns="0" tIns="0" rIns="0" bIns="0" rtlCol="0" anchor="t">
+            <a:spAutoFit/>
+          </a:bodyPr>
+          <a:lstStyle/>
+          <a:p>
+            <a:pPr algn="ctr">
+              <a:lnSpc>
+                <a:spcPts val="12685"/>
+              </a:lnSpc>
+            </a:pPr>
+            <a:r>
+              <a:rPr lang="en-US" sz="9060" b="1" dirty="0">
+                <a:solidFill>
+                  <a:srgbClr val="002B58"/>
+                </a:solidFill>
+                <a:latin typeface="Readex Pro Semi-Bold"/>
+                <a:ea typeface="Readex Pro Semi-Bold"/>
+                <a:cs typeface="Readex Pro Semi-Bold"/>
+                <a:sym typeface="Readex Pro Semi-Bold"/>
+              </a:rPr>
+              <a:t>DATASET CONTAINS</a:t>
+            </a:r>
+          </a:p>
+        </p:txBody>
+      </p:sp>
+      <p:sp>
+        <p:nvSpPr>
+          <p:cNvPr id="9" name="Rectangle: Diagonal Corners Rounded 8">
+            <a:extLst>
+              <a:ext uri="{FF2B5EF4-FFF2-40B4-BE49-F238E27FC236}">
+                <a16:creationId xmlns:a16="http://schemas.microsoft.com/office/drawing/2014/main" id="{8B786457-4806-6512-0689-514C6AC5E23B}"/>
+              </a:ext>
+            </a:extLst>
+          </p:cNvPr>
+          <p:cNvSpPr/>
+          <p:nvPr/>
+        </p:nvSpPr>
+        <p:spPr>
+          <a:xfrm>
+            <a:off x="2286000" y="7789720"/>
+            <a:ext cx="4419600" cy="1314450"/>
+          </a:xfrm>
+          <a:prstGeom prst="round2DiagRect">
+            <a:avLst>
+              <a:gd name="adj1" fmla="val 16667"/>
+              <a:gd name="adj2" fmla="val 50000"/>
+            </a:avLst>
+          </a:prstGeom>
+          <a:solidFill>
+            <a:schemeClr val="accent5">
+              <a:alpha val="50000"/>
+            </a:schemeClr>
+          </a:solidFill>
+          <a:ln>
+            <a:noFill/>
+          </a:ln>
+        </p:spPr>
+        <p:style>
+          <a:lnRef idx="0">
+            <a:scrgbClr r="0" g="0" b="0"/>
+          </a:lnRef>
+          <a:fillRef idx="0">
+            <a:scrgbClr r="0" g="0" b="0"/>
+          </a:fillRef>
+          <a:effectRef idx="0">
+            <a:scrgbClr r="0" g="0" b="0"/>
+          </a:effectRef>
+          <a:fontRef idx="minor">
+            <a:schemeClr val="lt1"/>
+          </a:fontRef>
+        </p:style>
+        <p:txBody>
+          <a:bodyPr rtlCol="0" anchor="ctr"/>
+          <a:lstStyle/>
+          <a:p>
+            <a:pPr algn="ctr"/>
+            <a:r>
+              <a:rPr lang="en-US" sz="4400" dirty="0">
+                <a:solidFill>
+                  <a:schemeClr val="tx2">
+                    <a:lumMod val="50000"/>
+                  </a:schemeClr>
+                </a:solidFill>
+                <a:latin typeface="Arial Rounded MT Bold" panose="020F0704030504030204" pitchFamily="34" charset="0"/>
+              </a:rPr>
+              <a:t>100K ROWS</a:t>
+            </a:r>
+            <a:endParaRPr lang="en-IN" sz="4400" dirty="0">
+              <a:solidFill>
+                <a:schemeClr val="tx2">
+                  <a:lumMod val="50000"/>
+                </a:schemeClr>
+              </a:solidFill>
+              <a:latin typeface="Arial Rounded MT Bold" panose="020F0704030504030204" pitchFamily="34" charset="0"/>
+            </a:endParaRPr>
+          </a:p>
+        </p:txBody>
+      </p:sp>
+      <p:sp>
+        <p:nvSpPr>
+          <p:cNvPr id="10" name="Rectangle: Diagonal Corners Rounded 9">
+            <a:extLst>
+              <a:ext uri="{FF2B5EF4-FFF2-40B4-BE49-F238E27FC236}">
+                <a16:creationId xmlns:a16="http://schemas.microsoft.com/office/drawing/2014/main" id="{226FD061-1C1E-02AB-3212-3DC98358F33C}"/>
+              </a:ext>
+            </a:extLst>
+          </p:cNvPr>
+          <p:cNvSpPr/>
+          <p:nvPr/>
+        </p:nvSpPr>
+        <p:spPr>
+          <a:xfrm>
+            <a:off x="7586738" y="7789720"/>
+            <a:ext cx="4990495" cy="1314450"/>
+          </a:xfrm>
+          <a:prstGeom prst="round2DiagRect">
+            <a:avLst>
+              <a:gd name="adj1" fmla="val 16667"/>
+              <a:gd name="adj2" fmla="val 50000"/>
+            </a:avLst>
+          </a:prstGeom>
+          <a:solidFill>
+            <a:schemeClr val="accent5">
+              <a:alpha val="50000"/>
+            </a:schemeClr>
+          </a:solidFill>
+          <a:ln>
+            <a:noFill/>
+          </a:ln>
+        </p:spPr>
+        <p:style>
+          <a:lnRef idx="0">
+            <a:scrgbClr r="0" g="0" b="0"/>
+          </a:lnRef>
+          <a:fillRef idx="0">
+            <a:scrgbClr r="0" g="0" b="0"/>
+          </a:fillRef>
+          <a:effectRef idx="0">
+            <a:scrgbClr r="0" g="0" b="0"/>
+          </a:effectRef>
+          <a:fontRef idx="minor">
+            <a:schemeClr val="lt1"/>
+          </a:fontRef>
+        </p:style>
+        <p:txBody>
+          <a:bodyPr rtlCol="0" anchor="ctr"/>
+          <a:lstStyle/>
+          <a:p>
+            <a:pPr algn="ctr"/>
+            <a:r>
+              <a:rPr lang="en-US" sz="4400" dirty="0">
+                <a:solidFill>
+                  <a:schemeClr val="tx2">
+                    <a:lumMod val="50000"/>
+                  </a:schemeClr>
+                </a:solidFill>
+                <a:latin typeface="Arial Rounded MT Bold" panose="020F0704030504030204" pitchFamily="34" charset="0"/>
+              </a:rPr>
+              <a:t>14 COLUMNS</a:t>
+            </a:r>
+            <a:endParaRPr lang="en-IN" sz="4400" dirty="0">
+              <a:solidFill>
+                <a:schemeClr val="tx2">
+                  <a:lumMod val="50000"/>
+                </a:schemeClr>
+              </a:solidFill>
+              <a:latin typeface="Arial Rounded MT Bold" panose="020F0704030504030204" pitchFamily="34" charset="0"/>
+            </a:endParaRPr>
+          </a:p>
+        </p:txBody>
+      </p:sp>
+      <p:pic>
+        <p:nvPicPr>
+          <p:cNvPr id="14" name="Picture 13">
+            <a:extLst>
+              <a:ext uri="{FF2B5EF4-FFF2-40B4-BE49-F238E27FC236}">
+                <a16:creationId xmlns:a16="http://schemas.microsoft.com/office/drawing/2014/main" id="{2B182665-3AA4-A053-E5DF-F89203CD2AB2}"/>
+              </a:ext>
+            </a:extLst>
+          </p:cNvPr>
+          <p:cNvPicPr>
+            <a:picLocks noChangeAspect="1"/>
+          </p:cNvPicPr>
+          <p:nvPr/>
+        </p:nvPicPr>
+        <p:blipFill>
+          <a:blip r:embed="rId4"/>
+          <a:stretch>
+            <a:fillRect/>
+          </a:stretch>
+        </p:blipFill>
+        <p:spPr>
+          <a:xfrm>
+            <a:off x="1098556" y="3655870"/>
+            <a:ext cx="16090887" cy="3621230"/>
+          </a:xfrm>
+          <a:prstGeom prst="rect">
+            <a:avLst/>
+          </a:prstGeom>
+        </p:spPr>
+      </p:pic>
+    </p:spTree>
+    <p:extLst>
+      <p:ext uri="{BB962C8B-B14F-4D97-AF65-F5344CB8AC3E}">
+        <p14:creationId xmlns:p14="http://schemas.microsoft.com/office/powerpoint/2010/main" val="3054742959"/>
+      </p:ext>
+    </p:extLst>
+  </p:cSld>
+  <p:clrMapOvr>
+    <a:masterClrMapping/>
+  </p:clrMapOvr>
+</p:sld>
+</file>
+
+<file path=ppt/slides/slide30.xml><?xml version="1.0" encoding="utf-8"?>
 <p:sld xmlns:a="http://schemas.openxmlformats.org/drawingml/2006/main" xmlns:r="http://schemas.openxmlformats.org/officeDocument/2006/relationships" xmlns:p="http://schemas.openxmlformats.org/presentationml/2006/main">
   <p:cSld>
     <p:bg>
@@ -12385,8 +14836,8 @@
           <p:nvPr/>
         </p:nvSpPr>
         <p:spPr>
-          <a:xfrm flipV="1">
-            <a:off x="-9908" y="-38100"/>
+          <a:xfrm rot="16200000" flipV="1">
+            <a:off x="-38099" y="4876800"/>
             <a:ext cx="5448300" cy="5448300"/>
           </a:xfrm>
           <a:custGeom>
@@ -12443,8 +14894,8 @@
           <p:nvPr/>
         </p:nvSpPr>
         <p:spPr>
-          <a:xfrm flipH="1">
-            <a:off x="12877800" y="4876800"/>
+          <a:xfrm rot="16200000" flipH="1">
+            <a:off x="12839700" y="-38100"/>
             <a:ext cx="5448300" cy="5448300"/>
           </a:xfrm>
           <a:custGeom>
@@ -12502,7 +14953,7 @@
         </p:nvSpPr>
         <p:spPr>
           <a:xfrm>
-            <a:off x="610206" y="7472290"/>
+            <a:off x="1066800" y="604765"/>
             <a:ext cx="836989" cy="2209944"/>
           </a:xfrm>
           <a:custGeom>
@@ -12560,7 +15011,7 @@
         </p:nvSpPr>
         <p:spPr>
           <a:xfrm>
-            <a:off x="16840806" y="604765"/>
+            <a:off x="15814753" y="7211642"/>
             <a:ext cx="836989" cy="2209944"/>
           </a:xfrm>
           <a:custGeom>
@@ -12603,6 +15054,13 @@
             </a:stretch>
           </a:blipFill>
         </p:spPr>
+        <p:txBody>
+          <a:bodyPr/>
+          <a:lstStyle/>
+          <a:p>
+            <a:endParaRPr lang="en-IN" dirty="0"/>
+          </a:p>
+        </p:txBody>
       </p:sp>
       <p:sp>
         <p:nvSpPr>
@@ -12618,7 +15076,7 @@
         </p:nvSpPr>
         <p:spPr>
           <a:xfrm>
-            <a:off x="2506883" y="4000500"/>
+            <a:off x="2512326" y="4363479"/>
             <a:ext cx="13302427" cy="1560042"/>
           </a:xfrm>
           <a:prstGeom prst="rect">
@@ -12651,6 +15109,51 @@
           </a:p>
         </p:txBody>
       </p:sp>
+      <p:sp>
+        <p:nvSpPr>
+          <p:cNvPr id="7" name="AutoShape 2" descr="फ्लिपकार्ट - विकिपीडिया">
+            <a:extLst>
+              <a:ext uri="{FF2B5EF4-FFF2-40B4-BE49-F238E27FC236}">
+                <a16:creationId xmlns:a16="http://schemas.microsoft.com/office/drawing/2014/main" id="{F8C1EF47-14B3-EBBD-A239-166E707DC2AA}"/>
+              </a:ext>
+            </a:extLst>
+          </p:cNvPr>
+          <p:cNvSpPr>
+            <a:spLocks noChangeAspect="1" noChangeArrowheads="1"/>
+          </p:cNvSpPr>
+          <p:nvPr/>
+        </p:nvSpPr>
+        <p:spPr bwMode="auto">
+          <a:xfrm>
+            <a:off x="4114800" y="4991100"/>
+            <a:ext cx="5181600" cy="5181600"/>
+          </a:xfrm>
+          <a:prstGeom prst="rect">
+            <a:avLst/>
+          </a:prstGeom>
+          <a:noFill/>
+          <a:extLst>
+            <a:ext uri="{909E8E84-426E-40DD-AFC4-6F175D3DCCD1}">
+              <a14:hiddenFill xmlns:a14="http://schemas.microsoft.com/office/drawing/2010/main">
+                <a:solidFill>
+                  <a:srgbClr val="FFFFFF"/>
+                </a:solidFill>
+              </a14:hiddenFill>
+            </a:ext>
+          </a:extLst>
+        </p:spPr>
+        <p:txBody>
+          <a:bodyPr vert="horz" wrap="square" lIns="91440" tIns="45720" rIns="91440" bIns="45720" numCol="1" anchor="t" anchorCtr="0" compatLnSpc="1">
+            <a:prstTxWarp prst="textNoShape">
+              <a:avLst/>
+            </a:prstTxWarp>
+          </a:bodyPr>
+          <a:lstStyle/>
+          <a:p>
+            <a:endParaRPr lang="en-IN"/>
+          </a:p>
+        </p:txBody>
+      </p:sp>
     </p:spTree>
     <p:extLst>
       <p:ext uri="{BB962C8B-B14F-4D97-AF65-F5344CB8AC3E}">
@@ -12664,7 +15167,7 @@
 </p:sld>
 </file>
 
-<file path=ppt/slides/slide3.xml><?xml version="1.0" encoding="utf-8"?>
+<file path=ppt/slides/slide4.xml><?xml version="1.0" encoding="utf-8"?>
 <p:sld xmlns:a="http://schemas.openxmlformats.org/drawingml/2006/main" xmlns:r="http://schemas.openxmlformats.org/officeDocument/2006/relationships" xmlns:p="http://schemas.openxmlformats.org/presentationml/2006/main">
   <p:cSld>
     <p:bg>
@@ -13042,7 +15545,7 @@
 </p:sld>
 </file>
 
-<file path=ppt/slides/slide4.xml><?xml version="1.0" encoding="utf-8"?>
+<file path=ppt/slides/slide5.xml><?xml version="1.0" encoding="utf-8"?>
 <p:sld xmlns:a="http://schemas.openxmlformats.org/drawingml/2006/main" xmlns:r="http://schemas.openxmlformats.org/officeDocument/2006/relationships" xmlns:p="http://schemas.openxmlformats.org/presentationml/2006/main">
   <p:cSld>
     <p:bg>
@@ -13498,7 +16001,7 @@
 </p:sld>
 </file>
 
-<file path=ppt/slides/slide5.xml><?xml version="1.0" encoding="utf-8"?>
+<file path=ppt/slides/slide6.xml><?xml version="1.0" encoding="utf-8"?>
 <p:sld xmlns:a="http://schemas.openxmlformats.org/drawingml/2006/main" xmlns:r="http://schemas.openxmlformats.org/officeDocument/2006/relationships" xmlns:p="http://schemas.openxmlformats.org/presentationml/2006/main">
   <p:cSld>
     <p:bg>
@@ -13954,7 +16457,7 @@
 </p:sld>
 </file>
 
-<file path=ppt/slides/slide6.xml><?xml version="1.0" encoding="utf-8"?>
+<file path=ppt/slides/slide7.xml><?xml version="1.0" encoding="utf-8"?>
 <p:sld xmlns:a="http://schemas.openxmlformats.org/drawingml/2006/main" xmlns:r="http://schemas.openxmlformats.org/officeDocument/2006/relationships" xmlns:p="http://schemas.openxmlformats.org/presentationml/2006/main">
   <p:cSld>
     <p:bg>
@@ -14410,7 +16913,7 @@
 </p:sld>
 </file>
 
-<file path=ppt/slides/slide7.xml><?xml version="1.0" encoding="utf-8"?>
+<file path=ppt/slides/slide8.xml><?xml version="1.0" encoding="utf-8"?>
 <p:sld xmlns:a="http://schemas.openxmlformats.org/drawingml/2006/main" xmlns:r="http://schemas.openxmlformats.org/officeDocument/2006/relationships" xmlns:p="http://schemas.openxmlformats.org/presentationml/2006/main">
   <p:cSld>
     <p:bg>
@@ -14816,7 +17319,7 @@
 </p:sld>
 </file>
 
-<file path=ppt/slides/slide8.xml><?xml version="1.0" encoding="utf-8"?>
+<file path=ppt/slides/slide9.xml><?xml version="1.0" encoding="utf-8"?>
 <p:sld xmlns:a="http://schemas.openxmlformats.org/drawingml/2006/main" xmlns:r="http://schemas.openxmlformats.org/officeDocument/2006/relationships" xmlns:p="http://schemas.openxmlformats.org/presentationml/2006/main">
   <p:cSld>
     <p:bg>
@@ -15093,8 +17596,8 @@
         </p:nvSpPr>
         <p:spPr>
           <a:xfrm>
-            <a:off x="3962400" y="491073"/>
-            <a:ext cx="12616460" cy="3057888"/>
+            <a:off x="2714242" y="1135582"/>
+            <a:ext cx="13911860" cy="1529265"/>
           </a:xfrm>
           <a:prstGeom prst="rect">
             <a:avLst/>
@@ -15123,13 +17626,6 @@
               </a:rPr>
               <a:t>Customer Segmentation</a:t>
             </a:r>
-          </a:p>
-          <a:p>
-            <a:pPr algn="ctr">
-              <a:lnSpc>
-                <a:spcPts val="12685"/>
-              </a:lnSpc>
-            </a:pPr>
             <a:r>
               <a:rPr lang="en-US" sz="5400" b="1" dirty="0">
                 <a:solidFill>
@@ -15253,288 +17749,12 @@
           </a:p>
         </p:txBody>
       </p:sp>
-    </p:spTree>
-    <p:extLst>
-      <p:ext uri="{BB962C8B-B14F-4D97-AF65-F5344CB8AC3E}">
-        <p14:creationId xmlns:p14="http://schemas.microsoft.com/office/powerpoint/2010/main" val="2052776629"/>
-      </p:ext>
-    </p:extLst>
-  </p:cSld>
-  <p:clrMapOvr>
-    <a:masterClrMapping/>
-  </p:clrMapOvr>
-</p:sld>
-</file>
-
-<file path=ppt/slides/slide9.xml><?xml version="1.0" encoding="utf-8"?>
-<p:sld xmlns:a="http://schemas.openxmlformats.org/drawingml/2006/main" xmlns:r="http://schemas.openxmlformats.org/officeDocument/2006/relationships" xmlns:p="http://schemas.openxmlformats.org/presentationml/2006/main">
-  <p:cSld>
-    <p:bg>
-      <p:bgPr>
-        <a:solidFill>
-          <a:srgbClr val="F8F3ED"/>
-        </a:solidFill>
-        <a:effectLst/>
-      </p:bgPr>
-    </p:bg>
-    <p:spTree>
-      <p:nvGrpSpPr>
-        <p:cNvPr id="1" name="">
-          <a:extLst>
-            <a:ext uri="{FF2B5EF4-FFF2-40B4-BE49-F238E27FC236}">
-              <a16:creationId xmlns:a16="http://schemas.microsoft.com/office/drawing/2014/main" id="{3ED26FA1-5B69-8033-832C-0C4506A1DAE0}"/>
-            </a:ext>
-          </a:extLst>
-        </p:cNvPr>
-        <p:cNvGrpSpPr/>
-        <p:nvPr/>
-      </p:nvGrpSpPr>
-      <p:grpSpPr>
-        <a:xfrm>
-          <a:off x="0" y="0"/>
-          <a:ext cx="0" cy="0"/>
-          <a:chOff x="0" y="0"/>
-          <a:chExt cx="0" cy="0"/>
-        </a:xfrm>
-      </p:grpSpPr>
-      <p:sp>
-        <p:nvSpPr>
-          <p:cNvPr id="2" name="Freeform 2">
-            <a:extLst>
-              <a:ext uri="{FF2B5EF4-FFF2-40B4-BE49-F238E27FC236}">
-                <a16:creationId xmlns:a16="http://schemas.microsoft.com/office/drawing/2014/main" id="{867AFCD8-14EC-0C6D-AF80-615E1612F651}"/>
-              </a:ext>
-            </a:extLst>
-          </p:cNvPr>
-          <p:cNvSpPr/>
-          <p:nvPr/>
-        </p:nvSpPr>
-        <p:spPr>
-          <a:xfrm flipV="1">
-            <a:off x="-9908" y="0"/>
-            <a:ext cx="5448300" cy="5448300"/>
-          </a:xfrm>
-          <a:custGeom>
-            <a:avLst/>
-            <a:gdLst/>
-            <a:ahLst/>
-            <a:cxnLst/>
-            <a:rect l="l" t="t" r="r" b="b"/>
-            <a:pathLst>
-              <a:path w="5448300" h="5448300">
-                <a:moveTo>
-                  <a:pt x="0" y="5448300"/>
-                </a:moveTo>
-                <a:lnTo>
-                  <a:pt x="5448300" y="5448300"/>
-                </a:lnTo>
-                <a:lnTo>
-                  <a:pt x="5448300" y="0"/>
-                </a:lnTo>
-                <a:lnTo>
-                  <a:pt x="0" y="0"/>
-                </a:lnTo>
-                <a:lnTo>
-                  <a:pt x="0" y="5448300"/>
-                </a:lnTo>
-                <a:close/>
-              </a:path>
-            </a:pathLst>
-          </a:custGeom>
-          <a:blipFill>
-            <a:blip>
-              <a:extLst>
-                <a:ext uri="{96DAC541-7B7A-43D3-8B79-37D633B846F1}">
-                  <asvg:svgBlip xmlns:asvg="http://schemas.microsoft.com/office/drawing/2016/SVG/main" r:embed="rId2"/>
-                </a:ext>
-              </a:extLst>
-            </a:blip>
-            <a:stretch>
-              <a:fillRect/>
-            </a:stretch>
-          </a:blipFill>
-        </p:spPr>
-      </p:sp>
-      <p:sp>
-        <p:nvSpPr>
-          <p:cNvPr id="3" name="Freeform 3">
-            <a:extLst>
-              <a:ext uri="{FF2B5EF4-FFF2-40B4-BE49-F238E27FC236}">
-                <a16:creationId xmlns:a16="http://schemas.microsoft.com/office/drawing/2014/main" id="{F1DF5BDD-20A9-1692-3B98-0111F4349878}"/>
-              </a:ext>
-            </a:extLst>
-          </p:cNvPr>
-          <p:cNvSpPr/>
-          <p:nvPr/>
-        </p:nvSpPr>
-        <p:spPr>
-          <a:xfrm flipH="1">
-            <a:off x="12849610" y="4838700"/>
-            <a:ext cx="5448300" cy="5448300"/>
-          </a:xfrm>
-          <a:custGeom>
-            <a:avLst/>
-            <a:gdLst/>
-            <a:ahLst/>
-            <a:cxnLst/>
-            <a:rect l="l" t="t" r="r" b="b"/>
-            <a:pathLst>
-              <a:path w="5448300" h="5448300">
-                <a:moveTo>
-                  <a:pt x="5448300" y="0"/>
-                </a:moveTo>
-                <a:lnTo>
-                  <a:pt x="0" y="0"/>
-                </a:lnTo>
-                <a:lnTo>
-                  <a:pt x="0" y="5448300"/>
-                </a:lnTo>
-                <a:lnTo>
-                  <a:pt x="5448300" y="5448300"/>
-                </a:lnTo>
-                <a:lnTo>
-                  <a:pt x="5448300" y="0"/>
-                </a:lnTo>
-                <a:close/>
-              </a:path>
-            </a:pathLst>
-          </a:custGeom>
-          <a:blipFill>
-            <a:blip>
-              <a:extLst>
-                <a:ext uri="{96DAC541-7B7A-43D3-8B79-37D633B846F1}">
-                  <asvg:svgBlip xmlns:asvg="http://schemas.microsoft.com/office/drawing/2016/SVG/main" r:embed="rId2"/>
-                </a:ext>
-              </a:extLst>
-            </a:blip>
-            <a:stretch>
-              <a:fillRect/>
-            </a:stretch>
-          </a:blipFill>
-        </p:spPr>
-      </p:sp>
-      <p:sp>
-        <p:nvSpPr>
-          <p:cNvPr id="4" name="Freeform 4">
-            <a:extLst>
-              <a:ext uri="{FF2B5EF4-FFF2-40B4-BE49-F238E27FC236}">
-                <a16:creationId xmlns:a16="http://schemas.microsoft.com/office/drawing/2014/main" id="{04D3A3B0-B9F5-9FA2-0328-3961AAEE9FDA}"/>
-              </a:ext>
-            </a:extLst>
-          </p:cNvPr>
-          <p:cNvSpPr/>
-          <p:nvPr/>
-        </p:nvSpPr>
-        <p:spPr>
-          <a:xfrm>
-            <a:off x="610206" y="7472290"/>
-            <a:ext cx="836989" cy="2209944"/>
-          </a:xfrm>
-          <a:custGeom>
-            <a:avLst/>
-            <a:gdLst/>
-            <a:ahLst/>
-            <a:cxnLst/>
-            <a:rect l="l" t="t" r="r" b="b"/>
-            <a:pathLst>
-              <a:path w="836989" h="2209944">
-                <a:moveTo>
-                  <a:pt x="0" y="0"/>
-                </a:moveTo>
-                <a:lnTo>
-                  <a:pt x="836988" y="0"/>
-                </a:lnTo>
-                <a:lnTo>
-                  <a:pt x="836988" y="2209945"/>
-                </a:lnTo>
-                <a:lnTo>
-                  <a:pt x="0" y="2209945"/>
-                </a:lnTo>
-                <a:lnTo>
-                  <a:pt x="0" y="0"/>
-                </a:lnTo>
-                <a:close/>
-              </a:path>
-            </a:pathLst>
-          </a:custGeom>
-          <a:blipFill>
-            <a:blip>
-              <a:extLst>
-                <a:ext uri="{96DAC541-7B7A-43D3-8B79-37D633B846F1}">
-                  <asvg:svgBlip xmlns:asvg="http://schemas.microsoft.com/office/drawing/2016/SVG/main" r:embed="rId3"/>
-                </a:ext>
-              </a:extLst>
-            </a:blip>
-            <a:stretch>
-              <a:fillRect/>
-            </a:stretch>
-          </a:blipFill>
-        </p:spPr>
-      </p:sp>
-      <p:sp>
-        <p:nvSpPr>
-          <p:cNvPr id="5" name="Freeform 5">
-            <a:extLst>
-              <a:ext uri="{FF2B5EF4-FFF2-40B4-BE49-F238E27FC236}">
-                <a16:creationId xmlns:a16="http://schemas.microsoft.com/office/drawing/2014/main" id="{F0300AB4-3B41-AA44-1A9C-B8D62F6C8F80}"/>
-              </a:ext>
-            </a:extLst>
-          </p:cNvPr>
-          <p:cNvSpPr/>
-          <p:nvPr/>
-        </p:nvSpPr>
-        <p:spPr>
-          <a:xfrm>
-            <a:off x="16840806" y="604765"/>
-            <a:ext cx="836989" cy="2209944"/>
-          </a:xfrm>
-          <a:custGeom>
-            <a:avLst/>
-            <a:gdLst/>
-            <a:ahLst/>
-            <a:cxnLst/>
-            <a:rect l="l" t="t" r="r" b="b"/>
-            <a:pathLst>
-              <a:path w="836989" h="2209944">
-                <a:moveTo>
-                  <a:pt x="0" y="0"/>
-                </a:moveTo>
-                <a:lnTo>
-                  <a:pt x="836988" y="0"/>
-                </a:lnTo>
-                <a:lnTo>
-                  <a:pt x="836988" y="2209945"/>
-                </a:lnTo>
-                <a:lnTo>
-                  <a:pt x="0" y="2209945"/>
-                </a:lnTo>
-                <a:lnTo>
-                  <a:pt x="0" y="0"/>
-                </a:lnTo>
-                <a:close/>
-              </a:path>
-            </a:pathLst>
-          </a:custGeom>
-          <a:blipFill>
-            <a:blip>
-              <a:extLst>
-                <a:ext uri="{96DAC541-7B7A-43D3-8B79-37D633B846F1}">
-                  <asvg:svgBlip xmlns:asvg="http://schemas.microsoft.com/office/drawing/2016/SVG/main" r:embed="rId3"/>
-                </a:ext>
-              </a:extLst>
-            </a:blip>
-            <a:stretch>
-              <a:fillRect/>
-            </a:stretch>
-          </a:blipFill>
-        </p:spPr>
-      </p:sp>
-      <p:sp>
-        <p:nvSpPr>
-          <p:cNvPr id="7" name="TextBox 6">
-            <a:extLst>
-              <a:ext uri="{FF2B5EF4-FFF2-40B4-BE49-F238E27FC236}">
-                <a16:creationId xmlns:a16="http://schemas.microsoft.com/office/drawing/2014/main" id="{2BD2998F-C43D-F19F-A53F-50366158B387}"/>
+      <p:sp>
+        <p:nvSpPr>
+          <p:cNvPr id="12" name="TextBox 11">
+            <a:extLst>
+              <a:ext uri="{FF2B5EF4-FFF2-40B4-BE49-F238E27FC236}">
+                <a16:creationId xmlns:a16="http://schemas.microsoft.com/office/drawing/2014/main" id="{234A4A13-09F7-3369-589D-BE98EF3D6BF9}"/>
               </a:ext>
             </a:extLst>
           </p:cNvPr>
@@ -15543,15 +17763,16 @@
         </p:nvSpPr>
         <p:spPr>
           <a:xfrm>
-            <a:off x="4038600" y="130779"/>
-            <a:ext cx="12616460" cy="3157916"/>
+            <a:off x="4710047" y="2032614"/>
+            <a:ext cx="9160328" cy="1483098"/>
           </a:xfrm>
           <a:prstGeom prst="rect">
             <a:avLst/>
           </a:prstGeom>
+          <a:noFill/>
         </p:spPr>
         <p:txBody>
-          <a:bodyPr wrap="square" lIns="0" tIns="0" rIns="0" bIns="0" rtlCol="0" anchor="t">
+          <a:bodyPr wrap="square">
             <a:spAutoFit/>
           </a:bodyPr>
           <a:lstStyle/>
@@ -15562,103 +17783,33 @@
               </a:lnSpc>
             </a:pPr>
             <a:r>
-              <a:rPr lang="en-US" sz="8000" b="1" dirty="0">
+              <a:rPr lang="en-US" sz="4400" b="1" i="1" dirty="0">
                 <a:solidFill>
                   <a:srgbClr val="002B58"/>
                 </a:solidFill>
-                <a:latin typeface="Perpetua" panose="02020502060401020303" pitchFamily="18" charset="0"/>
+                <a:latin typeface="Rockwell" panose="02060603020205020403" pitchFamily="18" charset="0"/>
                 <a:ea typeface="Readex Pro Semi-Bold"/>
                 <a:cs typeface="Readex Pro Semi-Bold"/>
                 <a:sym typeface="Readex Pro Semi-Bold"/>
               </a:rPr>
-              <a:t>Top Customers </a:t>
+              <a:t>String function (CASE WHEN)</a:t>
             </a:r>
-          </a:p>
-          <a:p>
-            <a:pPr algn="ctr">
-              <a:lnSpc>
-                <a:spcPts val="12685"/>
-              </a:lnSpc>
-            </a:pPr>
-            <a:r>
-              <a:rPr lang="en-US" sz="8000" b="1" dirty="0">
-                <a:solidFill>
-                  <a:srgbClr val="002B58"/>
-                </a:solidFill>
-                <a:latin typeface="Perpetua" panose="02020502060401020303" pitchFamily="18" charset="0"/>
-                <a:ea typeface="Readex Pro Semi-Bold"/>
-                <a:cs typeface="Readex Pro Semi-Bold"/>
-                <a:sym typeface="Readex Pro Semi-Bold"/>
-              </a:rPr>
-              <a:t>(Revenue-Wise)</a:t>
-            </a:r>
+            <a:endParaRPr lang="en-US" sz="2800" b="1" i="1" dirty="0">
+              <a:solidFill>
+                <a:srgbClr val="002B58"/>
+              </a:solidFill>
+              <a:latin typeface="Rockwell" panose="02060603020205020403" pitchFamily="18" charset="0"/>
+              <a:ea typeface="Readex Pro Semi-Bold"/>
+              <a:cs typeface="Readex Pro Semi-Bold"/>
+              <a:sym typeface="Readex Pro Semi-Bold"/>
+            </a:endParaRPr>
           </a:p>
         </p:txBody>
       </p:sp>
-      <p:pic>
-        <p:nvPicPr>
-          <p:cNvPr id="8" name="Picture 7">
-            <a:extLst>
-              <a:ext uri="{FF2B5EF4-FFF2-40B4-BE49-F238E27FC236}">
-                <a16:creationId xmlns:a16="http://schemas.microsoft.com/office/drawing/2014/main" id="{24380431-8D22-1F1E-F7BF-39A48515FEB7}"/>
-              </a:ext>
-            </a:extLst>
-          </p:cNvPr>
-          <p:cNvPicPr>
-            <a:picLocks noChangeAspect="1"/>
-          </p:cNvPicPr>
-          <p:nvPr/>
-        </p:nvPicPr>
-        <p:blipFill>
-          <a:blip r:embed="rId4"/>
-          <a:stretch>
-            <a:fillRect/>
-          </a:stretch>
-        </p:blipFill>
-        <p:spPr>
-          <a:xfrm>
-            <a:off x="10591800" y="3430360"/>
-            <a:ext cx="5340180" cy="3846739"/>
-          </a:xfrm>
-          <a:prstGeom prst="rect">
-            <a:avLst/>
-          </a:prstGeom>
-        </p:spPr>
-      </p:pic>
-      <p:pic>
-        <p:nvPicPr>
-          <p:cNvPr id="10" name="Picture 9">
-            <a:extLst>
-              <a:ext uri="{FF2B5EF4-FFF2-40B4-BE49-F238E27FC236}">
-                <a16:creationId xmlns:a16="http://schemas.microsoft.com/office/drawing/2014/main" id="{9AF500C7-BD08-13A7-5A07-E18CF421A19E}"/>
-              </a:ext>
-            </a:extLst>
-          </p:cNvPr>
-          <p:cNvPicPr>
-            <a:picLocks noChangeAspect="1"/>
-          </p:cNvPicPr>
-          <p:nvPr/>
-        </p:nvPicPr>
-        <p:blipFill>
-          <a:blip r:embed="rId5"/>
-          <a:stretch>
-            <a:fillRect/>
-          </a:stretch>
-        </p:blipFill>
-        <p:spPr>
-          <a:xfrm>
-            <a:off x="1752600" y="3379701"/>
-            <a:ext cx="8604104" cy="4092589"/>
-          </a:xfrm>
-          <a:prstGeom prst="rect">
-            <a:avLst/>
-          </a:prstGeom>
-        </p:spPr>
-      </p:pic>
     </p:spTree>
     <p:extLst>
       <p:ext uri="{BB962C8B-B14F-4D97-AF65-F5344CB8AC3E}">
-        <p14:creationId xmlns:p14="http://schemas.microsoft.com/office/powerpoint/2010/main" val="1831876244"/>
+        <p14:creationId xmlns:p14="http://schemas.microsoft.com/office/powerpoint/2010/main" val="2052776629"/>
       </p:ext>
     </p:extLst>
   </p:cSld>
